--- a/成果物/SentinelOne導入後も脆弱性検査が必要な理由.pptx
+++ b/成果物/SentinelOne導入後も脆弱性検査が必要な理由.pptx
@@ -18,9 +18,10 @@
     <p:sldId id="266" r:id="rId12"/>
     <p:sldId id="267" r:id="rId13"/>
     <p:sldId id="268" r:id="rId14"/>
+    <p:sldId id="269" r:id="rId15"/>
   </p:sldIdLst>
   <p:notesMasterIdLst>
-    <p:notesMasterId r:id="rId15"/>
+    <p:notesMasterId r:id="rId16"/>
   </p:notesMasterIdLst>
   <p:sldSz cx="12192000" cy="6858000"/>
   <p:notesSz cx="6858000" cy="12192000"/>
@@ -1154,6 +1155,94 @@
             <a:fld id="{F7021451-1387-4CA6-816F-3879F97B5CBC}" type="slidenum">
               <a:rPr lang="en-US"/>
               <a:t>13</a:t>
+            </a:fld>
+            <a:endParaRPr lang="en-US"/>
+          </a:p>
+        </p:txBody>
+      </p:sp>
+    </p:spTree>
+    <p:extLst>
+      <p:ext uri="{BB962C8B-B14F-4D97-AF65-F5344CB8AC3E}">
+        <p14:creationId xmlns:p14="http://schemas.microsoft.com/office/powerpoint/2010/main" val="1024086991"/>
+      </p:ext>
+    </p:extLst>
+  </p:cSld>
+  <p:clrMapOvr>
+    <a:masterClrMapping/>
+  </p:clrMapOvr>
+</p:notes>
+</file>
+
+<file path=ppt/notesSlides/notesSlide14.xml><?xml version="1.0" encoding="utf-8"?>
+<p:notes xmlns:a="http://schemas.openxmlformats.org/drawingml/2006/main" xmlns:r="http://schemas.openxmlformats.org/officeDocument/2006/relationships" xmlns:p="http://schemas.openxmlformats.org/presentationml/2006/main">
+  <p:cSld>
+    <p:spTree>
+      <p:nvGrpSpPr>
+        <p:cNvPr id="1" name=""/>
+        <p:cNvGrpSpPr/>
+        <p:nvPr/>
+      </p:nvGrpSpPr>
+      <p:grpSpPr>
+        <a:xfrm>
+          <a:off x="0" y="0"/>
+          <a:ext cx="0" cy="0"/>
+          <a:chOff x="0" y="0"/>
+          <a:chExt cx="0" cy="0"/>
+        </a:xfrm>
+      </p:grpSpPr>
+      <p:sp>
+        <p:nvSpPr>
+          <p:cNvPr id="2" name="Slide Image Placeholder 1"/>
+          <p:cNvSpPr>
+            <a:spLocks noGrp="1" noRot="1" noChangeAspect="1"/>
+          </p:cNvSpPr>
+          <p:nvPr>
+            <p:ph type="sldImg"/>
+          </p:nvPr>
+        </p:nvSpPr>
+        <p:spPr/>
+      </p:sp>
+      <p:sp>
+        <p:nvSpPr>
+          <p:cNvPr id="3" name="Notes Placeholder 2"/>
+          <p:cNvSpPr>
+            <a:spLocks noGrp="1"/>
+          </p:cNvSpPr>
+          <p:nvPr>
+            <p:ph type="body" idx="1"/>
+          </p:nvPr>
+        </p:nvSpPr>
+        <p:spPr/>
+        <p:txBody>
+          <a:bodyPr/>
+          <a:lstStyle/>
+          <a:p>
+            <a:r>
+              <a:rPr lang="en-US" dirty="0"/>
+              <a:t/>
+            </a:r>
+            <a:endParaRPr lang="en-US" dirty="0"/>
+          </a:p>
+        </p:txBody>
+      </p:sp>
+      <p:sp>
+        <p:nvSpPr>
+          <p:cNvPr id="4" name="Slide Number Placeholder 3"/>
+          <p:cNvSpPr>
+            <a:spLocks noGrp="1"/>
+          </p:cNvSpPr>
+          <p:nvPr>
+            <p:ph type="sldNum" sz="quarter" idx="10"/>
+          </p:nvPr>
+        </p:nvSpPr>
+        <p:spPr/>
+        <p:txBody>
+          <a:bodyPr/>
+          <a:lstStyle/>
+          <a:p>
+            <a:fld id="{F7021451-1387-4CA6-816F-3879F97B5CBC}" type="slidenum">
+              <a:rPr lang="en-US"/>
+              <a:t>14</a:t>
             </a:fld>
             <a:endParaRPr lang="en-US"/>
           </a:p>
@@ -2518,7 +2607,7 @@
                 <a:ea typeface="Calibri" pitchFamily="34" charset="-122"/>
                 <a:cs typeface="Calibri" pitchFamily="34" charset="-120"/>
               </a:rPr>
-              <a:t>あるべき考え方</a:t>
+              <a:t>事例に学ぶ攻撃フロー（VPNエッジ編）</a:t>
             </a:r>
             <a:endParaRPr lang="en-US" sz="1200" dirty="0"/>
           </a:p>
@@ -2557,7 +2646,7 @@
                 <a:ea typeface="Cambria" pitchFamily="34" charset="-122"/>
                 <a:cs typeface="Cambria" pitchFamily="34" charset="-120"/>
               </a:rPr>
-              <a:t>脆弱性検査とEDRは「補完関係」― 多層で守る</a:t>
+              <a:t>EDRの盲点：F/W越しの侵入 → ラテラルムーブメント</a:t>
             </a:r>
             <a:endParaRPr lang="en-US" sz="3200" dirty="0"/>
           </a:p>
@@ -2565,14 +2654,340 @@
       </p:sp>
       <p:sp>
         <p:nvSpPr>
-          <p:cNvPr id="4" name="Shape 2"/>
-          <p:cNvSpPr/>
-          <p:nvPr/>
-        </p:nvSpPr>
-        <p:spPr>
-          <a:xfrm>
-            <a:off x="566928" y="2011680"/>
-            <a:ext cx="7498080" cy="1097280"/>
+          <p:cNvPr id="4" name="Text 2"/>
+          <p:cNvSpPr/>
+          <p:nvPr/>
+        </p:nvSpPr>
+        <p:spPr>
+          <a:xfrm>
+            <a:off x="384048" y="1572768"/>
+            <a:ext cx="1828800" cy="274320"/>
+          </a:xfrm>
+          <a:prstGeom prst="rect">
+            <a:avLst/>
+          </a:prstGeom>
+          <a:noFill/>
+          <a:ln/>
+        </p:spPr>
+        <p:txBody>
+          <a:bodyPr wrap="square" lIns="0" tIns="0" rIns="0" bIns="0" rtlCol="0" anchor="ctr"/>
+          <a:lstStyle/>
+          <a:p>
+            <a:pPr indent="0" marL="0">
+              <a:buNone/>
+            </a:pPr>
+            <a:r>
+              <a:rPr lang="en-US" sz="1200" b="1" dirty="0">
+                <a:solidFill>
+                  <a:srgbClr val="68738A"/>
+                </a:solidFill>
+                <a:latin typeface="Calibri" pitchFamily="34" charset="0"/>
+                <a:ea typeface="Calibri" pitchFamily="34" charset="-122"/>
+                <a:cs typeface="Calibri" pitchFamily="34" charset="-120"/>
+              </a:rPr>
+              <a:t>インターネット</a:t>
+            </a:r>
+            <a:endParaRPr lang="en-US" sz="1200" dirty="0"/>
+          </a:p>
+        </p:txBody>
+      </p:sp>
+      <p:sp>
+        <p:nvSpPr>
+          <p:cNvPr id="5" name="Text 3"/>
+          <p:cNvSpPr/>
+          <p:nvPr/>
+        </p:nvSpPr>
+        <p:spPr>
+          <a:xfrm>
+            <a:off x="2468880" y="1572768"/>
+            <a:ext cx="2286000" cy="274320"/>
+          </a:xfrm>
+          <a:prstGeom prst="rect">
+            <a:avLst/>
+          </a:prstGeom>
+          <a:noFill/>
+          <a:ln/>
+        </p:spPr>
+        <p:txBody>
+          <a:bodyPr wrap="square" lIns="0" tIns="0" rIns="0" bIns="0" rtlCol="0" anchor="ctr"/>
+          <a:lstStyle/>
+          <a:p>
+            <a:pPr indent="0" marL="0">
+              <a:buNone/>
+            </a:pPr>
+            <a:r>
+              <a:rPr lang="en-US" sz="1200" b="1" dirty="0">
+                <a:solidFill>
+                  <a:srgbClr val="68738A"/>
+                </a:solidFill>
+                <a:latin typeface="Calibri" pitchFamily="34" charset="0"/>
+                <a:ea typeface="Calibri" pitchFamily="34" charset="-122"/>
+                <a:cs typeface="Calibri" pitchFamily="34" charset="-120"/>
+              </a:rPr>
+              <a:t>リレー（VPN Azure）</a:t>
+            </a:r>
+            <a:endParaRPr lang="en-US" sz="1200" dirty="0"/>
+          </a:p>
+        </p:txBody>
+      </p:sp>
+      <p:sp>
+        <p:nvSpPr>
+          <p:cNvPr id="6" name="Shape 4"/>
+          <p:cNvSpPr/>
+          <p:nvPr/>
+        </p:nvSpPr>
+        <p:spPr>
+          <a:xfrm>
+            <a:off x="4846320" y="1463040"/>
+            <a:ext cx="6903720" cy="2560320"/>
+          </a:xfrm>
+          <a:prstGeom prst="roundRect">
+            <a:avLst>
+              <a:gd name="adj" fmla="val 3214"/>
+            </a:avLst>
+          </a:prstGeom>
+          <a:solidFill>
+            <a:srgbClr val="F7F9FD"/>
+          </a:solidFill>
+          <a:ln w="12700">
+            <a:solidFill>
+              <a:srgbClr val="E2E8F4"/>
+            </a:solidFill>
+            <a:prstDash val="solid"/>
+          </a:ln>
+        </p:spPr>
+      </p:sp>
+      <p:sp>
+        <p:nvSpPr>
+          <p:cNvPr id="7" name="Text 5"/>
+          <p:cNvSpPr/>
+          <p:nvPr/>
+        </p:nvSpPr>
+        <p:spPr>
+          <a:xfrm>
+            <a:off x="5897880" y="1536192"/>
+            <a:ext cx="5669280" cy="292608"/>
+          </a:xfrm>
+          <a:prstGeom prst="rect">
+            <a:avLst/>
+          </a:prstGeom>
+          <a:noFill/>
+          <a:ln/>
+        </p:spPr>
+        <p:txBody>
+          <a:bodyPr wrap="square" lIns="0" tIns="0" rIns="0" bIns="0" rtlCol="0" anchor="ctr"/>
+          <a:lstStyle/>
+          <a:p>
+            <a:pPr indent="0" marL="0">
+              <a:buNone/>
+            </a:pPr>
+            <a:r>
+              <a:rPr lang="en-US" sz="1200" b="1" dirty="0">
+                <a:solidFill>
+                  <a:srgbClr val="0E1B3D"/>
+                </a:solidFill>
+                <a:latin typeface="Calibri" pitchFamily="34" charset="0"/>
+                <a:ea typeface="Calibri" pitchFamily="34" charset="-122"/>
+                <a:cs typeface="Calibri" pitchFamily="34" charset="-120"/>
+              </a:rPr>
+              <a:t>社内ネットワーク（LAN・EDR導入済み）</a:t>
+            </a:r>
+            <a:endParaRPr lang="en-US" sz="1200" dirty="0"/>
+          </a:p>
+        </p:txBody>
+      </p:sp>
+      <p:sp>
+        <p:nvSpPr>
+          <p:cNvPr id="8" name="Shape 6"/>
+          <p:cNvSpPr/>
+          <p:nvPr/>
+        </p:nvSpPr>
+        <p:spPr>
+          <a:xfrm>
+            <a:off x="457200" y="2240280"/>
+            <a:ext cx="1691640" cy="960120"/>
+          </a:xfrm>
+          <a:prstGeom prst="roundRect">
+            <a:avLst>
+              <a:gd name="adj" fmla="val 7619"/>
+            </a:avLst>
+          </a:prstGeom>
+          <a:solidFill>
+            <a:srgbClr val="C8102E"/>
+          </a:solidFill>
+          <a:ln/>
+          <a:effectLst>
+            <a:outerShdw sx="100000" sy="100000" kx="0" ky="0" algn="bl" rotWithShape="0" blurRad="101600" dist="38100" dir="5400000">
+              <a:srgbClr val="8A93A6">
+                <a:alpha val="28000"/>
+              </a:srgbClr>
+            </a:outerShdw>
+          </a:effectLst>
+        </p:spPr>
+      </p:sp>
+      <p:sp>
+        <p:nvSpPr>
+          <p:cNvPr id="9" name="Text 7"/>
+          <p:cNvSpPr/>
+          <p:nvPr/>
+        </p:nvSpPr>
+        <p:spPr>
+          <a:xfrm>
+            <a:off x="457200" y="2240280"/>
+            <a:ext cx="1691640" cy="960120"/>
+          </a:xfrm>
+          <a:prstGeom prst="rect">
+            <a:avLst/>
+          </a:prstGeom>
+          <a:noFill/>
+          <a:ln/>
+        </p:spPr>
+        <p:txBody>
+          <a:bodyPr wrap="square" lIns="0" tIns="0" rIns="0" bIns="0" rtlCol="0" anchor="ctr"/>
+          <a:lstStyle/>
+          <a:p>
+            <a:pPr algn="ctr" indent="0" marL="0">
+              <a:lnSpc>
+                <a:spcPts val="1700"/>
+              </a:lnSpc>
+              <a:buNone/>
+            </a:pPr>
+            <a:r>
+              <a:rPr lang="en-US" sz="1300" b="1" dirty="0">
+                <a:solidFill>
+                  <a:srgbClr val="FFFFFF"/>
+                </a:solidFill>
+                <a:latin typeface="Cambria" pitchFamily="34" charset="0"/>
+                <a:ea typeface="Cambria" pitchFamily="34" charset="-122"/>
+                <a:cs typeface="Cambria" pitchFamily="34" charset="-120"/>
+              </a:rPr>
+              <a:t>攻撃者</a:t>
+            </a:r>
+            <a:endParaRPr lang="en-US" sz="1300" dirty="0"/>
+          </a:p>
+          <a:p>
+            <a:pPr algn="ctr" indent="0" marL="0">
+              <a:lnSpc>
+                <a:spcPts val="1700"/>
+              </a:lnSpc>
+              <a:buNone/>
+            </a:pPr>
+            <a:r>
+              <a:rPr lang="en-US" sz="1300" b="1" dirty="0">
+                <a:solidFill>
+                  <a:srgbClr val="FFFFFF"/>
+                </a:solidFill>
+                <a:latin typeface="Cambria" pitchFamily="34" charset="0"/>
+                <a:ea typeface="Cambria" pitchFamily="34" charset="-122"/>
+                <a:cs typeface="Cambria" pitchFamily="34" charset="-120"/>
+              </a:rPr>
+              <a:t>（社外）</a:t>
+            </a:r>
+            <a:endParaRPr lang="en-US" sz="1300" dirty="0"/>
+          </a:p>
+        </p:txBody>
+      </p:sp>
+      <p:sp>
+        <p:nvSpPr>
+          <p:cNvPr id="10" name="Shape 8"/>
+          <p:cNvSpPr/>
+          <p:nvPr/>
+        </p:nvSpPr>
+        <p:spPr>
+          <a:xfrm>
+            <a:off x="2468880" y="2286000"/>
+            <a:ext cx="2194560" cy="868680"/>
+          </a:xfrm>
+          <a:prstGeom prst="roundRect">
+            <a:avLst>
+              <a:gd name="adj" fmla="val 14737"/>
+            </a:avLst>
+          </a:prstGeom>
+          <a:solidFill>
+            <a:srgbClr val="3E5C76"/>
+          </a:solidFill>
+          <a:ln/>
+          <a:effectLst>
+            <a:outerShdw sx="100000" sy="100000" kx="0" ky="0" algn="bl" rotWithShape="0" blurRad="101600" dist="38100" dir="5400000">
+              <a:srgbClr val="8A93A6">
+                <a:alpha val="28000"/>
+              </a:srgbClr>
+            </a:outerShdw>
+          </a:effectLst>
+        </p:spPr>
+      </p:sp>
+      <p:sp>
+        <p:nvSpPr>
+          <p:cNvPr id="11" name="Text 9"/>
+          <p:cNvSpPr/>
+          <p:nvPr/>
+        </p:nvSpPr>
+        <p:spPr>
+          <a:xfrm>
+            <a:off x="2468880" y="2286000"/>
+            <a:ext cx="2194560" cy="868680"/>
+          </a:xfrm>
+          <a:prstGeom prst="rect">
+            <a:avLst/>
+          </a:prstGeom>
+          <a:noFill/>
+          <a:ln/>
+        </p:spPr>
+        <p:txBody>
+          <a:bodyPr wrap="square" lIns="0" tIns="0" rIns="0" bIns="0" rtlCol="0" anchor="ctr"/>
+          <a:lstStyle/>
+          <a:p>
+            <a:pPr algn="ctr" indent="0" marL="0">
+              <a:lnSpc>
+                <a:spcPts val="1600"/>
+              </a:lnSpc>
+              <a:buNone/>
+            </a:pPr>
+            <a:r>
+              <a:rPr lang="en-US" sz="1150" b="1" dirty="0">
+                <a:solidFill>
+                  <a:srgbClr val="FFFFFF"/>
+                </a:solidFill>
+                <a:latin typeface="Calibri" pitchFamily="34" charset="0"/>
+                <a:ea typeface="Calibri" pitchFamily="34" charset="-122"/>
+                <a:cs typeface="Calibri" pitchFamily="34" charset="-120"/>
+              </a:rPr>
+              <a:t>VPN Azure リレー</a:t>
+            </a:r>
+            <a:endParaRPr lang="en-US" sz="1150" dirty="0"/>
+          </a:p>
+          <a:p>
+            <a:pPr algn="ctr" indent="0" marL="0">
+              <a:lnSpc>
+                <a:spcPts val="1600"/>
+              </a:lnSpc>
+              <a:buNone/>
+            </a:pPr>
+            <a:r>
+              <a:rPr lang="en-US" sz="1150" b="1" dirty="0">
+                <a:solidFill>
+                  <a:srgbClr val="FFFFFF"/>
+                </a:solidFill>
+                <a:latin typeface="Calibri" pitchFamily="34" charset="0"/>
+                <a:ea typeface="Calibri" pitchFamily="34" charset="-122"/>
+                <a:cs typeface="Calibri" pitchFamily="34" charset="-120"/>
+              </a:rPr>
+              <a:t>*.vpnazure.net</a:t>
+            </a:r>
+            <a:endParaRPr lang="en-US" sz="1150" dirty="0"/>
+          </a:p>
+        </p:txBody>
+      </p:sp>
+      <p:sp>
+        <p:nvSpPr>
+          <p:cNvPr id="12" name="Shape 10"/>
+          <p:cNvSpPr/>
+          <p:nvPr/>
+        </p:nvSpPr>
+        <p:spPr>
+          <a:xfrm>
+            <a:off x="4864608" y="1901952"/>
+            <a:ext cx="822960" cy="1773936"/>
           </a:xfrm>
           <a:prstGeom prst="roundRect">
             <a:avLst>
@@ -2580,9 +2995,186 @@
             </a:avLst>
           </a:prstGeom>
           <a:solidFill>
-            <a:srgbClr val="F4F6FB"/>
+            <a:srgbClr val="0E1B3D"/>
           </a:solidFill>
-          <a:ln w="12700">
+          <a:ln/>
+        </p:spPr>
+      </p:sp>
+      <p:sp>
+        <p:nvSpPr>
+          <p:cNvPr id="13" name="Text 11"/>
+          <p:cNvSpPr/>
+          <p:nvPr/>
+        </p:nvSpPr>
+        <p:spPr>
+          <a:xfrm>
+            <a:off x="4864608" y="1956816"/>
+            <a:ext cx="822960" cy="365760"/>
+          </a:xfrm>
+          <a:prstGeom prst="rect">
+            <a:avLst/>
+          </a:prstGeom>
+          <a:noFill/>
+          <a:ln/>
+        </p:spPr>
+        <p:txBody>
+          <a:bodyPr wrap="square" lIns="0" tIns="0" rIns="0" bIns="0" rtlCol="0" anchor="ctr"/>
+          <a:lstStyle/>
+          <a:p>
+            <a:pPr algn="ctr" indent="0" marL="0">
+              <a:buNone/>
+            </a:pPr>
+            <a:r>
+              <a:rPr lang="en-US" sz="1400" b="1" dirty="0">
+                <a:solidFill>
+                  <a:srgbClr val="FFFFFF"/>
+                </a:solidFill>
+                <a:latin typeface="Cambria" pitchFamily="34" charset="0"/>
+                <a:ea typeface="Cambria" pitchFamily="34" charset="-122"/>
+                <a:cs typeface="Cambria" pitchFamily="34" charset="-120"/>
+              </a:rPr>
+              <a:t>F/W</a:t>
+            </a:r>
+            <a:endParaRPr lang="en-US" sz="1400" dirty="0"/>
+          </a:p>
+        </p:txBody>
+      </p:sp>
+      <p:sp>
+        <p:nvSpPr>
+          <p:cNvPr id="14" name="Shape 12"/>
+          <p:cNvSpPr/>
+          <p:nvPr/>
+        </p:nvSpPr>
+        <p:spPr>
+          <a:xfrm>
+            <a:off x="5897880" y="2331720"/>
+            <a:ext cx="1874520" cy="914400"/>
+          </a:xfrm>
+          <a:prstGeom prst="roundRect">
+            <a:avLst>
+              <a:gd name="adj" fmla="val 8000"/>
+            </a:avLst>
+          </a:prstGeom>
+          <a:solidFill>
+            <a:srgbClr val="FBEDEF"/>
+          </a:solidFill>
+          <a:ln w="19050">
+            <a:solidFill>
+              <a:srgbClr val="8E0B20"/>
+            </a:solidFill>
+            <a:prstDash val="solid"/>
+          </a:ln>
+          <a:effectLst>
+            <a:outerShdw sx="100000" sy="100000" kx="0" ky="0" algn="bl" rotWithShape="0" blurRad="101600" dist="38100" dir="5400000">
+              <a:srgbClr val="8A93A6">
+                <a:alpha val="28000"/>
+              </a:srgbClr>
+            </a:outerShdw>
+          </a:effectLst>
+        </p:spPr>
+      </p:sp>
+      <p:sp>
+        <p:nvSpPr>
+          <p:cNvPr id="15" name="Text 13"/>
+          <p:cNvSpPr/>
+          <p:nvPr/>
+        </p:nvSpPr>
+        <p:spPr>
+          <a:xfrm>
+            <a:off x="5897880" y="2286000"/>
+            <a:ext cx="1874520" cy="777240"/>
+          </a:xfrm>
+          <a:prstGeom prst="rect">
+            <a:avLst/>
+          </a:prstGeom>
+          <a:noFill/>
+          <a:ln/>
+        </p:spPr>
+        <p:txBody>
+          <a:bodyPr wrap="square" lIns="0" tIns="0" rIns="0" bIns="0" rtlCol="0" anchor="t"/>
+          <a:lstStyle/>
+          <a:p>
+            <a:pPr algn="ctr" indent="0" marL="0">
+              <a:lnSpc>
+                <a:spcPts val="1400"/>
+              </a:lnSpc>
+              <a:buNone/>
+            </a:pPr>
+            <a:r>
+              <a:rPr lang="en-US" sz="1100" b="1" dirty="0">
+                <a:solidFill>
+                  <a:srgbClr val="0E1B3D"/>
+                </a:solidFill>
+                <a:latin typeface="Cambria" pitchFamily="34" charset="0"/>
+                <a:ea typeface="Cambria" pitchFamily="34" charset="-122"/>
+                <a:cs typeface="Cambria" pitchFamily="34" charset="-120"/>
+              </a:rPr>
+              <a:t>SoftEther</a:t>
+            </a:r>
+            <a:endParaRPr lang="en-US" sz="1100" dirty="0"/>
+          </a:p>
+          <a:p>
+            <a:pPr algn="ctr" indent="0" marL="0">
+              <a:lnSpc>
+                <a:spcPts val="1400"/>
+              </a:lnSpc>
+              <a:buNone/>
+            </a:pPr>
+            <a:r>
+              <a:rPr lang="en-US" sz="1100" b="1" dirty="0">
+                <a:solidFill>
+                  <a:srgbClr val="0E1B3D"/>
+                </a:solidFill>
+                <a:latin typeface="Cambria" pitchFamily="34" charset="0"/>
+                <a:ea typeface="Cambria" pitchFamily="34" charset="-122"/>
+                <a:cs typeface="Cambria" pitchFamily="34" charset="-120"/>
+              </a:rPr>
+              <a:t>エッジノード</a:t>
+            </a:r>
+            <a:endParaRPr lang="en-US" sz="1100" dirty="0"/>
+          </a:p>
+          <a:p>
+            <a:pPr algn="ctr" indent="0" marL="0">
+              <a:lnSpc>
+                <a:spcPts val="1400"/>
+              </a:lnSpc>
+              <a:buNone/>
+            </a:pPr>
+            <a:r>
+              <a:rPr lang="en-US" sz="1100" b="1" dirty="0">
+                <a:solidFill>
+                  <a:srgbClr val="0E1B3D"/>
+                </a:solidFill>
+                <a:latin typeface="Cambria" pitchFamily="34" charset="0"/>
+                <a:ea typeface="Cambria" pitchFamily="34" charset="-122"/>
+                <a:cs typeface="Cambria" pitchFamily="34" charset="-120"/>
+              </a:rPr>
+              <a:t>（VPNサーバ）</a:t>
+            </a:r>
+            <a:endParaRPr lang="en-US" sz="1100" dirty="0"/>
+          </a:p>
+        </p:txBody>
+      </p:sp>
+      <p:sp>
+        <p:nvSpPr>
+          <p:cNvPr id="16" name="Shape 14"/>
+          <p:cNvSpPr/>
+          <p:nvPr/>
+        </p:nvSpPr>
+        <p:spPr>
+          <a:xfrm>
+            <a:off x="8001000" y="2331720"/>
+            <a:ext cx="1737360" cy="914400"/>
+          </a:xfrm>
+          <a:prstGeom prst="roundRect">
+            <a:avLst>
+              <a:gd name="adj" fmla="val 8000"/>
+            </a:avLst>
+          </a:prstGeom>
+          <a:solidFill>
+            <a:srgbClr val="FFFFFF"/>
+          </a:solidFill>
+          <a:ln w="19050">
             <a:solidFill>
               <a:srgbClr val="E2E8F4"/>
             </a:solidFill>
@@ -2599,177 +3191,65 @@
       </p:sp>
       <p:sp>
         <p:nvSpPr>
-          <p:cNvPr id="5" name="Shape 3"/>
-          <p:cNvSpPr/>
-          <p:nvPr/>
-        </p:nvSpPr>
-        <p:spPr>
-          <a:xfrm>
-            <a:off x="795528" y="2267712"/>
-            <a:ext cx="585216" cy="585216"/>
-          </a:xfrm>
-          <a:prstGeom prst="ellipse">
-            <a:avLst/>
-          </a:prstGeom>
-          <a:solidFill>
-            <a:srgbClr val="C8102E"/>
-          </a:solidFill>
-          <a:ln/>
-        </p:spPr>
-      </p:sp>
-      <p:sp>
-        <p:nvSpPr>
-          <p:cNvPr id="6" name="Text 4"/>
-          <p:cNvSpPr/>
-          <p:nvPr/>
-        </p:nvSpPr>
-        <p:spPr>
-          <a:xfrm>
-            <a:off x="795528" y="2267712"/>
-            <a:ext cx="585216" cy="585216"/>
-          </a:xfrm>
-          <a:prstGeom prst="rect">
-            <a:avLst/>
-          </a:prstGeom>
-          <a:noFill/>
-          <a:ln/>
-        </p:spPr>
-        <p:txBody>
-          <a:bodyPr wrap="square" lIns="0" tIns="0" rIns="0" bIns="0" rtlCol="0" anchor="ctr"/>
+          <p:cNvPr id="17" name="Text 15"/>
+          <p:cNvSpPr/>
+          <p:nvPr/>
+        </p:nvSpPr>
+        <p:spPr>
+          <a:xfrm>
+            <a:off x="8001000" y="2395728"/>
+            <a:ext cx="1737360" cy="457200"/>
+          </a:xfrm>
+          <a:prstGeom prst="rect">
+            <a:avLst/>
+          </a:prstGeom>
+          <a:noFill/>
+          <a:ln/>
+        </p:spPr>
+        <p:txBody>
+          <a:bodyPr wrap="square" lIns="0" tIns="0" rIns="0" bIns="0" rtlCol="0" anchor="t"/>
           <a:lstStyle/>
           <a:p>
             <a:pPr algn="ctr" indent="0" marL="0">
               <a:buNone/>
             </a:pPr>
             <a:r>
-              <a:rPr lang="en-US" sz="2200" b="1" dirty="0">
-                <a:solidFill>
-                  <a:srgbClr val="FFFFFF"/>
+              <a:rPr lang="en-US" sz="1200" b="1" dirty="0">
+                <a:solidFill>
+                  <a:srgbClr val="0E1B3D"/>
                 </a:solidFill>
                 <a:latin typeface="Cambria" pitchFamily="34" charset="0"/>
                 <a:ea typeface="Cambria" pitchFamily="34" charset="-122"/>
                 <a:cs typeface="Cambria" pitchFamily="34" charset="-120"/>
               </a:rPr>
-              <a:t>1</a:t>
-            </a:r>
-            <a:endParaRPr lang="en-US" sz="2200" dirty="0"/>
-          </a:p>
-        </p:txBody>
-      </p:sp>
-      <p:sp>
-        <p:nvSpPr>
-          <p:cNvPr id="7" name="Text 5"/>
-          <p:cNvSpPr/>
-          <p:nvPr/>
-        </p:nvSpPr>
-        <p:spPr>
-          <a:xfrm>
-            <a:off x="1572768" y="2157984"/>
-            <a:ext cx="6400800" cy="457200"/>
-          </a:xfrm>
-          <a:prstGeom prst="rect">
-            <a:avLst/>
-          </a:prstGeom>
-          <a:noFill/>
-          <a:ln/>
-        </p:spPr>
-        <p:txBody>
-          <a:bodyPr wrap="square" lIns="0" tIns="0" rIns="0" bIns="0" rtlCol="0" anchor="ctr"/>
-          <a:lstStyle/>
-          <a:p>
-            <a:pPr indent="0" marL="0">
-              <a:buNone/>
-            </a:pPr>
-            <a:r>
-              <a:rPr lang="en-US" sz="1700" b="1" dirty="0">
-                <a:solidFill>
-                  <a:srgbClr val="0E1B3D"/>
-                </a:solidFill>
-                <a:latin typeface="Cambria" pitchFamily="34" charset="0"/>
-                <a:ea typeface="Cambria" pitchFamily="34" charset="-122"/>
-                <a:cs typeface="Cambria" pitchFamily="34" charset="-120"/>
-              </a:rPr>
-              <a:t>入口を塞ぐ   </a:t>
-            </a:r>
-            <a:pPr indent="0" marL="0">
-              <a:buNone/>
-            </a:pPr>
-            <a:r>
-              <a:rPr lang="en-US" sz="1300" b="1" dirty="0">
-                <a:solidFill>
-                  <a:srgbClr val="C8102E"/>
-                </a:solidFill>
-                <a:latin typeface="Cambria" pitchFamily="34" charset="0"/>
-                <a:ea typeface="Cambria" pitchFamily="34" charset="-122"/>
-                <a:cs typeface="Cambria" pitchFamily="34" charset="-120"/>
-              </a:rPr>
-              <a:t>脆弱性検査・パッチ・認証強化(MFA)</a:t>
-            </a:r>
-            <a:endParaRPr lang="en-US" sz="1700" dirty="0"/>
-          </a:p>
-        </p:txBody>
-      </p:sp>
-      <p:sp>
-        <p:nvSpPr>
-          <p:cNvPr id="8" name="Text 6"/>
-          <p:cNvSpPr/>
-          <p:nvPr/>
-        </p:nvSpPr>
-        <p:spPr>
-          <a:xfrm>
-            <a:off x="1572768" y="2578608"/>
-            <a:ext cx="6400800" cy="457200"/>
-          </a:xfrm>
-          <a:prstGeom prst="rect">
-            <a:avLst/>
-          </a:prstGeom>
-          <a:noFill/>
-          <a:ln/>
-        </p:spPr>
-        <p:txBody>
-          <a:bodyPr wrap="square" lIns="0" tIns="0" rIns="0" bIns="0" rtlCol="0" anchor="t"/>
-          <a:lstStyle/>
-          <a:p>
-            <a:pPr indent="0" marL="0">
-              <a:buNone/>
-            </a:pPr>
-            <a:r>
-              <a:rPr lang="en-US" sz="1250" dirty="0">
-                <a:solidFill>
-                  <a:srgbClr val="1A2332"/>
-                </a:solidFill>
-                <a:latin typeface="Calibri" pitchFamily="34" charset="0"/>
-                <a:ea typeface="Calibri" pitchFamily="34" charset="-122"/>
-                <a:cs typeface="Calibri" pitchFamily="34" charset="-120"/>
-              </a:rPr>
-              <a:t>侵入・乗っ取りの起点を事前に潰す</a:t>
-            </a:r>
-            <a:endParaRPr lang="en-US" sz="1250" dirty="0"/>
-          </a:p>
-        </p:txBody>
-      </p:sp>
-      <p:sp>
-        <p:nvSpPr>
-          <p:cNvPr id="9" name="Shape 7"/>
-          <p:cNvSpPr/>
-          <p:nvPr/>
-        </p:nvSpPr>
-        <p:spPr>
-          <a:xfrm>
-            <a:off x="566928" y="3310128"/>
-            <a:ext cx="7498080" cy="1097280"/>
+              <a:t>業務サーバ群</a:t>
+            </a:r>
+            <a:endParaRPr lang="en-US" sz="1200" dirty="0"/>
+          </a:p>
+        </p:txBody>
+      </p:sp>
+      <p:sp>
+        <p:nvSpPr>
+          <p:cNvPr id="18" name="Shape 16"/>
+          <p:cNvSpPr/>
+          <p:nvPr/>
+        </p:nvSpPr>
+        <p:spPr>
+          <a:xfrm>
+            <a:off x="9921240" y="2331720"/>
+            <a:ext cx="1691640" cy="914400"/>
           </a:xfrm>
           <a:prstGeom prst="roundRect">
             <a:avLst>
-              <a:gd name="adj" fmla="val 6667"/>
+              <a:gd name="adj" fmla="val 8000"/>
             </a:avLst>
           </a:prstGeom>
           <a:solidFill>
-            <a:srgbClr val="F4F6FB"/>
+            <a:srgbClr val="FFFFFF"/>
           </a:solidFill>
-          <a:ln w="12700">
+          <a:ln w="19050">
             <a:solidFill>
-              <a:srgbClr val="E2E8F4"/>
+              <a:srgbClr val="C8102E"/>
             </a:solidFill>
             <a:prstDash val="solid"/>
           </a:ln>
@@ -2784,169 +3264,683 @@
       </p:sp>
       <p:sp>
         <p:nvSpPr>
-          <p:cNvPr id="10" name="Shape 8"/>
-          <p:cNvSpPr/>
-          <p:nvPr/>
-        </p:nvSpPr>
-        <p:spPr>
-          <a:xfrm>
-            <a:off x="795528" y="3566160"/>
-            <a:ext cx="585216" cy="585216"/>
-          </a:xfrm>
-          <a:prstGeom prst="ellipse">
-            <a:avLst/>
-          </a:prstGeom>
-          <a:solidFill>
-            <a:srgbClr val="3E5C76"/>
-          </a:solidFill>
-          <a:ln/>
-        </p:spPr>
-      </p:sp>
-      <p:sp>
-        <p:nvSpPr>
-          <p:cNvPr id="11" name="Text 9"/>
-          <p:cNvSpPr/>
-          <p:nvPr/>
-        </p:nvSpPr>
-        <p:spPr>
-          <a:xfrm>
-            <a:off x="795528" y="3566160"/>
-            <a:ext cx="585216" cy="585216"/>
-          </a:xfrm>
-          <a:prstGeom prst="rect">
-            <a:avLst/>
-          </a:prstGeom>
-          <a:noFill/>
-          <a:ln/>
-        </p:spPr>
-        <p:txBody>
-          <a:bodyPr wrap="square" lIns="0" tIns="0" rIns="0" bIns="0" rtlCol="0" anchor="ctr"/>
+          <p:cNvPr id="19" name="Text 17"/>
+          <p:cNvSpPr/>
+          <p:nvPr/>
+        </p:nvSpPr>
+        <p:spPr>
+          <a:xfrm>
+            <a:off x="9921240" y="2377440"/>
+            <a:ext cx="1691640" cy="822960"/>
+          </a:xfrm>
+          <a:prstGeom prst="rect">
+            <a:avLst/>
+          </a:prstGeom>
+          <a:noFill/>
+          <a:ln/>
+        </p:spPr>
+        <p:txBody>
+          <a:bodyPr wrap="square" lIns="0" tIns="0" rIns="0" bIns="0" rtlCol="0" anchor="t"/>
           <a:lstStyle/>
           <a:p>
             <a:pPr algn="ctr" indent="0" marL="0">
-              <a:buNone/>
-            </a:pPr>
-            <a:r>
-              <a:rPr lang="en-US" sz="2200" b="1" dirty="0">
-                <a:solidFill>
-                  <a:srgbClr val="FFFFFF"/>
+              <a:lnSpc>
+                <a:spcPts val="1400"/>
+              </a:lnSpc>
+              <a:buNone/>
+            </a:pPr>
+            <a:r>
+              <a:rPr lang="en-US" sz="1100" b="1" dirty="0">
+                <a:solidFill>
+                  <a:srgbClr val="8E0B20"/>
                 </a:solidFill>
                 <a:latin typeface="Cambria" pitchFamily="34" charset="0"/>
                 <a:ea typeface="Cambria" pitchFamily="34" charset="-122"/>
                 <a:cs typeface="Cambria" pitchFamily="34" charset="-120"/>
               </a:rPr>
-              <a:t>2</a:t>
-            </a:r>
-            <a:endParaRPr lang="en-US" sz="2200" dirty="0"/>
-          </a:p>
-        </p:txBody>
-      </p:sp>
-      <p:sp>
-        <p:nvSpPr>
-          <p:cNvPr id="12" name="Text 10"/>
-          <p:cNvSpPr/>
-          <p:nvPr/>
-        </p:nvSpPr>
-        <p:spPr>
-          <a:xfrm>
-            <a:off x="1572768" y="3456432"/>
-            <a:ext cx="6400800" cy="457200"/>
-          </a:xfrm>
-          <a:prstGeom prst="rect">
-            <a:avLst/>
-          </a:prstGeom>
-          <a:noFill/>
-          <a:ln/>
-        </p:spPr>
-        <p:txBody>
-          <a:bodyPr wrap="square" lIns="0" tIns="0" rIns="0" bIns="0" rtlCol="0" anchor="ctr"/>
-          <a:lstStyle/>
-          <a:p>
-            <a:pPr indent="0" marL="0">
-              <a:buNone/>
-            </a:pPr>
-            <a:r>
-              <a:rPr lang="en-US" sz="1700" b="1" dirty="0">
-                <a:solidFill>
-                  <a:srgbClr val="0E1B3D"/>
+              <a:t>AD サーバ</a:t>
+            </a:r>
+            <a:endParaRPr lang="en-US" sz="1100" dirty="0"/>
+          </a:p>
+          <a:p>
+            <a:pPr algn="ctr" indent="0" marL="0">
+              <a:lnSpc>
+                <a:spcPts val="1400"/>
+              </a:lnSpc>
+              <a:buNone/>
+            </a:pPr>
+            <a:r>
+              <a:rPr lang="en-US" sz="1100" b="1" dirty="0">
+                <a:solidFill>
+                  <a:srgbClr val="8E0B20"/>
                 </a:solidFill>
                 <a:latin typeface="Cambria" pitchFamily="34" charset="0"/>
                 <a:ea typeface="Cambria" pitchFamily="34" charset="-122"/>
                 <a:cs typeface="Cambria" pitchFamily="34" charset="-120"/>
               </a:rPr>
-              <a:t>内側で検知   </a:t>
-            </a:r>
-            <a:pPr indent="0" marL="0">
-              <a:buNone/>
-            </a:pPr>
-            <a:r>
-              <a:rPr lang="en-US" sz="1300" b="1" dirty="0">
-                <a:solidFill>
-                  <a:srgbClr val="3E5C76"/>
+              <a:t>（管理者権限を奪取）</a:t>
+            </a:r>
+            <a:endParaRPr lang="en-US" sz="1100" dirty="0"/>
+          </a:p>
+        </p:txBody>
+      </p:sp>
+      <p:sp>
+        <p:nvSpPr>
+          <p:cNvPr id="20" name="Shape 18"/>
+          <p:cNvSpPr/>
+          <p:nvPr/>
+        </p:nvSpPr>
+        <p:spPr>
+          <a:xfrm>
+            <a:off x="6510528" y="2926080"/>
+            <a:ext cx="658368" cy="256032"/>
+          </a:xfrm>
+          <a:prstGeom prst="roundRect">
+            <a:avLst>
+              <a:gd name="adj" fmla="val 17857"/>
+            </a:avLst>
+          </a:prstGeom>
+          <a:solidFill>
+            <a:srgbClr val="1E7A46"/>
+          </a:solidFill>
+          <a:ln/>
+        </p:spPr>
+      </p:sp>
+      <p:sp>
+        <p:nvSpPr>
+          <p:cNvPr id="21" name="Text 19"/>
+          <p:cNvSpPr/>
+          <p:nvPr/>
+        </p:nvSpPr>
+        <p:spPr>
+          <a:xfrm>
+            <a:off x="6510528" y="2926080"/>
+            <a:ext cx="658368" cy="256032"/>
+          </a:xfrm>
+          <a:prstGeom prst="rect">
+            <a:avLst/>
+          </a:prstGeom>
+          <a:noFill/>
+          <a:ln/>
+        </p:spPr>
+        <p:txBody>
+          <a:bodyPr wrap="square" lIns="0" tIns="0" rIns="0" bIns="0" rtlCol="0" anchor="ctr"/>
+          <a:lstStyle/>
+          <a:p>
+            <a:pPr algn="ctr" indent="0" marL="0">
+              <a:buNone/>
+            </a:pPr>
+            <a:r>
+              <a:rPr lang="en-US" sz="900" b="1" dirty="0">
+                <a:solidFill>
+                  <a:srgbClr val="FFFFFF"/>
+                </a:solidFill>
+                <a:latin typeface="Calibri" pitchFamily="34" charset="0"/>
+                <a:ea typeface="Calibri" pitchFamily="34" charset="-122"/>
+                <a:cs typeface="Calibri" pitchFamily="34" charset="-120"/>
+              </a:rPr>
+              <a:t>EDR</a:t>
+            </a:r>
+            <a:endParaRPr lang="en-US" sz="900" dirty="0"/>
+          </a:p>
+        </p:txBody>
+      </p:sp>
+      <p:sp>
+        <p:nvSpPr>
+          <p:cNvPr id="22" name="Shape 20"/>
+          <p:cNvSpPr/>
+          <p:nvPr/>
+        </p:nvSpPr>
+        <p:spPr>
+          <a:xfrm>
+            <a:off x="8540496" y="2926080"/>
+            <a:ext cx="658368" cy="256032"/>
+          </a:xfrm>
+          <a:prstGeom prst="roundRect">
+            <a:avLst>
+              <a:gd name="adj" fmla="val 17857"/>
+            </a:avLst>
+          </a:prstGeom>
+          <a:solidFill>
+            <a:srgbClr val="1E7A46"/>
+          </a:solidFill>
+          <a:ln/>
+        </p:spPr>
+      </p:sp>
+      <p:sp>
+        <p:nvSpPr>
+          <p:cNvPr id="23" name="Text 21"/>
+          <p:cNvSpPr/>
+          <p:nvPr/>
+        </p:nvSpPr>
+        <p:spPr>
+          <a:xfrm>
+            <a:off x="8540496" y="2926080"/>
+            <a:ext cx="658368" cy="256032"/>
+          </a:xfrm>
+          <a:prstGeom prst="rect">
+            <a:avLst/>
+          </a:prstGeom>
+          <a:noFill/>
+          <a:ln/>
+        </p:spPr>
+        <p:txBody>
+          <a:bodyPr wrap="square" lIns="0" tIns="0" rIns="0" bIns="0" rtlCol="0" anchor="ctr"/>
+          <a:lstStyle/>
+          <a:p>
+            <a:pPr algn="ctr" indent="0" marL="0">
+              <a:buNone/>
+            </a:pPr>
+            <a:r>
+              <a:rPr lang="en-US" sz="900" b="1" dirty="0">
+                <a:solidFill>
+                  <a:srgbClr val="FFFFFF"/>
+                </a:solidFill>
+                <a:latin typeface="Calibri" pitchFamily="34" charset="0"/>
+                <a:ea typeface="Calibri" pitchFamily="34" charset="-122"/>
+                <a:cs typeface="Calibri" pitchFamily="34" charset="-120"/>
+              </a:rPr>
+              <a:t>EDR</a:t>
+            </a:r>
+            <a:endParaRPr lang="en-US" sz="900" dirty="0"/>
+          </a:p>
+        </p:txBody>
+      </p:sp>
+      <p:sp>
+        <p:nvSpPr>
+          <p:cNvPr id="24" name="Shape 22"/>
+          <p:cNvSpPr/>
+          <p:nvPr/>
+        </p:nvSpPr>
+        <p:spPr>
+          <a:xfrm>
+            <a:off x="10442448" y="2926080"/>
+            <a:ext cx="658368" cy="256032"/>
+          </a:xfrm>
+          <a:prstGeom prst="roundRect">
+            <a:avLst>
+              <a:gd name="adj" fmla="val 17857"/>
+            </a:avLst>
+          </a:prstGeom>
+          <a:solidFill>
+            <a:srgbClr val="1E7A46"/>
+          </a:solidFill>
+          <a:ln/>
+        </p:spPr>
+      </p:sp>
+      <p:sp>
+        <p:nvSpPr>
+          <p:cNvPr id="25" name="Text 23"/>
+          <p:cNvSpPr/>
+          <p:nvPr/>
+        </p:nvSpPr>
+        <p:spPr>
+          <a:xfrm>
+            <a:off x="10442448" y="2926080"/>
+            <a:ext cx="658368" cy="256032"/>
+          </a:xfrm>
+          <a:prstGeom prst="rect">
+            <a:avLst/>
+          </a:prstGeom>
+          <a:noFill/>
+          <a:ln/>
+        </p:spPr>
+        <p:txBody>
+          <a:bodyPr wrap="square" lIns="0" tIns="0" rIns="0" bIns="0" rtlCol="0" anchor="ctr"/>
+          <a:lstStyle/>
+          <a:p>
+            <a:pPr algn="ctr" indent="0" marL="0">
+              <a:buNone/>
+            </a:pPr>
+            <a:r>
+              <a:rPr lang="en-US" sz="900" b="1" dirty="0">
+                <a:solidFill>
+                  <a:srgbClr val="FFFFFF"/>
+                </a:solidFill>
+                <a:latin typeface="Calibri" pitchFamily="34" charset="0"/>
+                <a:ea typeface="Calibri" pitchFamily="34" charset="-122"/>
+                <a:cs typeface="Calibri" pitchFamily="34" charset="-120"/>
+              </a:rPr>
+              <a:t>EDR</a:t>
+            </a:r>
+            <a:endParaRPr lang="en-US" sz="900" dirty="0"/>
+          </a:p>
+        </p:txBody>
+      </p:sp>
+      <p:sp>
+        <p:nvSpPr>
+          <p:cNvPr id="26" name="Shape 24"/>
+          <p:cNvSpPr/>
+          <p:nvPr/>
+        </p:nvSpPr>
+        <p:spPr>
+          <a:xfrm>
+            <a:off x="2167128" y="2615184"/>
+            <a:ext cx="274320" cy="256032"/>
+          </a:xfrm>
+          <a:prstGeom prst="rightArrow">
+            <a:avLst/>
+          </a:prstGeom>
+          <a:solidFill>
+            <a:srgbClr val="C8102E"/>
+          </a:solidFill>
+          <a:ln/>
+        </p:spPr>
+      </p:sp>
+      <p:sp>
+        <p:nvSpPr>
+          <p:cNvPr id="27" name="Shape 25"/>
+          <p:cNvSpPr/>
+          <p:nvPr/>
+        </p:nvSpPr>
+        <p:spPr>
+          <a:xfrm>
+            <a:off x="4690872" y="2468880"/>
+            <a:ext cx="1170432" cy="274320"/>
+          </a:xfrm>
+          <a:prstGeom prst="rightArrow">
+            <a:avLst/>
+          </a:prstGeom>
+          <a:solidFill>
+            <a:srgbClr val="C8102E"/>
+          </a:solidFill>
+          <a:ln/>
+        </p:spPr>
+      </p:sp>
+      <p:sp>
+        <p:nvSpPr>
+          <p:cNvPr id="28" name="Shape 26"/>
+          <p:cNvSpPr/>
+          <p:nvPr/>
+        </p:nvSpPr>
+        <p:spPr>
+          <a:xfrm>
+            <a:off x="4690872" y="3310128"/>
+            <a:ext cx="1170432" cy="256032"/>
+          </a:xfrm>
+          <a:prstGeom prst="leftArrow">
+            <a:avLst/>
+          </a:prstGeom>
+          <a:solidFill>
+            <a:srgbClr val="7C93AC"/>
+          </a:solidFill>
+          <a:ln/>
+        </p:spPr>
+      </p:sp>
+      <p:sp>
+        <p:nvSpPr>
+          <p:cNvPr id="29" name="Shape 27"/>
+          <p:cNvSpPr/>
+          <p:nvPr/>
+        </p:nvSpPr>
+        <p:spPr>
+          <a:xfrm>
+            <a:off x="7790688" y="2651760"/>
+            <a:ext cx="182880" cy="256032"/>
+          </a:xfrm>
+          <a:prstGeom prst="rightArrow">
+            <a:avLst/>
+          </a:prstGeom>
+          <a:solidFill>
+            <a:srgbClr val="8E0B20"/>
+          </a:solidFill>
+          <a:ln/>
+        </p:spPr>
+      </p:sp>
+      <p:sp>
+        <p:nvSpPr>
+          <p:cNvPr id="30" name="Shape 28"/>
+          <p:cNvSpPr/>
+          <p:nvPr/>
+        </p:nvSpPr>
+        <p:spPr>
+          <a:xfrm>
+            <a:off x="9756648" y="2651760"/>
+            <a:ext cx="146304" cy="256032"/>
+          </a:xfrm>
+          <a:prstGeom prst="rightArrow">
+            <a:avLst/>
+          </a:prstGeom>
+          <a:solidFill>
+            <a:srgbClr val="8E0B20"/>
+          </a:solidFill>
+          <a:ln/>
+        </p:spPr>
+      </p:sp>
+      <p:sp>
+        <p:nvSpPr>
+          <p:cNvPr id="31" name="Shape 29"/>
+          <p:cNvSpPr/>
+          <p:nvPr/>
+        </p:nvSpPr>
+        <p:spPr>
+          <a:xfrm>
+            <a:off x="2212848" y="2304288"/>
+            <a:ext cx="310896" cy="310896"/>
+          </a:xfrm>
+          <a:prstGeom prst="ellipse">
+            <a:avLst/>
+          </a:prstGeom>
+          <a:solidFill>
+            <a:srgbClr val="C8102E"/>
+          </a:solidFill>
+          <a:ln w="19050">
+            <a:solidFill>
+              <a:srgbClr val="FFFFFF"/>
+            </a:solidFill>
+            <a:prstDash val="solid"/>
+          </a:ln>
+        </p:spPr>
+      </p:sp>
+      <p:sp>
+        <p:nvSpPr>
+          <p:cNvPr id="32" name="Text 30"/>
+          <p:cNvSpPr/>
+          <p:nvPr/>
+        </p:nvSpPr>
+        <p:spPr>
+          <a:xfrm>
+            <a:off x="2212848" y="2304288"/>
+            <a:ext cx="310896" cy="310896"/>
+          </a:xfrm>
+          <a:prstGeom prst="rect">
+            <a:avLst/>
+          </a:prstGeom>
+          <a:noFill/>
+          <a:ln/>
+        </p:spPr>
+        <p:txBody>
+          <a:bodyPr wrap="square" lIns="0" tIns="0" rIns="0" bIns="0" rtlCol="0" anchor="ctr"/>
+          <a:lstStyle/>
+          <a:p>
+            <a:pPr algn="ctr" indent="0" marL="0">
+              <a:buNone/>
+            </a:pPr>
+            <a:r>
+              <a:rPr lang="en-US" sz="1400" b="1" dirty="0">
+                <a:solidFill>
+                  <a:srgbClr val="FFFFFF"/>
                 </a:solidFill>
                 <a:latin typeface="Cambria" pitchFamily="34" charset="0"/>
                 <a:ea typeface="Cambria" pitchFamily="34" charset="-122"/>
                 <a:cs typeface="Cambria" pitchFamily="34" charset="-120"/>
               </a:rPr>
-              <a:t>EDR(SentinelOne)</a:t>
-            </a:r>
-            <a:endParaRPr lang="en-US" sz="1700" dirty="0"/>
-          </a:p>
-        </p:txBody>
-      </p:sp>
-      <p:sp>
-        <p:nvSpPr>
-          <p:cNvPr id="13" name="Text 11"/>
-          <p:cNvSpPr/>
-          <p:nvPr/>
-        </p:nvSpPr>
-        <p:spPr>
-          <a:xfrm>
-            <a:off x="1572768" y="3877056"/>
-            <a:ext cx="6400800" cy="457200"/>
-          </a:xfrm>
-          <a:prstGeom prst="rect">
-            <a:avLst/>
-          </a:prstGeom>
-          <a:noFill/>
-          <a:ln/>
-        </p:spPr>
-        <p:txBody>
-          <a:bodyPr wrap="square" lIns="0" tIns="0" rIns="0" bIns="0" rtlCol="0" anchor="t"/>
-          <a:lstStyle/>
-          <a:p>
-            <a:pPr indent="0" marL="0">
-              <a:buNone/>
-            </a:pPr>
-            <a:r>
-              <a:rPr lang="en-US" sz="1250" dirty="0">
-                <a:solidFill>
-                  <a:srgbClr val="1A2332"/>
-                </a:solidFill>
-                <a:latin typeface="Calibri" pitchFamily="34" charset="0"/>
-                <a:ea typeface="Calibri" pitchFamily="34" charset="-122"/>
-                <a:cs typeface="Calibri" pitchFamily="34" charset="-120"/>
-              </a:rPr>
-              <a:t>侵入されても被害拡大を検知・抑制</a:t>
-            </a:r>
-            <a:endParaRPr lang="en-US" sz="1250" dirty="0"/>
-          </a:p>
-        </p:txBody>
-      </p:sp>
-      <p:sp>
-        <p:nvSpPr>
-          <p:cNvPr id="14" name="Shape 12"/>
-          <p:cNvSpPr/>
-          <p:nvPr/>
-        </p:nvSpPr>
-        <p:spPr>
-          <a:xfrm>
-            <a:off x="566928" y="4608576"/>
-            <a:ext cx="7498080" cy="1097280"/>
+              <a:t>2</a:t>
+            </a:r>
+            <a:endParaRPr lang="en-US" sz="1400" dirty="0"/>
+          </a:p>
+        </p:txBody>
+      </p:sp>
+      <p:sp>
+        <p:nvSpPr>
+          <p:cNvPr id="33" name="Shape 31"/>
+          <p:cNvSpPr/>
+          <p:nvPr/>
+        </p:nvSpPr>
+        <p:spPr>
+          <a:xfrm>
+            <a:off x="5504688" y="2103120"/>
+            <a:ext cx="310896" cy="310896"/>
+          </a:xfrm>
+          <a:prstGeom prst="ellipse">
+            <a:avLst/>
+          </a:prstGeom>
+          <a:solidFill>
+            <a:srgbClr val="C8102E"/>
+          </a:solidFill>
+          <a:ln w="19050">
+            <a:solidFill>
+              <a:srgbClr val="FFFFFF"/>
+            </a:solidFill>
+            <a:prstDash val="solid"/>
+          </a:ln>
+        </p:spPr>
+      </p:sp>
+      <p:sp>
+        <p:nvSpPr>
+          <p:cNvPr id="34" name="Text 32"/>
+          <p:cNvSpPr/>
+          <p:nvPr/>
+        </p:nvSpPr>
+        <p:spPr>
+          <a:xfrm>
+            <a:off x="5504688" y="2103120"/>
+            <a:ext cx="310896" cy="310896"/>
+          </a:xfrm>
+          <a:prstGeom prst="rect">
+            <a:avLst/>
+          </a:prstGeom>
+          <a:noFill/>
+          <a:ln/>
+        </p:spPr>
+        <p:txBody>
+          <a:bodyPr wrap="square" lIns="0" tIns="0" rIns="0" bIns="0" rtlCol="0" anchor="ctr"/>
+          <a:lstStyle/>
+          <a:p>
+            <a:pPr algn="ctr" indent="0" marL="0">
+              <a:buNone/>
+            </a:pPr>
+            <a:r>
+              <a:rPr lang="en-US" sz="1400" b="1" dirty="0">
+                <a:solidFill>
+                  <a:srgbClr val="FFFFFF"/>
+                </a:solidFill>
+                <a:latin typeface="Cambria" pitchFamily="34" charset="0"/>
+                <a:ea typeface="Cambria" pitchFamily="34" charset="-122"/>
+                <a:cs typeface="Cambria" pitchFamily="34" charset="-120"/>
+              </a:rPr>
+              <a:t>3</a:t>
+            </a:r>
+            <a:endParaRPr lang="en-US" sz="1400" dirty="0"/>
+          </a:p>
+        </p:txBody>
+      </p:sp>
+      <p:sp>
+        <p:nvSpPr>
+          <p:cNvPr id="35" name="Shape 33"/>
+          <p:cNvSpPr/>
+          <p:nvPr/>
+        </p:nvSpPr>
+        <p:spPr>
+          <a:xfrm>
+            <a:off x="5120640" y="3246120"/>
+            <a:ext cx="310896" cy="310896"/>
+          </a:xfrm>
+          <a:prstGeom prst="ellipse">
+            <a:avLst/>
+          </a:prstGeom>
+          <a:solidFill>
+            <a:srgbClr val="5E7186"/>
+          </a:solidFill>
+          <a:ln w="19050">
+            <a:solidFill>
+              <a:srgbClr val="FFFFFF"/>
+            </a:solidFill>
+            <a:prstDash val="solid"/>
+          </a:ln>
+        </p:spPr>
+      </p:sp>
+      <p:sp>
+        <p:nvSpPr>
+          <p:cNvPr id="36" name="Text 34"/>
+          <p:cNvSpPr/>
+          <p:nvPr/>
+        </p:nvSpPr>
+        <p:spPr>
+          <a:xfrm>
+            <a:off x="5120640" y="3246120"/>
+            <a:ext cx="310896" cy="310896"/>
+          </a:xfrm>
+          <a:prstGeom prst="rect">
+            <a:avLst/>
+          </a:prstGeom>
+          <a:noFill/>
+          <a:ln/>
+        </p:spPr>
+        <p:txBody>
+          <a:bodyPr wrap="square" lIns="0" tIns="0" rIns="0" bIns="0" rtlCol="0" anchor="ctr"/>
+          <a:lstStyle/>
+          <a:p>
+            <a:pPr algn="ctr" indent="0" marL="0">
+              <a:buNone/>
+            </a:pPr>
+            <a:r>
+              <a:rPr lang="en-US" sz="1400" b="1" dirty="0">
+                <a:solidFill>
+                  <a:srgbClr val="FFFFFF"/>
+                </a:solidFill>
+                <a:latin typeface="Cambria" pitchFamily="34" charset="0"/>
+                <a:ea typeface="Cambria" pitchFamily="34" charset="-122"/>
+                <a:cs typeface="Cambria" pitchFamily="34" charset="-120"/>
+              </a:rPr>
+              <a:t>1</a:t>
+            </a:r>
+            <a:endParaRPr lang="en-US" sz="1400" dirty="0"/>
+          </a:p>
+        </p:txBody>
+      </p:sp>
+      <p:sp>
+        <p:nvSpPr>
+          <p:cNvPr id="37" name="Shape 35"/>
+          <p:cNvSpPr/>
+          <p:nvPr/>
+        </p:nvSpPr>
+        <p:spPr>
+          <a:xfrm>
+            <a:off x="7726680" y="3200400"/>
+            <a:ext cx="310896" cy="310896"/>
+          </a:xfrm>
+          <a:prstGeom prst="ellipse">
+            <a:avLst/>
+          </a:prstGeom>
+          <a:solidFill>
+            <a:srgbClr val="8E0B20"/>
+          </a:solidFill>
+          <a:ln w="19050">
+            <a:solidFill>
+              <a:srgbClr val="FFFFFF"/>
+            </a:solidFill>
+            <a:prstDash val="solid"/>
+          </a:ln>
+        </p:spPr>
+      </p:sp>
+      <p:sp>
+        <p:nvSpPr>
+          <p:cNvPr id="38" name="Text 36"/>
+          <p:cNvSpPr/>
+          <p:nvPr/>
+        </p:nvSpPr>
+        <p:spPr>
+          <a:xfrm>
+            <a:off x="7726680" y="3200400"/>
+            <a:ext cx="310896" cy="310896"/>
+          </a:xfrm>
+          <a:prstGeom prst="rect">
+            <a:avLst/>
+          </a:prstGeom>
+          <a:noFill/>
+          <a:ln/>
+        </p:spPr>
+        <p:txBody>
+          <a:bodyPr wrap="square" lIns="0" tIns="0" rIns="0" bIns="0" rtlCol="0" anchor="ctr"/>
+          <a:lstStyle/>
+          <a:p>
+            <a:pPr algn="ctr" indent="0" marL="0">
+              <a:buNone/>
+            </a:pPr>
+            <a:r>
+              <a:rPr lang="en-US" sz="1400" b="1" dirty="0">
+                <a:solidFill>
+                  <a:srgbClr val="FFFFFF"/>
+                </a:solidFill>
+                <a:latin typeface="Cambria" pitchFamily="34" charset="0"/>
+                <a:ea typeface="Cambria" pitchFamily="34" charset="-122"/>
+                <a:cs typeface="Cambria" pitchFamily="34" charset="-120"/>
+              </a:rPr>
+              <a:t>4</a:t>
+            </a:r>
+            <a:endParaRPr lang="en-US" sz="1400" dirty="0"/>
+          </a:p>
+        </p:txBody>
+      </p:sp>
+      <p:sp>
+        <p:nvSpPr>
+          <p:cNvPr id="39" name="Shape 37"/>
+          <p:cNvSpPr/>
+          <p:nvPr/>
+        </p:nvSpPr>
+        <p:spPr>
+          <a:xfrm>
+            <a:off x="9646920" y="3200400"/>
+            <a:ext cx="310896" cy="310896"/>
+          </a:xfrm>
+          <a:prstGeom prst="ellipse">
+            <a:avLst/>
+          </a:prstGeom>
+          <a:solidFill>
+            <a:srgbClr val="8E0B20"/>
+          </a:solidFill>
+          <a:ln w="19050">
+            <a:solidFill>
+              <a:srgbClr val="FFFFFF"/>
+            </a:solidFill>
+            <a:prstDash val="solid"/>
+          </a:ln>
+        </p:spPr>
+      </p:sp>
+      <p:sp>
+        <p:nvSpPr>
+          <p:cNvPr id="40" name="Text 38"/>
+          <p:cNvSpPr/>
+          <p:nvPr/>
+        </p:nvSpPr>
+        <p:spPr>
+          <a:xfrm>
+            <a:off x="9646920" y="3200400"/>
+            <a:ext cx="310896" cy="310896"/>
+          </a:xfrm>
+          <a:prstGeom prst="rect">
+            <a:avLst/>
+          </a:prstGeom>
+          <a:noFill/>
+          <a:ln/>
+        </p:spPr>
+        <p:txBody>
+          <a:bodyPr wrap="square" lIns="0" tIns="0" rIns="0" bIns="0" rtlCol="0" anchor="ctr"/>
+          <a:lstStyle/>
+          <a:p>
+            <a:pPr algn="ctr" indent="0" marL="0">
+              <a:buNone/>
+            </a:pPr>
+            <a:r>
+              <a:rPr lang="en-US" sz="1400" b="1" dirty="0">
+                <a:solidFill>
+                  <a:srgbClr val="FFFFFF"/>
+                </a:solidFill>
+                <a:latin typeface="Cambria" pitchFamily="34" charset="0"/>
+                <a:ea typeface="Cambria" pitchFamily="34" charset="-122"/>
+                <a:cs typeface="Cambria" pitchFamily="34" charset="-120"/>
+              </a:rPr>
+              <a:t>5</a:t>
+            </a:r>
+            <a:endParaRPr lang="en-US" sz="1400" dirty="0"/>
+          </a:p>
+        </p:txBody>
+      </p:sp>
+      <p:sp>
+        <p:nvSpPr>
+          <p:cNvPr id="41" name="Shape 39"/>
+          <p:cNvSpPr/>
+          <p:nvPr/>
+        </p:nvSpPr>
+        <p:spPr>
+          <a:xfrm>
+            <a:off x="457200" y="4169664"/>
+            <a:ext cx="11292840" cy="658368"/>
           </a:xfrm>
           <a:prstGeom prst="roundRect">
             <a:avLst>
-              <a:gd name="adj" fmla="val 6667"/>
+              <a:gd name="adj" fmla="val 9722"/>
             </a:avLst>
           </a:prstGeom>
           <a:solidFill>
@@ -2958,45 +3952,18 @@
             </a:solidFill>
             <a:prstDash val="solid"/>
           </a:ln>
-          <a:effectLst>
-            <a:outerShdw sx="100000" sy="100000" kx="0" ky="0" algn="bl" rotWithShape="0" blurRad="101600" dist="38100" dir="5400000">
-              <a:srgbClr val="8A93A6">
-                <a:alpha val="28000"/>
-              </a:srgbClr>
-            </a:outerShdw>
-          </a:effectLst>
-        </p:spPr>
-      </p:sp>
-      <p:sp>
-        <p:nvSpPr>
-          <p:cNvPr id="15" name="Shape 13"/>
-          <p:cNvSpPr/>
-          <p:nvPr/>
-        </p:nvSpPr>
-        <p:spPr>
-          <a:xfrm>
-            <a:off x="795528" y="4864608"/>
-            <a:ext cx="585216" cy="585216"/>
-          </a:xfrm>
-          <a:prstGeom prst="ellipse">
-            <a:avLst/>
-          </a:prstGeom>
-          <a:solidFill>
-            <a:srgbClr val="1E7A46"/>
-          </a:solidFill>
-          <a:ln/>
-        </p:spPr>
-      </p:sp>
-      <p:sp>
-        <p:nvSpPr>
-          <p:cNvPr id="16" name="Text 14"/>
-          <p:cNvSpPr/>
-          <p:nvPr/>
-        </p:nvSpPr>
-        <p:spPr>
-          <a:xfrm>
-            <a:off x="795528" y="4864608"/>
-            <a:ext cx="585216" cy="585216"/>
+        </p:spPr>
+      </p:sp>
+      <p:sp>
+        <p:nvSpPr>
+          <p:cNvPr id="42" name="Text 40"/>
+          <p:cNvSpPr/>
+          <p:nvPr/>
+        </p:nvSpPr>
+        <p:spPr>
+          <a:xfrm>
+            <a:off x="658368" y="4169664"/>
+            <a:ext cx="10881360" cy="658368"/>
           </a:xfrm>
           <a:prstGeom prst="rect">
             <a:avLst/>
@@ -3008,103 +3975,65 @@
           <a:bodyPr wrap="square" lIns="0" tIns="0" rIns="0" bIns="0" rtlCol="0" anchor="ctr"/>
           <a:lstStyle/>
           <a:p>
-            <a:pPr algn="ctr" indent="0" marL="0">
-              <a:buNone/>
-            </a:pPr>
-            <a:r>
-              <a:rPr lang="en-US" sz="2200" b="1" dirty="0">
-                <a:solidFill>
-                  <a:srgbClr val="FFFFFF"/>
-                </a:solidFill>
-                <a:latin typeface="Cambria" pitchFamily="34" charset="0"/>
-                <a:ea typeface="Cambria" pitchFamily="34" charset="-122"/>
-                <a:cs typeface="Cambria" pitchFamily="34" charset="-120"/>
-              </a:rPr>
-              <a:t>3</a:t>
-            </a:r>
-            <a:endParaRPr lang="en-US" sz="2200" dirty="0"/>
-          </a:p>
-        </p:txBody>
-      </p:sp>
-      <p:sp>
-        <p:nvSpPr>
-          <p:cNvPr id="17" name="Text 15"/>
-          <p:cNvSpPr/>
-          <p:nvPr/>
-        </p:nvSpPr>
-        <p:spPr>
-          <a:xfrm>
-            <a:off x="1572768" y="4754880"/>
-            <a:ext cx="6400800" cy="457200"/>
-          </a:xfrm>
-          <a:prstGeom prst="rect">
-            <a:avLst/>
-          </a:prstGeom>
-          <a:noFill/>
-          <a:ln/>
-        </p:spPr>
-        <p:txBody>
-          <a:bodyPr wrap="square" lIns="0" tIns="0" rIns="0" bIns="0" rtlCol="0" anchor="ctr"/>
-          <a:lstStyle/>
-          <a:p>
             <a:pPr indent="0" marL="0">
-              <a:buNone/>
-            </a:pPr>
-            <a:r>
-              <a:rPr lang="en-US" sz="1700" b="1" dirty="0">
-                <a:solidFill>
-                  <a:srgbClr val="0E1B3D"/>
-                </a:solidFill>
-                <a:latin typeface="Cambria" pitchFamily="34" charset="0"/>
-                <a:ea typeface="Cambria" pitchFamily="34" charset="-122"/>
-                <a:cs typeface="Cambria" pitchFamily="34" charset="-120"/>
-              </a:rPr>
-              <a:t>備えと復旧   </a:t>
+              <a:lnSpc>
+                <a:spcPts val="1700"/>
+              </a:lnSpc>
+              <a:buNone/>
+            </a:pPr>
+            <a:r>
+              <a:rPr lang="en-US" sz="1150" b="1" dirty="0">
+                <a:solidFill>
+                  <a:srgbClr val="5E7186"/>
+                </a:solidFill>
+                <a:latin typeface="Calibri" pitchFamily="34" charset="0"/>
+                <a:ea typeface="Calibri" pitchFamily="34" charset="-122"/>
+                <a:cs typeface="Calibri" pitchFamily="34" charset="-120"/>
+              </a:rPr>
+              <a:t>①</a:t>
             </a:r>
             <a:pPr indent="0" marL="0">
-              <a:buNone/>
-            </a:pPr>
-            <a:r>
-              <a:rPr lang="en-US" sz="1300" b="1" dirty="0">
-                <a:solidFill>
-                  <a:srgbClr val="1E7A46"/>
-                </a:solidFill>
-                <a:latin typeface="Cambria" pitchFamily="34" charset="0"/>
-                <a:ea typeface="Cambria" pitchFamily="34" charset="-122"/>
-                <a:cs typeface="Cambria" pitchFamily="34" charset="-120"/>
-              </a:rPr>
-              <a:t>バックアップ・監視・訓練</a:t>
-            </a:r>
-            <a:endParaRPr lang="en-US" sz="1700" dirty="0"/>
-          </a:p>
-        </p:txBody>
-      </p:sp>
-      <p:sp>
-        <p:nvSpPr>
-          <p:cNvPr id="18" name="Text 16"/>
-          <p:cNvSpPr/>
-          <p:nvPr/>
-        </p:nvSpPr>
-        <p:spPr>
-          <a:xfrm>
-            <a:off x="1572768" y="5175504"/>
-            <a:ext cx="6400800" cy="457200"/>
-          </a:xfrm>
-          <a:prstGeom prst="rect">
-            <a:avLst/>
-          </a:prstGeom>
-          <a:noFill/>
-          <a:ln/>
-        </p:spPr>
-        <p:txBody>
-          <a:bodyPr wrap="square" lIns="0" tIns="0" rIns="0" bIns="0" rtlCol="0" anchor="t"/>
-          <a:lstStyle/>
-          <a:p>
+              <a:lnSpc>
+                <a:spcPts val="1700"/>
+              </a:lnSpc>
+              <a:buNone/>
+            </a:pPr>
+            <a:r>
+              <a:rPr lang="en-US" sz="1150" dirty="0">
+                <a:solidFill>
+                  <a:srgbClr val="1A2332"/>
+                </a:solidFill>
+                <a:latin typeface="Calibri" pitchFamily="34" charset="0"/>
+                <a:ea typeface="Calibri" pitchFamily="34" charset="-122"/>
+                <a:cs typeface="Calibri" pitchFamily="34" charset="-120"/>
+              </a:rPr>
+              <a:t> エッジが常時アウトバウンド接続(443)→F/Wが許可　　</a:t>
+            </a:r>
             <a:pPr indent="0" marL="0">
-              <a:buNone/>
-            </a:pPr>
-            <a:r>
-              <a:rPr lang="en-US" sz="1250" dirty="0">
+              <a:lnSpc>
+                <a:spcPts val="1700"/>
+              </a:lnSpc>
+              <a:buNone/>
+            </a:pPr>
+            <a:r>
+              <a:rPr lang="en-US" sz="1150" b="1" dirty="0">
+                <a:solidFill>
+                  <a:srgbClr val="C8102E"/>
+                </a:solidFill>
+                <a:latin typeface="Calibri" pitchFamily="34" charset="0"/>
+                <a:ea typeface="Calibri" pitchFamily="34" charset="-122"/>
+                <a:cs typeface="Calibri" pitchFamily="34" charset="-120"/>
+              </a:rPr>
+              <a:t>②</a:t>
+            </a:r>
+            <a:pPr indent="0" marL="0">
+              <a:lnSpc>
+                <a:spcPts val="1700"/>
+              </a:lnSpc>
+              <a:buNone/>
+            </a:pPr>
+            <a:r>
+              <a:rPr lang="en-US" sz="1150" dirty="0">
                 <a:solidFill>
                   <a:srgbClr val="1A2332"/>
                 </a:solidFill>
@@ -3112,73 +4041,303 @@
                 <a:ea typeface="Calibri" pitchFamily="34" charset="-122"/>
                 <a:cs typeface="Calibri" pitchFamily="34" charset="-120"/>
               </a:rPr>
-              <a:t>最悪時に事業を止めない</a:t>
-            </a:r>
-            <a:endParaRPr lang="en-US" sz="1250" dirty="0"/>
-          </a:p>
-        </p:txBody>
-      </p:sp>
-      <p:sp>
-        <p:nvSpPr>
-          <p:cNvPr id="19" name="Shape 17"/>
-          <p:cNvSpPr/>
-          <p:nvPr/>
-        </p:nvSpPr>
-        <p:spPr>
-          <a:xfrm>
-            <a:off x="8366760" y="2011680"/>
-            <a:ext cx="3255264" cy="3712464"/>
+              <a:t> 攻撃者はリレー越しに到達　　</a:t>
+            </a:r>
+            <a:pPr indent="0" marL="0">
+              <a:lnSpc>
+                <a:spcPts val="1700"/>
+              </a:lnSpc>
+              <a:buNone/>
+            </a:pPr>
+            <a:r>
+              <a:rPr lang="en-US" sz="1150" b="1" dirty="0">
+                <a:solidFill>
+                  <a:srgbClr val="C8102E"/>
+                </a:solidFill>
+                <a:latin typeface="Calibri" pitchFamily="34" charset="0"/>
+                <a:ea typeface="Calibri" pitchFamily="34" charset="-122"/>
+                <a:cs typeface="Calibri" pitchFamily="34" charset="-120"/>
+              </a:rPr>
+              <a:t>③</a:t>
+            </a:r>
+            <a:pPr indent="0" marL="0">
+              <a:lnSpc>
+                <a:spcPts val="1700"/>
+              </a:lnSpc>
+              <a:buNone/>
+            </a:pPr>
+            <a:r>
+              <a:rPr lang="en-US" sz="1150" dirty="0">
+                <a:solidFill>
+                  <a:srgbClr val="1A2332"/>
+                </a:solidFill>
+                <a:latin typeface="Calibri" pitchFamily="34" charset="0"/>
+                <a:ea typeface="Calibri" pitchFamily="34" charset="-122"/>
+                <a:cs typeface="Calibri" pitchFamily="34" charset="-120"/>
+              </a:rPr>
+              <a:t> 正規認証／未パッチCVEで侵入　　</a:t>
+            </a:r>
+            <a:pPr indent="0" marL="0">
+              <a:lnSpc>
+                <a:spcPts val="1700"/>
+              </a:lnSpc>
+              <a:buNone/>
+            </a:pPr>
+            <a:r>
+              <a:rPr lang="en-US" sz="1150" b="1" dirty="0">
+                <a:solidFill>
+                  <a:srgbClr val="8E0B20"/>
+                </a:solidFill>
+                <a:latin typeface="Calibri" pitchFamily="34" charset="0"/>
+                <a:ea typeface="Calibri" pitchFamily="34" charset="-122"/>
+                <a:cs typeface="Calibri" pitchFamily="34" charset="-120"/>
+              </a:rPr>
+              <a:t>④</a:t>
+            </a:r>
+            <a:pPr indent="0" marL="0">
+              <a:lnSpc>
+                <a:spcPts val="1700"/>
+              </a:lnSpc>
+              <a:buNone/>
+            </a:pPr>
+            <a:r>
+              <a:rPr lang="en-US" sz="1150" dirty="0">
+                <a:solidFill>
+                  <a:srgbClr val="1A2332"/>
+                </a:solidFill>
+                <a:latin typeface="Calibri" pitchFamily="34" charset="0"/>
+                <a:ea typeface="Calibri" pitchFamily="34" charset="-122"/>
+                <a:cs typeface="Calibri" pitchFamily="34" charset="-120"/>
+              </a:rPr>
+              <a:t> 内部を横展開　　</a:t>
+            </a:r>
+            <a:pPr indent="0" marL="0">
+              <a:lnSpc>
+                <a:spcPts val="1700"/>
+              </a:lnSpc>
+              <a:buNone/>
+            </a:pPr>
+            <a:r>
+              <a:rPr lang="en-US" sz="1150" b="1" dirty="0">
+                <a:solidFill>
+                  <a:srgbClr val="8E0B20"/>
+                </a:solidFill>
+                <a:latin typeface="Calibri" pitchFamily="34" charset="0"/>
+                <a:ea typeface="Calibri" pitchFamily="34" charset="-122"/>
+                <a:cs typeface="Calibri" pitchFamily="34" charset="-120"/>
+              </a:rPr>
+              <a:t>⑤</a:t>
+            </a:r>
+            <a:pPr indent="0" marL="0">
+              <a:lnSpc>
+                <a:spcPts val="1700"/>
+              </a:lnSpc>
+              <a:buNone/>
+            </a:pPr>
+            <a:r>
+              <a:rPr lang="en-US" sz="1150" dirty="0">
+                <a:solidFill>
+                  <a:srgbClr val="1A2332"/>
+                </a:solidFill>
+                <a:latin typeface="Calibri" pitchFamily="34" charset="0"/>
+                <a:ea typeface="Calibri" pitchFamily="34" charset="-122"/>
+                <a:cs typeface="Calibri" pitchFamily="34" charset="-120"/>
+              </a:rPr>
+              <a:t> AD管理者権限を奪取しEDRを無効化</a:t>
+            </a:r>
+            <a:endParaRPr lang="en-US" sz="1150" dirty="0"/>
+          </a:p>
+        </p:txBody>
+      </p:sp>
+      <p:sp>
+        <p:nvSpPr>
+          <p:cNvPr id="43" name="Shape 41"/>
+          <p:cNvSpPr/>
+          <p:nvPr/>
+        </p:nvSpPr>
+        <p:spPr>
+          <a:xfrm>
+            <a:off x="457200" y="4956048"/>
+            <a:ext cx="4315968" cy="585216"/>
           </a:xfrm>
           <a:prstGeom prst="roundRect">
             <a:avLst>
-              <a:gd name="adj" fmla="val 2809"/>
+              <a:gd name="adj" fmla="val 10938"/>
+            </a:avLst>
+          </a:prstGeom>
+          <a:solidFill>
+            <a:srgbClr val="FBEDEF"/>
+          </a:solidFill>
+          <a:ln w="12700">
+            <a:solidFill>
+              <a:srgbClr val="E7B9C1"/>
+            </a:solidFill>
+            <a:prstDash val="solid"/>
+          </a:ln>
+        </p:spPr>
+      </p:sp>
+      <p:sp>
+        <p:nvSpPr>
+          <p:cNvPr id="44" name="Text 42"/>
+          <p:cNvSpPr/>
+          <p:nvPr/>
+        </p:nvSpPr>
+        <p:spPr>
+          <a:xfrm>
+            <a:off x="621792" y="4956048"/>
+            <a:ext cx="4023360" cy="585216"/>
+          </a:xfrm>
+          <a:prstGeom prst="rect">
+            <a:avLst/>
+          </a:prstGeom>
+          <a:noFill/>
+          <a:ln/>
+        </p:spPr>
+        <p:txBody>
+          <a:bodyPr wrap="square" lIns="0" tIns="0" rIns="0" bIns="0" rtlCol="0" anchor="ctr"/>
+          <a:lstStyle/>
+          <a:p>
+            <a:pPr indent="0" marL="0">
+              <a:lnSpc>
+                <a:spcPts val="1400"/>
+              </a:lnSpc>
+              <a:buNone/>
+            </a:pPr>
+            <a:r>
+              <a:rPr lang="en-US" sz="1050" b="1" dirty="0">
+                <a:solidFill>
+                  <a:srgbClr val="8E0B20"/>
+                </a:solidFill>
+                <a:latin typeface="Calibri" pitchFamily="34" charset="0"/>
+                <a:ea typeface="Calibri" pitchFamily="34" charset="-122"/>
+                <a:cs typeface="Calibri" pitchFamily="34" charset="-120"/>
+              </a:rPr>
+              <a:t>EDRの盲点｜①〜③は検知できない（社外偵察・リレー到達・正規ログイン）</a:t>
+            </a:r>
+            <a:endParaRPr lang="en-US" sz="1050" dirty="0"/>
+          </a:p>
+        </p:txBody>
+      </p:sp>
+      <p:sp>
+        <p:nvSpPr>
+          <p:cNvPr id="45" name="Shape 43"/>
+          <p:cNvSpPr/>
+          <p:nvPr/>
+        </p:nvSpPr>
+        <p:spPr>
+          <a:xfrm>
+            <a:off x="4892040" y="4956048"/>
+            <a:ext cx="6858000" cy="585216"/>
+          </a:xfrm>
+          <a:prstGeom prst="roundRect">
+            <a:avLst>
+              <a:gd name="adj" fmla="val 10938"/>
+            </a:avLst>
+          </a:prstGeom>
+          <a:solidFill>
+            <a:srgbClr val="FBF2E6"/>
+          </a:solidFill>
+          <a:ln w="12700">
+            <a:solidFill>
+              <a:srgbClr val="E8CBA0"/>
+            </a:solidFill>
+            <a:prstDash val="solid"/>
+          </a:ln>
+        </p:spPr>
+      </p:sp>
+      <p:sp>
+        <p:nvSpPr>
+          <p:cNvPr id="46" name="Text 44"/>
+          <p:cNvSpPr/>
+          <p:nvPr/>
+        </p:nvSpPr>
+        <p:spPr>
+          <a:xfrm>
+            <a:off x="5056632" y="4956048"/>
+            <a:ext cx="6583680" cy="585216"/>
+          </a:xfrm>
+          <a:prstGeom prst="rect">
+            <a:avLst/>
+          </a:prstGeom>
+          <a:noFill/>
+          <a:ln/>
+        </p:spPr>
+        <p:txBody>
+          <a:bodyPr wrap="square" lIns="0" tIns="0" rIns="0" bIns="0" rtlCol="0" anchor="ctr"/>
+          <a:lstStyle/>
+          <a:p>
+            <a:pPr indent="0" marL="0">
+              <a:lnSpc>
+                <a:spcPts val="1400"/>
+              </a:lnSpc>
+              <a:buNone/>
+            </a:pPr>
+            <a:r>
+              <a:rPr lang="en-US" sz="1050" b="1" dirty="0">
+                <a:solidFill>
+                  <a:srgbClr val="9A5B12"/>
+                </a:solidFill>
+                <a:latin typeface="Calibri" pitchFamily="34" charset="0"/>
+                <a:ea typeface="Calibri" pitchFamily="34" charset="-122"/>
+                <a:cs typeface="Calibri" pitchFamily="34" charset="-120"/>
+              </a:rPr>
+              <a:t>④〜⑤で初めて検知の余地。ただし攻撃者にEDRを無効化されうる（S-1でも実例あり）</a:t>
+            </a:r>
+            <a:endParaRPr lang="en-US" sz="1050" dirty="0"/>
+          </a:p>
+        </p:txBody>
+      </p:sp>
+      <p:sp>
+        <p:nvSpPr>
+          <p:cNvPr id="47" name="Shape 45"/>
+          <p:cNvSpPr/>
+          <p:nvPr/>
+        </p:nvSpPr>
+        <p:spPr>
+          <a:xfrm>
+            <a:off x="457200" y="5669280"/>
+            <a:ext cx="11292840" cy="658368"/>
+          </a:xfrm>
+          <a:prstGeom prst="roundRect">
+            <a:avLst>
+              <a:gd name="adj" fmla="val 11111"/>
             </a:avLst>
           </a:prstGeom>
           <a:solidFill>
             <a:srgbClr val="0E1B3D"/>
           </a:solidFill>
           <a:ln/>
-          <a:effectLst>
-            <a:outerShdw sx="100000" sy="100000" kx="0" ky="0" algn="bl" rotWithShape="0" blurRad="101600" dist="38100" dir="5400000">
-              <a:srgbClr val="8A93A6">
-                <a:alpha val="28000"/>
-              </a:srgbClr>
-            </a:outerShdw>
-          </a:effectLst>
-        </p:spPr>
-      </p:sp>
-      <p:sp>
-        <p:nvSpPr>
-          <p:cNvPr id="20" name="Text 18"/>
-          <p:cNvSpPr/>
-          <p:nvPr/>
-        </p:nvSpPr>
-        <p:spPr>
-          <a:xfrm>
-            <a:off x="8595360" y="2286000"/>
-            <a:ext cx="2779776" cy="3200400"/>
-          </a:xfrm>
-          <a:prstGeom prst="rect">
-            <a:avLst/>
-          </a:prstGeom>
-          <a:noFill/>
-          <a:ln/>
-        </p:spPr>
-        <p:txBody>
-          <a:bodyPr wrap="square" lIns="0" tIns="0" rIns="0" bIns="0" rtlCol="0" anchor="t"/>
+        </p:spPr>
+      </p:sp>
+      <p:sp>
+        <p:nvSpPr>
+          <p:cNvPr id="48" name="Text 46"/>
+          <p:cNvSpPr/>
+          <p:nvPr/>
+        </p:nvSpPr>
+        <p:spPr>
+          <a:xfrm>
+            <a:off x="777240" y="5669280"/>
+            <a:ext cx="10698480" cy="658368"/>
+          </a:xfrm>
+          <a:prstGeom prst="rect">
+            <a:avLst/>
+          </a:prstGeom>
+          <a:noFill/>
+          <a:ln/>
+        </p:spPr>
+        <p:txBody>
+          <a:bodyPr wrap="square" lIns="0" tIns="0" rIns="0" bIns="0" rtlCol="0" anchor="ctr"/>
           <a:lstStyle/>
           <a:p>
             <a:pPr indent="0" marL="0">
               <a:lnSpc>
-                <a:spcPts val="2000"/>
+                <a:spcPts val="1800"/>
               </a:lnSpc>
-              <a:spcAft>
-                <a:spcPts val="1000"/>
-              </a:spcAft>
-              <a:buNone/>
-            </a:pPr>
-            <a:r>
-              <a:rPr lang="en-US" sz="1800" b="1" dirty="0">
+              <a:buNone/>
+            </a:pPr>
+            <a:r>
+              <a:rPr lang="en-US" sz="1300" b="1" dirty="0">
                 <a:solidFill>
                   <a:srgbClr val="FF6B81"/>
                 </a:solidFill>
@@ -3186,22 +4345,16 @@
                 <a:ea typeface="Calibri" pitchFamily="34" charset="-122"/>
                 <a:cs typeface="Calibri" pitchFamily="34" charset="-120"/>
               </a:rPr>
-              <a:t>S-1は層②。</a:t>
-            </a:r>
-            <a:endParaRPr lang="en-US" sz="1800" dirty="0"/>
-          </a:p>
-          <a:p>
+              <a:t>要点：  </a:t>
+            </a:r>
             <a:pPr indent="0" marL="0">
               <a:lnSpc>
-                <a:spcPts val="2000"/>
+                <a:spcPts val="1800"/>
               </a:lnSpc>
-              <a:spcAft>
-                <a:spcPts val="1400"/>
-              </a:spcAft>
-              <a:buNone/>
-            </a:pPr>
-            <a:r>
-              <a:rPr lang="en-US" sz="1400" dirty="0">
+              <a:buNone/>
+            </a:pPr>
+            <a:r>
+              <a:rPr lang="en-US" sz="1300" dirty="0">
                 <a:solidFill>
                   <a:srgbClr val="DCE6F5"/>
                 </a:solidFill>
@@ -3209,35 +4362,15 @@
                 <a:ea typeface="Calibri" pitchFamily="34" charset="-122"/>
                 <a:cs typeface="Calibri" pitchFamily="34" charset="-120"/>
               </a:rPr>
-              <a:t>層①（入口）が抜けたままでは、攻撃者は容易に侵入し、層②を無効化しにいく。</a:t>
-            </a:r>
-            <a:endParaRPr lang="en-US" sz="1800" dirty="0"/>
-          </a:p>
-          <a:p>
-            <a:pPr indent="0" marL="0">
-              <a:lnSpc>
-                <a:spcPts val="2000"/>
-              </a:lnSpc>
-              <a:buNone/>
-            </a:pPr>
-            <a:r>
-              <a:rPr lang="en-US" sz="1400" b="1" dirty="0">
-                <a:solidFill>
-                  <a:srgbClr val="FFFFFF"/>
-                </a:solidFill>
-                <a:latin typeface="Calibri" pitchFamily="34" charset="0"/>
-                <a:ea typeface="Calibri" pitchFamily="34" charset="-122"/>
-                <a:cs typeface="Calibri" pitchFamily="34" charset="-120"/>
-              </a:rPr>
-              <a:t>脆弱性検査は層②を置き換えるものではなく、層②が守る前提となる層①を成立させるもの。</a:t>
-            </a:r>
-            <a:endParaRPr lang="en-US" sz="1800" dirty="0"/>
-          </a:p>
-        </p:txBody>
-      </p:sp>
-      <p:sp>
-        <p:nvSpPr>
-          <p:cNvPr id="21" name="Text 19"/>
+              <a:t>F/Wの内側にあるVPNエッジが「入口」。①〜③はEDRの管轄外で、脆弱性検査・MFA・資産棚卸しでしか塞げない。</a:t>
+            </a:r>
+            <a:endParaRPr lang="en-US" sz="1300" dirty="0"/>
+          </a:p>
+        </p:txBody>
+      </p:sp>
+      <p:sp>
+        <p:nvSpPr>
+          <p:cNvPr id="49" name="Text 47"/>
           <p:cNvSpPr/>
           <p:nvPr/>
         </p:nvSpPr>
@@ -3339,7 +4472,7 @@
                 <a:ea typeface="Calibri" pitchFamily="34" charset="-122"/>
                 <a:cs typeface="Calibri" pitchFamily="34" charset="-120"/>
               </a:rPr>
-              <a:t>Aenaへの提言</a:t>
+              <a:t>あるべき考え方</a:t>
             </a:r>
             <a:endParaRPr lang="en-US" sz="1200" dirty="0"/>
           </a:p>
@@ -3378,7 +4511,7 @@
                 <a:ea typeface="Cambria" pitchFamily="34" charset="-122"/>
                 <a:cs typeface="Cambria" pitchFamily="34" charset="-120"/>
               </a:rPr>
-              <a:t>S-1に加えて今すぐ着手したい5項目</a:t>
+              <a:t>脆弱性検査とEDRは「補完関係」― 多層で守る</a:t>
             </a:r>
             <a:endParaRPr lang="en-US" sz="3200" dirty="0"/>
           </a:p>
@@ -3392,12 +4525,12 @@
         </p:nvSpPr>
         <p:spPr>
           <a:xfrm>
-            <a:off x="566928" y="1920240"/>
-            <a:ext cx="5344668" cy="1143000"/>
+            <a:off x="566928" y="2011680"/>
+            <a:ext cx="7498080" cy="1097280"/>
           </a:xfrm>
           <a:prstGeom prst="roundRect">
             <a:avLst>
-              <a:gd name="adj" fmla="val 6400"/>
+              <a:gd name="adj" fmla="val 6667"/>
             </a:avLst>
           </a:prstGeom>
           <a:solidFill>
@@ -3426,8 +4559,8 @@
         </p:nvSpPr>
         <p:spPr>
           <a:xfrm>
-            <a:off x="795528" y="2203704"/>
-            <a:ext cx="566928" cy="566928"/>
+            <a:off x="795528" y="2267712"/>
+            <a:ext cx="585216" cy="585216"/>
           </a:xfrm>
           <a:prstGeom prst="ellipse">
             <a:avLst/>
@@ -3446,8 +4579,8 @@
         </p:nvSpPr>
         <p:spPr>
           <a:xfrm>
-            <a:off x="795528" y="2203704"/>
-            <a:ext cx="566928" cy="566928"/>
+            <a:off x="795528" y="2267712"/>
+            <a:ext cx="585216" cy="585216"/>
           </a:xfrm>
           <a:prstGeom prst="rect">
             <a:avLst/>
@@ -3485,24 +4618,24 @@
         </p:nvSpPr>
         <p:spPr>
           <a:xfrm>
-            <a:off x="1527048" y="2066544"/>
-            <a:ext cx="4155948" cy="457200"/>
-          </a:xfrm>
-          <a:prstGeom prst="rect">
-            <a:avLst/>
-          </a:prstGeom>
-          <a:noFill/>
-          <a:ln/>
-        </p:spPr>
-        <p:txBody>
-          <a:bodyPr wrap="square" lIns="0" tIns="0" rIns="0" bIns="0" rtlCol="0" anchor="t"/>
+            <a:off x="1572768" y="2157984"/>
+            <a:ext cx="6400800" cy="457200"/>
+          </a:xfrm>
+          <a:prstGeom prst="rect">
+            <a:avLst/>
+          </a:prstGeom>
+          <a:noFill/>
+          <a:ln/>
+        </p:spPr>
+        <p:txBody>
+          <a:bodyPr wrap="square" lIns="0" tIns="0" rIns="0" bIns="0" rtlCol="0" anchor="ctr"/>
           <a:lstStyle/>
           <a:p>
             <a:pPr indent="0" marL="0">
               <a:buNone/>
             </a:pPr>
             <a:r>
-              <a:rPr lang="en-US" sz="1550" b="1" dirty="0">
+              <a:rPr lang="en-US" sz="1700" b="1" dirty="0">
                 <a:solidFill>
                   <a:srgbClr val="0E1B3D"/>
                 </a:solidFill>
@@ -3510,9 +4643,23 @@
                 <a:ea typeface="Cambria" pitchFamily="34" charset="-122"/>
                 <a:cs typeface="Cambria" pitchFamily="34" charset="-120"/>
               </a:rPr>
-              <a:t>外部公開資産の脆弱性検査を定期実施</a:t>
-            </a:r>
-            <a:endParaRPr lang="en-US" sz="1550" dirty="0"/>
+              <a:t>入口を塞ぐ   </a:t>
+            </a:r>
+            <a:pPr indent="0" marL="0">
+              <a:buNone/>
+            </a:pPr>
+            <a:r>
+              <a:rPr lang="en-US" sz="1300" b="1" dirty="0">
+                <a:solidFill>
+                  <a:srgbClr val="C8102E"/>
+                </a:solidFill>
+                <a:latin typeface="Cambria" pitchFamily="34" charset="0"/>
+                <a:ea typeface="Cambria" pitchFamily="34" charset="-122"/>
+                <a:cs typeface="Cambria" pitchFamily="34" charset="-120"/>
+              </a:rPr>
+              <a:t>脆弱性検査・パッチ・認証強化(MFA)</a:t>
+            </a:r>
+            <a:endParaRPr lang="en-US" sz="1700" dirty="0"/>
           </a:p>
         </p:txBody>
       </p:sp>
@@ -3524,8 +4671,8 @@
         </p:nvSpPr>
         <p:spPr>
           <a:xfrm>
-            <a:off x="1527048" y="2487168"/>
-            <a:ext cx="4155948" cy="502920"/>
+            <a:off x="1572768" y="2578608"/>
+            <a:ext cx="6400800" cy="457200"/>
           </a:xfrm>
           <a:prstGeom prst="rect">
             <a:avLst/>
@@ -3538,9 +4685,6 @@
           <a:lstStyle/>
           <a:p>
             <a:pPr indent="0" marL="0">
-              <a:lnSpc>
-                <a:spcPts val="1600"/>
-              </a:lnSpc>
               <a:buNone/>
             </a:pPr>
             <a:r>
@@ -3552,7 +4696,7 @@
                 <a:ea typeface="Calibri" pitchFamily="34" charset="-122"/>
                 <a:cs typeface="Calibri" pitchFamily="34" charset="-120"/>
               </a:rPr>
-              <a:t>VPN・公開サーバ・Webを対象に、悪用可能な入口を洗い出す</a:t>
+              <a:t>侵入・乗っ取りの起点を事前に潰す</a:t>
             </a:r>
             <a:endParaRPr lang="en-US" sz="1250" dirty="0"/>
           </a:p>
@@ -3566,12 +4710,12 @@
         </p:nvSpPr>
         <p:spPr>
           <a:xfrm>
-            <a:off x="6277356" y="1920240"/>
-            <a:ext cx="5344668" cy="1143000"/>
+            <a:off x="566928" y="3310128"/>
+            <a:ext cx="7498080" cy="1097280"/>
           </a:xfrm>
           <a:prstGeom prst="roundRect">
             <a:avLst>
-              <a:gd name="adj" fmla="val 6400"/>
+              <a:gd name="adj" fmla="val 6667"/>
             </a:avLst>
           </a:prstGeom>
           <a:solidFill>
@@ -3600,14 +4744,14 @@
         </p:nvSpPr>
         <p:spPr>
           <a:xfrm>
-            <a:off x="6505956" y="2203704"/>
-            <a:ext cx="566928" cy="566928"/>
+            <a:off x="795528" y="3566160"/>
+            <a:ext cx="585216" cy="585216"/>
           </a:xfrm>
           <a:prstGeom prst="ellipse">
             <a:avLst/>
           </a:prstGeom>
           <a:solidFill>
-            <a:srgbClr val="C8102E"/>
+            <a:srgbClr val="3E5C76"/>
           </a:solidFill>
           <a:ln/>
         </p:spPr>
@@ -3620,8 +4764,8 @@
         </p:nvSpPr>
         <p:spPr>
           <a:xfrm>
-            <a:off x="6505956" y="2203704"/>
-            <a:ext cx="566928" cy="566928"/>
+            <a:off x="795528" y="3566160"/>
+            <a:ext cx="585216" cy="585216"/>
           </a:xfrm>
           <a:prstGeom prst="rect">
             <a:avLst/>
@@ -3659,24 +4803,24 @@
         </p:nvSpPr>
         <p:spPr>
           <a:xfrm>
-            <a:off x="7237476" y="2066544"/>
-            <a:ext cx="4155948" cy="457200"/>
-          </a:xfrm>
-          <a:prstGeom prst="rect">
-            <a:avLst/>
-          </a:prstGeom>
-          <a:noFill/>
-          <a:ln/>
-        </p:spPr>
-        <p:txBody>
-          <a:bodyPr wrap="square" lIns="0" tIns="0" rIns="0" bIns="0" rtlCol="0" anchor="t"/>
+            <a:off x="1572768" y="3456432"/>
+            <a:ext cx="6400800" cy="457200"/>
+          </a:xfrm>
+          <a:prstGeom prst="rect">
+            <a:avLst/>
+          </a:prstGeom>
+          <a:noFill/>
+          <a:ln/>
+        </p:spPr>
+        <p:txBody>
+          <a:bodyPr wrap="square" lIns="0" tIns="0" rIns="0" bIns="0" rtlCol="0" anchor="ctr"/>
           <a:lstStyle/>
           <a:p>
             <a:pPr indent="0" marL="0">
               <a:buNone/>
             </a:pPr>
             <a:r>
-              <a:rPr lang="en-US" sz="1550" b="1" dirty="0">
+              <a:rPr lang="en-US" sz="1700" b="1" dirty="0">
                 <a:solidFill>
                   <a:srgbClr val="0E1B3D"/>
                 </a:solidFill>
@@ -3684,9 +4828,23 @@
                 <a:ea typeface="Cambria" pitchFamily="34" charset="-122"/>
                 <a:cs typeface="Cambria" pitchFamily="34" charset="-120"/>
               </a:rPr>
-              <a:t>パッチ運用の徹底と棚卸し</a:t>
-            </a:r>
-            <a:endParaRPr lang="en-US" sz="1550" dirty="0"/>
+              <a:t>内側で検知   </a:t>
+            </a:r>
+            <a:pPr indent="0" marL="0">
+              <a:buNone/>
+            </a:pPr>
+            <a:r>
+              <a:rPr lang="en-US" sz="1300" b="1" dirty="0">
+                <a:solidFill>
+                  <a:srgbClr val="3E5C76"/>
+                </a:solidFill>
+                <a:latin typeface="Cambria" pitchFamily="34" charset="0"/>
+                <a:ea typeface="Cambria" pitchFamily="34" charset="-122"/>
+                <a:cs typeface="Cambria" pitchFamily="34" charset="-120"/>
+              </a:rPr>
+              <a:t>EDR(SentinelOne)</a:t>
+            </a:r>
+            <a:endParaRPr lang="en-US" sz="1700" dirty="0"/>
           </a:p>
         </p:txBody>
       </p:sp>
@@ -3698,8 +4856,8 @@
         </p:nvSpPr>
         <p:spPr>
           <a:xfrm>
-            <a:off x="7237476" y="2487168"/>
-            <a:ext cx="4155948" cy="502920"/>
+            <a:off x="1572768" y="3877056"/>
+            <a:ext cx="6400800" cy="457200"/>
           </a:xfrm>
           <a:prstGeom prst="rect">
             <a:avLst/>
@@ -3712,9 +4870,6 @@
           <a:lstStyle/>
           <a:p>
             <a:pPr indent="0" marL="0">
-              <a:lnSpc>
-                <a:spcPts val="1600"/>
-              </a:lnSpc>
               <a:buNone/>
             </a:pPr>
             <a:r>
@@ -3726,7 +4881,7 @@
                 <a:ea typeface="Calibri" pitchFamily="34" charset="-122"/>
                 <a:cs typeface="Calibri" pitchFamily="34" charset="-120"/>
               </a:rPr>
-              <a:t>侵入元の約半数は未パッチ。適用状況を継続的に可視化</a:t>
+              <a:t>侵入されても被害拡大を検知・抑制</a:t>
             </a:r>
             <a:endParaRPr lang="en-US" sz="1250" dirty="0"/>
           </a:p>
@@ -3740,12 +4895,12 @@
         </p:nvSpPr>
         <p:spPr>
           <a:xfrm>
-            <a:off x="566928" y="3246120"/>
-            <a:ext cx="5344668" cy="1143000"/>
+            <a:off x="566928" y="4608576"/>
+            <a:ext cx="7498080" cy="1097280"/>
           </a:xfrm>
           <a:prstGeom prst="roundRect">
             <a:avLst>
-              <a:gd name="adj" fmla="val 6400"/>
+              <a:gd name="adj" fmla="val 6667"/>
             </a:avLst>
           </a:prstGeom>
           <a:solidFill>
@@ -3774,14 +4929,14 @@
         </p:nvSpPr>
         <p:spPr>
           <a:xfrm>
-            <a:off x="795528" y="3529584"/>
-            <a:ext cx="566928" cy="566928"/>
+            <a:off x="795528" y="4864608"/>
+            <a:ext cx="585216" cy="585216"/>
           </a:xfrm>
           <a:prstGeom prst="ellipse">
             <a:avLst/>
           </a:prstGeom>
           <a:solidFill>
-            <a:srgbClr val="C8102E"/>
+            <a:srgbClr val="1E7A46"/>
           </a:solidFill>
           <a:ln/>
         </p:spPr>
@@ -3794,8 +4949,8 @@
         </p:nvSpPr>
         <p:spPr>
           <a:xfrm>
-            <a:off x="795528" y="3529584"/>
-            <a:ext cx="566928" cy="566928"/>
+            <a:off x="795528" y="4864608"/>
+            <a:ext cx="585216" cy="585216"/>
           </a:xfrm>
           <a:prstGeom prst="rect">
             <a:avLst/>
@@ -3833,24 +4988,24 @@
         </p:nvSpPr>
         <p:spPr>
           <a:xfrm>
-            <a:off x="1527048" y="3392424"/>
-            <a:ext cx="4155948" cy="457200"/>
-          </a:xfrm>
-          <a:prstGeom prst="rect">
-            <a:avLst/>
-          </a:prstGeom>
-          <a:noFill/>
-          <a:ln/>
-        </p:spPr>
-        <p:txBody>
-          <a:bodyPr wrap="square" lIns="0" tIns="0" rIns="0" bIns="0" rtlCol="0" anchor="t"/>
+            <a:off x="1572768" y="4754880"/>
+            <a:ext cx="6400800" cy="457200"/>
+          </a:xfrm>
+          <a:prstGeom prst="rect">
+            <a:avLst/>
+          </a:prstGeom>
+          <a:noFill/>
+          <a:ln/>
+        </p:spPr>
+        <p:txBody>
+          <a:bodyPr wrap="square" lIns="0" tIns="0" rIns="0" bIns="0" rtlCol="0" anchor="ctr"/>
           <a:lstStyle/>
           <a:p>
             <a:pPr indent="0" marL="0">
               <a:buNone/>
             </a:pPr>
             <a:r>
-              <a:rPr lang="en-US" sz="1550" b="1" dirty="0">
+              <a:rPr lang="en-US" sz="1700" b="1" dirty="0">
                 <a:solidFill>
                   <a:srgbClr val="0E1B3D"/>
                 </a:solidFill>
@@ -3858,9 +5013,23 @@
                 <a:ea typeface="Cambria" pitchFamily="34" charset="-122"/>
                 <a:cs typeface="Cambria" pitchFamily="34" charset="-120"/>
               </a:rPr>
-              <a:t>認証の強化（MFA・特権管理）</a:t>
-            </a:r>
-            <a:endParaRPr lang="en-US" sz="1550" dirty="0"/>
+              <a:t>備えと復旧   </a:t>
+            </a:r>
+            <a:pPr indent="0" marL="0">
+              <a:buNone/>
+            </a:pPr>
+            <a:r>
+              <a:rPr lang="en-US" sz="1300" b="1" dirty="0">
+                <a:solidFill>
+                  <a:srgbClr val="1E7A46"/>
+                </a:solidFill>
+                <a:latin typeface="Cambria" pitchFamily="34" charset="0"/>
+                <a:ea typeface="Cambria" pitchFamily="34" charset="-122"/>
+                <a:cs typeface="Cambria" pitchFamily="34" charset="-120"/>
+              </a:rPr>
+              <a:t>バックアップ・監視・訓練</a:t>
+            </a:r>
+            <a:endParaRPr lang="en-US" sz="1700" dirty="0"/>
           </a:p>
         </p:txBody>
       </p:sp>
@@ -3872,8 +5041,76 @@
         </p:nvSpPr>
         <p:spPr>
           <a:xfrm>
-            <a:off x="1527048" y="3813048"/>
-            <a:ext cx="4155948" cy="502920"/>
+            <a:off x="1572768" y="5175504"/>
+            <a:ext cx="6400800" cy="457200"/>
+          </a:xfrm>
+          <a:prstGeom prst="rect">
+            <a:avLst/>
+          </a:prstGeom>
+          <a:noFill/>
+          <a:ln/>
+        </p:spPr>
+        <p:txBody>
+          <a:bodyPr wrap="square" lIns="0" tIns="0" rIns="0" bIns="0" rtlCol="0" anchor="t"/>
+          <a:lstStyle/>
+          <a:p>
+            <a:pPr indent="0" marL="0">
+              <a:buNone/>
+            </a:pPr>
+            <a:r>
+              <a:rPr lang="en-US" sz="1250" dirty="0">
+                <a:solidFill>
+                  <a:srgbClr val="1A2332"/>
+                </a:solidFill>
+                <a:latin typeface="Calibri" pitchFamily="34" charset="0"/>
+                <a:ea typeface="Calibri" pitchFamily="34" charset="-122"/>
+                <a:cs typeface="Calibri" pitchFamily="34" charset="-120"/>
+              </a:rPr>
+              <a:t>最悪時に事業を止めない</a:t>
+            </a:r>
+            <a:endParaRPr lang="en-US" sz="1250" dirty="0"/>
+          </a:p>
+        </p:txBody>
+      </p:sp>
+      <p:sp>
+        <p:nvSpPr>
+          <p:cNvPr id="19" name="Shape 17"/>
+          <p:cNvSpPr/>
+          <p:nvPr/>
+        </p:nvSpPr>
+        <p:spPr>
+          <a:xfrm>
+            <a:off x="8366760" y="2011680"/>
+            <a:ext cx="3255264" cy="3712464"/>
+          </a:xfrm>
+          <a:prstGeom prst="roundRect">
+            <a:avLst>
+              <a:gd name="adj" fmla="val 2809"/>
+            </a:avLst>
+          </a:prstGeom>
+          <a:solidFill>
+            <a:srgbClr val="0E1B3D"/>
+          </a:solidFill>
+          <a:ln/>
+          <a:effectLst>
+            <a:outerShdw sx="100000" sy="100000" kx="0" ky="0" algn="bl" rotWithShape="0" blurRad="101600" dist="38100" dir="5400000">
+              <a:srgbClr val="8A93A6">
+                <a:alpha val="28000"/>
+              </a:srgbClr>
+            </a:outerShdw>
+          </a:effectLst>
+        </p:spPr>
+      </p:sp>
+      <p:sp>
+        <p:nvSpPr>
+          <p:cNvPr id="20" name="Text 18"/>
+          <p:cNvSpPr/>
+          <p:nvPr/>
+        </p:nvSpPr>
+        <p:spPr>
+          <a:xfrm>
+            <a:off x="8595360" y="2286000"/>
+            <a:ext cx="2779776" cy="3200400"/>
           </a:xfrm>
           <a:prstGeom prst="rect">
             <a:avLst/>
@@ -3887,34 +5124,229 @@
           <a:p>
             <a:pPr indent="0" marL="0">
               <a:lnSpc>
-                <a:spcPts val="1600"/>
+                <a:spcPts val="2000"/>
               </a:lnSpc>
-              <a:buNone/>
-            </a:pPr>
-            <a:r>
-              <a:rPr lang="en-US" sz="1250" dirty="0">
-                <a:solidFill>
-                  <a:srgbClr val="1A2332"/>
-                </a:solidFill>
-                <a:latin typeface="Calibri" pitchFamily="34" charset="0"/>
-                <a:ea typeface="Calibri" pitchFamily="34" charset="-122"/>
-                <a:cs typeface="Calibri" pitchFamily="34" charset="-120"/>
-              </a:rPr>
-              <a:t>盗まれた正規アカウントでの侵入を防ぐ。ADの保護を優先</a:t>
-            </a:r>
-            <a:endParaRPr lang="en-US" sz="1250" dirty="0"/>
-          </a:p>
-        </p:txBody>
-      </p:sp>
-      <p:sp>
-        <p:nvSpPr>
-          <p:cNvPr id="19" name="Shape 17"/>
-          <p:cNvSpPr/>
-          <p:nvPr/>
-        </p:nvSpPr>
-        <p:spPr>
-          <a:xfrm>
-            <a:off x="6277356" y="3246120"/>
+              <a:spcAft>
+                <a:spcPts val="1000"/>
+              </a:spcAft>
+              <a:buNone/>
+            </a:pPr>
+            <a:r>
+              <a:rPr lang="en-US" sz="1800" b="1" dirty="0">
+                <a:solidFill>
+                  <a:srgbClr val="FF6B81"/>
+                </a:solidFill>
+                <a:latin typeface="Calibri" pitchFamily="34" charset="0"/>
+                <a:ea typeface="Calibri" pitchFamily="34" charset="-122"/>
+                <a:cs typeface="Calibri" pitchFamily="34" charset="-120"/>
+              </a:rPr>
+              <a:t>S-1は層②。</a:t>
+            </a:r>
+            <a:endParaRPr lang="en-US" sz="1800" dirty="0"/>
+          </a:p>
+          <a:p>
+            <a:pPr indent="0" marL="0">
+              <a:lnSpc>
+                <a:spcPts val="2000"/>
+              </a:lnSpc>
+              <a:spcAft>
+                <a:spcPts val="1400"/>
+              </a:spcAft>
+              <a:buNone/>
+            </a:pPr>
+            <a:r>
+              <a:rPr lang="en-US" sz="1400" dirty="0">
+                <a:solidFill>
+                  <a:srgbClr val="DCE6F5"/>
+                </a:solidFill>
+                <a:latin typeface="Calibri" pitchFamily="34" charset="0"/>
+                <a:ea typeface="Calibri" pitchFamily="34" charset="-122"/>
+                <a:cs typeface="Calibri" pitchFamily="34" charset="-120"/>
+              </a:rPr>
+              <a:t>層①（入口）が抜けたままでは、攻撃者は容易に侵入し、層②を無効化しにいく。</a:t>
+            </a:r>
+            <a:endParaRPr lang="en-US" sz="1800" dirty="0"/>
+          </a:p>
+          <a:p>
+            <a:pPr indent="0" marL="0">
+              <a:lnSpc>
+                <a:spcPts val="2000"/>
+              </a:lnSpc>
+              <a:buNone/>
+            </a:pPr>
+            <a:r>
+              <a:rPr lang="en-US" sz="1400" b="1" dirty="0">
+                <a:solidFill>
+                  <a:srgbClr val="FFFFFF"/>
+                </a:solidFill>
+                <a:latin typeface="Calibri" pitchFamily="34" charset="0"/>
+                <a:ea typeface="Calibri" pitchFamily="34" charset="-122"/>
+                <a:cs typeface="Calibri" pitchFamily="34" charset="-120"/>
+              </a:rPr>
+              <a:t>脆弱性検査は層②を置き換えるものではなく、層②が守る前提となる層①を成立させるもの。</a:t>
+            </a:r>
+            <a:endParaRPr lang="en-US" sz="1800" dirty="0"/>
+          </a:p>
+        </p:txBody>
+      </p:sp>
+      <p:sp>
+        <p:nvSpPr>
+          <p:cNvPr id="21" name="Text 19"/>
+          <p:cNvSpPr/>
+          <p:nvPr/>
+        </p:nvSpPr>
+        <p:spPr>
+          <a:xfrm>
+            <a:off x="11411712" y="6400800"/>
+            <a:ext cx="457200" cy="274320"/>
+          </a:xfrm>
+          <a:prstGeom prst="rect">
+            <a:avLst/>
+          </a:prstGeom>
+          <a:noFill/>
+          <a:ln/>
+        </p:spPr>
+        <p:txBody>
+          <a:bodyPr wrap="square" lIns="0" tIns="0" rIns="0" bIns="0" rtlCol="0" anchor="ctr"/>
+          <a:lstStyle/>
+          <a:p>
+            <a:pPr algn="r" indent="0" marL="0">
+              <a:buNone/>
+            </a:pPr>
+            <a:r>
+              <a:rPr lang="en-US" sz="1000" dirty="0">
+                <a:solidFill>
+                  <a:srgbClr val="68738A"/>
+                </a:solidFill>
+                <a:latin typeface="Calibri" pitchFamily="34" charset="0"/>
+                <a:ea typeface="Calibri" pitchFamily="34" charset="-122"/>
+                <a:cs typeface="Calibri" pitchFamily="34" charset="-120"/>
+              </a:rPr>
+              <a:t>11</a:t>
+            </a:r>
+            <a:endParaRPr lang="en-US" sz="1000" dirty="0"/>
+          </a:p>
+        </p:txBody>
+      </p:sp>
+    </p:spTree>
+  </p:cSld>
+  <p:clrMapOvr>
+    <a:masterClrMapping/>
+  </p:clrMapOvr>
+</p:sld>
+</file>
+
+<file path=ppt/slides/slide12.xml><?xml version="1.0" encoding="utf-8"?>
+<p:sld xmlns:a="http://schemas.openxmlformats.org/drawingml/2006/main" xmlns:r="http://schemas.openxmlformats.org/officeDocument/2006/relationships" xmlns:p="http://schemas.openxmlformats.org/presentationml/2006/main">
+  <p:cSld name="Slide 12">
+    <p:bg>
+      <p:bgPr>
+        <a:solidFill>
+          <a:srgbClr val="FFFFFF"/>
+        </a:solidFill>
+      </p:bgPr>
+    </p:bg>
+    <p:spTree>
+      <p:nvGrpSpPr>
+        <p:cNvPr id="1" name=""/>
+        <p:cNvGrpSpPr/>
+        <p:nvPr/>
+      </p:nvGrpSpPr>
+      <p:grpSpPr>
+        <a:xfrm>
+          <a:off x="0" y="0"/>
+          <a:ext cx="0" cy="0"/>
+          <a:chOff x="0" y="0"/>
+          <a:chExt cx="0" cy="0"/>
+        </a:xfrm>
+      </p:grpSpPr>
+      <p:sp>
+        <p:nvSpPr>
+          <p:cNvPr id="2" name="Text 0"/>
+          <p:cNvSpPr/>
+          <p:nvPr/>
+        </p:nvSpPr>
+        <p:spPr>
+          <a:xfrm>
+            <a:off x="566928" y="384048"/>
+            <a:ext cx="8229600" cy="274320"/>
+          </a:xfrm>
+          <a:prstGeom prst="rect">
+            <a:avLst/>
+          </a:prstGeom>
+          <a:noFill/>
+          <a:ln/>
+        </p:spPr>
+        <p:txBody>
+          <a:bodyPr wrap="square" lIns="0" tIns="0" rIns="0" bIns="0" rtlCol="0" anchor="ctr"/>
+          <a:lstStyle/>
+          <a:p>
+            <a:pPr algn="l" indent="0" marL="0">
+              <a:buNone/>
+            </a:pPr>
+            <a:r>
+              <a:rPr lang="en-US" sz="1200" b="1" spc="300" kern="0" dirty="0">
+                <a:solidFill>
+                  <a:srgbClr val="C8102E"/>
+                </a:solidFill>
+                <a:latin typeface="Calibri" pitchFamily="34" charset="0"/>
+                <a:ea typeface="Calibri" pitchFamily="34" charset="-122"/>
+                <a:cs typeface="Calibri" pitchFamily="34" charset="-120"/>
+              </a:rPr>
+              <a:t>Aenaへの提言</a:t>
+            </a:r>
+            <a:endParaRPr lang="en-US" sz="1200" dirty="0"/>
+          </a:p>
+        </p:txBody>
+      </p:sp>
+      <p:sp>
+        <p:nvSpPr>
+          <p:cNvPr id="3" name="Text 1"/>
+          <p:cNvSpPr/>
+          <p:nvPr/>
+        </p:nvSpPr>
+        <p:spPr>
+          <a:xfrm>
+            <a:off x="566928" y="658368"/>
+            <a:ext cx="11055096" cy="868680"/>
+          </a:xfrm>
+          <a:prstGeom prst="rect">
+            <a:avLst/>
+          </a:prstGeom>
+          <a:noFill/>
+          <a:ln/>
+        </p:spPr>
+        <p:txBody>
+          <a:bodyPr wrap="square" lIns="0" tIns="0" rIns="0" bIns="0" rtlCol="0" anchor="t"/>
+          <a:lstStyle/>
+          <a:p>
+            <a:pPr algn="l" indent="0" marL="0">
+              <a:buNone/>
+            </a:pPr>
+            <a:r>
+              <a:rPr lang="en-US" sz="3200" b="1" dirty="0">
+                <a:solidFill>
+                  <a:srgbClr val="0E1B3D"/>
+                </a:solidFill>
+                <a:latin typeface="Cambria" pitchFamily="34" charset="0"/>
+                <a:ea typeface="Cambria" pitchFamily="34" charset="-122"/>
+                <a:cs typeface="Cambria" pitchFamily="34" charset="-120"/>
+              </a:rPr>
+              <a:t>S-1に加えて今すぐ着手したい5項目</a:t>
+            </a:r>
+            <a:endParaRPr lang="en-US" sz="3200" dirty="0"/>
+          </a:p>
+        </p:txBody>
+      </p:sp>
+      <p:sp>
+        <p:nvSpPr>
+          <p:cNvPr id="4" name="Shape 2"/>
+          <p:cNvSpPr/>
+          <p:nvPr/>
+        </p:nvSpPr>
+        <p:spPr>
+          <a:xfrm>
+            <a:off x="566928" y="1920240"/>
             <a:ext cx="5344668" cy="1143000"/>
           </a:xfrm>
           <a:prstGeom prst="roundRect">
@@ -3942,13 +5374,13 @@
       </p:sp>
       <p:sp>
         <p:nvSpPr>
-          <p:cNvPr id="20" name="Shape 18"/>
-          <p:cNvSpPr/>
-          <p:nvPr/>
-        </p:nvSpPr>
-        <p:spPr>
-          <a:xfrm>
-            <a:off x="6505956" y="3529584"/>
+          <p:cNvPr id="5" name="Shape 3"/>
+          <p:cNvSpPr/>
+          <p:nvPr/>
+        </p:nvSpPr>
+        <p:spPr>
+          <a:xfrm>
+            <a:off x="795528" y="2203704"/>
             <a:ext cx="566928" cy="566928"/>
           </a:xfrm>
           <a:prstGeom prst="ellipse">
@@ -3962,13 +5394,13 @@
       </p:sp>
       <p:sp>
         <p:nvSpPr>
-          <p:cNvPr id="21" name="Text 19"/>
-          <p:cNvSpPr/>
-          <p:nvPr/>
-        </p:nvSpPr>
-        <p:spPr>
-          <a:xfrm>
-            <a:off x="6505956" y="3529584"/>
+          <p:cNvPr id="6" name="Text 4"/>
+          <p:cNvSpPr/>
+          <p:nvPr/>
+        </p:nvSpPr>
+        <p:spPr>
+          <a:xfrm>
+            <a:off x="795528" y="2203704"/>
             <a:ext cx="566928" cy="566928"/>
           </a:xfrm>
           <a:prstGeom prst="rect">
@@ -3993,7 +5425,7 @@
                 <a:ea typeface="Cambria" pitchFamily="34" charset="-122"/>
                 <a:cs typeface="Cambria" pitchFamily="34" charset="-120"/>
               </a:rPr>
-              <a:t>4</a:t>
+              <a:t>1</a:t>
             </a:r>
             <a:endParaRPr lang="en-US" sz="2200" dirty="0"/>
           </a:p>
@@ -4001,13 +5433,13 @@
       </p:sp>
       <p:sp>
         <p:nvSpPr>
-          <p:cNvPr id="22" name="Text 20"/>
-          <p:cNvSpPr/>
-          <p:nvPr/>
-        </p:nvSpPr>
-        <p:spPr>
-          <a:xfrm>
-            <a:off x="7237476" y="3392424"/>
+          <p:cNvPr id="7" name="Text 5"/>
+          <p:cNvSpPr/>
+          <p:nvPr/>
+        </p:nvSpPr>
+        <p:spPr>
+          <a:xfrm>
+            <a:off x="1527048" y="2066544"/>
             <a:ext cx="4155948" cy="457200"/>
           </a:xfrm>
           <a:prstGeom prst="rect">
@@ -4032,7 +5464,7 @@
                 <a:ea typeface="Cambria" pitchFamily="34" charset="-122"/>
                 <a:cs typeface="Cambria" pitchFamily="34" charset="-120"/>
               </a:rPr>
-              <a:t>SentinelOneの堅牢化設定</a:t>
+              <a:t>外部公開資産の脆弱性検査を定期実施</a:t>
             </a:r>
             <a:endParaRPr lang="en-US" sz="1550" dirty="0"/>
           </a:p>
@@ -4040,13 +5472,13 @@
       </p:sp>
       <p:sp>
         <p:nvSpPr>
-          <p:cNvPr id="23" name="Text 21"/>
-          <p:cNvSpPr/>
-          <p:nvPr/>
-        </p:nvSpPr>
-        <p:spPr>
-          <a:xfrm>
-            <a:off x="7237476" y="3813048"/>
+          <p:cNvPr id="8" name="Text 6"/>
+          <p:cNvSpPr/>
+          <p:nvPr/>
+        </p:nvSpPr>
+        <p:spPr>
+          <a:xfrm>
+            <a:off x="1527048" y="2487168"/>
             <a:ext cx="4155948" cy="502920"/>
           </a:xfrm>
           <a:prstGeom prst="rect">
@@ -4074,7 +5506,7 @@
                 <a:ea typeface="Calibri" pitchFamily="34" charset="-122"/>
                 <a:cs typeface="Calibri" pitchFamily="34" charset="-120"/>
               </a:rPr>
-              <a:t>Online Authorization等で無効化・改ざん回避を難しくする</a:t>
+              <a:t>VPN・公開サーバ・Webを対象に、悪用可能な入口を洗い出す</a:t>
             </a:r>
             <a:endParaRPr lang="en-US" sz="1250" dirty="0"/>
           </a:p>
@@ -4082,14 +5514,14 @@
       </p:sp>
       <p:sp>
         <p:nvSpPr>
-          <p:cNvPr id="24" name="Shape 22"/>
-          <p:cNvSpPr/>
-          <p:nvPr/>
-        </p:nvSpPr>
-        <p:spPr>
-          <a:xfrm>
-            <a:off x="566928" y="4572000"/>
-            <a:ext cx="11055096" cy="1143000"/>
+          <p:cNvPr id="9" name="Shape 7"/>
+          <p:cNvSpPr/>
+          <p:nvPr/>
+        </p:nvSpPr>
+        <p:spPr>
+          <a:xfrm>
+            <a:off x="6277356" y="1920240"/>
+            <a:ext cx="5344668" cy="1143000"/>
           </a:xfrm>
           <a:prstGeom prst="roundRect">
             <a:avLst>
@@ -4116,13 +5548,13 @@
       </p:sp>
       <p:sp>
         <p:nvSpPr>
-          <p:cNvPr id="25" name="Shape 23"/>
-          <p:cNvSpPr/>
-          <p:nvPr/>
-        </p:nvSpPr>
-        <p:spPr>
-          <a:xfrm>
-            <a:off x="795528" y="4855464"/>
+          <p:cNvPr id="10" name="Shape 8"/>
+          <p:cNvSpPr/>
+          <p:nvPr/>
+        </p:nvSpPr>
+        <p:spPr>
+          <a:xfrm>
+            <a:off x="6505956" y="2203704"/>
             <a:ext cx="566928" cy="566928"/>
           </a:xfrm>
           <a:prstGeom prst="ellipse">
@@ -4136,13 +5568,13 @@
       </p:sp>
       <p:sp>
         <p:nvSpPr>
-          <p:cNvPr id="26" name="Text 24"/>
-          <p:cNvSpPr/>
-          <p:nvPr/>
-        </p:nvSpPr>
-        <p:spPr>
-          <a:xfrm>
-            <a:off x="795528" y="4855464"/>
+          <p:cNvPr id="11" name="Text 9"/>
+          <p:cNvSpPr/>
+          <p:nvPr/>
+        </p:nvSpPr>
+        <p:spPr>
+          <a:xfrm>
+            <a:off x="6505956" y="2203704"/>
             <a:ext cx="566928" cy="566928"/>
           </a:xfrm>
           <a:prstGeom prst="rect">
@@ -4167,7 +5599,7 @@
                 <a:ea typeface="Cambria" pitchFamily="34" charset="-122"/>
                 <a:cs typeface="Cambria" pitchFamily="34" charset="-120"/>
               </a:rPr>
-              <a:t>5</a:t>
+              <a:t>2</a:t>
             </a:r>
             <a:endParaRPr lang="en-US" sz="2200" dirty="0"/>
           </a:p>
@@ -4175,14 +5607,14 @@
       </p:sp>
       <p:sp>
         <p:nvSpPr>
-          <p:cNvPr id="27" name="Text 25"/>
-          <p:cNvSpPr/>
-          <p:nvPr/>
-        </p:nvSpPr>
-        <p:spPr>
-          <a:xfrm>
-            <a:off x="1527048" y="4718304"/>
-            <a:ext cx="9866376" cy="457200"/>
+          <p:cNvPr id="12" name="Text 10"/>
+          <p:cNvSpPr/>
+          <p:nvPr/>
+        </p:nvSpPr>
+        <p:spPr>
+          <a:xfrm>
+            <a:off x="7237476" y="2066544"/>
+            <a:ext cx="4155948" cy="457200"/>
           </a:xfrm>
           <a:prstGeom prst="rect">
             <a:avLst/>
@@ -4206,7 +5638,7 @@
                 <a:ea typeface="Cambria" pitchFamily="34" charset="-122"/>
                 <a:cs typeface="Cambria" pitchFamily="34" charset="-120"/>
               </a:rPr>
-              <a:t>バックアップと復旧訓練</a:t>
+              <a:t>パッチ運用の徹底と棚卸し</a:t>
             </a:r>
             <a:endParaRPr lang="en-US" sz="1550" dirty="0"/>
           </a:p>
@@ -4214,14 +5646,14 @@
       </p:sp>
       <p:sp>
         <p:nvSpPr>
-          <p:cNvPr id="28" name="Text 26"/>
-          <p:cNvSpPr/>
-          <p:nvPr/>
-        </p:nvSpPr>
-        <p:spPr>
-          <a:xfrm>
-            <a:off x="1527048" y="5138928"/>
-            <a:ext cx="9866376" cy="502920"/>
+          <p:cNvPr id="13" name="Text 11"/>
+          <p:cNvSpPr/>
+          <p:nvPr/>
+        </p:nvSpPr>
+        <p:spPr>
+          <a:xfrm>
+            <a:off x="7237476" y="2487168"/>
+            <a:ext cx="4155948" cy="502920"/>
           </a:xfrm>
           <a:prstGeom prst="rect">
             <a:avLst/>
@@ -4248,6 +5680,528 @@
                 <a:ea typeface="Calibri" pitchFamily="34" charset="-122"/>
                 <a:cs typeface="Calibri" pitchFamily="34" charset="-120"/>
               </a:rPr>
+              <a:t>侵入元の約半数は未パッチ。適用状況を継続的に可視化</a:t>
+            </a:r>
+            <a:endParaRPr lang="en-US" sz="1250" dirty="0"/>
+          </a:p>
+        </p:txBody>
+      </p:sp>
+      <p:sp>
+        <p:nvSpPr>
+          <p:cNvPr id="14" name="Shape 12"/>
+          <p:cNvSpPr/>
+          <p:nvPr/>
+        </p:nvSpPr>
+        <p:spPr>
+          <a:xfrm>
+            <a:off x="566928" y="3246120"/>
+            <a:ext cx="5344668" cy="1143000"/>
+          </a:xfrm>
+          <a:prstGeom prst="roundRect">
+            <a:avLst>
+              <a:gd name="adj" fmla="val 6400"/>
+            </a:avLst>
+          </a:prstGeom>
+          <a:solidFill>
+            <a:srgbClr val="F4F6FB"/>
+          </a:solidFill>
+          <a:ln w="12700">
+            <a:solidFill>
+              <a:srgbClr val="E2E8F4"/>
+            </a:solidFill>
+            <a:prstDash val="solid"/>
+          </a:ln>
+          <a:effectLst>
+            <a:outerShdw sx="100000" sy="100000" kx="0" ky="0" algn="bl" rotWithShape="0" blurRad="101600" dist="38100" dir="5400000">
+              <a:srgbClr val="8A93A6">
+                <a:alpha val="28000"/>
+              </a:srgbClr>
+            </a:outerShdw>
+          </a:effectLst>
+        </p:spPr>
+      </p:sp>
+      <p:sp>
+        <p:nvSpPr>
+          <p:cNvPr id="15" name="Shape 13"/>
+          <p:cNvSpPr/>
+          <p:nvPr/>
+        </p:nvSpPr>
+        <p:spPr>
+          <a:xfrm>
+            <a:off x="795528" y="3529584"/>
+            <a:ext cx="566928" cy="566928"/>
+          </a:xfrm>
+          <a:prstGeom prst="ellipse">
+            <a:avLst/>
+          </a:prstGeom>
+          <a:solidFill>
+            <a:srgbClr val="C8102E"/>
+          </a:solidFill>
+          <a:ln/>
+        </p:spPr>
+      </p:sp>
+      <p:sp>
+        <p:nvSpPr>
+          <p:cNvPr id="16" name="Text 14"/>
+          <p:cNvSpPr/>
+          <p:nvPr/>
+        </p:nvSpPr>
+        <p:spPr>
+          <a:xfrm>
+            <a:off x="795528" y="3529584"/>
+            <a:ext cx="566928" cy="566928"/>
+          </a:xfrm>
+          <a:prstGeom prst="rect">
+            <a:avLst/>
+          </a:prstGeom>
+          <a:noFill/>
+          <a:ln/>
+        </p:spPr>
+        <p:txBody>
+          <a:bodyPr wrap="square" lIns="0" tIns="0" rIns="0" bIns="0" rtlCol="0" anchor="ctr"/>
+          <a:lstStyle/>
+          <a:p>
+            <a:pPr algn="ctr" indent="0" marL="0">
+              <a:buNone/>
+            </a:pPr>
+            <a:r>
+              <a:rPr lang="en-US" sz="2200" b="1" dirty="0">
+                <a:solidFill>
+                  <a:srgbClr val="FFFFFF"/>
+                </a:solidFill>
+                <a:latin typeface="Cambria" pitchFamily="34" charset="0"/>
+                <a:ea typeface="Cambria" pitchFamily="34" charset="-122"/>
+                <a:cs typeface="Cambria" pitchFamily="34" charset="-120"/>
+              </a:rPr>
+              <a:t>3</a:t>
+            </a:r>
+            <a:endParaRPr lang="en-US" sz="2200" dirty="0"/>
+          </a:p>
+        </p:txBody>
+      </p:sp>
+      <p:sp>
+        <p:nvSpPr>
+          <p:cNvPr id="17" name="Text 15"/>
+          <p:cNvSpPr/>
+          <p:nvPr/>
+        </p:nvSpPr>
+        <p:spPr>
+          <a:xfrm>
+            <a:off x="1527048" y="3392424"/>
+            <a:ext cx="4155948" cy="457200"/>
+          </a:xfrm>
+          <a:prstGeom prst="rect">
+            <a:avLst/>
+          </a:prstGeom>
+          <a:noFill/>
+          <a:ln/>
+        </p:spPr>
+        <p:txBody>
+          <a:bodyPr wrap="square" lIns="0" tIns="0" rIns="0" bIns="0" rtlCol="0" anchor="t"/>
+          <a:lstStyle/>
+          <a:p>
+            <a:pPr indent="0" marL="0">
+              <a:buNone/>
+            </a:pPr>
+            <a:r>
+              <a:rPr lang="en-US" sz="1550" b="1" dirty="0">
+                <a:solidFill>
+                  <a:srgbClr val="0E1B3D"/>
+                </a:solidFill>
+                <a:latin typeface="Cambria" pitchFamily="34" charset="0"/>
+                <a:ea typeface="Cambria" pitchFamily="34" charset="-122"/>
+                <a:cs typeface="Cambria" pitchFamily="34" charset="-120"/>
+              </a:rPr>
+              <a:t>認証の強化（MFA・特権管理）</a:t>
+            </a:r>
+            <a:endParaRPr lang="en-US" sz="1550" dirty="0"/>
+          </a:p>
+        </p:txBody>
+      </p:sp>
+      <p:sp>
+        <p:nvSpPr>
+          <p:cNvPr id="18" name="Text 16"/>
+          <p:cNvSpPr/>
+          <p:nvPr/>
+        </p:nvSpPr>
+        <p:spPr>
+          <a:xfrm>
+            <a:off x="1527048" y="3813048"/>
+            <a:ext cx="4155948" cy="502920"/>
+          </a:xfrm>
+          <a:prstGeom prst="rect">
+            <a:avLst/>
+          </a:prstGeom>
+          <a:noFill/>
+          <a:ln/>
+        </p:spPr>
+        <p:txBody>
+          <a:bodyPr wrap="square" lIns="0" tIns="0" rIns="0" bIns="0" rtlCol="0" anchor="t"/>
+          <a:lstStyle/>
+          <a:p>
+            <a:pPr indent="0" marL="0">
+              <a:lnSpc>
+                <a:spcPts val="1600"/>
+              </a:lnSpc>
+              <a:buNone/>
+            </a:pPr>
+            <a:r>
+              <a:rPr lang="en-US" sz="1250" dirty="0">
+                <a:solidFill>
+                  <a:srgbClr val="1A2332"/>
+                </a:solidFill>
+                <a:latin typeface="Calibri" pitchFamily="34" charset="0"/>
+                <a:ea typeface="Calibri" pitchFamily="34" charset="-122"/>
+                <a:cs typeface="Calibri" pitchFamily="34" charset="-120"/>
+              </a:rPr>
+              <a:t>盗まれた正規アカウントでの侵入を防ぐ。ADの保護を優先</a:t>
+            </a:r>
+            <a:endParaRPr lang="en-US" sz="1250" dirty="0"/>
+          </a:p>
+        </p:txBody>
+      </p:sp>
+      <p:sp>
+        <p:nvSpPr>
+          <p:cNvPr id="19" name="Shape 17"/>
+          <p:cNvSpPr/>
+          <p:nvPr/>
+        </p:nvSpPr>
+        <p:spPr>
+          <a:xfrm>
+            <a:off x="6277356" y="3246120"/>
+            <a:ext cx="5344668" cy="1143000"/>
+          </a:xfrm>
+          <a:prstGeom prst="roundRect">
+            <a:avLst>
+              <a:gd name="adj" fmla="val 6400"/>
+            </a:avLst>
+          </a:prstGeom>
+          <a:solidFill>
+            <a:srgbClr val="F4F6FB"/>
+          </a:solidFill>
+          <a:ln w="12700">
+            <a:solidFill>
+              <a:srgbClr val="E2E8F4"/>
+            </a:solidFill>
+            <a:prstDash val="solid"/>
+          </a:ln>
+          <a:effectLst>
+            <a:outerShdw sx="100000" sy="100000" kx="0" ky="0" algn="bl" rotWithShape="0" blurRad="101600" dist="38100" dir="5400000">
+              <a:srgbClr val="8A93A6">
+                <a:alpha val="28000"/>
+              </a:srgbClr>
+            </a:outerShdw>
+          </a:effectLst>
+        </p:spPr>
+      </p:sp>
+      <p:sp>
+        <p:nvSpPr>
+          <p:cNvPr id="20" name="Shape 18"/>
+          <p:cNvSpPr/>
+          <p:nvPr/>
+        </p:nvSpPr>
+        <p:spPr>
+          <a:xfrm>
+            <a:off x="6505956" y="3529584"/>
+            <a:ext cx="566928" cy="566928"/>
+          </a:xfrm>
+          <a:prstGeom prst="ellipse">
+            <a:avLst/>
+          </a:prstGeom>
+          <a:solidFill>
+            <a:srgbClr val="C8102E"/>
+          </a:solidFill>
+          <a:ln/>
+        </p:spPr>
+      </p:sp>
+      <p:sp>
+        <p:nvSpPr>
+          <p:cNvPr id="21" name="Text 19"/>
+          <p:cNvSpPr/>
+          <p:nvPr/>
+        </p:nvSpPr>
+        <p:spPr>
+          <a:xfrm>
+            <a:off x="6505956" y="3529584"/>
+            <a:ext cx="566928" cy="566928"/>
+          </a:xfrm>
+          <a:prstGeom prst="rect">
+            <a:avLst/>
+          </a:prstGeom>
+          <a:noFill/>
+          <a:ln/>
+        </p:spPr>
+        <p:txBody>
+          <a:bodyPr wrap="square" lIns="0" tIns="0" rIns="0" bIns="0" rtlCol="0" anchor="ctr"/>
+          <a:lstStyle/>
+          <a:p>
+            <a:pPr algn="ctr" indent="0" marL="0">
+              <a:buNone/>
+            </a:pPr>
+            <a:r>
+              <a:rPr lang="en-US" sz="2200" b="1" dirty="0">
+                <a:solidFill>
+                  <a:srgbClr val="FFFFFF"/>
+                </a:solidFill>
+                <a:latin typeface="Cambria" pitchFamily="34" charset="0"/>
+                <a:ea typeface="Cambria" pitchFamily="34" charset="-122"/>
+                <a:cs typeface="Cambria" pitchFamily="34" charset="-120"/>
+              </a:rPr>
+              <a:t>4</a:t>
+            </a:r>
+            <a:endParaRPr lang="en-US" sz="2200" dirty="0"/>
+          </a:p>
+        </p:txBody>
+      </p:sp>
+      <p:sp>
+        <p:nvSpPr>
+          <p:cNvPr id="22" name="Text 20"/>
+          <p:cNvSpPr/>
+          <p:nvPr/>
+        </p:nvSpPr>
+        <p:spPr>
+          <a:xfrm>
+            <a:off x="7237476" y="3392424"/>
+            <a:ext cx="4155948" cy="457200"/>
+          </a:xfrm>
+          <a:prstGeom prst="rect">
+            <a:avLst/>
+          </a:prstGeom>
+          <a:noFill/>
+          <a:ln/>
+        </p:spPr>
+        <p:txBody>
+          <a:bodyPr wrap="square" lIns="0" tIns="0" rIns="0" bIns="0" rtlCol="0" anchor="t"/>
+          <a:lstStyle/>
+          <a:p>
+            <a:pPr indent="0" marL="0">
+              <a:buNone/>
+            </a:pPr>
+            <a:r>
+              <a:rPr lang="en-US" sz="1550" b="1" dirty="0">
+                <a:solidFill>
+                  <a:srgbClr val="0E1B3D"/>
+                </a:solidFill>
+                <a:latin typeface="Cambria" pitchFamily="34" charset="0"/>
+                <a:ea typeface="Cambria" pitchFamily="34" charset="-122"/>
+                <a:cs typeface="Cambria" pitchFamily="34" charset="-120"/>
+              </a:rPr>
+              <a:t>SentinelOneの堅牢化設定</a:t>
+            </a:r>
+            <a:endParaRPr lang="en-US" sz="1550" dirty="0"/>
+          </a:p>
+        </p:txBody>
+      </p:sp>
+      <p:sp>
+        <p:nvSpPr>
+          <p:cNvPr id="23" name="Text 21"/>
+          <p:cNvSpPr/>
+          <p:nvPr/>
+        </p:nvSpPr>
+        <p:spPr>
+          <a:xfrm>
+            <a:off x="7237476" y="3813048"/>
+            <a:ext cx="4155948" cy="502920"/>
+          </a:xfrm>
+          <a:prstGeom prst="rect">
+            <a:avLst/>
+          </a:prstGeom>
+          <a:noFill/>
+          <a:ln/>
+        </p:spPr>
+        <p:txBody>
+          <a:bodyPr wrap="square" lIns="0" tIns="0" rIns="0" bIns="0" rtlCol="0" anchor="t"/>
+          <a:lstStyle/>
+          <a:p>
+            <a:pPr indent="0" marL="0">
+              <a:lnSpc>
+                <a:spcPts val="1600"/>
+              </a:lnSpc>
+              <a:buNone/>
+            </a:pPr>
+            <a:r>
+              <a:rPr lang="en-US" sz="1250" dirty="0">
+                <a:solidFill>
+                  <a:srgbClr val="1A2332"/>
+                </a:solidFill>
+                <a:latin typeface="Calibri" pitchFamily="34" charset="0"/>
+                <a:ea typeface="Calibri" pitchFamily="34" charset="-122"/>
+                <a:cs typeface="Calibri" pitchFamily="34" charset="-120"/>
+              </a:rPr>
+              <a:t>Online Authorization等で無効化・改ざん回避を難しくする</a:t>
+            </a:r>
+            <a:endParaRPr lang="en-US" sz="1250" dirty="0"/>
+          </a:p>
+        </p:txBody>
+      </p:sp>
+      <p:sp>
+        <p:nvSpPr>
+          <p:cNvPr id="24" name="Shape 22"/>
+          <p:cNvSpPr/>
+          <p:nvPr/>
+        </p:nvSpPr>
+        <p:spPr>
+          <a:xfrm>
+            <a:off x="566928" y="4572000"/>
+            <a:ext cx="11055096" cy="1143000"/>
+          </a:xfrm>
+          <a:prstGeom prst="roundRect">
+            <a:avLst>
+              <a:gd name="adj" fmla="val 6400"/>
+            </a:avLst>
+          </a:prstGeom>
+          <a:solidFill>
+            <a:srgbClr val="F4F6FB"/>
+          </a:solidFill>
+          <a:ln w="12700">
+            <a:solidFill>
+              <a:srgbClr val="E2E8F4"/>
+            </a:solidFill>
+            <a:prstDash val="solid"/>
+          </a:ln>
+          <a:effectLst>
+            <a:outerShdw sx="100000" sy="100000" kx="0" ky="0" algn="bl" rotWithShape="0" blurRad="101600" dist="38100" dir="5400000">
+              <a:srgbClr val="8A93A6">
+                <a:alpha val="28000"/>
+              </a:srgbClr>
+            </a:outerShdw>
+          </a:effectLst>
+        </p:spPr>
+      </p:sp>
+      <p:sp>
+        <p:nvSpPr>
+          <p:cNvPr id="25" name="Shape 23"/>
+          <p:cNvSpPr/>
+          <p:nvPr/>
+        </p:nvSpPr>
+        <p:spPr>
+          <a:xfrm>
+            <a:off x="795528" y="4855464"/>
+            <a:ext cx="566928" cy="566928"/>
+          </a:xfrm>
+          <a:prstGeom prst="ellipse">
+            <a:avLst/>
+          </a:prstGeom>
+          <a:solidFill>
+            <a:srgbClr val="C8102E"/>
+          </a:solidFill>
+          <a:ln/>
+        </p:spPr>
+      </p:sp>
+      <p:sp>
+        <p:nvSpPr>
+          <p:cNvPr id="26" name="Text 24"/>
+          <p:cNvSpPr/>
+          <p:nvPr/>
+        </p:nvSpPr>
+        <p:spPr>
+          <a:xfrm>
+            <a:off x="795528" y="4855464"/>
+            <a:ext cx="566928" cy="566928"/>
+          </a:xfrm>
+          <a:prstGeom prst="rect">
+            <a:avLst/>
+          </a:prstGeom>
+          <a:noFill/>
+          <a:ln/>
+        </p:spPr>
+        <p:txBody>
+          <a:bodyPr wrap="square" lIns="0" tIns="0" rIns="0" bIns="0" rtlCol="0" anchor="ctr"/>
+          <a:lstStyle/>
+          <a:p>
+            <a:pPr algn="ctr" indent="0" marL="0">
+              <a:buNone/>
+            </a:pPr>
+            <a:r>
+              <a:rPr lang="en-US" sz="2200" b="1" dirty="0">
+                <a:solidFill>
+                  <a:srgbClr val="FFFFFF"/>
+                </a:solidFill>
+                <a:latin typeface="Cambria" pitchFamily="34" charset="0"/>
+                <a:ea typeface="Cambria" pitchFamily="34" charset="-122"/>
+                <a:cs typeface="Cambria" pitchFamily="34" charset="-120"/>
+              </a:rPr>
+              <a:t>5</a:t>
+            </a:r>
+            <a:endParaRPr lang="en-US" sz="2200" dirty="0"/>
+          </a:p>
+        </p:txBody>
+      </p:sp>
+      <p:sp>
+        <p:nvSpPr>
+          <p:cNvPr id="27" name="Text 25"/>
+          <p:cNvSpPr/>
+          <p:nvPr/>
+        </p:nvSpPr>
+        <p:spPr>
+          <a:xfrm>
+            <a:off x="1527048" y="4718304"/>
+            <a:ext cx="9866376" cy="457200"/>
+          </a:xfrm>
+          <a:prstGeom prst="rect">
+            <a:avLst/>
+          </a:prstGeom>
+          <a:noFill/>
+          <a:ln/>
+        </p:spPr>
+        <p:txBody>
+          <a:bodyPr wrap="square" lIns="0" tIns="0" rIns="0" bIns="0" rtlCol="0" anchor="t"/>
+          <a:lstStyle/>
+          <a:p>
+            <a:pPr indent="0" marL="0">
+              <a:buNone/>
+            </a:pPr>
+            <a:r>
+              <a:rPr lang="en-US" sz="1550" b="1" dirty="0">
+                <a:solidFill>
+                  <a:srgbClr val="0E1B3D"/>
+                </a:solidFill>
+                <a:latin typeface="Cambria" pitchFamily="34" charset="0"/>
+                <a:ea typeface="Cambria" pitchFamily="34" charset="-122"/>
+                <a:cs typeface="Cambria" pitchFamily="34" charset="-120"/>
+              </a:rPr>
+              <a:t>バックアップと復旧訓練</a:t>
+            </a:r>
+            <a:endParaRPr lang="en-US" sz="1550" dirty="0"/>
+          </a:p>
+        </p:txBody>
+      </p:sp>
+      <p:sp>
+        <p:nvSpPr>
+          <p:cNvPr id="28" name="Text 26"/>
+          <p:cNvSpPr/>
+          <p:nvPr/>
+        </p:nvSpPr>
+        <p:spPr>
+          <a:xfrm>
+            <a:off x="1527048" y="5138928"/>
+            <a:ext cx="9866376" cy="502920"/>
+          </a:xfrm>
+          <a:prstGeom prst="rect">
+            <a:avLst/>
+          </a:prstGeom>
+          <a:noFill/>
+          <a:ln/>
+        </p:spPr>
+        <p:txBody>
+          <a:bodyPr wrap="square" lIns="0" tIns="0" rIns="0" bIns="0" rtlCol="0" anchor="t"/>
+          <a:lstStyle/>
+          <a:p>
+            <a:pPr indent="0" marL="0">
+              <a:lnSpc>
+                <a:spcPts val="1600"/>
+              </a:lnSpc>
+              <a:buNone/>
+            </a:pPr>
+            <a:r>
+              <a:rPr lang="en-US" sz="1250" dirty="0">
+                <a:solidFill>
+                  <a:srgbClr val="1A2332"/>
+                </a:solidFill>
+                <a:latin typeface="Calibri" pitchFamily="34" charset="0"/>
+                <a:ea typeface="Calibri" pitchFamily="34" charset="-122"/>
+                <a:cs typeface="Calibri" pitchFamily="34" charset="-120"/>
+              </a:rPr>
               <a:t>暗号化されても事業を止めない。オフライン保管と定期演習</a:t>
             </a:r>
             <a:endParaRPr lang="en-US" sz="1250" dirty="0"/>
@@ -4287,7 +6241,7 @@
                 <a:ea typeface="Calibri" pitchFamily="34" charset="-122"/>
                 <a:cs typeface="Calibri" pitchFamily="34" charset="-120"/>
               </a:rPr>
-              <a:t>11</a:t>
+              <a:t>12</a:t>
             </a:r>
             <a:endParaRPr lang="en-US" sz="1000" dirty="0"/>
           </a:p>
@@ -4301,9 +6255,9 @@
 </p:sld>
 </file>
 
-<file path=ppt/slides/slide12.xml><?xml version="1.0" encoding="utf-8"?>
+<file path=ppt/slides/slide13.xml><?xml version="1.0" encoding="utf-8"?>
 <p:sld xmlns:a="http://schemas.openxmlformats.org/drawingml/2006/main" xmlns:r="http://schemas.openxmlformats.org/officeDocument/2006/relationships" xmlns:p="http://schemas.openxmlformats.org/presentationml/2006/main">
-  <p:cSld name="Slide 12">
+  <p:cSld name="Slide 13">
     <p:bg>
       <p:bgPr>
         <a:solidFill>
@@ -4640,7 +6594,7 @@
                 <a:ea typeface="Calibri" pitchFamily="34" charset="-122"/>
                 <a:cs typeface="Calibri" pitchFamily="34" charset="-120"/>
               </a:rPr>
-              <a:t>12</a:t>
+              <a:t>13</a:t>
             </a:r>
             <a:endParaRPr lang="en-US" sz="1000" dirty="0"/>
           </a:p>
@@ -4654,9 +6608,9 @@
 </p:sld>
 </file>
 
-<file path=ppt/slides/slide13.xml><?xml version="1.0" encoding="utf-8"?>
+<file path=ppt/slides/slide14.xml><?xml version="1.0" encoding="utf-8"?>
 <p:sld xmlns:a="http://schemas.openxmlformats.org/drawingml/2006/main" xmlns:r="http://schemas.openxmlformats.org/officeDocument/2006/relationships" xmlns:p="http://schemas.openxmlformats.org/presentationml/2006/main">
-  <p:cSld name="Slide 13">
+  <p:cSld name="Slide 14">
     <p:bg>
       <p:bgPr>
         <a:solidFill>
@@ -5018,7 +6972,7 @@
                 <a:ea typeface="Calibri" pitchFamily="34" charset="-122"/>
                 <a:cs typeface="Calibri" pitchFamily="34" charset="-120"/>
               </a:rPr>
-              <a:t>13</a:t>
+              <a:t>14</a:t>
             </a:r>
             <a:endParaRPr lang="en-US" sz="1000" dirty="0"/>
           </a:p>

--- a/成果物/SentinelOne導入後も脆弱性検査が必要な理由.pptx
+++ b/成果物/SentinelOne導入後も脆弱性検査が必要な理由.pptx
@@ -19,9 +19,10 @@
     <p:sldId id="267" r:id="rId13"/>
     <p:sldId id="268" r:id="rId14"/>
     <p:sldId id="269" r:id="rId15"/>
+    <p:sldId id="270" r:id="rId16"/>
   </p:sldIdLst>
   <p:notesMasterIdLst>
-    <p:notesMasterId r:id="rId16"/>
+    <p:notesMasterId r:id="rId17"/>
   </p:notesMasterIdLst>
   <p:sldSz cx="12192000" cy="6858000"/>
   <p:notesSz cx="6858000" cy="12192000"/>
@@ -1243,6 +1244,94 @@
             <a:fld id="{F7021451-1387-4CA6-816F-3879F97B5CBC}" type="slidenum">
               <a:rPr lang="en-US"/>
               <a:t>14</a:t>
+            </a:fld>
+            <a:endParaRPr lang="en-US"/>
+          </a:p>
+        </p:txBody>
+      </p:sp>
+    </p:spTree>
+    <p:extLst>
+      <p:ext uri="{BB962C8B-B14F-4D97-AF65-F5344CB8AC3E}">
+        <p14:creationId xmlns:p14="http://schemas.microsoft.com/office/powerpoint/2010/main" val="1024086991"/>
+      </p:ext>
+    </p:extLst>
+  </p:cSld>
+  <p:clrMapOvr>
+    <a:masterClrMapping/>
+  </p:clrMapOvr>
+</p:notes>
+</file>
+
+<file path=ppt/notesSlides/notesSlide15.xml><?xml version="1.0" encoding="utf-8"?>
+<p:notes xmlns:a="http://schemas.openxmlformats.org/drawingml/2006/main" xmlns:r="http://schemas.openxmlformats.org/officeDocument/2006/relationships" xmlns:p="http://schemas.openxmlformats.org/presentationml/2006/main">
+  <p:cSld>
+    <p:spTree>
+      <p:nvGrpSpPr>
+        <p:cNvPr id="1" name=""/>
+        <p:cNvGrpSpPr/>
+        <p:nvPr/>
+      </p:nvGrpSpPr>
+      <p:grpSpPr>
+        <a:xfrm>
+          <a:off x="0" y="0"/>
+          <a:ext cx="0" cy="0"/>
+          <a:chOff x="0" y="0"/>
+          <a:chExt cx="0" cy="0"/>
+        </a:xfrm>
+      </p:grpSpPr>
+      <p:sp>
+        <p:nvSpPr>
+          <p:cNvPr id="2" name="Slide Image Placeholder 1"/>
+          <p:cNvSpPr>
+            <a:spLocks noGrp="1" noRot="1" noChangeAspect="1"/>
+          </p:cNvSpPr>
+          <p:nvPr>
+            <p:ph type="sldImg"/>
+          </p:nvPr>
+        </p:nvSpPr>
+        <p:spPr/>
+      </p:sp>
+      <p:sp>
+        <p:nvSpPr>
+          <p:cNvPr id="3" name="Notes Placeholder 2"/>
+          <p:cNvSpPr>
+            <a:spLocks noGrp="1"/>
+          </p:cNvSpPr>
+          <p:nvPr>
+            <p:ph type="body" idx="1"/>
+          </p:nvPr>
+        </p:nvSpPr>
+        <p:spPr/>
+        <p:txBody>
+          <a:bodyPr/>
+          <a:lstStyle/>
+          <a:p>
+            <a:r>
+              <a:rPr lang="en-US" dirty="0"/>
+              <a:t/>
+            </a:r>
+            <a:endParaRPr lang="en-US" dirty="0"/>
+          </a:p>
+        </p:txBody>
+      </p:sp>
+      <p:sp>
+        <p:nvSpPr>
+          <p:cNvPr id="4" name="Slide Number Placeholder 3"/>
+          <p:cNvSpPr>
+            <a:spLocks noGrp="1"/>
+          </p:cNvSpPr>
+          <p:nvPr>
+            <p:ph type="sldNum" sz="quarter" idx="10"/>
+          </p:nvPr>
+        </p:nvSpPr>
+        <p:spPr/>
+        <p:txBody>
+          <a:bodyPr/>
+          <a:lstStyle/>
+          <a:p>
+            <a:fld id="{F7021451-1387-4CA6-816F-3879F97B5CBC}" type="slidenum">
+              <a:rPr lang="en-US"/>
+              <a:t>15</a:t>
             </a:fld>
             <a:endParaRPr lang="en-US"/>
           </a:p>
@@ -3270,7 +3359,7 @@
         </p:nvSpPr>
         <p:spPr>
           <a:xfrm>
-            <a:off x="9921240" y="2377440"/>
+            <a:off x="9921240" y="2395728"/>
             <a:ext cx="1691640" cy="822960"/>
           </a:xfrm>
           <a:prstGeom prst="rect">
@@ -3290,7 +3379,7 @@
               <a:buNone/>
             </a:pPr>
             <a:r>
-              <a:rPr lang="en-US" sz="1100" b="1" dirty="0">
+              <a:rPr lang="en-US" sz="1050" b="1" dirty="0">
                 <a:solidFill>
                   <a:srgbClr val="8E0B20"/>
                 </a:solidFill>
@@ -3298,9 +3387,9 @@
                 <a:ea typeface="Cambria" pitchFamily="34" charset="-122"/>
                 <a:cs typeface="Cambria" pitchFamily="34" charset="-120"/>
               </a:rPr>
-              <a:t>AD サーバ</a:t>
-            </a:r>
-            <a:endParaRPr lang="en-US" sz="1100" dirty="0"/>
+              <a:t>認証基盤サーバ</a:t>
+            </a:r>
+            <a:endParaRPr lang="en-US" sz="1050" dirty="0"/>
           </a:p>
           <a:p>
             <a:pPr algn="ctr" indent="0" marL="0">
@@ -3310,7 +3399,7 @@
               <a:buNone/>
             </a:pPr>
             <a:r>
-              <a:rPr lang="en-US" sz="1100" b="1" dirty="0">
+              <a:rPr lang="en-US" sz="1050" b="1" dirty="0">
                 <a:solidFill>
                   <a:srgbClr val="8E0B20"/>
                 </a:solidFill>
@@ -3318,9 +3407,9 @@
                 <a:ea typeface="Cambria" pitchFamily="34" charset="-122"/>
                 <a:cs typeface="Cambria" pitchFamily="34" charset="-120"/>
               </a:rPr>
-              <a:t>（管理者権限を奪取）</a:t>
-            </a:r>
-            <a:endParaRPr lang="en-US" sz="1100" dirty="0"/>
+              <a:t>(AD/SQL認証DB)</a:t>
+            </a:r>
+            <a:endParaRPr lang="en-US" sz="1050" dirty="0"/>
           </a:p>
         </p:txBody>
       </p:sp>
@@ -4143,7 +4232,7 @@
                 <a:ea typeface="Calibri" pitchFamily="34" charset="-122"/>
                 <a:cs typeface="Calibri" pitchFamily="34" charset="-120"/>
               </a:rPr>
-              <a:t> AD管理者権限を奪取しEDRを無効化</a:t>
+              <a:t> 認証基盤の権限を奪取しEDRを無効化</a:t>
             </a:r>
             <a:endParaRPr lang="en-US" sz="1150" dirty="0"/>
           </a:p>
@@ -4472,7 +4561,7 @@
                 <a:ea typeface="Calibri" pitchFamily="34" charset="-122"/>
                 <a:cs typeface="Calibri" pitchFamily="34" charset="-120"/>
               </a:rPr>
-              <a:t>あるべき考え方</a:t>
+              <a:t>SQL認証環境の追加リスク（ADが無くても）</a:t>
             </a:r>
             <a:endParaRPr lang="en-US" sz="1200" dirty="0"/>
           </a:p>
@@ -4511,7 +4600,7 @@
                 <a:ea typeface="Cambria" pitchFamily="34" charset="-122"/>
                 <a:cs typeface="Cambria" pitchFamily="34" charset="-120"/>
               </a:rPr>
-              <a:t>脆弱性検査とEDRは「補完関係」― 多層で守る</a:t>
+              <a:t>SQL認証でも認証情報は盗まれる ― 5つの経路</a:t>
             </a:r>
             <a:endParaRPr lang="en-US" sz="3200" dirty="0"/>
           </a:p>
@@ -4525,12 +4614,12 @@
         </p:nvSpPr>
         <p:spPr>
           <a:xfrm>
-            <a:off x="566928" y="2011680"/>
-            <a:ext cx="7498080" cy="1097280"/>
+            <a:off x="566928" y="1783080"/>
+            <a:ext cx="11055096" cy="713232"/>
           </a:xfrm>
           <a:prstGeom prst="roundRect">
             <a:avLst>
-              <a:gd name="adj" fmla="val 6667"/>
+              <a:gd name="adj" fmla="val 8974"/>
             </a:avLst>
           </a:prstGeom>
           <a:solidFill>
@@ -4559,8 +4648,8 @@
         </p:nvSpPr>
         <p:spPr>
           <a:xfrm>
-            <a:off x="795528" y="2267712"/>
-            <a:ext cx="585216" cy="585216"/>
+            <a:off x="749808" y="1911096"/>
+            <a:ext cx="457200" cy="457200"/>
           </a:xfrm>
           <a:prstGeom prst="ellipse">
             <a:avLst/>
@@ -4579,8 +4668,8 @@
         </p:nvSpPr>
         <p:spPr>
           <a:xfrm>
-            <a:off x="795528" y="2267712"/>
-            <a:ext cx="585216" cy="585216"/>
+            <a:off x="749808" y="1911096"/>
+            <a:ext cx="457200" cy="457200"/>
           </a:xfrm>
           <a:prstGeom prst="rect">
             <a:avLst/>
@@ -4596,7 +4685,7 @@
               <a:buNone/>
             </a:pPr>
             <a:r>
-              <a:rPr lang="en-US" sz="2200" b="1" dirty="0">
+              <a:rPr lang="en-US" sz="1800" b="1" dirty="0">
                 <a:solidFill>
                   <a:srgbClr val="FFFFFF"/>
                 </a:solidFill>
@@ -4606,7 +4695,7 @@
               </a:rPr>
               <a:t>1</a:t>
             </a:r>
-            <a:endParaRPr lang="en-US" sz="2200" dirty="0"/>
+            <a:endParaRPr lang="en-US" sz="1800" dirty="0"/>
           </a:p>
         </p:txBody>
       </p:sp>
@@ -4618,8 +4707,8 @@
         </p:nvSpPr>
         <p:spPr>
           <a:xfrm>
-            <a:off x="1572768" y="2157984"/>
-            <a:ext cx="6400800" cy="457200"/>
+            <a:off x="1344168" y="1856232"/>
+            <a:ext cx="3383280" cy="566928"/>
           </a:xfrm>
           <a:prstGeom prst="rect">
             <a:avLst/>
@@ -4632,10 +4721,13 @@
           <a:lstStyle/>
           <a:p>
             <a:pPr indent="0" marL="0">
-              <a:buNone/>
-            </a:pPr>
-            <a:r>
-              <a:rPr lang="en-US" sz="1700" b="1" dirty="0">
+              <a:lnSpc>
+                <a:spcPts val="1600"/>
+              </a:lnSpc>
+              <a:buNone/>
+            </a:pPr>
+            <a:r>
+              <a:rPr lang="en-US" sz="1450" b="1" dirty="0">
                 <a:solidFill>
                   <a:srgbClr val="0E1B3D"/>
                 </a:solidFill>
@@ -4643,52 +4735,41 @@
                 <a:ea typeface="Cambria" pitchFamily="34" charset="-122"/>
                 <a:cs typeface="Cambria" pitchFamily="34" charset="-120"/>
               </a:rPr>
-              <a:t>入口を塞ぐ   </a:t>
-            </a:r>
+              <a:t>SQLインジェクション</a:t>
+            </a:r>
+            <a:endParaRPr lang="en-US" sz="1450" dirty="0"/>
+          </a:p>
+        </p:txBody>
+      </p:sp>
+      <p:sp>
+        <p:nvSpPr>
+          <p:cNvPr id="8" name="Text 6"/>
+          <p:cNvSpPr/>
+          <p:nvPr/>
+        </p:nvSpPr>
+        <p:spPr>
+          <a:xfrm>
+            <a:off x="4864608" y="1856232"/>
+            <a:ext cx="6574536" cy="566928"/>
+          </a:xfrm>
+          <a:prstGeom prst="rect">
+            <a:avLst/>
+          </a:prstGeom>
+          <a:noFill/>
+          <a:ln/>
+        </p:spPr>
+        <p:txBody>
+          <a:bodyPr wrap="square" lIns="0" tIns="0" rIns="0" bIns="0" rtlCol="0" anchor="ctr"/>
+          <a:lstStyle/>
+          <a:p>
             <a:pPr indent="0" marL="0">
-              <a:buNone/>
-            </a:pPr>
-            <a:r>
-              <a:rPr lang="en-US" sz="1300" b="1" dirty="0">
-                <a:solidFill>
-                  <a:srgbClr val="C8102E"/>
-                </a:solidFill>
-                <a:latin typeface="Cambria" pitchFamily="34" charset="0"/>
-                <a:ea typeface="Cambria" pitchFamily="34" charset="-122"/>
-                <a:cs typeface="Cambria" pitchFamily="34" charset="-120"/>
-              </a:rPr>
-              <a:t>脆弱性検査・パッチ・認証強化(MFA)</a:t>
-            </a:r>
-            <a:endParaRPr lang="en-US" sz="1700" dirty="0"/>
-          </a:p>
-        </p:txBody>
-      </p:sp>
-      <p:sp>
-        <p:nvSpPr>
-          <p:cNvPr id="8" name="Text 6"/>
-          <p:cNvSpPr/>
-          <p:nvPr/>
-        </p:nvSpPr>
-        <p:spPr>
-          <a:xfrm>
-            <a:off x="1572768" y="2578608"/>
-            <a:ext cx="6400800" cy="457200"/>
-          </a:xfrm>
-          <a:prstGeom prst="rect">
-            <a:avLst/>
-          </a:prstGeom>
-          <a:noFill/>
-          <a:ln/>
-        </p:spPr>
-        <p:txBody>
-          <a:bodyPr wrap="square" lIns="0" tIns="0" rIns="0" bIns="0" rtlCol="0" anchor="t"/>
-          <a:lstStyle/>
-          <a:p>
-            <a:pPr indent="0" marL="0">
-              <a:buNone/>
-            </a:pPr>
-            <a:r>
-              <a:rPr lang="en-US" sz="1250" dirty="0">
+              <a:lnSpc>
+                <a:spcPts val="1500"/>
+              </a:lnSpc>
+              <a:buNone/>
+            </a:pPr>
+            <a:r>
+              <a:rPr lang="en-US" sz="1200" dirty="0">
                 <a:solidFill>
                   <a:srgbClr val="1A2332"/>
                 </a:solidFill>
@@ -4696,9 +4777,9 @@
                 <a:ea typeface="Calibri" pitchFamily="34" charset="-122"/>
                 <a:cs typeface="Calibri" pitchFamily="34" charset="-120"/>
               </a:rPr>
-              <a:t>侵入・乗っ取りの起点を事前に潰す</a:t>
-            </a:r>
-            <a:endParaRPr lang="en-US" sz="1250" dirty="0"/>
+              <a:t>ログイン/アプリの脆弱性で認証テーブルを丸ごとダンプ。1件ずつ破る必要すらない。</a:t>
+            </a:r>
+            <a:endParaRPr lang="en-US" sz="1200" dirty="0"/>
           </a:p>
         </p:txBody>
       </p:sp>
@@ -4710,12 +4791,12 @@
         </p:nvSpPr>
         <p:spPr>
           <a:xfrm>
-            <a:off x="566928" y="3310128"/>
-            <a:ext cx="7498080" cy="1097280"/>
+            <a:off x="566928" y="2606040"/>
+            <a:ext cx="11055096" cy="713232"/>
           </a:xfrm>
           <a:prstGeom prst="roundRect">
             <a:avLst>
-              <a:gd name="adj" fmla="val 6667"/>
+              <a:gd name="adj" fmla="val 8974"/>
             </a:avLst>
           </a:prstGeom>
           <a:solidFill>
@@ -4744,14 +4825,14 @@
         </p:nvSpPr>
         <p:spPr>
           <a:xfrm>
-            <a:off x="795528" y="3566160"/>
-            <a:ext cx="585216" cy="585216"/>
+            <a:off x="749808" y="2734056"/>
+            <a:ext cx="457200" cy="457200"/>
           </a:xfrm>
           <a:prstGeom prst="ellipse">
             <a:avLst/>
           </a:prstGeom>
           <a:solidFill>
-            <a:srgbClr val="3E5C76"/>
+            <a:srgbClr val="C8102E"/>
           </a:solidFill>
           <a:ln/>
         </p:spPr>
@@ -4764,8 +4845,8 @@
         </p:nvSpPr>
         <p:spPr>
           <a:xfrm>
-            <a:off x="795528" y="3566160"/>
-            <a:ext cx="585216" cy="585216"/>
+            <a:off x="749808" y="2734056"/>
+            <a:ext cx="457200" cy="457200"/>
           </a:xfrm>
           <a:prstGeom prst="rect">
             <a:avLst/>
@@ -4781,7 +4862,7 @@
               <a:buNone/>
             </a:pPr>
             <a:r>
-              <a:rPr lang="en-US" sz="2200" b="1" dirty="0">
+              <a:rPr lang="en-US" sz="1800" b="1" dirty="0">
                 <a:solidFill>
                   <a:srgbClr val="FFFFFF"/>
                 </a:solidFill>
@@ -4791,7 +4872,7 @@
               </a:rPr>
               <a:t>2</a:t>
             </a:r>
-            <a:endParaRPr lang="en-US" sz="2200" dirty="0"/>
+            <a:endParaRPr lang="en-US" sz="1800" dirty="0"/>
           </a:p>
         </p:txBody>
       </p:sp>
@@ -4803,8 +4884,8 @@
         </p:nvSpPr>
         <p:spPr>
           <a:xfrm>
-            <a:off x="1572768" y="3456432"/>
-            <a:ext cx="6400800" cy="457200"/>
+            <a:off x="1344168" y="2679192"/>
+            <a:ext cx="3383280" cy="566928"/>
           </a:xfrm>
           <a:prstGeom prst="rect">
             <a:avLst/>
@@ -4817,10 +4898,13 @@
           <a:lstStyle/>
           <a:p>
             <a:pPr indent="0" marL="0">
-              <a:buNone/>
-            </a:pPr>
-            <a:r>
-              <a:rPr lang="en-US" sz="1700" b="1" dirty="0">
+              <a:lnSpc>
+                <a:spcPts val="1600"/>
+              </a:lnSpc>
+              <a:buNone/>
+            </a:pPr>
+            <a:r>
+              <a:rPr lang="en-US" sz="1450" b="1" dirty="0">
                 <a:solidFill>
                   <a:srgbClr val="0E1B3D"/>
                 </a:solidFill>
@@ -4828,52 +4912,41 @@
                 <a:ea typeface="Cambria" pitchFamily="34" charset="-122"/>
                 <a:cs typeface="Cambria" pitchFamily="34" charset="-120"/>
               </a:rPr>
-              <a:t>内側で検知   </a:t>
-            </a:r>
+              <a:t>パスワード保存の弱さ</a:t>
+            </a:r>
+            <a:endParaRPr lang="en-US" sz="1450" dirty="0"/>
+          </a:p>
+        </p:txBody>
+      </p:sp>
+      <p:sp>
+        <p:nvSpPr>
+          <p:cNvPr id="13" name="Text 11"/>
+          <p:cNvSpPr/>
+          <p:nvPr/>
+        </p:nvSpPr>
+        <p:spPr>
+          <a:xfrm>
+            <a:off x="4864608" y="2679192"/>
+            <a:ext cx="6574536" cy="566928"/>
+          </a:xfrm>
+          <a:prstGeom prst="rect">
+            <a:avLst/>
+          </a:prstGeom>
+          <a:noFill/>
+          <a:ln/>
+        </p:spPr>
+        <p:txBody>
+          <a:bodyPr wrap="square" lIns="0" tIns="0" rIns="0" bIns="0" rtlCol="0" anchor="ctr"/>
+          <a:lstStyle/>
+          <a:p>
             <a:pPr indent="0" marL="0">
-              <a:buNone/>
-            </a:pPr>
-            <a:r>
-              <a:rPr lang="en-US" sz="1300" b="1" dirty="0">
-                <a:solidFill>
-                  <a:srgbClr val="3E5C76"/>
-                </a:solidFill>
-                <a:latin typeface="Cambria" pitchFamily="34" charset="0"/>
-                <a:ea typeface="Cambria" pitchFamily="34" charset="-122"/>
-                <a:cs typeface="Cambria" pitchFamily="34" charset="-120"/>
-              </a:rPr>
-              <a:t>EDR(SentinelOne)</a:t>
-            </a:r>
-            <a:endParaRPr lang="en-US" sz="1700" dirty="0"/>
-          </a:p>
-        </p:txBody>
-      </p:sp>
-      <p:sp>
-        <p:nvSpPr>
-          <p:cNvPr id="13" name="Text 11"/>
-          <p:cNvSpPr/>
-          <p:nvPr/>
-        </p:nvSpPr>
-        <p:spPr>
-          <a:xfrm>
-            <a:off x="1572768" y="3877056"/>
-            <a:ext cx="6400800" cy="457200"/>
-          </a:xfrm>
-          <a:prstGeom prst="rect">
-            <a:avLst/>
-          </a:prstGeom>
-          <a:noFill/>
-          <a:ln/>
-        </p:spPr>
-        <p:txBody>
-          <a:bodyPr wrap="square" lIns="0" tIns="0" rIns="0" bIns="0" rtlCol="0" anchor="t"/>
-          <a:lstStyle/>
-          <a:p>
-            <a:pPr indent="0" marL="0">
-              <a:buNone/>
-            </a:pPr>
-            <a:r>
-              <a:rPr lang="en-US" sz="1250" dirty="0">
+              <a:lnSpc>
+                <a:spcPts val="1500"/>
+              </a:lnSpc>
+              <a:buNone/>
+            </a:pPr>
+            <a:r>
+              <a:rPr lang="en-US" sz="1200" dirty="0">
                 <a:solidFill>
                   <a:srgbClr val="1A2332"/>
                 </a:solidFill>
@@ -4881,9 +4954,9 @@
                 <a:ea typeface="Calibri" pitchFamily="34" charset="-122"/>
                 <a:cs typeface="Calibri" pitchFamily="34" charset="-120"/>
               </a:rPr>
-              <a:t>侵入されても被害拡大を検知・抑制</a:t>
-            </a:r>
-            <a:endParaRPr lang="en-US" sz="1250" dirty="0"/>
+              <a:t>平文・MD5/SHA1(ソルト無)・可逆暗号だと、DBを1回読むだけで全アカウントが判明。</a:t>
+            </a:r>
+            <a:endParaRPr lang="en-US" sz="1200" dirty="0"/>
           </a:p>
         </p:txBody>
       </p:sp>
@@ -4895,12 +4968,12 @@
         </p:nvSpPr>
         <p:spPr>
           <a:xfrm>
-            <a:off x="566928" y="4608576"/>
-            <a:ext cx="7498080" cy="1097280"/>
+            <a:off x="566928" y="3429000"/>
+            <a:ext cx="11055096" cy="713232"/>
           </a:xfrm>
           <a:prstGeom prst="roundRect">
             <a:avLst>
-              <a:gd name="adj" fmla="val 6667"/>
+              <a:gd name="adj" fmla="val 8974"/>
             </a:avLst>
           </a:prstGeom>
           <a:solidFill>
@@ -4929,14 +5002,14 @@
         </p:nvSpPr>
         <p:spPr>
           <a:xfrm>
-            <a:off x="795528" y="4864608"/>
-            <a:ext cx="585216" cy="585216"/>
+            <a:off x="749808" y="3557016"/>
+            <a:ext cx="457200" cy="457200"/>
           </a:xfrm>
           <a:prstGeom prst="ellipse">
             <a:avLst/>
           </a:prstGeom>
           <a:solidFill>
-            <a:srgbClr val="1E7A46"/>
+            <a:srgbClr val="C8102E"/>
           </a:solidFill>
           <a:ln/>
         </p:spPr>
@@ -4949,8 +5022,8 @@
         </p:nvSpPr>
         <p:spPr>
           <a:xfrm>
-            <a:off x="795528" y="4864608"/>
-            <a:ext cx="585216" cy="585216"/>
+            <a:off x="749808" y="3557016"/>
+            <a:ext cx="457200" cy="457200"/>
           </a:xfrm>
           <a:prstGeom prst="rect">
             <a:avLst/>
@@ -4966,7 +5039,7 @@
               <a:buNone/>
             </a:pPr>
             <a:r>
-              <a:rPr lang="en-US" sz="2200" b="1" dirty="0">
+              <a:rPr lang="en-US" sz="1800" b="1" dirty="0">
                 <a:solidFill>
                   <a:srgbClr val="FFFFFF"/>
                 </a:solidFill>
@@ -4976,7 +5049,7 @@
               </a:rPr>
               <a:t>3</a:t>
             </a:r>
-            <a:endParaRPr lang="en-US" sz="2200" dirty="0"/>
+            <a:endParaRPr lang="en-US" sz="1800" dirty="0"/>
           </a:p>
         </p:txBody>
       </p:sp>
@@ -4988,8 +5061,8 @@
         </p:nvSpPr>
         <p:spPr>
           <a:xfrm>
-            <a:off x="1572768" y="4754880"/>
-            <a:ext cx="6400800" cy="457200"/>
+            <a:off x="1344168" y="3502152"/>
+            <a:ext cx="3383280" cy="566928"/>
           </a:xfrm>
           <a:prstGeom prst="rect">
             <a:avLst/>
@@ -5002,10 +5075,13 @@
           <a:lstStyle/>
           <a:p>
             <a:pPr indent="0" marL="0">
-              <a:buNone/>
-            </a:pPr>
-            <a:r>
-              <a:rPr lang="en-US" sz="1700" b="1" dirty="0">
+              <a:lnSpc>
+                <a:spcPts val="1600"/>
+              </a:lnSpc>
+              <a:buNone/>
+            </a:pPr>
+            <a:r>
+              <a:rPr lang="en-US" sz="1450" b="1" dirty="0">
                 <a:solidFill>
                   <a:srgbClr val="0E1B3D"/>
                 </a:solidFill>
@@ -5013,52 +5089,41 @@
                 <a:ea typeface="Cambria" pitchFamily="34" charset="-122"/>
                 <a:cs typeface="Cambria" pitchFamily="34" charset="-120"/>
               </a:rPr>
-              <a:t>備えと復旧   </a:t>
-            </a:r>
+              <a:t>DBサーバの直接侵害</a:t>
+            </a:r>
+            <a:endParaRPr lang="en-US" sz="1450" dirty="0"/>
+          </a:p>
+        </p:txBody>
+      </p:sp>
+      <p:sp>
+        <p:nvSpPr>
+          <p:cNvPr id="18" name="Text 16"/>
+          <p:cNvSpPr/>
+          <p:nvPr/>
+        </p:nvSpPr>
+        <p:spPr>
+          <a:xfrm>
+            <a:off x="4864608" y="3502152"/>
+            <a:ext cx="6574536" cy="566928"/>
+          </a:xfrm>
+          <a:prstGeom prst="rect">
+            <a:avLst/>
+          </a:prstGeom>
+          <a:noFill/>
+          <a:ln/>
+        </p:spPr>
+        <p:txBody>
+          <a:bodyPr wrap="square" lIns="0" tIns="0" rIns="0" bIns="0" rtlCol="0" anchor="ctr"/>
+          <a:lstStyle/>
+          <a:p>
             <a:pPr indent="0" marL="0">
-              <a:buNone/>
-            </a:pPr>
-            <a:r>
-              <a:rPr lang="en-US" sz="1300" b="1" dirty="0">
-                <a:solidFill>
-                  <a:srgbClr val="1E7A46"/>
-                </a:solidFill>
-                <a:latin typeface="Cambria" pitchFamily="34" charset="0"/>
-                <a:ea typeface="Cambria" pitchFamily="34" charset="-122"/>
-                <a:cs typeface="Cambria" pitchFamily="34" charset="-120"/>
-              </a:rPr>
-              <a:t>バックアップ・監視・訓練</a:t>
-            </a:r>
-            <a:endParaRPr lang="en-US" sz="1700" dirty="0"/>
-          </a:p>
-        </p:txBody>
-      </p:sp>
-      <p:sp>
-        <p:nvSpPr>
-          <p:cNvPr id="18" name="Text 16"/>
-          <p:cNvSpPr/>
-          <p:nvPr/>
-        </p:nvSpPr>
-        <p:spPr>
-          <a:xfrm>
-            <a:off x="1572768" y="5175504"/>
-            <a:ext cx="6400800" cy="457200"/>
-          </a:xfrm>
-          <a:prstGeom prst="rect">
-            <a:avLst/>
-          </a:prstGeom>
-          <a:noFill/>
-          <a:ln/>
-        </p:spPr>
-        <p:txBody>
-          <a:bodyPr wrap="square" lIns="0" tIns="0" rIns="0" bIns="0" rtlCol="0" anchor="t"/>
-          <a:lstStyle/>
-          <a:p>
-            <a:pPr indent="0" marL="0">
-              <a:buNone/>
-            </a:pPr>
-            <a:r>
-              <a:rPr lang="en-US" sz="1250" dirty="0">
+              <a:lnSpc>
+                <a:spcPts val="1500"/>
+              </a:lnSpc>
+              <a:buNone/>
+            </a:pPr>
+            <a:r>
+              <a:rPr lang="en-US" sz="1200" dirty="0">
                 <a:solidFill>
                   <a:srgbClr val="1A2332"/>
                 </a:solidFill>
@@ -5066,9 +5131,9 @@
                 <a:ea typeface="Calibri" pitchFamily="34" charset="-122"/>
                 <a:cs typeface="Calibri" pitchFamily="34" charset="-120"/>
               </a:rPr>
-              <a:t>最悪時に事業を止めない</a:t>
-            </a:r>
-            <a:endParaRPr lang="en-US" sz="1250" dirty="0"/>
+              <a:t>露出した1433/3306/5432、弱いsa/root、バックアップ流出から認証テーブルを直読み。</a:t>
+            </a:r>
+            <a:endParaRPr lang="en-US" sz="1200" dirty="0"/>
           </a:p>
         </p:txBody>
       </p:sp>
@@ -5080,18 +5145,23 @@
         </p:nvSpPr>
         <p:spPr>
           <a:xfrm>
-            <a:off x="8366760" y="2011680"/>
-            <a:ext cx="3255264" cy="3712464"/>
+            <a:off x="566928" y="4251960"/>
+            <a:ext cx="11055096" cy="713232"/>
           </a:xfrm>
           <a:prstGeom prst="roundRect">
             <a:avLst>
-              <a:gd name="adj" fmla="val 2809"/>
+              <a:gd name="adj" fmla="val 8974"/>
             </a:avLst>
           </a:prstGeom>
           <a:solidFill>
-            <a:srgbClr val="0E1B3D"/>
+            <a:srgbClr val="F4F6FB"/>
           </a:solidFill>
-          <a:ln/>
+          <a:ln w="12700">
+            <a:solidFill>
+              <a:srgbClr val="E2E8F4"/>
+            </a:solidFill>
+            <a:prstDash val="solid"/>
+          </a:ln>
           <a:effectLst>
             <a:outerShdw sx="100000" sy="100000" kx="0" ky="0" algn="bl" rotWithShape="0" blurRad="101600" dist="38100" dir="5400000">
               <a:srgbClr val="8A93A6">
@@ -5103,95 +5173,402 @@
       </p:sp>
       <p:sp>
         <p:nvSpPr>
-          <p:cNvPr id="20" name="Text 18"/>
-          <p:cNvSpPr/>
-          <p:nvPr/>
-        </p:nvSpPr>
-        <p:spPr>
-          <a:xfrm>
-            <a:off x="8595360" y="2286000"/>
-            <a:ext cx="2779776" cy="3200400"/>
-          </a:xfrm>
-          <a:prstGeom prst="rect">
-            <a:avLst/>
-          </a:prstGeom>
-          <a:noFill/>
-          <a:ln/>
-        </p:spPr>
-        <p:txBody>
-          <a:bodyPr wrap="square" lIns="0" tIns="0" rIns="0" bIns="0" rtlCol="0" anchor="t"/>
+          <p:cNvPr id="20" name="Shape 18"/>
+          <p:cNvSpPr/>
+          <p:nvPr/>
+        </p:nvSpPr>
+        <p:spPr>
+          <a:xfrm>
+            <a:off x="749808" y="4379976"/>
+            <a:ext cx="457200" cy="457200"/>
+          </a:xfrm>
+          <a:prstGeom prst="ellipse">
+            <a:avLst/>
+          </a:prstGeom>
+          <a:solidFill>
+            <a:srgbClr val="C8102E"/>
+          </a:solidFill>
+          <a:ln/>
+        </p:spPr>
+      </p:sp>
+      <p:sp>
+        <p:nvSpPr>
+          <p:cNvPr id="21" name="Text 19"/>
+          <p:cNvSpPr/>
+          <p:nvPr/>
+        </p:nvSpPr>
+        <p:spPr>
+          <a:xfrm>
+            <a:off x="749808" y="4379976"/>
+            <a:ext cx="457200" cy="457200"/>
+          </a:xfrm>
+          <a:prstGeom prst="rect">
+            <a:avLst/>
+          </a:prstGeom>
+          <a:noFill/>
+          <a:ln/>
+        </p:spPr>
+        <p:txBody>
+          <a:bodyPr wrap="square" lIns="0" tIns="0" rIns="0" bIns="0" rtlCol="0" anchor="ctr"/>
+          <a:lstStyle/>
+          <a:p>
+            <a:pPr algn="ctr" indent="0" marL="0">
+              <a:buNone/>
+            </a:pPr>
+            <a:r>
+              <a:rPr lang="en-US" sz="1800" b="1" dirty="0">
+                <a:solidFill>
+                  <a:srgbClr val="FFFFFF"/>
+                </a:solidFill>
+                <a:latin typeface="Cambria" pitchFamily="34" charset="0"/>
+                <a:ea typeface="Cambria" pitchFamily="34" charset="-122"/>
+                <a:cs typeface="Cambria" pitchFamily="34" charset="-120"/>
+              </a:rPr>
+              <a:t>4</a:t>
+            </a:r>
+            <a:endParaRPr lang="en-US" sz="1800" dirty="0"/>
+          </a:p>
+        </p:txBody>
+      </p:sp>
+      <p:sp>
+        <p:nvSpPr>
+          <p:cNvPr id="22" name="Text 20"/>
+          <p:cNvSpPr/>
+          <p:nvPr/>
+        </p:nvSpPr>
+        <p:spPr>
+          <a:xfrm>
+            <a:off x="1344168" y="4325112"/>
+            <a:ext cx="3383280" cy="566928"/>
+          </a:xfrm>
+          <a:prstGeom prst="rect">
+            <a:avLst/>
+          </a:prstGeom>
+          <a:noFill/>
+          <a:ln/>
+        </p:spPr>
+        <p:txBody>
+          <a:bodyPr wrap="square" lIns="0" tIns="0" rIns="0" bIns="0" rtlCol="0" anchor="ctr"/>
           <a:lstStyle/>
           <a:p>
             <a:pPr indent="0" marL="0">
               <a:lnSpc>
-                <a:spcPts val="2000"/>
+                <a:spcPts val="1600"/>
               </a:lnSpc>
-              <a:spcAft>
-                <a:spcPts val="1000"/>
-              </a:spcAft>
-              <a:buNone/>
-            </a:pPr>
-            <a:r>
-              <a:rPr lang="en-US" sz="1800" b="1" dirty="0">
-                <a:solidFill>
-                  <a:srgbClr val="FF6B81"/>
+              <a:buNone/>
+            </a:pPr>
+            <a:r>
+              <a:rPr lang="en-US" sz="1450" b="1" dirty="0">
+                <a:solidFill>
+                  <a:srgbClr val="0E1B3D"/>
+                </a:solidFill>
+                <a:latin typeface="Cambria" pitchFamily="34" charset="0"/>
+                <a:ea typeface="Cambria" pitchFamily="34" charset="-122"/>
+                <a:cs typeface="Cambria" pitchFamily="34" charset="-120"/>
+              </a:rPr>
+              <a:t>接続文字列・秘密情報の散在</a:t>
+            </a:r>
+            <a:endParaRPr lang="en-US" sz="1450" dirty="0"/>
+          </a:p>
+        </p:txBody>
+      </p:sp>
+      <p:sp>
+        <p:nvSpPr>
+          <p:cNvPr id="23" name="Text 21"/>
+          <p:cNvSpPr/>
+          <p:nvPr/>
+        </p:nvSpPr>
+        <p:spPr>
+          <a:xfrm>
+            <a:off x="4864608" y="4325112"/>
+            <a:ext cx="6574536" cy="566928"/>
+          </a:xfrm>
+          <a:prstGeom prst="rect">
+            <a:avLst/>
+          </a:prstGeom>
+          <a:noFill/>
+          <a:ln/>
+        </p:spPr>
+        <p:txBody>
+          <a:bodyPr wrap="square" lIns="0" tIns="0" rIns="0" bIns="0" rtlCol="0" anchor="ctr"/>
+          <a:lstStyle/>
+          <a:p>
+            <a:pPr indent="0" marL="0">
+              <a:lnSpc>
+                <a:spcPts val="1500"/>
+              </a:lnSpc>
+              <a:buNone/>
+            </a:pPr>
+            <a:r>
+              <a:rPr lang="en-US" sz="1200" dirty="0">
+                <a:solidFill>
+                  <a:srgbClr val="1A2332"/>
                 </a:solidFill>
                 <a:latin typeface="Calibri" pitchFamily="34" charset="0"/>
                 <a:ea typeface="Calibri" pitchFamily="34" charset="-122"/>
                 <a:cs typeface="Calibri" pitchFamily="34" charset="-120"/>
               </a:rPr>
-              <a:t>S-1は層②。</a:t>
+              <a:t>web.config・appsettings・環境変数・ソースからDB資格情報を回収し即アクセス。</a:t>
+            </a:r>
+            <a:endParaRPr lang="en-US" sz="1200" dirty="0"/>
+          </a:p>
+        </p:txBody>
+      </p:sp>
+      <p:sp>
+        <p:nvSpPr>
+          <p:cNvPr id="24" name="Shape 22"/>
+          <p:cNvSpPr/>
+          <p:nvPr/>
+        </p:nvSpPr>
+        <p:spPr>
+          <a:xfrm>
+            <a:off x="566928" y="5074920"/>
+            <a:ext cx="11055096" cy="713232"/>
+          </a:xfrm>
+          <a:prstGeom prst="roundRect">
+            <a:avLst>
+              <a:gd name="adj" fmla="val 8974"/>
+            </a:avLst>
+          </a:prstGeom>
+          <a:solidFill>
+            <a:srgbClr val="F4F6FB"/>
+          </a:solidFill>
+          <a:ln w="12700">
+            <a:solidFill>
+              <a:srgbClr val="E2E8F4"/>
+            </a:solidFill>
+            <a:prstDash val="solid"/>
+          </a:ln>
+          <a:effectLst>
+            <a:outerShdw sx="100000" sy="100000" kx="0" ky="0" algn="bl" rotWithShape="0" blurRad="101600" dist="38100" dir="5400000">
+              <a:srgbClr val="8A93A6">
+                <a:alpha val="28000"/>
+              </a:srgbClr>
+            </a:outerShdw>
+          </a:effectLst>
+        </p:spPr>
+      </p:sp>
+      <p:sp>
+        <p:nvSpPr>
+          <p:cNvPr id="25" name="Shape 23"/>
+          <p:cNvSpPr/>
+          <p:nvPr/>
+        </p:nvSpPr>
+        <p:spPr>
+          <a:xfrm>
+            <a:off x="749808" y="5202936"/>
+            <a:ext cx="457200" cy="457200"/>
+          </a:xfrm>
+          <a:prstGeom prst="ellipse">
+            <a:avLst/>
+          </a:prstGeom>
+          <a:solidFill>
+            <a:srgbClr val="C8102E"/>
+          </a:solidFill>
+          <a:ln/>
+        </p:spPr>
+      </p:sp>
+      <p:sp>
+        <p:nvSpPr>
+          <p:cNvPr id="26" name="Text 24"/>
+          <p:cNvSpPr/>
+          <p:nvPr/>
+        </p:nvSpPr>
+        <p:spPr>
+          <a:xfrm>
+            <a:off x="749808" y="5202936"/>
+            <a:ext cx="457200" cy="457200"/>
+          </a:xfrm>
+          <a:prstGeom prst="rect">
+            <a:avLst/>
+          </a:prstGeom>
+          <a:noFill/>
+          <a:ln/>
+        </p:spPr>
+        <p:txBody>
+          <a:bodyPr wrap="square" lIns="0" tIns="0" rIns="0" bIns="0" rtlCol="0" anchor="ctr"/>
+          <a:lstStyle/>
+          <a:p>
+            <a:pPr algn="ctr" indent="0" marL="0">
+              <a:buNone/>
+            </a:pPr>
+            <a:r>
+              <a:rPr lang="en-US" sz="1800" b="1" dirty="0">
+                <a:solidFill>
+                  <a:srgbClr val="FFFFFF"/>
+                </a:solidFill>
+                <a:latin typeface="Cambria" pitchFamily="34" charset="0"/>
+                <a:ea typeface="Cambria" pitchFamily="34" charset="-122"/>
+                <a:cs typeface="Cambria" pitchFamily="34" charset="-120"/>
+              </a:rPr>
+              <a:t>5</a:t>
             </a:r>
             <a:endParaRPr lang="en-US" sz="1800" dirty="0"/>
           </a:p>
+        </p:txBody>
+      </p:sp>
+      <p:sp>
+        <p:nvSpPr>
+          <p:cNvPr id="27" name="Text 25"/>
+          <p:cNvSpPr/>
+          <p:nvPr/>
+        </p:nvSpPr>
+        <p:spPr>
+          <a:xfrm>
+            <a:off x="1344168" y="5148072"/>
+            <a:ext cx="3383280" cy="566928"/>
+          </a:xfrm>
+          <a:prstGeom prst="rect">
+            <a:avLst/>
+          </a:prstGeom>
+          <a:noFill/>
+          <a:ln/>
+        </p:spPr>
+        <p:txBody>
+          <a:bodyPr wrap="square" lIns="0" tIns="0" rIns="0" bIns="0" rtlCol="0" anchor="ctr"/>
+          <a:lstStyle/>
           <a:p>
             <a:pPr indent="0" marL="0">
               <a:lnSpc>
-                <a:spcPts val="2000"/>
+                <a:spcPts val="1600"/>
               </a:lnSpc>
-              <a:spcAft>
-                <a:spcPts val="1400"/>
-              </a:spcAft>
-              <a:buNone/>
-            </a:pPr>
-            <a:r>
-              <a:rPr lang="en-US" sz="1400" dirty="0">
-                <a:solidFill>
-                  <a:srgbClr val="DCE6F5"/>
+              <a:buNone/>
+            </a:pPr>
+            <a:r>
+              <a:rPr lang="en-US" sz="1450" b="1" dirty="0">
+                <a:solidFill>
+                  <a:srgbClr val="0E1B3D"/>
+                </a:solidFill>
+                <a:latin typeface="Cambria" pitchFamily="34" charset="0"/>
+                <a:ea typeface="Cambria" pitchFamily="34" charset="-122"/>
+                <a:cs typeface="Cambria" pitchFamily="34" charset="-120"/>
+              </a:rPr>
+              <a:t>sa / db_owner の悪用</a:t>
+            </a:r>
+            <a:endParaRPr lang="en-US" sz="1450" dirty="0"/>
+          </a:p>
+        </p:txBody>
+      </p:sp>
+      <p:sp>
+        <p:nvSpPr>
+          <p:cNvPr id="28" name="Text 26"/>
+          <p:cNvSpPr/>
+          <p:nvPr/>
+        </p:nvSpPr>
+        <p:spPr>
+          <a:xfrm>
+            <a:off x="4864608" y="5148072"/>
+            <a:ext cx="6574536" cy="566928"/>
+          </a:xfrm>
+          <a:prstGeom prst="rect">
+            <a:avLst/>
+          </a:prstGeom>
+          <a:noFill/>
+          <a:ln/>
+        </p:spPr>
+        <p:txBody>
+          <a:bodyPr wrap="square" lIns="0" tIns="0" rIns="0" bIns="0" rtlCol="0" anchor="ctr"/>
+          <a:lstStyle/>
+          <a:p>
+            <a:pPr indent="0" marL="0">
+              <a:lnSpc>
+                <a:spcPts val="1500"/>
+              </a:lnSpc>
+              <a:buNone/>
+            </a:pPr>
+            <a:r>
+              <a:rPr lang="en-US" sz="1200" dirty="0">
+                <a:solidFill>
+                  <a:srgbClr val="1A2332"/>
                 </a:solidFill>
                 <a:latin typeface="Calibri" pitchFamily="34" charset="0"/>
                 <a:ea typeface="Calibri" pitchFamily="34" charset="-122"/>
                 <a:cs typeface="Calibri" pitchFamily="34" charset="-120"/>
               </a:rPr>
-              <a:t>層①（入口）が抜けたままでは、攻撃者は容易に侵入し、層②を無効化しにいく。</a:t>
-            </a:r>
-            <a:endParaRPr lang="en-US" sz="1800" dirty="0"/>
-          </a:p>
+              <a:t>特権SQLログイン奪取→xp_cmdshell等でOSコマンド実行(RCE)・横展開の踏み台に。</a:t>
+            </a:r>
+            <a:endParaRPr lang="en-US" sz="1200" dirty="0"/>
+          </a:p>
+        </p:txBody>
+      </p:sp>
+      <p:sp>
+        <p:nvSpPr>
+          <p:cNvPr id="29" name="Shape 27"/>
+          <p:cNvSpPr/>
+          <p:nvPr/>
+        </p:nvSpPr>
+        <p:spPr>
+          <a:xfrm>
+            <a:off x="566928" y="5870448"/>
+            <a:ext cx="11055096" cy="457200"/>
+          </a:xfrm>
+          <a:prstGeom prst="roundRect">
+            <a:avLst>
+              <a:gd name="adj" fmla="val 14000"/>
+            </a:avLst>
+          </a:prstGeom>
+          <a:solidFill>
+            <a:srgbClr val="0E1B3D"/>
+          </a:solidFill>
+          <a:ln/>
+        </p:spPr>
+      </p:sp>
+      <p:sp>
+        <p:nvSpPr>
+          <p:cNvPr id="30" name="Text 28"/>
+          <p:cNvSpPr/>
+          <p:nvPr/>
+        </p:nvSpPr>
+        <p:spPr>
+          <a:xfrm>
+            <a:off x="886968" y="5870448"/>
+            <a:ext cx="10415016" cy="457200"/>
+          </a:xfrm>
+          <a:prstGeom prst="rect">
+            <a:avLst/>
+          </a:prstGeom>
+          <a:noFill/>
+          <a:ln/>
+        </p:spPr>
+        <p:txBody>
+          <a:bodyPr wrap="square" lIns="0" tIns="0" rIns="0" bIns="0" rtlCol="0" anchor="ctr"/>
+          <a:lstStyle/>
           <a:p>
             <a:pPr indent="0" marL="0">
-              <a:lnSpc>
-                <a:spcPts val="2000"/>
-              </a:lnSpc>
-              <a:buNone/>
-            </a:pPr>
-            <a:r>
-              <a:rPr lang="en-US" sz="1400" b="1" dirty="0">
-                <a:solidFill>
-                  <a:srgbClr val="FFFFFF"/>
+              <a:buNone/>
+            </a:pPr>
+            <a:r>
+              <a:rPr lang="en-US" sz="1250" b="1" dirty="0">
+                <a:solidFill>
+                  <a:srgbClr val="FF6B81"/>
                 </a:solidFill>
                 <a:latin typeface="Calibri" pitchFamily="34" charset="0"/>
                 <a:ea typeface="Calibri" pitchFamily="34" charset="-122"/>
                 <a:cs typeface="Calibri" pitchFamily="34" charset="-120"/>
               </a:rPr>
-              <a:t>脆弱性検査は層②を置き換えるものではなく、層②が守る前提となる層①を成立させるもの。</a:t>
-            </a:r>
-            <a:endParaRPr lang="en-US" sz="1800" dirty="0"/>
-          </a:p>
-        </p:txBody>
-      </p:sp>
-      <p:sp>
-        <p:nvSpPr>
-          <p:cNvPr id="21" name="Text 19"/>
+              <a:t>対処：  </a:t>
+            </a:r>
+            <a:pPr indent="0" marL="0">
+              <a:buNone/>
+            </a:pPr>
+            <a:r>
+              <a:rPr lang="en-US" sz="1250" dirty="0">
+                <a:solidFill>
+                  <a:srgbClr val="DCE6F5"/>
+                </a:solidFill>
+                <a:latin typeface="Calibri" pitchFamily="34" charset="0"/>
+                <a:ea typeface="Calibri" pitchFamily="34" charset="-122"/>
+                <a:cs typeface="Calibri" pitchFamily="34" charset="-120"/>
+              </a:rPr>
+              <a:t>脆弱性検査(SQLi)・パスワード保存方式の監査・秘密情報の棚卸し・MFA。いずれもEDRの管轄外。</a:t>
+            </a:r>
+            <a:endParaRPr lang="en-US" sz="1250" dirty="0"/>
+          </a:p>
+        </p:txBody>
+      </p:sp>
+      <p:sp>
+        <p:nvSpPr>
+          <p:cNvPr id="31" name="Text 29"/>
           <p:cNvSpPr/>
           <p:nvPr/>
         </p:nvSpPr>
@@ -5293,7 +5670,7 @@
                 <a:ea typeface="Calibri" pitchFamily="34" charset="-122"/>
                 <a:cs typeface="Calibri" pitchFamily="34" charset="-120"/>
               </a:rPr>
-              <a:t>Aenaへの提言</a:t>
+              <a:t>あるべき考え方</a:t>
             </a:r>
             <a:endParaRPr lang="en-US" sz="1200" dirty="0"/>
           </a:p>
@@ -5332,7 +5709,7 @@
                 <a:ea typeface="Cambria" pitchFamily="34" charset="-122"/>
                 <a:cs typeface="Cambria" pitchFamily="34" charset="-120"/>
               </a:rPr>
-              <a:t>S-1に加えて今すぐ着手したい5項目</a:t>
+              <a:t>脆弱性検査とEDRは「補完関係」― 多層で守る</a:t>
             </a:r>
             <a:endParaRPr lang="en-US" sz="3200" dirty="0"/>
           </a:p>
@@ -5346,12 +5723,12 @@
         </p:nvSpPr>
         <p:spPr>
           <a:xfrm>
-            <a:off x="566928" y="1920240"/>
-            <a:ext cx="5344668" cy="1143000"/>
+            <a:off x="566928" y="2011680"/>
+            <a:ext cx="7498080" cy="1097280"/>
           </a:xfrm>
           <a:prstGeom prst="roundRect">
             <a:avLst>
-              <a:gd name="adj" fmla="val 6400"/>
+              <a:gd name="adj" fmla="val 6667"/>
             </a:avLst>
           </a:prstGeom>
           <a:solidFill>
@@ -5380,8 +5757,8 @@
         </p:nvSpPr>
         <p:spPr>
           <a:xfrm>
-            <a:off x="795528" y="2203704"/>
-            <a:ext cx="566928" cy="566928"/>
+            <a:off x="795528" y="2267712"/>
+            <a:ext cx="585216" cy="585216"/>
           </a:xfrm>
           <a:prstGeom prst="ellipse">
             <a:avLst/>
@@ -5400,8 +5777,8 @@
         </p:nvSpPr>
         <p:spPr>
           <a:xfrm>
-            <a:off x="795528" y="2203704"/>
-            <a:ext cx="566928" cy="566928"/>
+            <a:off x="795528" y="2267712"/>
+            <a:ext cx="585216" cy="585216"/>
           </a:xfrm>
           <a:prstGeom prst="rect">
             <a:avLst/>
@@ -5439,24 +5816,24 @@
         </p:nvSpPr>
         <p:spPr>
           <a:xfrm>
-            <a:off x="1527048" y="2066544"/>
-            <a:ext cx="4155948" cy="457200"/>
-          </a:xfrm>
-          <a:prstGeom prst="rect">
-            <a:avLst/>
-          </a:prstGeom>
-          <a:noFill/>
-          <a:ln/>
-        </p:spPr>
-        <p:txBody>
-          <a:bodyPr wrap="square" lIns="0" tIns="0" rIns="0" bIns="0" rtlCol="0" anchor="t"/>
+            <a:off x="1572768" y="2157984"/>
+            <a:ext cx="6400800" cy="457200"/>
+          </a:xfrm>
+          <a:prstGeom prst="rect">
+            <a:avLst/>
+          </a:prstGeom>
+          <a:noFill/>
+          <a:ln/>
+        </p:spPr>
+        <p:txBody>
+          <a:bodyPr wrap="square" lIns="0" tIns="0" rIns="0" bIns="0" rtlCol="0" anchor="ctr"/>
           <a:lstStyle/>
           <a:p>
             <a:pPr indent="0" marL="0">
               <a:buNone/>
             </a:pPr>
             <a:r>
-              <a:rPr lang="en-US" sz="1550" b="1" dirty="0">
+              <a:rPr lang="en-US" sz="1700" b="1" dirty="0">
                 <a:solidFill>
                   <a:srgbClr val="0E1B3D"/>
                 </a:solidFill>
@@ -5464,9 +5841,23 @@
                 <a:ea typeface="Cambria" pitchFamily="34" charset="-122"/>
                 <a:cs typeface="Cambria" pitchFamily="34" charset="-120"/>
               </a:rPr>
-              <a:t>外部公開資産の脆弱性検査を定期実施</a:t>
-            </a:r>
-            <a:endParaRPr lang="en-US" sz="1550" dirty="0"/>
+              <a:t>入口を塞ぐ   </a:t>
+            </a:r>
+            <a:pPr indent="0" marL="0">
+              <a:buNone/>
+            </a:pPr>
+            <a:r>
+              <a:rPr lang="en-US" sz="1300" b="1" dirty="0">
+                <a:solidFill>
+                  <a:srgbClr val="C8102E"/>
+                </a:solidFill>
+                <a:latin typeface="Cambria" pitchFamily="34" charset="0"/>
+                <a:ea typeface="Cambria" pitchFamily="34" charset="-122"/>
+                <a:cs typeface="Cambria" pitchFamily="34" charset="-120"/>
+              </a:rPr>
+              <a:t>脆弱性検査・パッチ・認証強化(MFA)</a:t>
+            </a:r>
+            <a:endParaRPr lang="en-US" sz="1700" dirty="0"/>
           </a:p>
         </p:txBody>
       </p:sp>
@@ -5478,8 +5869,8 @@
         </p:nvSpPr>
         <p:spPr>
           <a:xfrm>
-            <a:off x="1527048" y="2487168"/>
-            <a:ext cx="4155948" cy="502920"/>
+            <a:off x="1572768" y="2578608"/>
+            <a:ext cx="6400800" cy="457200"/>
           </a:xfrm>
           <a:prstGeom prst="rect">
             <a:avLst/>
@@ -5492,9 +5883,6 @@
           <a:lstStyle/>
           <a:p>
             <a:pPr indent="0" marL="0">
-              <a:lnSpc>
-                <a:spcPts val="1600"/>
-              </a:lnSpc>
               <a:buNone/>
             </a:pPr>
             <a:r>
@@ -5506,7 +5894,7 @@
                 <a:ea typeface="Calibri" pitchFamily="34" charset="-122"/>
                 <a:cs typeface="Calibri" pitchFamily="34" charset="-120"/>
               </a:rPr>
-              <a:t>VPN・公開サーバ・Webを対象に、悪用可能な入口を洗い出す</a:t>
+              <a:t>侵入・乗っ取りの起点を事前に潰す</a:t>
             </a:r>
             <a:endParaRPr lang="en-US" sz="1250" dirty="0"/>
           </a:p>
@@ -5520,12 +5908,12 @@
         </p:nvSpPr>
         <p:spPr>
           <a:xfrm>
-            <a:off x="6277356" y="1920240"/>
-            <a:ext cx="5344668" cy="1143000"/>
+            <a:off x="566928" y="3310128"/>
+            <a:ext cx="7498080" cy="1097280"/>
           </a:xfrm>
           <a:prstGeom prst="roundRect">
             <a:avLst>
-              <a:gd name="adj" fmla="val 6400"/>
+              <a:gd name="adj" fmla="val 6667"/>
             </a:avLst>
           </a:prstGeom>
           <a:solidFill>
@@ -5554,14 +5942,14 @@
         </p:nvSpPr>
         <p:spPr>
           <a:xfrm>
-            <a:off x="6505956" y="2203704"/>
-            <a:ext cx="566928" cy="566928"/>
+            <a:off x="795528" y="3566160"/>
+            <a:ext cx="585216" cy="585216"/>
           </a:xfrm>
           <a:prstGeom prst="ellipse">
             <a:avLst/>
           </a:prstGeom>
           <a:solidFill>
-            <a:srgbClr val="C8102E"/>
+            <a:srgbClr val="3E5C76"/>
           </a:solidFill>
           <a:ln/>
         </p:spPr>
@@ -5574,8 +5962,8 @@
         </p:nvSpPr>
         <p:spPr>
           <a:xfrm>
-            <a:off x="6505956" y="2203704"/>
-            <a:ext cx="566928" cy="566928"/>
+            <a:off x="795528" y="3566160"/>
+            <a:ext cx="585216" cy="585216"/>
           </a:xfrm>
           <a:prstGeom prst="rect">
             <a:avLst/>
@@ -5613,24 +6001,24 @@
         </p:nvSpPr>
         <p:spPr>
           <a:xfrm>
-            <a:off x="7237476" y="2066544"/>
-            <a:ext cx="4155948" cy="457200"/>
-          </a:xfrm>
-          <a:prstGeom prst="rect">
-            <a:avLst/>
-          </a:prstGeom>
-          <a:noFill/>
-          <a:ln/>
-        </p:spPr>
-        <p:txBody>
-          <a:bodyPr wrap="square" lIns="0" tIns="0" rIns="0" bIns="0" rtlCol="0" anchor="t"/>
+            <a:off x="1572768" y="3456432"/>
+            <a:ext cx="6400800" cy="457200"/>
+          </a:xfrm>
+          <a:prstGeom prst="rect">
+            <a:avLst/>
+          </a:prstGeom>
+          <a:noFill/>
+          <a:ln/>
+        </p:spPr>
+        <p:txBody>
+          <a:bodyPr wrap="square" lIns="0" tIns="0" rIns="0" bIns="0" rtlCol="0" anchor="ctr"/>
           <a:lstStyle/>
           <a:p>
             <a:pPr indent="0" marL="0">
               <a:buNone/>
             </a:pPr>
             <a:r>
-              <a:rPr lang="en-US" sz="1550" b="1" dirty="0">
+              <a:rPr lang="en-US" sz="1700" b="1" dirty="0">
                 <a:solidFill>
                   <a:srgbClr val="0E1B3D"/>
                 </a:solidFill>
@@ -5638,9 +6026,23 @@
                 <a:ea typeface="Cambria" pitchFamily="34" charset="-122"/>
                 <a:cs typeface="Cambria" pitchFamily="34" charset="-120"/>
               </a:rPr>
-              <a:t>パッチ運用の徹底と棚卸し</a:t>
-            </a:r>
-            <a:endParaRPr lang="en-US" sz="1550" dirty="0"/>
+              <a:t>内側で検知   </a:t>
+            </a:r>
+            <a:pPr indent="0" marL="0">
+              <a:buNone/>
+            </a:pPr>
+            <a:r>
+              <a:rPr lang="en-US" sz="1300" b="1" dirty="0">
+                <a:solidFill>
+                  <a:srgbClr val="3E5C76"/>
+                </a:solidFill>
+                <a:latin typeface="Cambria" pitchFamily="34" charset="0"/>
+                <a:ea typeface="Cambria" pitchFamily="34" charset="-122"/>
+                <a:cs typeface="Cambria" pitchFamily="34" charset="-120"/>
+              </a:rPr>
+              <a:t>EDR(SentinelOne)</a:t>
+            </a:r>
+            <a:endParaRPr lang="en-US" sz="1700" dirty="0"/>
           </a:p>
         </p:txBody>
       </p:sp>
@@ -5652,8 +6054,8 @@
         </p:nvSpPr>
         <p:spPr>
           <a:xfrm>
-            <a:off x="7237476" y="2487168"/>
-            <a:ext cx="4155948" cy="502920"/>
+            <a:off x="1572768" y="3877056"/>
+            <a:ext cx="6400800" cy="457200"/>
           </a:xfrm>
           <a:prstGeom prst="rect">
             <a:avLst/>
@@ -5666,9 +6068,6 @@
           <a:lstStyle/>
           <a:p>
             <a:pPr indent="0" marL="0">
-              <a:lnSpc>
-                <a:spcPts val="1600"/>
-              </a:lnSpc>
               <a:buNone/>
             </a:pPr>
             <a:r>
@@ -5680,7 +6079,7 @@
                 <a:ea typeface="Calibri" pitchFamily="34" charset="-122"/>
                 <a:cs typeface="Calibri" pitchFamily="34" charset="-120"/>
               </a:rPr>
-              <a:t>侵入元の約半数は未パッチ。適用状況を継続的に可視化</a:t>
+              <a:t>侵入されても被害拡大を検知・抑制</a:t>
             </a:r>
             <a:endParaRPr lang="en-US" sz="1250" dirty="0"/>
           </a:p>
@@ -5694,12 +6093,12 @@
         </p:nvSpPr>
         <p:spPr>
           <a:xfrm>
-            <a:off x="566928" y="3246120"/>
-            <a:ext cx="5344668" cy="1143000"/>
+            <a:off x="566928" y="4608576"/>
+            <a:ext cx="7498080" cy="1097280"/>
           </a:xfrm>
           <a:prstGeom prst="roundRect">
             <a:avLst>
-              <a:gd name="adj" fmla="val 6400"/>
+              <a:gd name="adj" fmla="val 6667"/>
             </a:avLst>
           </a:prstGeom>
           <a:solidFill>
@@ -5728,14 +6127,14 @@
         </p:nvSpPr>
         <p:spPr>
           <a:xfrm>
-            <a:off x="795528" y="3529584"/>
-            <a:ext cx="566928" cy="566928"/>
+            <a:off x="795528" y="4864608"/>
+            <a:ext cx="585216" cy="585216"/>
           </a:xfrm>
           <a:prstGeom prst="ellipse">
             <a:avLst/>
           </a:prstGeom>
           <a:solidFill>
-            <a:srgbClr val="C8102E"/>
+            <a:srgbClr val="1E7A46"/>
           </a:solidFill>
           <a:ln/>
         </p:spPr>
@@ -5748,8 +6147,8 @@
         </p:nvSpPr>
         <p:spPr>
           <a:xfrm>
-            <a:off x="795528" y="3529584"/>
-            <a:ext cx="566928" cy="566928"/>
+            <a:off x="795528" y="4864608"/>
+            <a:ext cx="585216" cy="585216"/>
           </a:xfrm>
           <a:prstGeom prst="rect">
             <a:avLst/>
@@ -5787,24 +6186,24 @@
         </p:nvSpPr>
         <p:spPr>
           <a:xfrm>
-            <a:off x="1527048" y="3392424"/>
-            <a:ext cx="4155948" cy="457200"/>
-          </a:xfrm>
-          <a:prstGeom prst="rect">
-            <a:avLst/>
-          </a:prstGeom>
-          <a:noFill/>
-          <a:ln/>
-        </p:spPr>
-        <p:txBody>
-          <a:bodyPr wrap="square" lIns="0" tIns="0" rIns="0" bIns="0" rtlCol="0" anchor="t"/>
+            <a:off x="1572768" y="4754880"/>
+            <a:ext cx="6400800" cy="457200"/>
+          </a:xfrm>
+          <a:prstGeom prst="rect">
+            <a:avLst/>
+          </a:prstGeom>
+          <a:noFill/>
+          <a:ln/>
+        </p:spPr>
+        <p:txBody>
+          <a:bodyPr wrap="square" lIns="0" tIns="0" rIns="0" bIns="0" rtlCol="0" anchor="ctr"/>
           <a:lstStyle/>
           <a:p>
             <a:pPr indent="0" marL="0">
               <a:buNone/>
             </a:pPr>
             <a:r>
-              <a:rPr lang="en-US" sz="1550" b="1" dirty="0">
+              <a:rPr lang="en-US" sz="1700" b="1" dirty="0">
                 <a:solidFill>
                   <a:srgbClr val="0E1B3D"/>
                 </a:solidFill>
@@ -5812,9 +6211,23 @@
                 <a:ea typeface="Cambria" pitchFamily="34" charset="-122"/>
                 <a:cs typeface="Cambria" pitchFamily="34" charset="-120"/>
               </a:rPr>
-              <a:t>認証の強化（MFA・特権管理）</a:t>
-            </a:r>
-            <a:endParaRPr lang="en-US" sz="1550" dirty="0"/>
+              <a:t>備えと復旧   </a:t>
+            </a:r>
+            <a:pPr indent="0" marL="0">
+              <a:buNone/>
+            </a:pPr>
+            <a:r>
+              <a:rPr lang="en-US" sz="1300" b="1" dirty="0">
+                <a:solidFill>
+                  <a:srgbClr val="1E7A46"/>
+                </a:solidFill>
+                <a:latin typeface="Cambria" pitchFamily="34" charset="0"/>
+                <a:ea typeface="Cambria" pitchFamily="34" charset="-122"/>
+                <a:cs typeface="Cambria" pitchFamily="34" charset="-120"/>
+              </a:rPr>
+              <a:t>バックアップ・監視・訓練</a:t>
+            </a:r>
+            <a:endParaRPr lang="en-US" sz="1700" dirty="0"/>
           </a:p>
         </p:txBody>
       </p:sp>
@@ -5826,8 +6239,8 @@
         </p:nvSpPr>
         <p:spPr>
           <a:xfrm>
-            <a:off x="1527048" y="3813048"/>
-            <a:ext cx="4155948" cy="502920"/>
+            <a:off x="1572768" y="5175504"/>
+            <a:ext cx="6400800" cy="457200"/>
           </a:xfrm>
           <a:prstGeom prst="rect">
             <a:avLst/>
@@ -5840,9 +6253,6 @@
           <a:lstStyle/>
           <a:p>
             <a:pPr indent="0" marL="0">
-              <a:lnSpc>
-                <a:spcPts val="1600"/>
-              </a:lnSpc>
               <a:buNone/>
             </a:pPr>
             <a:r>
@@ -5854,7 +6264,7 @@
                 <a:ea typeface="Calibri" pitchFamily="34" charset="-122"/>
                 <a:cs typeface="Calibri" pitchFamily="34" charset="-120"/>
               </a:rPr>
-              <a:t>盗まれた正規アカウントでの侵入を防ぐ。ADの保護を優先</a:t>
+              <a:t>最悪時に事業を止めない</a:t>
             </a:r>
             <a:endParaRPr lang="en-US" sz="1250" dirty="0"/>
           </a:p>
@@ -5868,7 +6278,273 @@
         </p:nvSpPr>
         <p:spPr>
           <a:xfrm>
-            <a:off x="6277356" y="3246120"/>
+            <a:off x="8366760" y="2011680"/>
+            <a:ext cx="3255264" cy="3712464"/>
+          </a:xfrm>
+          <a:prstGeom prst="roundRect">
+            <a:avLst>
+              <a:gd name="adj" fmla="val 2809"/>
+            </a:avLst>
+          </a:prstGeom>
+          <a:solidFill>
+            <a:srgbClr val="0E1B3D"/>
+          </a:solidFill>
+          <a:ln/>
+          <a:effectLst>
+            <a:outerShdw sx="100000" sy="100000" kx="0" ky="0" algn="bl" rotWithShape="0" blurRad="101600" dist="38100" dir="5400000">
+              <a:srgbClr val="8A93A6">
+                <a:alpha val="28000"/>
+              </a:srgbClr>
+            </a:outerShdw>
+          </a:effectLst>
+        </p:spPr>
+      </p:sp>
+      <p:sp>
+        <p:nvSpPr>
+          <p:cNvPr id="20" name="Text 18"/>
+          <p:cNvSpPr/>
+          <p:nvPr/>
+        </p:nvSpPr>
+        <p:spPr>
+          <a:xfrm>
+            <a:off x="8595360" y="2286000"/>
+            <a:ext cx="2779776" cy="3200400"/>
+          </a:xfrm>
+          <a:prstGeom prst="rect">
+            <a:avLst/>
+          </a:prstGeom>
+          <a:noFill/>
+          <a:ln/>
+        </p:spPr>
+        <p:txBody>
+          <a:bodyPr wrap="square" lIns="0" tIns="0" rIns="0" bIns="0" rtlCol="0" anchor="t"/>
+          <a:lstStyle/>
+          <a:p>
+            <a:pPr indent="0" marL="0">
+              <a:lnSpc>
+                <a:spcPts val="2000"/>
+              </a:lnSpc>
+              <a:spcAft>
+                <a:spcPts val="1000"/>
+              </a:spcAft>
+              <a:buNone/>
+            </a:pPr>
+            <a:r>
+              <a:rPr lang="en-US" sz="1800" b="1" dirty="0">
+                <a:solidFill>
+                  <a:srgbClr val="FF6B81"/>
+                </a:solidFill>
+                <a:latin typeface="Calibri" pitchFamily="34" charset="0"/>
+                <a:ea typeface="Calibri" pitchFamily="34" charset="-122"/>
+                <a:cs typeface="Calibri" pitchFamily="34" charset="-120"/>
+              </a:rPr>
+              <a:t>S-1は層②。</a:t>
+            </a:r>
+            <a:endParaRPr lang="en-US" sz="1800" dirty="0"/>
+          </a:p>
+          <a:p>
+            <a:pPr indent="0" marL="0">
+              <a:lnSpc>
+                <a:spcPts val="2000"/>
+              </a:lnSpc>
+              <a:spcAft>
+                <a:spcPts val="1400"/>
+              </a:spcAft>
+              <a:buNone/>
+            </a:pPr>
+            <a:r>
+              <a:rPr lang="en-US" sz="1400" dirty="0">
+                <a:solidFill>
+                  <a:srgbClr val="DCE6F5"/>
+                </a:solidFill>
+                <a:latin typeface="Calibri" pitchFamily="34" charset="0"/>
+                <a:ea typeface="Calibri" pitchFamily="34" charset="-122"/>
+                <a:cs typeface="Calibri" pitchFamily="34" charset="-120"/>
+              </a:rPr>
+              <a:t>層①（入口）が抜けたままでは、攻撃者は容易に侵入し、層②を無効化しにいく。</a:t>
+            </a:r>
+            <a:endParaRPr lang="en-US" sz="1800" dirty="0"/>
+          </a:p>
+          <a:p>
+            <a:pPr indent="0" marL="0">
+              <a:lnSpc>
+                <a:spcPts val="2000"/>
+              </a:lnSpc>
+              <a:buNone/>
+            </a:pPr>
+            <a:r>
+              <a:rPr lang="en-US" sz="1400" b="1" dirty="0">
+                <a:solidFill>
+                  <a:srgbClr val="FFFFFF"/>
+                </a:solidFill>
+                <a:latin typeface="Calibri" pitchFamily="34" charset="0"/>
+                <a:ea typeface="Calibri" pitchFamily="34" charset="-122"/>
+                <a:cs typeface="Calibri" pitchFamily="34" charset="-120"/>
+              </a:rPr>
+              <a:t>脆弱性検査は層②を置き換えるものではなく、層②が守る前提となる層①を成立させるもの。</a:t>
+            </a:r>
+            <a:endParaRPr lang="en-US" sz="1800" dirty="0"/>
+          </a:p>
+        </p:txBody>
+      </p:sp>
+      <p:sp>
+        <p:nvSpPr>
+          <p:cNvPr id="21" name="Text 19"/>
+          <p:cNvSpPr/>
+          <p:nvPr/>
+        </p:nvSpPr>
+        <p:spPr>
+          <a:xfrm>
+            <a:off x="11411712" y="6400800"/>
+            <a:ext cx="457200" cy="274320"/>
+          </a:xfrm>
+          <a:prstGeom prst="rect">
+            <a:avLst/>
+          </a:prstGeom>
+          <a:noFill/>
+          <a:ln/>
+        </p:spPr>
+        <p:txBody>
+          <a:bodyPr wrap="square" lIns="0" tIns="0" rIns="0" bIns="0" rtlCol="0" anchor="ctr"/>
+          <a:lstStyle/>
+          <a:p>
+            <a:pPr algn="r" indent="0" marL="0">
+              <a:buNone/>
+            </a:pPr>
+            <a:r>
+              <a:rPr lang="en-US" sz="1000" dirty="0">
+                <a:solidFill>
+                  <a:srgbClr val="68738A"/>
+                </a:solidFill>
+                <a:latin typeface="Calibri" pitchFamily="34" charset="0"/>
+                <a:ea typeface="Calibri" pitchFamily="34" charset="-122"/>
+                <a:cs typeface="Calibri" pitchFamily="34" charset="-120"/>
+              </a:rPr>
+              <a:t>12</a:t>
+            </a:r>
+            <a:endParaRPr lang="en-US" sz="1000" dirty="0"/>
+          </a:p>
+        </p:txBody>
+      </p:sp>
+    </p:spTree>
+  </p:cSld>
+  <p:clrMapOvr>
+    <a:masterClrMapping/>
+  </p:clrMapOvr>
+</p:sld>
+</file>
+
+<file path=ppt/slides/slide13.xml><?xml version="1.0" encoding="utf-8"?>
+<p:sld xmlns:a="http://schemas.openxmlformats.org/drawingml/2006/main" xmlns:r="http://schemas.openxmlformats.org/officeDocument/2006/relationships" xmlns:p="http://schemas.openxmlformats.org/presentationml/2006/main">
+  <p:cSld name="Slide 13">
+    <p:bg>
+      <p:bgPr>
+        <a:solidFill>
+          <a:srgbClr val="FFFFFF"/>
+        </a:solidFill>
+      </p:bgPr>
+    </p:bg>
+    <p:spTree>
+      <p:nvGrpSpPr>
+        <p:cNvPr id="1" name=""/>
+        <p:cNvGrpSpPr/>
+        <p:nvPr/>
+      </p:nvGrpSpPr>
+      <p:grpSpPr>
+        <a:xfrm>
+          <a:off x="0" y="0"/>
+          <a:ext cx="0" cy="0"/>
+          <a:chOff x="0" y="0"/>
+          <a:chExt cx="0" cy="0"/>
+        </a:xfrm>
+      </p:grpSpPr>
+      <p:sp>
+        <p:nvSpPr>
+          <p:cNvPr id="2" name="Text 0"/>
+          <p:cNvSpPr/>
+          <p:nvPr/>
+        </p:nvSpPr>
+        <p:spPr>
+          <a:xfrm>
+            <a:off x="566928" y="384048"/>
+            <a:ext cx="8229600" cy="274320"/>
+          </a:xfrm>
+          <a:prstGeom prst="rect">
+            <a:avLst/>
+          </a:prstGeom>
+          <a:noFill/>
+          <a:ln/>
+        </p:spPr>
+        <p:txBody>
+          <a:bodyPr wrap="square" lIns="0" tIns="0" rIns="0" bIns="0" rtlCol="0" anchor="ctr"/>
+          <a:lstStyle/>
+          <a:p>
+            <a:pPr algn="l" indent="0" marL="0">
+              <a:buNone/>
+            </a:pPr>
+            <a:r>
+              <a:rPr lang="en-US" sz="1200" b="1" spc="300" kern="0" dirty="0">
+                <a:solidFill>
+                  <a:srgbClr val="C8102E"/>
+                </a:solidFill>
+                <a:latin typeface="Calibri" pitchFamily="34" charset="0"/>
+                <a:ea typeface="Calibri" pitchFamily="34" charset="-122"/>
+                <a:cs typeface="Calibri" pitchFamily="34" charset="-120"/>
+              </a:rPr>
+              <a:t>Aenaへの提言</a:t>
+            </a:r>
+            <a:endParaRPr lang="en-US" sz="1200" dirty="0"/>
+          </a:p>
+        </p:txBody>
+      </p:sp>
+      <p:sp>
+        <p:nvSpPr>
+          <p:cNvPr id="3" name="Text 1"/>
+          <p:cNvSpPr/>
+          <p:nvPr/>
+        </p:nvSpPr>
+        <p:spPr>
+          <a:xfrm>
+            <a:off x="566928" y="658368"/>
+            <a:ext cx="11055096" cy="868680"/>
+          </a:xfrm>
+          <a:prstGeom prst="rect">
+            <a:avLst/>
+          </a:prstGeom>
+          <a:noFill/>
+          <a:ln/>
+        </p:spPr>
+        <p:txBody>
+          <a:bodyPr wrap="square" lIns="0" tIns="0" rIns="0" bIns="0" rtlCol="0" anchor="t"/>
+          <a:lstStyle/>
+          <a:p>
+            <a:pPr algn="l" indent="0" marL="0">
+              <a:buNone/>
+            </a:pPr>
+            <a:r>
+              <a:rPr lang="en-US" sz="3200" b="1" dirty="0">
+                <a:solidFill>
+                  <a:srgbClr val="0E1B3D"/>
+                </a:solidFill>
+                <a:latin typeface="Cambria" pitchFamily="34" charset="0"/>
+                <a:ea typeface="Cambria" pitchFamily="34" charset="-122"/>
+                <a:cs typeface="Cambria" pitchFamily="34" charset="-120"/>
+              </a:rPr>
+              <a:t>S-1に加えて今すぐ着手したい5項目</a:t>
+            </a:r>
+            <a:endParaRPr lang="en-US" sz="3200" dirty="0"/>
+          </a:p>
+        </p:txBody>
+      </p:sp>
+      <p:sp>
+        <p:nvSpPr>
+          <p:cNvPr id="4" name="Shape 2"/>
+          <p:cNvSpPr/>
+          <p:nvPr/>
+        </p:nvSpPr>
+        <p:spPr>
+          <a:xfrm>
+            <a:off x="566928" y="1920240"/>
             <a:ext cx="5344668" cy="1143000"/>
           </a:xfrm>
           <a:prstGeom prst="roundRect">
@@ -5896,13 +6572,13 @@
       </p:sp>
       <p:sp>
         <p:nvSpPr>
-          <p:cNvPr id="20" name="Shape 18"/>
-          <p:cNvSpPr/>
-          <p:nvPr/>
-        </p:nvSpPr>
-        <p:spPr>
-          <a:xfrm>
-            <a:off x="6505956" y="3529584"/>
+          <p:cNvPr id="5" name="Shape 3"/>
+          <p:cNvSpPr/>
+          <p:nvPr/>
+        </p:nvSpPr>
+        <p:spPr>
+          <a:xfrm>
+            <a:off x="795528" y="2203704"/>
             <a:ext cx="566928" cy="566928"/>
           </a:xfrm>
           <a:prstGeom prst="ellipse">
@@ -5916,13 +6592,13 @@
       </p:sp>
       <p:sp>
         <p:nvSpPr>
-          <p:cNvPr id="21" name="Text 19"/>
-          <p:cNvSpPr/>
-          <p:nvPr/>
-        </p:nvSpPr>
-        <p:spPr>
-          <a:xfrm>
-            <a:off x="6505956" y="3529584"/>
+          <p:cNvPr id="6" name="Text 4"/>
+          <p:cNvSpPr/>
+          <p:nvPr/>
+        </p:nvSpPr>
+        <p:spPr>
+          <a:xfrm>
+            <a:off x="795528" y="2203704"/>
             <a:ext cx="566928" cy="566928"/>
           </a:xfrm>
           <a:prstGeom prst="rect">
@@ -5947,7 +6623,7 @@
                 <a:ea typeface="Cambria" pitchFamily="34" charset="-122"/>
                 <a:cs typeface="Cambria" pitchFamily="34" charset="-120"/>
               </a:rPr>
-              <a:t>4</a:t>
+              <a:t>1</a:t>
             </a:r>
             <a:endParaRPr lang="en-US" sz="2200" dirty="0"/>
           </a:p>
@@ -5955,13 +6631,13 @@
       </p:sp>
       <p:sp>
         <p:nvSpPr>
-          <p:cNvPr id="22" name="Text 20"/>
-          <p:cNvSpPr/>
-          <p:nvPr/>
-        </p:nvSpPr>
-        <p:spPr>
-          <a:xfrm>
-            <a:off x="7237476" y="3392424"/>
+          <p:cNvPr id="7" name="Text 5"/>
+          <p:cNvSpPr/>
+          <p:nvPr/>
+        </p:nvSpPr>
+        <p:spPr>
+          <a:xfrm>
+            <a:off x="1527048" y="2066544"/>
             <a:ext cx="4155948" cy="457200"/>
           </a:xfrm>
           <a:prstGeom prst="rect">
@@ -5986,7 +6662,7 @@
                 <a:ea typeface="Cambria" pitchFamily="34" charset="-122"/>
                 <a:cs typeface="Cambria" pitchFamily="34" charset="-120"/>
               </a:rPr>
-              <a:t>SentinelOneの堅牢化設定</a:t>
+              <a:t>外部公開資産の脆弱性検査を定期実施</a:t>
             </a:r>
             <a:endParaRPr lang="en-US" sz="1550" dirty="0"/>
           </a:p>
@@ -5994,13 +6670,13 @@
       </p:sp>
       <p:sp>
         <p:nvSpPr>
-          <p:cNvPr id="23" name="Text 21"/>
-          <p:cNvSpPr/>
-          <p:nvPr/>
-        </p:nvSpPr>
-        <p:spPr>
-          <a:xfrm>
-            <a:off x="7237476" y="3813048"/>
+          <p:cNvPr id="8" name="Text 6"/>
+          <p:cNvSpPr/>
+          <p:nvPr/>
+        </p:nvSpPr>
+        <p:spPr>
+          <a:xfrm>
+            <a:off x="1527048" y="2487168"/>
             <a:ext cx="4155948" cy="502920"/>
           </a:xfrm>
           <a:prstGeom prst="rect">
@@ -6028,7 +6704,7 @@
                 <a:ea typeface="Calibri" pitchFamily="34" charset="-122"/>
                 <a:cs typeface="Calibri" pitchFamily="34" charset="-120"/>
               </a:rPr>
-              <a:t>Online Authorization等で無効化・改ざん回避を難しくする</a:t>
+              <a:t>VPN・公開サーバ・Webを対象に、悪用可能な入口を洗い出す</a:t>
             </a:r>
             <a:endParaRPr lang="en-US" sz="1250" dirty="0"/>
           </a:p>
@@ -6036,14 +6712,14 @@
       </p:sp>
       <p:sp>
         <p:nvSpPr>
-          <p:cNvPr id="24" name="Shape 22"/>
-          <p:cNvSpPr/>
-          <p:nvPr/>
-        </p:nvSpPr>
-        <p:spPr>
-          <a:xfrm>
-            <a:off x="566928" y="4572000"/>
-            <a:ext cx="11055096" cy="1143000"/>
+          <p:cNvPr id="9" name="Shape 7"/>
+          <p:cNvSpPr/>
+          <p:nvPr/>
+        </p:nvSpPr>
+        <p:spPr>
+          <a:xfrm>
+            <a:off x="6277356" y="1920240"/>
+            <a:ext cx="5344668" cy="1143000"/>
           </a:xfrm>
           <a:prstGeom prst="roundRect">
             <a:avLst>
@@ -6070,13 +6746,13 @@
       </p:sp>
       <p:sp>
         <p:nvSpPr>
-          <p:cNvPr id="25" name="Shape 23"/>
-          <p:cNvSpPr/>
-          <p:nvPr/>
-        </p:nvSpPr>
-        <p:spPr>
-          <a:xfrm>
-            <a:off x="795528" y="4855464"/>
+          <p:cNvPr id="10" name="Shape 8"/>
+          <p:cNvSpPr/>
+          <p:nvPr/>
+        </p:nvSpPr>
+        <p:spPr>
+          <a:xfrm>
+            <a:off x="6505956" y="2203704"/>
             <a:ext cx="566928" cy="566928"/>
           </a:xfrm>
           <a:prstGeom prst="ellipse">
@@ -6090,13 +6766,13 @@
       </p:sp>
       <p:sp>
         <p:nvSpPr>
-          <p:cNvPr id="26" name="Text 24"/>
-          <p:cNvSpPr/>
-          <p:nvPr/>
-        </p:nvSpPr>
-        <p:spPr>
-          <a:xfrm>
-            <a:off x="795528" y="4855464"/>
+          <p:cNvPr id="11" name="Text 9"/>
+          <p:cNvSpPr/>
+          <p:nvPr/>
+        </p:nvSpPr>
+        <p:spPr>
+          <a:xfrm>
+            <a:off x="6505956" y="2203704"/>
             <a:ext cx="566928" cy="566928"/>
           </a:xfrm>
           <a:prstGeom prst="rect">
@@ -6121,7 +6797,7 @@
                 <a:ea typeface="Cambria" pitchFamily="34" charset="-122"/>
                 <a:cs typeface="Cambria" pitchFamily="34" charset="-120"/>
               </a:rPr>
-              <a:t>5</a:t>
+              <a:t>2</a:t>
             </a:r>
             <a:endParaRPr lang="en-US" sz="2200" dirty="0"/>
           </a:p>
@@ -6129,14 +6805,14 @@
       </p:sp>
       <p:sp>
         <p:nvSpPr>
-          <p:cNvPr id="27" name="Text 25"/>
-          <p:cNvSpPr/>
-          <p:nvPr/>
-        </p:nvSpPr>
-        <p:spPr>
-          <a:xfrm>
-            <a:off x="1527048" y="4718304"/>
-            <a:ext cx="9866376" cy="457200"/>
+          <p:cNvPr id="12" name="Text 10"/>
+          <p:cNvSpPr/>
+          <p:nvPr/>
+        </p:nvSpPr>
+        <p:spPr>
+          <a:xfrm>
+            <a:off x="7237476" y="2066544"/>
+            <a:ext cx="4155948" cy="457200"/>
           </a:xfrm>
           <a:prstGeom prst="rect">
             <a:avLst/>
@@ -6160,7 +6836,7 @@
                 <a:ea typeface="Cambria" pitchFamily="34" charset="-122"/>
                 <a:cs typeface="Cambria" pitchFamily="34" charset="-120"/>
               </a:rPr>
-              <a:t>バックアップと復旧訓練</a:t>
+              <a:t>パッチ運用の徹底と棚卸し</a:t>
             </a:r>
             <a:endParaRPr lang="en-US" sz="1550" dirty="0"/>
           </a:p>
@@ -6168,14 +6844,14 @@
       </p:sp>
       <p:sp>
         <p:nvSpPr>
-          <p:cNvPr id="28" name="Text 26"/>
-          <p:cNvSpPr/>
-          <p:nvPr/>
-        </p:nvSpPr>
-        <p:spPr>
-          <a:xfrm>
-            <a:off x="1527048" y="5138928"/>
-            <a:ext cx="9866376" cy="502920"/>
+          <p:cNvPr id="13" name="Text 11"/>
+          <p:cNvSpPr/>
+          <p:nvPr/>
+        </p:nvSpPr>
+        <p:spPr>
+          <a:xfrm>
+            <a:off x="7237476" y="2487168"/>
+            <a:ext cx="4155948" cy="502920"/>
           </a:xfrm>
           <a:prstGeom prst="rect">
             <a:avLst/>
@@ -6202,7 +6878,7 @@
                 <a:ea typeface="Calibri" pitchFamily="34" charset="-122"/>
                 <a:cs typeface="Calibri" pitchFamily="34" charset="-120"/>
               </a:rPr>
-              <a:t>暗号化されても事業を止めない。オフライン保管と定期演習</a:t>
+              <a:t>侵入元の約半数は未パッチ。適用状況を継続的に可視化</a:t>
             </a:r>
             <a:endParaRPr lang="en-US" sz="1250" dirty="0"/>
           </a:p>
@@ -6210,14 +6886,68 @@
       </p:sp>
       <p:sp>
         <p:nvSpPr>
-          <p:cNvPr id="29" name="Text 27"/>
-          <p:cNvSpPr/>
-          <p:nvPr/>
-        </p:nvSpPr>
-        <p:spPr>
-          <a:xfrm>
-            <a:off x="11411712" y="6400800"/>
-            <a:ext cx="457200" cy="274320"/>
+          <p:cNvPr id="14" name="Shape 12"/>
+          <p:cNvSpPr/>
+          <p:nvPr/>
+        </p:nvSpPr>
+        <p:spPr>
+          <a:xfrm>
+            <a:off x="566928" y="3246120"/>
+            <a:ext cx="5344668" cy="1143000"/>
+          </a:xfrm>
+          <a:prstGeom prst="roundRect">
+            <a:avLst>
+              <a:gd name="adj" fmla="val 6400"/>
+            </a:avLst>
+          </a:prstGeom>
+          <a:solidFill>
+            <a:srgbClr val="F4F6FB"/>
+          </a:solidFill>
+          <a:ln w="12700">
+            <a:solidFill>
+              <a:srgbClr val="E2E8F4"/>
+            </a:solidFill>
+            <a:prstDash val="solid"/>
+          </a:ln>
+          <a:effectLst>
+            <a:outerShdw sx="100000" sy="100000" kx="0" ky="0" algn="bl" rotWithShape="0" blurRad="101600" dist="38100" dir="5400000">
+              <a:srgbClr val="8A93A6">
+                <a:alpha val="28000"/>
+              </a:srgbClr>
+            </a:outerShdw>
+          </a:effectLst>
+        </p:spPr>
+      </p:sp>
+      <p:sp>
+        <p:nvSpPr>
+          <p:cNvPr id="15" name="Shape 13"/>
+          <p:cNvSpPr/>
+          <p:nvPr/>
+        </p:nvSpPr>
+        <p:spPr>
+          <a:xfrm>
+            <a:off x="795528" y="3529584"/>
+            <a:ext cx="566928" cy="566928"/>
+          </a:xfrm>
+          <a:prstGeom prst="ellipse">
+            <a:avLst/>
+          </a:prstGeom>
+          <a:solidFill>
+            <a:srgbClr val="C8102E"/>
+          </a:solidFill>
+          <a:ln/>
+        </p:spPr>
+      </p:sp>
+      <p:sp>
+        <p:nvSpPr>
+          <p:cNvPr id="16" name="Text 14"/>
+          <p:cNvSpPr/>
+          <p:nvPr/>
+        </p:nvSpPr>
+        <p:spPr>
+          <a:xfrm>
+            <a:off x="795528" y="3529584"/>
+            <a:ext cx="566928" cy="566928"/>
           </a:xfrm>
           <a:prstGeom prst="rect">
             <a:avLst/>
@@ -6229,19 +6959,487 @@
           <a:bodyPr wrap="square" lIns="0" tIns="0" rIns="0" bIns="0" rtlCol="0" anchor="ctr"/>
           <a:lstStyle/>
           <a:p>
-            <a:pPr algn="r" indent="0" marL="0">
-              <a:buNone/>
-            </a:pPr>
-            <a:r>
-              <a:rPr lang="en-US" sz="1000" dirty="0">
-                <a:solidFill>
-                  <a:srgbClr val="68738A"/>
+            <a:pPr algn="ctr" indent="0" marL="0">
+              <a:buNone/>
+            </a:pPr>
+            <a:r>
+              <a:rPr lang="en-US" sz="2200" b="1" dirty="0">
+                <a:solidFill>
+                  <a:srgbClr val="FFFFFF"/>
+                </a:solidFill>
+                <a:latin typeface="Cambria" pitchFamily="34" charset="0"/>
+                <a:ea typeface="Cambria" pitchFamily="34" charset="-122"/>
+                <a:cs typeface="Cambria" pitchFamily="34" charset="-120"/>
+              </a:rPr>
+              <a:t>3</a:t>
+            </a:r>
+            <a:endParaRPr lang="en-US" sz="2200" dirty="0"/>
+          </a:p>
+        </p:txBody>
+      </p:sp>
+      <p:sp>
+        <p:nvSpPr>
+          <p:cNvPr id="17" name="Text 15"/>
+          <p:cNvSpPr/>
+          <p:nvPr/>
+        </p:nvSpPr>
+        <p:spPr>
+          <a:xfrm>
+            <a:off x="1527048" y="3392424"/>
+            <a:ext cx="4155948" cy="457200"/>
+          </a:xfrm>
+          <a:prstGeom prst="rect">
+            <a:avLst/>
+          </a:prstGeom>
+          <a:noFill/>
+          <a:ln/>
+        </p:spPr>
+        <p:txBody>
+          <a:bodyPr wrap="square" lIns="0" tIns="0" rIns="0" bIns="0" rtlCol="0" anchor="t"/>
+          <a:lstStyle/>
+          <a:p>
+            <a:pPr indent="0" marL="0">
+              <a:buNone/>
+            </a:pPr>
+            <a:r>
+              <a:rPr lang="en-US" sz="1550" b="1" dirty="0">
+                <a:solidFill>
+                  <a:srgbClr val="0E1B3D"/>
+                </a:solidFill>
+                <a:latin typeface="Cambria" pitchFamily="34" charset="0"/>
+                <a:ea typeface="Cambria" pitchFamily="34" charset="-122"/>
+                <a:cs typeface="Cambria" pitchFamily="34" charset="-120"/>
+              </a:rPr>
+              <a:t>認証の強化（MFA・特権管理）</a:t>
+            </a:r>
+            <a:endParaRPr lang="en-US" sz="1550" dirty="0"/>
+          </a:p>
+        </p:txBody>
+      </p:sp>
+      <p:sp>
+        <p:nvSpPr>
+          <p:cNvPr id="18" name="Text 16"/>
+          <p:cNvSpPr/>
+          <p:nvPr/>
+        </p:nvSpPr>
+        <p:spPr>
+          <a:xfrm>
+            <a:off x="1527048" y="3813048"/>
+            <a:ext cx="4155948" cy="502920"/>
+          </a:xfrm>
+          <a:prstGeom prst="rect">
+            <a:avLst/>
+          </a:prstGeom>
+          <a:noFill/>
+          <a:ln/>
+        </p:spPr>
+        <p:txBody>
+          <a:bodyPr wrap="square" lIns="0" tIns="0" rIns="0" bIns="0" rtlCol="0" anchor="t"/>
+          <a:lstStyle/>
+          <a:p>
+            <a:pPr indent="0" marL="0">
+              <a:lnSpc>
+                <a:spcPts val="1600"/>
+              </a:lnSpc>
+              <a:buNone/>
+            </a:pPr>
+            <a:r>
+              <a:rPr lang="en-US" sz="1250" dirty="0">
+                <a:solidFill>
+                  <a:srgbClr val="1A2332"/>
                 </a:solidFill>
                 <a:latin typeface="Calibri" pitchFamily="34" charset="0"/>
                 <a:ea typeface="Calibri" pitchFamily="34" charset="-122"/>
                 <a:cs typeface="Calibri" pitchFamily="34" charset="-120"/>
               </a:rPr>
-              <a:t>12</a:t>
+              <a:t>盗まれた正規アカウントでの侵入を防ぐ。ADの保護を優先</a:t>
+            </a:r>
+            <a:endParaRPr lang="en-US" sz="1250" dirty="0"/>
+          </a:p>
+        </p:txBody>
+      </p:sp>
+      <p:sp>
+        <p:nvSpPr>
+          <p:cNvPr id="19" name="Shape 17"/>
+          <p:cNvSpPr/>
+          <p:nvPr/>
+        </p:nvSpPr>
+        <p:spPr>
+          <a:xfrm>
+            <a:off x="6277356" y="3246120"/>
+            <a:ext cx="5344668" cy="1143000"/>
+          </a:xfrm>
+          <a:prstGeom prst="roundRect">
+            <a:avLst>
+              <a:gd name="adj" fmla="val 6400"/>
+            </a:avLst>
+          </a:prstGeom>
+          <a:solidFill>
+            <a:srgbClr val="F4F6FB"/>
+          </a:solidFill>
+          <a:ln w="12700">
+            <a:solidFill>
+              <a:srgbClr val="E2E8F4"/>
+            </a:solidFill>
+            <a:prstDash val="solid"/>
+          </a:ln>
+          <a:effectLst>
+            <a:outerShdw sx="100000" sy="100000" kx="0" ky="0" algn="bl" rotWithShape="0" blurRad="101600" dist="38100" dir="5400000">
+              <a:srgbClr val="8A93A6">
+                <a:alpha val="28000"/>
+              </a:srgbClr>
+            </a:outerShdw>
+          </a:effectLst>
+        </p:spPr>
+      </p:sp>
+      <p:sp>
+        <p:nvSpPr>
+          <p:cNvPr id="20" name="Shape 18"/>
+          <p:cNvSpPr/>
+          <p:nvPr/>
+        </p:nvSpPr>
+        <p:spPr>
+          <a:xfrm>
+            <a:off x="6505956" y="3529584"/>
+            <a:ext cx="566928" cy="566928"/>
+          </a:xfrm>
+          <a:prstGeom prst="ellipse">
+            <a:avLst/>
+          </a:prstGeom>
+          <a:solidFill>
+            <a:srgbClr val="C8102E"/>
+          </a:solidFill>
+          <a:ln/>
+        </p:spPr>
+      </p:sp>
+      <p:sp>
+        <p:nvSpPr>
+          <p:cNvPr id="21" name="Text 19"/>
+          <p:cNvSpPr/>
+          <p:nvPr/>
+        </p:nvSpPr>
+        <p:spPr>
+          <a:xfrm>
+            <a:off x="6505956" y="3529584"/>
+            <a:ext cx="566928" cy="566928"/>
+          </a:xfrm>
+          <a:prstGeom prst="rect">
+            <a:avLst/>
+          </a:prstGeom>
+          <a:noFill/>
+          <a:ln/>
+        </p:spPr>
+        <p:txBody>
+          <a:bodyPr wrap="square" lIns="0" tIns="0" rIns="0" bIns="0" rtlCol="0" anchor="ctr"/>
+          <a:lstStyle/>
+          <a:p>
+            <a:pPr algn="ctr" indent="0" marL="0">
+              <a:buNone/>
+            </a:pPr>
+            <a:r>
+              <a:rPr lang="en-US" sz="2200" b="1" dirty="0">
+                <a:solidFill>
+                  <a:srgbClr val="FFFFFF"/>
+                </a:solidFill>
+                <a:latin typeface="Cambria" pitchFamily="34" charset="0"/>
+                <a:ea typeface="Cambria" pitchFamily="34" charset="-122"/>
+                <a:cs typeface="Cambria" pitchFamily="34" charset="-120"/>
+              </a:rPr>
+              <a:t>4</a:t>
+            </a:r>
+            <a:endParaRPr lang="en-US" sz="2200" dirty="0"/>
+          </a:p>
+        </p:txBody>
+      </p:sp>
+      <p:sp>
+        <p:nvSpPr>
+          <p:cNvPr id="22" name="Text 20"/>
+          <p:cNvSpPr/>
+          <p:nvPr/>
+        </p:nvSpPr>
+        <p:spPr>
+          <a:xfrm>
+            <a:off x="7237476" y="3392424"/>
+            <a:ext cx="4155948" cy="457200"/>
+          </a:xfrm>
+          <a:prstGeom prst="rect">
+            <a:avLst/>
+          </a:prstGeom>
+          <a:noFill/>
+          <a:ln/>
+        </p:spPr>
+        <p:txBody>
+          <a:bodyPr wrap="square" lIns="0" tIns="0" rIns="0" bIns="0" rtlCol="0" anchor="t"/>
+          <a:lstStyle/>
+          <a:p>
+            <a:pPr indent="0" marL="0">
+              <a:buNone/>
+            </a:pPr>
+            <a:r>
+              <a:rPr lang="en-US" sz="1550" b="1" dirty="0">
+                <a:solidFill>
+                  <a:srgbClr val="0E1B3D"/>
+                </a:solidFill>
+                <a:latin typeface="Cambria" pitchFamily="34" charset="0"/>
+                <a:ea typeface="Cambria" pitchFamily="34" charset="-122"/>
+                <a:cs typeface="Cambria" pitchFamily="34" charset="-120"/>
+              </a:rPr>
+              <a:t>SentinelOneの堅牢化設定</a:t>
+            </a:r>
+            <a:endParaRPr lang="en-US" sz="1550" dirty="0"/>
+          </a:p>
+        </p:txBody>
+      </p:sp>
+      <p:sp>
+        <p:nvSpPr>
+          <p:cNvPr id="23" name="Text 21"/>
+          <p:cNvSpPr/>
+          <p:nvPr/>
+        </p:nvSpPr>
+        <p:spPr>
+          <a:xfrm>
+            <a:off x="7237476" y="3813048"/>
+            <a:ext cx="4155948" cy="502920"/>
+          </a:xfrm>
+          <a:prstGeom prst="rect">
+            <a:avLst/>
+          </a:prstGeom>
+          <a:noFill/>
+          <a:ln/>
+        </p:spPr>
+        <p:txBody>
+          <a:bodyPr wrap="square" lIns="0" tIns="0" rIns="0" bIns="0" rtlCol="0" anchor="t"/>
+          <a:lstStyle/>
+          <a:p>
+            <a:pPr indent="0" marL="0">
+              <a:lnSpc>
+                <a:spcPts val="1600"/>
+              </a:lnSpc>
+              <a:buNone/>
+            </a:pPr>
+            <a:r>
+              <a:rPr lang="en-US" sz="1250" dirty="0">
+                <a:solidFill>
+                  <a:srgbClr val="1A2332"/>
+                </a:solidFill>
+                <a:latin typeface="Calibri" pitchFamily="34" charset="0"/>
+                <a:ea typeface="Calibri" pitchFamily="34" charset="-122"/>
+                <a:cs typeface="Calibri" pitchFamily="34" charset="-120"/>
+              </a:rPr>
+              <a:t>Online Authorization等で無効化・改ざん回避を難しくする</a:t>
+            </a:r>
+            <a:endParaRPr lang="en-US" sz="1250" dirty="0"/>
+          </a:p>
+        </p:txBody>
+      </p:sp>
+      <p:sp>
+        <p:nvSpPr>
+          <p:cNvPr id="24" name="Shape 22"/>
+          <p:cNvSpPr/>
+          <p:nvPr/>
+        </p:nvSpPr>
+        <p:spPr>
+          <a:xfrm>
+            <a:off x="566928" y="4572000"/>
+            <a:ext cx="11055096" cy="1143000"/>
+          </a:xfrm>
+          <a:prstGeom prst="roundRect">
+            <a:avLst>
+              <a:gd name="adj" fmla="val 6400"/>
+            </a:avLst>
+          </a:prstGeom>
+          <a:solidFill>
+            <a:srgbClr val="F4F6FB"/>
+          </a:solidFill>
+          <a:ln w="12700">
+            <a:solidFill>
+              <a:srgbClr val="E2E8F4"/>
+            </a:solidFill>
+            <a:prstDash val="solid"/>
+          </a:ln>
+          <a:effectLst>
+            <a:outerShdw sx="100000" sy="100000" kx="0" ky="0" algn="bl" rotWithShape="0" blurRad="101600" dist="38100" dir="5400000">
+              <a:srgbClr val="8A93A6">
+                <a:alpha val="28000"/>
+              </a:srgbClr>
+            </a:outerShdw>
+          </a:effectLst>
+        </p:spPr>
+      </p:sp>
+      <p:sp>
+        <p:nvSpPr>
+          <p:cNvPr id="25" name="Shape 23"/>
+          <p:cNvSpPr/>
+          <p:nvPr/>
+        </p:nvSpPr>
+        <p:spPr>
+          <a:xfrm>
+            <a:off x="795528" y="4855464"/>
+            <a:ext cx="566928" cy="566928"/>
+          </a:xfrm>
+          <a:prstGeom prst="ellipse">
+            <a:avLst/>
+          </a:prstGeom>
+          <a:solidFill>
+            <a:srgbClr val="C8102E"/>
+          </a:solidFill>
+          <a:ln/>
+        </p:spPr>
+      </p:sp>
+      <p:sp>
+        <p:nvSpPr>
+          <p:cNvPr id="26" name="Text 24"/>
+          <p:cNvSpPr/>
+          <p:nvPr/>
+        </p:nvSpPr>
+        <p:spPr>
+          <a:xfrm>
+            <a:off x="795528" y="4855464"/>
+            <a:ext cx="566928" cy="566928"/>
+          </a:xfrm>
+          <a:prstGeom prst="rect">
+            <a:avLst/>
+          </a:prstGeom>
+          <a:noFill/>
+          <a:ln/>
+        </p:spPr>
+        <p:txBody>
+          <a:bodyPr wrap="square" lIns="0" tIns="0" rIns="0" bIns="0" rtlCol="0" anchor="ctr"/>
+          <a:lstStyle/>
+          <a:p>
+            <a:pPr algn="ctr" indent="0" marL="0">
+              <a:buNone/>
+            </a:pPr>
+            <a:r>
+              <a:rPr lang="en-US" sz="2200" b="1" dirty="0">
+                <a:solidFill>
+                  <a:srgbClr val="FFFFFF"/>
+                </a:solidFill>
+                <a:latin typeface="Cambria" pitchFamily="34" charset="0"/>
+                <a:ea typeface="Cambria" pitchFamily="34" charset="-122"/>
+                <a:cs typeface="Cambria" pitchFamily="34" charset="-120"/>
+              </a:rPr>
+              <a:t>5</a:t>
+            </a:r>
+            <a:endParaRPr lang="en-US" sz="2200" dirty="0"/>
+          </a:p>
+        </p:txBody>
+      </p:sp>
+      <p:sp>
+        <p:nvSpPr>
+          <p:cNvPr id="27" name="Text 25"/>
+          <p:cNvSpPr/>
+          <p:nvPr/>
+        </p:nvSpPr>
+        <p:spPr>
+          <a:xfrm>
+            <a:off x="1527048" y="4718304"/>
+            <a:ext cx="9866376" cy="457200"/>
+          </a:xfrm>
+          <a:prstGeom prst="rect">
+            <a:avLst/>
+          </a:prstGeom>
+          <a:noFill/>
+          <a:ln/>
+        </p:spPr>
+        <p:txBody>
+          <a:bodyPr wrap="square" lIns="0" tIns="0" rIns="0" bIns="0" rtlCol="0" anchor="t"/>
+          <a:lstStyle/>
+          <a:p>
+            <a:pPr indent="0" marL="0">
+              <a:buNone/>
+            </a:pPr>
+            <a:r>
+              <a:rPr lang="en-US" sz="1550" b="1" dirty="0">
+                <a:solidFill>
+                  <a:srgbClr val="0E1B3D"/>
+                </a:solidFill>
+                <a:latin typeface="Cambria" pitchFamily="34" charset="0"/>
+                <a:ea typeface="Cambria" pitchFamily="34" charset="-122"/>
+                <a:cs typeface="Cambria" pitchFamily="34" charset="-120"/>
+              </a:rPr>
+              <a:t>バックアップと復旧訓練</a:t>
+            </a:r>
+            <a:endParaRPr lang="en-US" sz="1550" dirty="0"/>
+          </a:p>
+        </p:txBody>
+      </p:sp>
+      <p:sp>
+        <p:nvSpPr>
+          <p:cNvPr id="28" name="Text 26"/>
+          <p:cNvSpPr/>
+          <p:nvPr/>
+        </p:nvSpPr>
+        <p:spPr>
+          <a:xfrm>
+            <a:off x="1527048" y="5138928"/>
+            <a:ext cx="9866376" cy="502920"/>
+          </a:xfrm>
+          <a:prstGeom prst="rect">
+            <a:avLst/>
+          </a:prstGeom>
+          <a:noFill/>
+          <a:ln/>
+        </p:spPr>
+        <p:txBody>
+          <a:bodyPr wrap="square" lIns="0" tIns="0" rIns="0" bIns="0" rtlCol="0" anchor="t"/>
+          <a:lstStyle/>
+          <a:p>
+            <a:pPr indent="0" marL="0">
+              <a:lnSpc>
+                <a:spcPts val="1600"/>
+              </a:lnSpc>
+              <a:buNone/>
+            </a:pPr>
+            <a:r>
+              <a:rPr lang="en-US" sz="1250" dirty="0">
+                <a:solidFill>
+                  <a:srgbClr val="1A2332"/>
+                </a:solidFill>
+                <a:latin typeface="Calibri" pitchFamily="34" charset="0"/>
+                <a:ea typeface="Calibri" pitchFamily="34" charset="-122"/>
+                <a:cs typeface="Calibri" pitchFamily="34" charset="-120"/>
+              </a:rPr>
+              <a:t>暗号化されても事業を止めない。オフライン保管と定期演習</a:t>
+            </a:r>
+            <a:endParaRPr lang="en-US" sz="1250" dirty="0"/>
+          </a:p>
+        </p:txBody>
+      </p:sp>
+      <p:sp>
+        <p:nvSpPr>
+          <p:cNvPr id="29" name="Text 27"/>
+          <p:cNvSpPr/>
+          <p:nvPr/>
+        </p:nvSpPr>
+        <p:spPr>
+          <a:xfrm>
+            <a:off x="11411712" y="6400800"/>
+            <a:ext cx="457200" cy="274320"/>
+          </a:xfrm>
+          <a:prstGeom prst="rect">
+            <a:avLst/>
+          </a:prstGeom>
+          <a:noFill/>
+          <a:ln/>
+        </p:spPr>
+        <p:txBody>
+          <a:bodyPr wrap="square" lIns="0" tIns="0" rIns="0" bIns="0" rtlCol="0" anchor="ctr"/>
+          <a:lstStyle/>
+          <a:p>
+            <a:pPr algn="r" indent="0" marL="0">
+              <a:buNone/>
+            </a:pPr>
+            <a:r>
+              <a:rPr lang="en-US" sz="1000" dirty="0">
+                <a:solidFill>
+                  <a:srgbClr val="68738A"/>
+                </a:solidFill>
+                <a:latin typeface="Calibri" pitchFamily="34" charset="0"/>
+                <a:ea typeface="Calibri" pitchFamily="34" charset="-122"/>
+                <a:cs typeface="Calibri" pitchFamily="34" charset="-120"/>
+              </a:rPr>
+              <a:t>13</a:t>
             </a:r>
             <a:endParaRPr lang="en-US" sz="1000" dirty="0"/>
           </a:p>
@@ -6255,9 +7453,9 @@
 </p:sld>
 </file>
 
-<file path=ppt/slides/slide13.xml><?xml version="1.0" encoding="utf-8"?>
+<file path=ppt/slides/slide14.xml><?xml version="1.0" encoding="utf-8"?>
 <p:sld xmlns:a="http://schemas.openxmlformats.org/drawingml/2006/main" xmlns:r="http://schemas.openxmlformats.org/officeDocument/2006/relationships" xmlns:p="http://schemas.openxmlformats.org/presentationml/2006/main">
-  <p:cSld name="Slide 13">
+  <p:cSld name="Slide 14">
     <p:bg>
       <p:bgPr>
         <a:solidFill>
@@ -6594,7 +7792,7 @@
                 <a:ea typeface="Calibri" pitchFamily="34" charset="-122"/>
                 <a:cs typeface="Calibri" pitchFamily="34" charset="-120"/>
               </a:rPr>
-              <a:t>13</a:t>
+              <a:t>14</a:t>
             </a:r>
             <a:endParaRPr lang="en-US" sz="1000" dirty="0"/>
           </a:p>
@@ -6608,9 +7806,9 @@
 </p:sld>
 </file>
 
-<file path=ppt/slides/slide14.xml><?xml version="1.0" encoding="utf-8"?>
+<file path=ppt/slides/slide15.xml><?xml version="1.0" encoding="utf-8"?>
 <p:sld xmlns:a="http://schemas.openxmlformats.org/drawingml/2006/main" xmlns:r="http://schemas.openxmlformats.org/officeDocument/2006/relationships" xmlns:p="http://schemas.openxmlformats.org/presentationml/2006/main">
-  <p:cSld name="Slide 14">
+  <p:cSld name="Slide 15">
     <p:bg>
       <p:bgPr>
         <a:solidFill>
@@ -6972,7 +8170,7 @@
                 <a:ea typeface="Calibri" pitchFamily="34" charset="-122"/>
                 <a:cs typeface="Calibri" pitchFamily="34" charset="-120"/>
               </a:rPr>
-              <a:t>14</a:t>
+              <a:t>15</a:t>
             </a:r>
             <a:endParaRPr lang="en-US" sz="1000" dirty="0"/>
           </a:p>
@@ -8741,7 +9939,7 @@
                 <a:ea typeface="Calibri" pitchFamily="34" charset="-122"/>
                 <a:cs typeface="Calibri" pitchFamily="34" charset="-120"/>
               </a:rPr>
-              <a:t>Active Directory を標的に管理者権限を奪い拡散</a:t>
+              <a:t>認証基盤（AD／SQL認証DB等）を標的に権限を奪い拡散</a:t>
             </a:r>
             <a:endParaRPr lang="en-US" sz="1150" dirty="0"/>
           </a:p>
@@ -10788,8 +11986,8 @@
         </p:nvSpPr>
         <p:spPr>
           <a:xfrm>
-            <a:off x="7315200" y="4590288"/>
-            <a:ext cx="4032504" cy="1097280"/>
+            <a:off x="7315200" y="4553712"/>
+            <a:ext cx="4032504" cy="1188720"/>
           </a:xfrm>
           <a:prstGeom prst="rect">
             <a:avLst/>
@@ -10803,15 +12001,15 @@
           <a:p>
             <a:pPr indent="0" marL="0">
               <a:lnSpc>
-                <a:spcPts val="1800"/>
+                <a:spcPts val="1500"/>
               </a:lnSpc>
               <a:spcAft>
-                <a:spcPts val="400"/>
+                <a:spcPts val="300"/>
               </a:spcAft>
               <a:buNone/>
             </a:pPr>
             <a:r>
-              <a:rPr lang="en-US" sz="1300" b="1" dirty="0">
+              <a:rPr lang="en-US" sz="1200" b="1" dirty="0">
                 <a:solidFill>
                   <a:srgbClr val="9FE0B5"/>
                 </a:solidFill>
@@ -10819,19 +12017,22 @@
                 <a:ea typeface="Calibri" pitchFamily="34" charset="-122"/>
                 <a:cs typeface="Calibri" pitchFamily="34" charset="-120"/>
               </a:rPr>
-              <a:t>緩和策（S-1側）：</a:t>
-            </a:r>
-            <a:endParaRPr lang="en-US" sz="1300" dirty="0"/>
+              <a:t>緩和策（S-1側・2025年1月提供）：</a:t>
+            </a:r>
+            <a:endParaRPr lang="en-US" sz="1200" dirty="0"/>
           </a:p>
           <a:p>
             <a:pPr indent="0" marL="0">
               <a:lnSpc>
-                <a:spcPts val="1800"/>
+                <a:spcPts val="1500"/>
               </a:lnSpc>
-              <a:buNone/>
-            </a:pPr>
-            <a:r>
-              <a:rPr lang="en-US" sz="1300" dirty="0">
+              <a:spcAft>
+                <a:spcPts val="300"/>
+              </a:spcAft>
+              <a:buNone/>
+            </a:pPr>
+            <a:r>
+              <a:rPr lang="en-US" sz="1200" dirty="0">
                 <a:solidFill>
                   <a:srgbClr val="DCE6F5"/>
                 </a:solidFill>
@@ -10839,9 +12040,29 @@
                 <a:ea typeface="Calibri" pitchFamily="34" charset="-122"/>
                 <a:cs typeface="Calibri" pitchFamily="34" charset="-120"/>
               </a:rPr>
-              <a:t>「Online Authorization」を有効化し、端末ローカルでのアップグレード/ダウングレードを禁止する。</a:t>
-            </a:r>
-            <a:endParaRPr lang="en-US" sz="1300" dirty="0"/>
+              <a:t>「Online Authorization」有効化＋検知ルール追加。</a:t>
+            </a:r>
+            <a:endParaRPr lang="en-US" sz="1200" dirty="0"/>
+          </a:p>
+          <a:p>
+            <a:pPr indent="0" marL="0">
+              <a:lnSpc>
+                <a:spcPts val="1500"/>
+              </a:lnSpc>
+              <a:buNone/>
+            </a:pPr>
+            <a:r>
+              <a:rPr lang="en-US" sz="1100" dirty="0">
+                <a:solidFill>
+                  <a:srgbClr val="FFD9A0"/>
+                </a:solidFill>
+                <a:latin typeface="Calibri" pitchFamily="34" charset="0"/>
+                <a:ea typeface="Calibri" pitchFamily="34" charset="-122"/>
+                <a:cs typeface="Calibri" pitchFamily="34" charset="-120"/>
+              </a:rPr>
+              <a:t>※既存導入は既定OFF＝手動で有効化を確認しない限り未対策。</a:t>
+            </a:r>
+            <a:endParaRPr lang="en-US" sz="1200" dirty="0"/>
           </a:p>
         </p:txBody>
       </p:sp>

--- a/成果物/SentinelOne導入後も脆弱性検査が必要な理由.pptx
+++ b/成果物/SentinelOne導入後も脆弱性検査が必要な理由.pptx
@@ -6530,7 +6530,7 @@
                 <a:ea typeface="Cambria" pitchFamily="34" charset="-122"/>
                 <a:cs typeface="Cambria" pitchFamily="34" charset="-120"/>
               </a:rPr>
-              <a:t>S-1に加えて今すぐ着手したい5項目</a:t>
+              <a:t>S-1に加えて今すぐ着手したい6項目</a:t>
             </a:r>
             <a:endParaRPr lang="en-US" sz="3200" dirty="0"/>
           </a:p>
@@ -6544,12 +6544,12 @@
         </p:nvSpPr>
         <p:spPr>
           <a:xfrm>
-            <a:off x="566928" y="1920240"/>
-            <a:ext cx="5344668" cy="1143000"/>
+            <a:off x="566928" y="1874520"/>
+            <a:ext cx="5344668" cy="1188720"/>
           </a:xfrm>
           <a:prstGeom prst="roundRect">
             <a:avLst>
-              <a:gd name="adj" fmla="val 6400"/>
+              <a:gd name="adj" fmla="val 6154"/>
             </a:avLst>
           </a:prstGeom>
           <a:solidFill>
@@ -6578,7 +6578,7 @@
         </p:nvSpPr>
         <p:spPr>
           <a:xfrm>
-            <a:off x="795528" y="2203704"/>
+            <a:off x="795528" y="2185416"/>
             <a:ext cx="566928" cy="566928"/>
           </a:xfrm>
           <a:prstGeom prst="ellipse">
@@ -6598,7 +6598,7 @@
         </p:nvSpPr>
         <p:spPr>
           <a:xfrm>
-            <a:off x="795528" y="2203704"/>
+            <a:off x="795528" y="2185416"/>
             <a:ext cx="566928" cy="566928"/>
           </a:xfrm>
           <a:prstGeom prst="rect">
@@ -6637,7 +6637,7 @@
         </p:nvSpPr>
         <p:spPr>
           <a:xfrm>
-            <a:off x="1527048" y="2066544"/>
+            <a:off x="1527048" y="2011680"/>
             <a:ext cx="4155948" cy="457200"/>
           </a:xfrm>
           <a:prstGeom prst="rect">
@@ -6651,10 +6651,13 @@
           <a:lstStyle/>
           <a:p>
             <a:pPr indent="0" marL="0">
-              <a:buNone/>
-            </a:pPr>
-            <a:r>
-              <a:rPr lang="en-US" sz="1550" b="1" dirty="0">
+              <a:lnSpc>
+                <a:spcPts val="1700"/>
+              </a:lnSpc>
+              <a:buNone/>
+            </a:pPr>
+            <a:r>
+              <a:rPr lang="en-US" sz="1450" b="1" dirty="0">
                 <a:solidFill>
                   <a:srgbClr val="0E1B3D"/>
                 </a:solidFill>
@@ -6664,7 +6667,7 @@
               </a:rPr>
               <a:t>外部公開資産の脆弱性検査を定期実施</a:t>
             </a:r>
-            <a:endParaRPr lang="en-US" sz="1550" dirty="0"/>
+            <a:endParaRPr lang="en-US" sz="1450" dirty="0"/>
           </a:p>
         </p:txBody>
       </p:sp>
@@ -6676,8 +6679,8 @@
         </p:nvSpPr>
         <p:spPr>
           <a:xfrm>
-            <a:off x="1527048" y="2487168"/>
-            <a:ext cx="4155948" cy="502920"/>
+            <a:off x="1527048" y="2478024"/>
+            <a:ext cx="4155948" cy="512064"/>
           </a:xfrm>
           <a:prstGeom prst="rect">
             <a:avLst/>
@@ -6691,12 +6694,12 @@
           <a:p>
             <a:pPr indent="0" marL="0">
               <a:lnSpc>
-                <a:spcPts val="1600"/>
+                <a:spcPts val="1500"/>
               </a:lnSpc>
               <a:buNone/>
             </a:pPr>
             <a:r>
-              <a:rPr lang="en-US" sz="1250" dirty="0">
+              <a:rPr lang="en-US" sz="1200" dirty="0">
                 <a:solidFill>
                   <a:srgbClr val="1A2332"/>
                 </a:solidFill>
@@ -6704,9 +6707,9 @@
                 <a:ea typeface="Calibri" pitchFamily="34" charset="-122"/>
                 <a:cs typeface="Calibri" pitchFamily="34" charset="-120"/>
               </a:rPr>
-              <a:t>VPN・公開サーバ・Webを対象に、悪用可能な入口を洗い出す</a:t>
-            </a:r>
-            <a:endParaRPr lang="en-US" sz="1250" dirty="0"/>
+              <a:t>VPN・公開サーバ・Web/アプリ（SQLi含む）で悪用可能な入口を洗い出す</a:t>
+            </a:r>
+            <a:endParaRPr lang="en-US" sz="1200" dirty="0"/>
           </a:p>
         </p:txBody>
       </p:sp>
@@ -6718,12 +6721,12 @@
         </p:nvSpPr>
         <p:spPr>
           <a:xfrm>
-            <a:off x="6277356" y="1920240"/>
-            <a:ext cx="5344668" cy="1143000"/>
+            <a:off x="6277356" y="1874520"/>
+            <a:ext cx="5344668" cy="1188720"/>
           </a:xfrm>
           <a:prstGeom prst="roundRect">
             <a:avLst>
-              <a:gd name="adj" fmla="val 6400"/>
+              <a:gd name="adj" fmla="val 6154"/>
             </a:avLst>
           </a:prstGeom>
           <a:solidFill>
@@ -6752,7 +6755,7 @@
         </p:nvSpPr>
         <p:spPr>
           <a:xfrm>
-            <a:off x="6505956" y="2203704"/>
+            <a:off x="6505956" y="2185416"/>
             <a:ext cx="566928" cy="566928"/>
           </a:xfrm>
           <a:prstGeom prst="ellipse">
@@ -6772,7 +6775,7 @@
         </p:nvSpPr>
         <p:spPr>
           <a:xfrm>
-            <a:off x="6505956" y="2203704"/>
+            <a:off x="6505956" y="2185416"/>
             <a:ext cx="566928" cy="566928"/>
           </a:xfrm>
           <a:prstGeom prst="rect">
@@ -6811,7 +6814,7 @@
         </p:nvSpPr>
         <p:spPr>
           <a:xfrm>
-            <a:off x="7237476" y="2066544"/>
+            <a:off x="7237476" y="2011680"/>
             <a:ext cx="4155948" cy="457200"/>
           </a:xfrm>
           <a:prstGeom prst="rect">
@@ -6825,10 +6828,13 @@
           <a:lstStyle/>
           <a:p>
             <a:pPr indent="0" marL="0">
-              <a:buNone/>
-            </a:pPr>
-            <a:r>
-              <a:rPr lang="en-US" sz="1550" b="1" dirty="0">
+              <a:lnSpc>
+                <a:spcPts val="1700"/>
+              </a:lnSpc>
+              <a:buNone/>
+            </a:pPr>
+            <a:r>
+              <a:rPr lang="en-US" sz="1450" b="1" dirty="0">
                 <a:solidFill>
                   <a:srgbClr val="0E1B3D"/>
                 </a:solidFill>
@@ -6838,7 +6844,7 @@
               </a:rPr>
               <a:t>パッチ運用の徹底と棚卸し</a:t>
             </a:r>
-            <a:endParaRPr lang="en-US" sz="1550" dirty="0"/>
+            <a:endParaRPr lang="en-US" sz="1450" dirty="0"/>
           </a:p>
         </p:txBody>
       </p:sp>
@@ -6850,8 +6856,8 @@
         </p:nvSpPr>
         <p:spPr>
           <a:xfrm>
-            <a:off x="7237476" y="2487168"/>
-            <a:ext cx="4155948" cy="502920"/>
+            <a:off x="7237476" y="2478024"/>
+            <a:ext cx="4155948" cy="512064"/>
           </a:xfrm>
           <a:prstGeom prst="rect">
             <a:avLst/>
@@ -6865,12 +6871,12 @@
           <a:p>
             <a:pPr indent="0" marL="0">
               <a:lnSpc>
-                <a:spcPts val="1600"/>
+                <a:spcPts val="1500"/>
               </a:lnSpc>
               <a:buNone/>
             </a:pPr>
             <a:r>
-              <a:rPr lang="en-US" sz="1250" dirty="0">
+              <a:rPr lang="en-US" sz="1200" dirty="0">
                 <a:solidFill>
                   <a:srgbClr val="1A2332"/>
                 </a:solidFill>
@@ -6880,7 +6886,7 @@
               </a:rPr>
               <a:t>侵入元の約半数は未パッチ。適用状況を継続的に可視化</a:t>
             </a:r>
-            <a:endParaRPr lang="en-US" sz="1250" dirty="0"/>
+            <a:endParaRPr lang="en-US" sz="1200" dirty="0"/>
           </a:p>
         </p:txBody>
       </p:sp>
@@ -6893,11 +6899,11 @@
         <p:spPr>
           <a:xfrm>
             <a:off x="566928" y="3246120"/>
-            <a:ext cx="5344668" cy="1143000"/>
+            <a:ext cx="5344668" cy="1188720"/>
           </a:xfrm>
           <a:prstGeom prst="roundRect">
             <a:avLst>
-              <a:gd name="adj" fmla="val 6400"/>
+              <a:gd name="adj" fmla="val 6154"/>
             </a:avLst>
           </a:prstGeom>
           <a:solidFill>
@@ -6926,7 +6932,7 @@
         </p:nvSpPr>
         <p:spPr>
           <a:xfrm>
-            <a:off x="795528" y="3529584"/>
+            <a:off x="795528" y="3557016"/>
             <a:ext cx="566928" cy="566928"/>
           </a:xfrm>
           <a:prstGeom prst="ellipse">
@@ -6946,7 +6952,7 @@
         </p:nvSpPr>
         <p:spPr>
           <a:xfrm>
-            <a:off x="795528" y="3529584"/>
+            <a:off x="795528" y="3557016"/>
             <a:ext cx="566928" cy="566928"/>
           </a:xfrm>
           <a:prstGeom prst="rect">
@@ -6985,7 +6991,7 @@
         </p:nvSpPr>
         <p:spPr>
           <a:xfrm>
-            <a:off x="1527048" y="3392424"/>
+            <a:off x="1527048" y="3383280"/>
             <a:ext cx="4155948" cy="457200"/>
           </a:xfrm>
           <a:prstGeom prst="rect">
@@ -6999,10 +7005,13 @@
           <a:lstStyle/>
           <a:p>
             <a:pPr indent="0" marL="0">
-              <a:buNone/>
-            </a:pPr>
-            <a:r>
-              <a:rPr lang="en-US" sz="1550" b="1" dirty="0">
+              <a:lnSpc>
+                <a:spcPts val="1700"/>
+              </a:lnSpc>
+              <a:buNone/>
+            </a:pPr>
+            <a:r>
+              <a:rPr lang="en-US" sz="1450" b="1" dirty="0">
                 <a:solidFill>
                   <a:srgbClr val="0E1B3D"/>
                 </a:solidFill>
@@ -7012,7 +7021,7 @@
               </a:rPr>
               <a:t>認証の強化（MFA・特権管理）</a:t>
             </a:r>
-            <a:endParaRPr lang="en-US" sz="1550" dirty="0"/>
+            <a:endParaRPr lang="en-US" sz="1450" dirty="0"/>
           </a:p>
         </p:txBody>
       </p:sp>
@@ -7024,8 +7033,8 @@
         </p:nvSpPr>
         <p:spPr>
           <a:xfrm>
-            <a:off x="1527048" y="3813048"/>
-            <a:ext cx="4155948" cy="502920"/>
+            <a:off x="1527048" y="3849624"/>
+            <a:ext cx="4155948" cy="512064"/>
           </a:xfrm>
           <a:prstGeom prst="rect">
             <a:avLst/>
@@ -7039,12 +7048,12 @@
           <a:p>
             <a:pPr indent="0" marL="0">
               <a:lnSpc>
-                <a:spcPts val="1600"/>
+                <a:spcPts val="1500"/>
               </a:lnSpc>
               <a:buNone/>
             </a:pPr>
             <a:r>
-              <a:rPr lang="en-US" sz="1250" dirty="0">
+              <a:rPr lang="en-US" sz="1200" dirty="0">
                 <a:solidFill>
                   <a:srgbClr val="1A2332"/>
                 </a:solidFill>
@@ -7052,9 +7061,9 @@
                 <a:ea typeface="Calibri" pitchFamily="34" charset="-122"/>
                 <a:cs typeface="Calibri" pitchFamily="34" charset="-120"/>
               </a:rPr>
-              <a:t>盗まれた正規アカウントでの侵入を防ぐ。ADの保護を優先</a:t>
-            </a:r>
-            <a:endParaRPr lang="en-US" sz="1250" dirty="0"/>
+              <a:t>盗まれた正規アカウントでの侵入を防ぐ。委託先含め例外を作らない</a:t>
+            </a:r>
+            <a:endParaRPr lang="en-US" sz="1200" dirty="0"/>
           </a:p>
         </p:txBody>
       </p:sp>
@@ -7067,11 +7076,11 @@
         <p:spPr>
           <a:xfrm>
             <a:off x="6277356" y="3246120"/>
-            <a:ext cx="5344668" cy="1143000"/>
+            <a:ext cx="5344668" cy="1188720"/>
           </a:xfrm>
           <a:prstGeom prst="roundRect">
             <a:avLst>
-              <a:gd name="adj" fmla="val 6400"/>
+              <a:gd name="adj" fmla="val 6154"/>
             </a:avLst>
           </a:prstGeom>
           <a:solidFill>
@@ -7100,7 +7109,7 @@
         </p:nvSpPr>
         <p:spPr>
           <a:xfrm>
-            <a:off x="6505956" y="3529584"/>
+            <a:off x="6505956" y="3557016"/>
             <a:ext cx="566928" cy="566928"/>
           </a:xfrm>
           <a:prstGeom prst="ellipse">
@@ -7120,7 +7129,7 @@
         </p:nvSpPr>
         <p:spPr>
           <a:xfrm>
-            <a:off x="6505956" y="3529584"/>
+            <a:off x="6505956" y="3557016"/>
             <a:ext cx="566928" cy="566928"/>
           </a:xfrm>
           <a:prstGeom prst="rect">
@@ -7159,7 +7168,7 @@
         </p:nvSpPr>
         <p:spPr>
           <a:xfrm>
-            <a:off x="7237476" y="3392424"/>
+            <a:off x="7237476" y="3383280"/>
             <a:ext cx="4155948" cy="457200"/>
           </a:xfrm>
           <a:prstGeom prst="rect">
@@ -7173,10 +7182,13 @@
           <a:lstStyle/>
           <a:p>
             <a:pPr indent="0" marL="0">
-              <a:buNone/>
-            </a:pPr>
-            <a:r>
-              <a:rPr lang="en-US" sz="1550" b="1" dirty="0">
+              <a:lnSpc>
+                <a:spcPts val="1700"/>
+              </a:lnSpc>
+              <a:buNone/>
+            </a:pPr>
+            <a:r>
+              <a:rPr lang="en-US" sz="1450" b="1" dirty="0">
                 <a:solidFill>
                   <a:srgbClr val="0E1B3D"/>
                 </a:solidFill>
@@ -7184,9 +7196,9 @@
                 <a:ea typeface="Cambria" pitchFamily="34" charset="-122"/>
                 <a:cs typeface="Cambria" pitchFamily="34" charset="-120"/>
               </a:rPr>
-              <a:t>SentinelOneの堅牢化設定</a:t>
-            </a:r>
-            <a:endParaRPr lang="en-US" sz="1550" dirty="0"/>
+              <a:t>S-1のOnline Authorization有効化を確認</a:t>
+            </a:r>
+            <a:endParaRPr lang="en-US" sz="1450" dirty="0"/>
           </a:p>
         </p:txBody>
       </p:sp>
@@ -7198,8 +7210,8 @@
         </p:nvSpPr>
         <p:spPr>
           <a:xfrm>
-            <a:off x="7237476" y="3813048"/>
-            <a:ext cx="4155948" cy="502920"/>
+            <a:off x="7237476" y="3849624"/>
+            <a:ext cx="4155948" cy="512064"/>
           </a:xfrm>
           <a:prstGeom prst="rect">
             <a:avLst/>
@@ -7213,12 +7225,12 @@
           <a:p>
             <a:pPr indent="0" marL="0">
               <a:lnSpc>
-                <a:spcPts val="1600"/>
+                <a:spcPts val="1500"/>
               </a:lnSpc>
               <a:buNone/>
             </a:pPr>
             <a:r>
-              <a:rPr lang="en-US" sz="1250" dirty="0">
+              <a:rPr lang="en-US" sz="1200" dirty="0">
                 <a:solidFill>
                   <a:srgbClr val="1A2332"/>
                 </a:solidFill>
@@ -7226,9 +7238,9 @@
                 <a:ea typeface="Calibri" pitchFamily="34" charset="-122"/>
                 <a:cs typeface="Calibri" pitchFamily="34" charset="-120"/>
               </a:rPr>
-              <a:t>Online Authorization等で無効化・改ざん回避を難しくする</a:t>
-            </a:r>
-            <a:endParaRPr lang="en-US" sz="1250" dirty="0"/>
+              <a:t>既存導入は既定OFF。無効化・改ざん回避（BYOI等）を難しくする</a:t>
+            </a:r>
+            <a:endParaRPr lang="en-US" sz="1200" dirty="0"/>
           </a:p>
         </p:txBody>
       </p:sp>
@@ -7240,12 +7252,12 @@
         </p:nvSpPr>
         <p:spPr>
           <a:xfrm>
-            <a:off x="566928" y="4572000"/>
-            <a:ext cx="11055096" cy="1143000"/>
+            <a:off x="566928" y="4617720"/>
+            <a:ext cx="5344668" cy="1188720"/>
           </a:xfrm>
           <a:prstGeom prst="roundRect">
             <a:avLst>
-              <a:gd name="adj" fmla="val 6400"/>
+              <a:gd name="adj" fmla="val 6154"/>
             </a:avLst>
           </a:prstGeom>
           <a:solidFill>
@@ -7274,7 +7286,7 @@
         </p:nvSpPr>
         <p:spPr>
           <a:xfrm>
-            <a:off x="795528" y="4855464"/>
+            <a:off x="795528" y="4928616"/>
             <a:ext cx="566928" cy="566928"/>
           </a:xfrm>
           <a:prstGeom prst="ellipse">
@@ -7294,7 +7306,7 @@
         </p:nvSpPr>
         <p:spPr>
           <a:xfrm>
-            <a:off x="795528" y="4855464"/>
+            <a:off x="795528" y="4928616"/>
             <a:ext cx="566928" cy="566928"/>
           </a:xfrm>
           <a:prstGeom prst="rect">
@@ -7333,8 +7345,8 @@
         </p:nvSpPr>
         <p:spPr>
           <a:xfrm>
-            <a:off x="1527048" y="4718304"/>
-            <a:ext cx="9866376" cy="457200"/>
+            <a:off x="1527048" y="4754880"/>
+            <a:ext cx="4155948" cy="457200"/>
           </a:xfrm>
           <a:prstGeom prst="rect">
             <a:avLst/>
@@ -7347,10 +7359,13 @@
           <a:lstStyle/>
           <a:p>
             <a:pPr indent="0" marL="0">
-              <a:buNone/>
-            </a:pPr>
-            <a:r>
-              <a:rPr lang="en-US" sz="1550" b="1" dirty="0">
+              <a:lnSpc>
+                <a:spcPts val="1700"/>
+              </a:lnSpc>
+              <a:buNone/>
+            </a:pPr>
+            <a:r>
+              <a:rPr lang="en-US" sz="1450" b="1" dirty="0">
                 <a:solidFill>
                   <a:srgbClr val="0E1B3D"/>
                 </a:solidFill>
@@ -7358,9 +7373,9 @@
                 <a:ea typeface="Cambria" pitchFamily="34" charset="-122"/>
                 <a:cs typeface="Cambria" pitchFamily="34" charset="-120"/>
               </a:rPr>
-              <a:t>バックアップと復旧訓練</a:t>
-            </a:r>
-            <a:endParaRPr lang="en-US" sz="1550" dirty="0"/>
+              <a:t>認証情報のSQL保存方式を監査</a:t>
+            </a:r>
+            <a:endParaRPr lang="en-US" sz="1450" dirty="0"/>
           </a:p>
         </p:txBody>
       </p:sp>
@@ -7372,8 +7387,8 @@
         </p:nvSpPr>
         <p:spPr>
           <a:xfrm>
-            <a:off x="1527048" y="5138928"/>
-            <a:ext cx="9866376" cy="502920"/>
+            <a:off x="1527048" y="5221224"/>
+            <a:ext cx="4155948" cy="512064"/>
           </a:xfrm>
           <a:prstGeom prst="rect">
             <a:avLst/>
@@ -7387,12 +7402,12 @@
           <a:p>
             <a:pPr indent="0" marL="0">
               <a:lnSpc>
-                <a:spcPts val="1600"/>
+                <a:spcPts val="1500"/>
               </a:lnSpc>
               <a:buNone/>
             </a:pPr>
             <a:r>
-              <a:rPr lang="en-US" sz="1250" dirty="0">
+              <a:rPr lang="en-US" sz="1200" dirty="0">
                 <a:solidFill>
                   <a:srgbClr val="1A2332"/>
                 </a:solidFill>
@@ -7400,15 +7415,192 @@
                 <a:ea typeface="Calibri" pitchFamily="34" charset="-122"/>
                 <a:cs typeface="Calibri" pitchFamily="34" charset="-120"/>
               </a:rPr>
+              <a:t>ハッシュ/ソルトの有無、接続文字列・秘密情報の管理を点検</a:t>
+            </a:r>
+            <a:endParaRPr lang="en-US" sz="1200" dirty="0"/>
+          </a:p>
+        </p:txBody>
+      </p:sp>
+      <p:sp>
+        <p:nvSpPr>
+          <p:cNvPr id="29" name="Shape 27"/>
+          <p:cNvSpPr/>
+          <p:nvPr/>
+        </p:nvSpPr>
+        <p:spPr>
+          <a:xfrm>
+            <a:off x="6277356" y="4617720"/>
+            <a:ext cx="5344668" cy="1188720"/>
+          </a:xfrm>
+          <a:prstGeom prst="roundRect">
+            <a:avLst>
+              <a:gd name="adj" fmla="val 6154"/>
+            </a:avLst>
+          </a:prstGeom>
+          <a:solidFill>
+            <a:srgbClr val="F4F6FB"/>
+          </a:solidFill>
+          <a:ln w="12700">
+            <a:solidFill>
+              <a:srgbClr val="E2E8F4"/>
+            </a:solidFill>
+            <a:prstDash val="solid"/>
+          </a:ln>
+          <a:effectLst>
+            <a:outerShdw sx="100000" sy="100000" kx="0" ky="0" algn="bl" rotWithShape="0" blurRad="101600" dist="38100" dir="5400000">
+              <a:srgbClr val="8A93A6">
+                <a:alpha val="28000"/>
+              </a:srgbClr>
+            </a:outerShdw>
+          </a:effectLst>
+        </p:spPr>
+      </p:sp>
+      <p:sp>
+        <p:nvSpPr>
+          <p:cNvPr id="30" name="Shape 28"/>
+          <p:cNvSpPr/>
+          <p:nvPr/>
+        </p:nvSpPr>
+        <p:spPr>
+          <a:xfrm>
+            <a:off x="6505956" y="4928616"/>
+            <a:ext cx="566928" cy="566928"/>
+          </a:xfrm>
+          <a:prstGeom prst="ellipse">
+            <a:avLst/>
+          </a:prstGeom>
+          <a:solidFill>
+            <a:srgbClr val="C8102E"/>
+          </a:solidFill>
+          <a:ln/>
+        </p:spPr>
+      </p:sp>
+      <p:sp>
+        <p:nvSpPr>
+          <p:cNvPr id="31" name="Text 29"/>
+          <p:cNvSpPr/>
+          <p:nvPr/>
+        </p:nvSpPr>
+        <p:spPr>
+          <a:xfrm>
+            <a:off x="6505956" y="4928616"/>
+            <a:ext cx="566928" cy="566928"/>
+          </a:xfrm>
+          <a:prstGeom prst="rect">
+            <a:avLst/>
+          </a:prstGeom>
+          <a:noFill/>
+          <a:ln/>
+        </p:spPr>
+        <p:txBody>
+          <a:bodyPr wrap="square" lIns="0" tIns="0" rIns="0" bIns="0" rtlCol="0" anchor="ctr"/>
+          <a:lstStyle/>
+          <a:p>
+            <a:pPr algn="ctr" indent="0" marL="0">
+              <a:buNone/>
+            </a:pPr>
+            <a:r>
+              <a:rPr lang="en-US" sz="2200" b="1" dirty="0">
+                <a:solidFill>
+                  <a:srgbClr val="FFFFFF"/>
+                </a:solidFill>
+                <a:latin typeface="Cambria" pitchFamily="34" charset="0"/>
+                <a:ea typeface="Cambria" pitchFamily="34" charset="-122"/>
+                <a:cs typeface="Cambria" pitchFamily="34" charset="-120"/>
+              </a:rPr>
+              <a:t>6</a:t>
+            </a:r>
+            <a:endParaRPr lang="en-US" sz="2200" dirty="0"/>
+          </a:p>
+        </p:txBody>
+      </p:sp>
+      <p:sp>
+        <p:nvSpPr>
+          <p:cNvPr id="32" name="Text 30"/>
+          <p:cNvSpPr/>
+          <p:nvPr/>
+        </p:nvSpPr>
+        <p:spPr>
+          <a:xfrm>
+            <a:off x="7237476" y="4754880"/>
+            <a:ext cx="4155948" cy="457200"/>
+          </a:xfrm>
+          <a:prstGeom prst="rect">
+            <a:avLst/>
+          </a:prstGeom>
+          <a:noFill/>
+          <a:ln/>
+        </p:spPr>
+        <p:txBody>
+          <a:bodyPr wrap="square" lIns="0" tIns="0" rIns="0" bIns="0" rtlCol="0" anchor="t"/>
+          <a:lstStyle/>
+          <a:p>
+            <a:pPr indent="0" marL="0">
+              <a:lnSpc>
+                <a:spcPts val="1700"/>
+              </a:lnSpc>
+              <a:buNone/>
+            </a:pPr>
+            <a:r>
+              <a:rPr lang="en-US" sz="1450" b="1" dirty="0">
+                <a:solidFill>
+                  <a:srgbClr val="0E1B3D"/>
+                </a:solidFill>
+                <a:latin typeface="Cambria" pitchFamily="34" charset="0"/>
+                <a:ea typeface="Cambria" pitchFamily="34" charset="-122"/>
+                <a:cs typeface="Cambria" pitchFamily="34" charset="-120"/>
+              </a:rPr>
+              <a:t>バックアップと復旧訓練</a:t>
+            </a:r>
+            <a:endParaRPr lang="en-US" sz="1450" dirty="0"/>
+          </a:p>
+        </p:txBody>
+      </p:sp>
+      <p:sp>
+        <p:nvSpPr>
+          <p:cNvPr id="33" name="Text 31"/>
+          <p:cNvSpPr/>
+          <p:nvPr/>
+        </p:nvSpPr>
+        <p:spPr>
+          <a:xfrm>
+            <a:off x="7237476" y="5221224"/>
+            <a:ext cx="4155948" cy="512064"/>
+          </a:xfrm>
+          <a:prstGeom prst="rect">
+            <a:avLst/>
+          </a:prstGeom>
+          <a:noFill/>
+          <a:ln/>
+        </p:spPr>
+        <p:txBody>
+          <a:bodyPr wrap="square" lIns="0" tIns="0" rIns="0" bIns="0" rtlCol="0" anchor="t"/>
+          <a:lstStyle/>
+          <a:p>
+            <a:pPr indent="0" marL="0">
+              <a:lnSpc>
+                <a:spcPts val="1500"/>
+              </a:lnSpc>
+              <a:buNone/>
+            </a:pPr>
+            <a:r>
+              <a:rPr lang="en-US" sz="1200" dirty="0">
+                <a:solidFill>
+                  <a:srgbClr val="1A2332"/>
+                </a:solidFill>
+                <a:latin typeface="Calibri" pitchFamily="34" charset="0"/>
+                <a:ea typeface="Calibri" pitchFamily="34" charset="-122"/>
+                <a:cs typeface="Calibri" pitchFamily="34" charset="-120"/>
+              </a:rPr>
               <a:t>暗号化されても事業を止めない。オフライン保管と定期演習</a:t>
             </a:r>
-            <a:endParaRPr lang="en-US" sz="1250" dirty="0"/>
-          </a:p>
-        </p:txBody>
-      </p:sp>
-      <p:sp>
-        <p:nvSpPr>
-          <p:cNvPr id="29" name="Text 27"/>
+            <a:endParaRPr lang="en-US" sz="1200" dirty="0"/>
+          </a:p>
+        </p:txBody>
+      </p:sp>
+      <p:sp>
+        <p:nvSpPr>
+          <p:cNvPr id="34" name="Text 32"/>
           <p:cNvSpPr/>
           <p:nvPr/>
         </p:nvSpPr>

--- a/成果物/SentinelOne導入後も脆弱性検査が必要な理由.pptx
+++ b/成果物/SentinelOne導入後も脆弱性検査が必要な理由.pptx
@@ -2387,7 +2387,46 @@
       </p:grpSpPr>
       <p:sp>
         <p:nvSpPr>
-          <p:cNvPr id="2" name="Shape 0"/>
+          <p:cNvPr id="2" name="Text 0"/>
+          <p:cNvSpPr/>
+          <p:nvPr/>
+        </p:nvSpPr>
+        <p:spPr>
+          <a:xfrm rot="19800000">
+            <a:off x="822960" y="2331720"/>
+            <a:ext cx="10515600" cy="1920240"/>
+          </a:xfrm>
+          <a:prstGeom prst="rect">
+            <a:avLst/>
+          </a:prstGeom>
+          <a:noFill/>
+          <a:ln/>
+        </p:spPr>
+        <p:txBody>
+          <a:bodyPr wrap="square" lIns="0" tIns="0" rIns="0" bIns="0" rtlCol="0" anchor="ctr"/>
+          <a:lstStyle/>
+          <a:p>
+            <a:pPr algn="ctr" indent="0" marL="0">
+              <a:buNone/>
+            </a:pPr>
+            <a:r>
+              <a:rPr lang="en-US" sz="5200" b="1" dirty="0">
+                <a:solidFill>
+                  <a:srgbClr val="D3D9E3"/>
+                </a:solidFill>
+                <a:latin typeface="Cambria" pitchFamily="34" charset="0"/>
+                <a:ea typeface="Cambria" pitchFamily="34" charset="-122"/>
+                <a:cs typeface="Cambria" pitchFamily="34" charset="-120"/>
+              </a:rPr>
+              <a:t>CONFIDENTIAL ｜ 社外秘</a:t>
+            </a:r>
+            <a:endParaRPr lang="en-US" sz="5200" dirty="0"/>
+          </a:p>
+        </p:txBody>
+      </p:sp>
+      <p:sp>
+        <p:nvSpPr>
+          <p:cNvPr id="3" name="Shape 1"/>
           <p:cNvSpPr/>
           <p:nvPr/>
         </p:nvSpPr>
@@ -2409,7 +2448,7 @@
       </p:sp>
       <p:sp>
         <p:nvSpPr>
-          <p:cNvPr id="3" name="Shape 1"/>
+          <p:cNvPr id="4" name="Shape 2"/>
           <p:cNvSpPr/>
           <p:nvPr/>
         </p:nvSpPr>
@@ -2431,7 +2470,7 @@
       </p:sp>
       <p:sp>
         <p:nvSpPr>
-          <p:cNvPr id="4" name="Shape 2"/>
+          <p:cNvPr id="5" name="Shape 3"/>
           <p:cNvSpPr/>
           <p:nvPr/>
         </p:nvSpPr>
@@ -2451,7 +2490,7 @@
       </p:sp>
       <p:sp>
         <p:nvSpPr>
-          <p:cNvPr id="5" name="Text 3"/>
+          <p:cNvPr id="6" name="Text 4"/>
           <p:cNvSpPr/>
           <p:nvPr/>
         </p:nvSpPr>
@@ -2490,7 +2529,7 @@
       </p:sp>
       <p:sp>
         <p:nvSpPr>
-          <p:cNvPr id="6" name="Text 4"/>
+          <p:cNvPr id="7" name="Text 5"/>
           <p:cNvSpPr/>
           <p:nvPr/>
         </p:nvSpPr>
@@ -2552,7 +2591,7 @@
       </p:sp>
       <p:sp>
         <p:nvSpPr>
-          <p:cNvPr id="7" name="Text 5"/>
+          <p:cNvPr id="8" name="Text 6"/>
           <p:cNvSpPr/>
           <p:nvPr/>
         </p:nvSpPr>
@@ -2594,7 +2633,7 @@
       </p:sp>
       <p:sp>
         <p:nvSpPr>
-          <p:cNvPr id="8" name="Text 6"/>
+          <p:cNvPr id="9" name="Text 7"/>
           <p:cNvSpPr/>
           <p:nvPr/>
         </p:nvSpPr>
@@ -2628,6 +2667,45 @@
               <a:t>作成日: 2026-07-26 ／ 出典: 警察庁・トレンドマイクロ・BleepingComputer 他（末尾に記載）</a:t>
             </a:r>
             <a:endParaRPr lang="en-US" sz="1100" dirty="0"/>
+          </a:p>
+        </p:txBody>
+      </p:sp>
+      <p:sp>
+        <p:nvSpPr>
+          <p:cNvPr id="10" name="Text 8"/>
+          <p:cNvSpPr/>
+          <p:nvPr/>
+        </p:nvSpPr>
+        <p:spPr>
+          <a:xfrm>
+            <a:off x="9052560" y="237744"/>
+            <a:ext cx="2697480" cy="292608"/>
+          </a:xfrm>
+          <a:prstGeom prst="rect">
+            <a:avLst/>
+          </a:prstGeom>
+          <a:noFill/>
+          <a:ln/>
+        </p:spPr>
+        <p:txBody>
+          <a:bodyPr wrap="square" lIns="0" tIns="0" rIns="0" bIns="0" rtlCol="0" anchor="ctr"/>
+          <a:lstStyle/>
+          <a:p>
+            <a:pPr algn="r" indent="0" marL="0">
+              <a:buNone/>
+            </a:pPr>
+            <a:r>
+              <a:rPr lang="en-US" sz="1000" b="1" spc="100" kern="0" dirty="0">
+                <a:solidFill>
+                  <a:srgbClr val="C8102E"/>
+                </a:solidFill>
+                <a:latin typeface="Calibri" pitchFamily="34" charset="0"/>
+                <a:ea typeface="Calibri" pitchFamily="34" charset="-122"/>
+                <a:cs typeface="Calibri" pitchFamily="34" charset="-120"/>
+              </a:rPr>
+              <a:t>社外秘・取扱注意</a:t>
+            </a:r>
+            <a:endParaRPr lang="en-US" sz="1000" dirty="0"/>
           </a:p>
         </p:txBody>
       </p:sp>
@@ -2670,9 +2748,9 @@
           <p:nvPr/>
         </p:nvSpPr>
         <p:spPr>
-          <a:xfrm>
-            <a:off x="566928" y="384048"/>
-            <a:ext cx="8229600" cy="274320"/>
+          <a:xfrm rot="19800000">
+            <a:off x="822960" y="2331720"/>
+            <a:ext cx="10515600" cy="1920240"/>
           </a:xfrm>
           <a:prstGeom prst="rect">
             <a:avLst/>
@@ -2684,57 +2762,96 @@
           <a:bodyPr wrap="square" lIns="0" tIns="0" rIns="0" bIns="0" rtlCol="0" anchor="ctr"/>
           <a:lstStyle/>
           <a:p>
-            <a:pPr algn="l" indent="0" marL="0">
-              <a:buNone/>
-            </a:pPr>
-            <a:r>
-              <a:rPr lang="en-US" sz="1200" b="1" spc="300" kern="0" dirty="0">
-                <a:solidFill>
-                  <a:srgbClr val="C8102E"/>
-                </a:solidFill>
-                <a:latin typeface="Calibri" pitchFamily="34" charset="0"/>
-                <a:ea typeface="Calibri" pitchFamily="34" charset="-122"/>
-                <a:cs typeface="Calibri" pitchFamily="34" charset="-120"/>
-              </a:rPr>
-              <a:t>事例に学ぶ攻撃フロー（VPNエッジ編）</a:t>
-            </a:r>
-            <a:endParaRPr lang="en-US" sz="1200" dirty="0"/>
-          </a:p>
-        </p:txBody>
-      </p:sp>
-      <p:sp>
-        <p:nvSpPr>
-          <p:cNvPr id="3" name="Text 1"/>
-          <p:cNvSpPr/>
-          <p:nvPr/>
-        </p:nvSpPr>
-        <p:spPr>
-          <a:xfrm>
-            <a:off x="566928" y="658368"/>
-            <a:ext cx="11055096" cy="868680"/>
-          </a:xfrm>
-          <a:prstGeom prst="rect">
-            <a:avLst/>
-          </a:prstGeom>
-          <a:noFill/>
-          <a:ln/>
-        </p:spPr>
-        <p:txBody>
-          <a:bodyPr wrap="square" lIns="0" tIns="0" rIns="0" bIns="0" rtlCol="0" anchor="t"/>
-          <a:lstStyle/>
-          <a:p>
-            <a:pPr algn="l" indent="0" marL="0">
-              <a:buNone/>
-            </a:pPr>
-            <a:r>
-              <a:rPr lang="en-US" sz="3200" b="1" dirty="0">
-                <a:solidFill>
-                  <a:srgbClr val="0E1B3D"/>
+            <a:pPr algn="ctr" indent="0" marL="0">
+              <a:buNone/>
+            </a:pPr>
+            <a:r>
+              <a:rPr lang="en-US" sz="5200" b="1" dirty="0">
+                <a:solidFill>
+                  <a:srgbClr val="D3D9E3"/>
                 </a:solidFill>
                 <a:latin typeface="Cambria" pitchFamily="34" charset="0"/>
                 <a:ea typeface="Cambria" pitchFamily="34" charset="-122"/>
                 <a:cs typeface="Cambria" pitchFamily="34" charset="-120"/>
               </a:rPr>
+              <a:t>CONFIDENTIAL ｜ 社外秘</a:t>
+            </a:r>
+            <a:endParaRPr lang="en-US" sz="5200" dirty="0"/>
+          </a:p>
+        </p:txBody>
+      </p:sp>
+      <p:sp>
+        <p:nvSpPr>
+          <p:cNvPr id="3" name="Text 1"/>
+          <p:cNvSpPr/>
+          <p:nvPr/>
+        </p:nvSpPr>
+        <p:spPr>
+          <a:xfrm>
+            <a:off x="566928" y="384048"/>
+            <a:ext cx="8229600" cy="274320"/>
+          </a:xfrm>
+          <a:prstGeom prst="rect">
+            <a:avLst/>
+          </a:prstGeom>
+          <a:noFill/>
+          <a:ln/>
+        </p:spPr>
+        <p:txBody>
+          <a:bodyPr wrap="square" lIns="0" tIns="0" rIns="0" bIns="0" rtlCol="0" anchor="ctr"/>
+          <a:lstStyle/>
+          <a:p>
+            <a:pPr algn="l" indent="0" marL="0">
+              <a:buNone/>
+            </a:pPr>
+            <a:r>
+              <a:rPr lang="en-US" sz="1200" b="1" spc="300" kern="0" dirty="0">
+                <a:solidFill>
+                  <a:srgbClr val="C8102E"/>
+                </a:solidFill>
+                <a:latin typeface="Calibri" pitchFamily="34" charset="0"/>
+                <a:ea typeface="Calibri" pitchFamily="34" charset="-122"/>
+                <a:cs typeface="Calibri" pitchFamily="34" charset="-120"/>
+              </a:rPr>
+              <a:t>事例に学ぶ攻撃フロー（VPNエッジ編）</a:t>
+            </a:r>
+            <a:endParaRPr lang="en-US" sz="1200" dirty="0"/>
+          </a:p>
+        </p:txBody>
+      </p:sp>
+      <p:sp>
+        <p:nvSpPr>
+          <p:cNvPr id="4" name="Text 2"/>
+          <p:cNvSpPr/>
+          <p:nvPr/>
+        </p:nvSpPr>
+        <p:spPr>
+          <a:xfrm>
+            <a:off x="566928" y="658368"/>
+            <a:ext cx="11055096" cy="868680"/>
+          </a:xfrm>
+          <a:prstGeom prst="rect">
+            <a:avLst/>
+          </a:prstGeom>
+          <a:noFill/>
+          <a:ln/>
+        </p:spPr>
+        <p:txBody>
+          <a:bodyPr wrap="square" lIns="0" tIns="0" rIns="0" bIns="0" rtlCol="0" anchor="t"/>
+          <a:lstStyle/>
+          <a:p>
+            <a:pPr algn="l" indent="0" marL="0">
+              <a:buNone/>
+            </a:pPr>
+            <a:r>
+              <a:rPr lang="en-US" sz="3200" b="1" dirty="0">
+                <a:solidFill>
+                  <a:srgbClr val="0E1B3D"/>
+                </a:solidFill>
+                <a:latin typeface="Cambria" pitchFamily="34" charset="0"/>
+                <a:ea typeface="Cambria" pitchFamily="34" charset="-122"/>
+                <a:cs typeface="Cambria" pitchFamily="34" charset="-120"/>
+              </a:rPr>
               <a:t>EDRの盲点：F/W越しの侵入 → ラテラルムーブメント</a:t>
             </a:r>
             <a:endParaRPr lang="en-US" sz="3200" dirty="0"/>
@@ -2743,7 +2860,7 @@
       </p:sp>
       <p:sp>
         <p:nvSpPr>
-          <p:cNvPr id="4" name="Text 2"/>
+          <p:cNvPr id="5" name="Text 3"/>
           <p:cNvSpPr/>
           <p:nvPr/>
         </p:nvSpPr>
@@ -2782,7 +2899,7 @@
       </p:sp>
       <p:sp>
         <p:nvSpPr>
-          <p:cNvPr id="5" name="Text 3"/>
+          <p:cNvPr id="6" name="Text 4"/>
           <p:cNvSpPr/>
           <p:nvPr/>
         </p:nvSpPr>
@@ -2821,7 +2938,7 @@
       </p:sp>
       <p:sp>
         <p:nvSpPr>
-          <p:cNvPr id="6" name="Shape 4"/>
+          <p:cNvPr id="7" name="Shape 5"/>
           <p:cNvSpPr/>
           <p:nvPr/>
         </p:nvSpPr>
@@ -2848,7 +2965,7 @@
       </p:sp>
       <p:sp>
         <p:nvSpPr>
-          <p:cNvPr id="7" name="Text 5"/>
+          <p:cNvPr id="8" name="Text 6"/>
           <p:cNvSpPr/>
           <p:nvPr/>
         </p:nvSpPr>
@@ -2887,7 +3004,7 @@
       </p:sp>
       <p:sp>
         <p:nvSpPr>
-          <p:cNvPr id="8" name="Shape 6"/>
+          <p:cNvPr id="9" name="Shape 7"/>
           <p:cNvSpPr/>
           <p:nvPr/>
         </p:nvSpPr>
@@ -2916,7 +3033,7 @@
       </p:sp>
       <p:sp>
         <p:nvSpPr>
-          <p:cNvPr id="9" name="Text 7"/>
+          <p:cNvPr id="10" name="Text 8"/>
           <p:cNvSpPr/>
           <p:nvPr/>
         </p:nvSpPr>
@@ -2978,7 +3095,7 @@
       </p:sp>
       <p:sp>
         <p:nvSpPr>
-          <p:cNvPr id="10" name="Shape 8"/>
+          <p:cNvPr id="11" name="Shape 9"/>
           <p:cNvSpPr/>
           <p:nvPr/>
         </p:nvSpPr>
@@ -3007,7 +3124,7 @@
       </p:sp>
       <p:sp>
         <p:nvSpPr>
-          <p:cNvPr id="11" name="Text 9"/>
+          <p:cNvPr id="12" name="Text 10"/>
           <p:cNvSpPr/>
           <p:nvPr/>
         </p:nvSpPr>
@@ -3069,7 +3186,7 @@
       </p:sp>
       <p:sp>
         <p:nvSpPr>
-          <p:cNvPr id="12" name="Shape 10"/>
+          <p:cNvPr id="13" name="Shape 11"/>
           <p:cNvSpPr/>
           <p:nvPr/>
         </p:nvSpPr>
@@ -3091,7 +3208,7 @@
       </p:sp>
       <p:sp>
         <p:nvSpPr>
-          <p:cNvPr id="13" name="Text 11"/>
+          <p:cNvPr id="14" name="Text 12"/>
           <p:cNvSpPr/>
           <p:nvPr/>
         </p:nvSpPr>
@@ -3130,7 +3247,7 @@
       </p:sp>
       <p:sp>
         <p:nvSpPr>
-          <p:cNvPr id="14" name="Shape 12"/>
+          <p:cNvPr id="15" name="Shape 13"/>
           <p:cNvSpPr/>
           <p:nvPr/>
         </p:nvSpPr>
@@ -3164,7 +3281,7 @@
       </p:sp>
       <p:sp>
         <p:nvSpPr>
-          <p:cNvPr id="15" name="Text 13"/>
+          <p:cNvPr id="16" name="Text 14"/>
           <p:cNvSpPr/>
           <p:nvPr/>
         </p:nvSpPr>
@@ -3246,7 +3363,7 @@
       </p:sp>
       <p:sp>
         <p:nvSpPr>
-          <p:cNvPr id="16" name="Shape 14"/>
+          <p:cNvPr id="17" name="Shape 15"/>
           <p:cNvSpPr/>
           <p:nvPr/>
         </p:nvSpPr>
@@ -3280,7 +3397,7 @@
       </p:sp>
       <p:sp>
         <p:nvSpPr>
-          <p:cNvPr id="17" name="Text 15"/>
+          <p:cNvPr id="18" name="Text 16"/>
           <p:cNvSpPr/>
           <p:nvPr/>
         </p:nvSpPr>
@@ -3319,7 +3436,7 @@
       </p:sp>
       <p:sp>
         <p:nvSpPr>
-          <p:cNvPr id="18" name="Shape 16"/>
+          <p:cNvPr id="19" name="Shape 17"/>
           <p:cNvSpPr/>
           <p:nvPr/>
         </p:nvSpPr>
@@ -3353,7 +3470,7 @@
       </p:sp>
       <p:sp>
         <p:nvSpPr>
-          <p:cNvPr id="19" name="Text 17"/>
+          <p:cNvPr id="20" name="Text 18"/>
           <p:cNvSpPr/>
           <p:nvPr/>
         </p:nvSpPr>
@@ -3415,7 +3532,7 @@
       </p:sp>
       <p:sp>
         <p:nvSpPr>
-          <p:cNvPr id="20" name="Shape 18"/>
+          <p:cNvPr id="21" name="Shape 19"/>
           <p:cNvSpPr/>
           <p:nvPr/>
         </p:nvSpPr>
@@ -3437,7 +3554,7 @@
       </p:sp>
       <p:sp>
         <p:nvSpPr>
-          <p:cNvPr id="21" name="Text 19"/>
+          <p:cNvPr id="22" name="Text 20"/>
           <p:cNvSpPr/>
           <p:nvPr/>
         </p:nvSpPr>
@@ -3476,7 +3593,7 @@
       </p:sp>
       <p:sp>
         <p:nvSpPr>
-          <p:cNvPr id="22" name="Shape 20"/>
+          <p:cNvPr id="23" name="Shape 21"/>
           <p:cNvSpPr/>
           <p:nvPr/>
         </p:nvSpPr>
@@ -3498,7 +3615,7 @@
       </p:sp>
       <p:sp>
         <p:nvSpPr>
-          <p:cNvPr id="23" name="Text 21"/>
+          <p:cNvPr id="24" name="Text 22"/>
           <p:cNvSpPr/>
           <p:nvPr/>
         </p:nvSpPr>
@@ -3537,7 +3654,7 @@
       </p:sp>
       <p:sp>
         <p:nvSpPr>
-          <p:cNvPr id="24" name="Shape 22"/>
+          <p:cNvPr id="25" name="Shape 23"/>
           <p:cNvSpPr/>
           <p:nvPr/>
         </p:nvSpPr>
@@ -3559,7 +3676,7 @@
       </p:sp>
       <p:sp>
         <p:nvSpPr>
-          <p:cNvPr id="25" name="Text 23"/>
+          <p:cNvPr id="26" name="Text 24"/>
           <p:cNvSpPr/>
           <p:nvPr/>
         </p:nvSpPr>
@@ -3598,7 +3715,7 @@
       </p:sp>
       <p:sp>
         <p:nvSpPr>
-          <p:cNvPr id="26" name="Shape 24"/>
+          <p:cNvPr id="27" name="Shape 25"/>
           <p:cNvSpPr/>
           <p:nvPr/>
         </p:nvSpPr>
@@ -3618,7 +3735,7 @@
       </p:sp>
       <p:sp>
         <p:nvSpPr>
-          <p:cNvPr id="27" name="Shape 25"/>
+          <p:cNvPr id="28" name="Shape 26"/>
           <p:cNvSpPr/>
           <p:nvPr/>
         </p:nvSpPr>
@@ -3638,7 +3755,7 @@
       </p:sp>
       <p:sp>
         <p:nvSpPr>
-          <p:cNvPr id="28" name="Shape 26"/>
+          <p:cNvPr id="29" name="Shape 27"/>
           <p:cNvSpPr/>
           <p:nvPr/>
         </p:nvSpPr>
@@ -3658,7 +3775,7 @@
       </p:sp>
       <p:sp>
         <p:nvSpPr>
-          <p:cNvPr id="29" name="Shape 27"/>
+          <p:cNvPr id="30" name="Shape 28"/>
           <p:cNvSpPr/>
           <p:nvPr/>
         </p:nvSpPr>
@@ -3678,7 +3795,7 @@
       </p:sp>
       <p:sp>
         <p:nvSpPr>
-          <p:cNvPr id="30" name="Shape 28"/>
+          <p:cNvPr id="31" name="Shape 29"/>
           <p:cNvSpPr/>
           <p:nvPr/>
         </p:nvSpPr>
@@ -3698,7 +3815,7 @@
       </p:sp>
       <p:sp>
         <p:nvSpPr>
-          <p:cNvPr id="31" name="Shape 29"/>
+          <p:cNvPr id="32" name="Shape 30"/>
           <p:cNvSpPr/>
           <p:nvPr/>
         </p:nvSpPr>
@@ -3723,7 +3840,7 @@
       </p:sp>
       <p:sp>
         <p:nvSpPr>
-          <p:cNvPr id="32" name="Text 30"/>
+          <p:cNvPr id="33" name="Text 31"/>
           <p:cNvSpPr/>
           <p:nvPr/>
         </p:nvSpPr>
@@ -3762,7 +3879,7 @@
       </p:sp>
       <p:sp>
         <p:nvSpPr>
-          <p:cNvPr id="33" name="Shape 31"/>
+          <p:cNvPr id="34" name="Shape 32"/>
           <p:cNvSpPr/>
           <p:nvPr/>
         </p:nvSpPr>
@@ -3787,7 +3904,7 @@
       </p:sp>
       <p:sp>
         <p:nvSpPr>
-          <p:cNvPr id="34" name="Text 32"/>
+          <p:cNvPr id="35" name="Text 33"/>
           <p:cNvSpPr/>
           <p:nvPr/>
         </p:nvSpPr>
@@ -3826,7 +3943,7 @@
       </p:sp>
       <p:sp>
         <p:nvSpPr>
-          <p:cNvPr id="35" name="Shape 33"/>
+          <p:cNvPr id="36" name="Shape 34"/>
           <p:cNvSpPr/>
           <p:nvPr/>
         </p:nvSpPr>
@@ -3851,7 +3968,7 @@
       </p:sp>
       <p:sp>
         <p:nvSpPr>
-          <p:cNvPr id="36" name="Text 34"/>
+          <p:cNvPr id="37" name="Text 35"/>
           <p:cNvSpPr/>
           <p:nvPr/>
         </p:nvSpPr>
@@ -3890,7 +4007,7 @@
       </p:sp>
       <p:sp>
         <p:nvSpPr>
-          <p:cNvPr id="37" name="Shape 35"/>
+          <p:cNvPr id="38" name="Shape 36"/>
           <p:cNvSpPr/>
           <p:nvPr/>
         </p:nvSpPr>
@@ -3915,7 +4032,7 @@
       </p:sp>
       <p:sp>
         <p:nvSpPr>
-          <p:cNvPr id="38" name="Text 36"/>
+          <p:cNvPr id="39" name="Text 37"/>
           <p:cNvSpPr/>
           <p:nvPr/>
         </p:nvSpPr>
@@ -3954,7 +4071,7 @@
       </p:sp>
       <p:sp>
         <p:nvSpPr>
-          <p:cNvPr id="39" name="Shape 37"/>
+          <p:cNvPr id="40" name="Shape 38"/>
           <p:cNvSpPr/>
           <p:nvPr/>
         </p:nvSpPr>
@@ -3979,7 +4096,7 @@
       </p:sp>
       <p:sp>
         <p:nvSpPr>
-          <p:cNvPr id="40" name="Text 38"/>
+          <p:cNvPr id="41" name="Text 39"/>
           <p:cNvSpPr/>
           <p:nvPr/>
         </p:nvSpPr>
@@ -4018,7 +4135,7 @@
       </p:sp>
       <p:sp>
         <p:nvSpPr>
-          <p:cNvPr id="41" name="Shape 39"/>
+          <p:cNvPr id="42" name="Shape 40"/>
           <p:cNvSpPr/>
           <p:nvPr/>
         </p:nvSpPr>
@@ -4045,7 +4162,7 @@
       </p:sp>
       <p:sp>
         <p:nvSpPr>
-          <p:cNvPr id="42" name="Text 40"/>
+          <p:cNvPr id="43" name="Text 41"/>
           <p:cNvSpPr/>
           <p:nvPr/>
         </p:nvSpPr>
@@ -4240,7 +4357,7 @@
       </p:sp>
       <p:sp>
         <p:nvSpPr>
-          <p:cNvPr id="43" name="Shape 41"/>
+          <p:cNvPr id="44" name="Shape 42"/>
           <p:cNvSpPr/>
           <p:nvPr/>
         </p:nvSpPr>
@@ -4267,7 +4384,7 @@
       </p:sp>
       <p:sp>
         <p:nvSpPr>
-          <p:cNvPr id="44" name="Text 42"/>
+          <p:cNvPr id="45" name="Text 43"/>
           <p:cNvSpPr/>
           <p:nvPr/>
         </p:nvSpPr>
@@ -4309,7 +4426,7 @@
       </p:sp>
       <p:sp>
         <p:nvSpPr>
-          <p:cNvPr id="45" name="Shape 43"/>
+          <p:cNvPr id="46" name="Shape 44"/>
           <p:cNvSpPr/>
           <p:nvPr/>
         </p:nvSpPr>
@@ -4336,7 +4453,7 @@
       </p:sp>
       <p:sp>
         <p:nvSpPr>
-          <p:cNvPr id="46" name="Text 44"/>
+          <p:cNvPr id="47" name="Text 45"/>
           <p:cNvSpPr/>
           <p:nvPr/>
         </p:nvSpPr>
@@ -4378,7 +4495,7 @@
       </p:sp>
       <p:sp>
         <p:nvSpPr>
-          <p:cNvPr id="47" name="Shape 45"/>
+          <p:cNvPr id="48" name="Shape 46"/>
           <p:cNvSpPr/>
           <p:nvPr/>
         </p:nvSpPr>
@@ -4400,7 +4517,7 @@
       </p:sp>
       <p:sp>
         <p:nvSpPr>
-          <p:cNvPr id="48" name="Text 46"/>
+          <p:cNvPr id="49" name="Text 47"/>
           <p:cNvSpPr/>
           <p:nvPr/>
         </p:nvSpPr>
@@ -4459,7 +4576,7 @@
       </p:sp>
       <p:sp>
         <p:nvSpPr>
-          <p:cNvPr id="49" name="Text 47"/>
+          <p:cNvPr id="50" name="Text 48"/>
           <p:cNvSpPr/>
           <p:nvPr/>
         </p:nvSpPr>
@@ -4491,6 +4608,45 @@
                 <a:cs typeface="Calibri" pitchFamily="34" charset="-120"/>
               </a:rPr>
               <a:t>10</a:t>
+            </a:r>
+            <a:endParaRPr lang="en-US" sz="1000" dirty="0"/>
+          </a:p>
+        </p:txBody>
+      </p:sp>
+      <p:sp>
+        <p:nvSpPr>
+          <p:cNvPr id="51" name="Text 49"/>
+          <p:cNvSpPr/>
+          <p:nvPr/>
+        </p:nvSpPr>
+        <p:spPr>
+          <a:xfrm>
+            <a:off x="9052560" y="237744"/>
+            <a:ext cx="2697480" cy="292608"/>
+          </a:xfrm>
+          <a:prstGeom prst="rect">
+            <a:avLst/>
+          </a:prstGeom>
+          <a:noFill/>
+          <a:ln/>
+        </p:spPr>
+        <p:txBody>
+          <a:bodyPr wrap="square" lIns="0" tIns="0" rIns="0" bIns="0" rtlCol="0" anchor="ctr"/>
+          <a:lstStyle/>
+          <a:p>
+            <a:pPr algn="r" indent="0" marL="0">
+              <a:buNone/>
+            </a:pPr>
+            <a:r>
+              <a:rPr lang="en-US" sz="1000" b="1" spc="100" kern="0" dirty="0">
+                <a:solidFill>
+                  <a:srgbClr val="C8102E"/>
+                </a:solidFill>
+                <a:latin typeface="Calibri" pitchFamily="34" charset="0"/>
+                <a:ea typeface="Calibri" pitchFamily="34" charset="-122"/>
+                <a:cs typeface="Calibri" pitchFamily="34" charset="-120"/>
+              </a:rPr>
+              <a:t>社外秘・取扱注意</a:t>
             </a:r>
             <a:endParaRPr lang="en-US" sz="1000" dirty="0"/>
           </a:p>
@@ -4535,9 +4691,9 @@
           <p:nvPr/>
         </p:nvSpPr>
         <p:spPr>
-          <a:xfrm>
-            <a:off x="566928" y="384048"/>
-            <a:ext cx="8229600" cy="274320"/>
+          <a:xfrm rot="19800000">
+            <a:off x="822960" y="2331720"/>
+            <a:ext cx="10515600" cy="1920240"/>
           </a:xfrm>
           <a:prstGeom prst="rect">
             <a:avLst/>
@@ -4549,57 +4705,96 @@
           <a:bodyPr wrap="square" lIns="0" tIns="0" rIns="0" bIns="0" rtlCol="0" anchor="ctr"/>
           <a:lstStyle/>
           <a:p>
-            <a:pPr algn="l" indent="0" marL="0">
-              <a:buNone/>
-            </a:pPr>
-            <a:r>
-              <a:rPr lang="en-US" sz="1200" b="1" spc="300" kern="0" dirty="0">
-                <a:solidFill>
-                  <a:srgbClr val="C8102E"/>
-                </a:solidFill>
-                <a:latin typeface="Calibri" pitchFamily="34" charset="0"/>
-                <a:ea typeface="Calibri" pitchFamily="34" charset="-122"/>
-                <a:cs typeface="Calibri" pitchFamily="34" charset="-120"/>
-              </a:rPr>
-              <a:t>SQL認証環境の追加リスク（ADが無くても）</a:t>
-            </a:r>
-            <a:endParaRPr lang="en-US" sz="1200" dirty="0"/>
-          </a:p>
-        </p:txBody>
-      </p:sp>
-      <p:sp>
-        <p:nvSpPr>
-          <p:cNvPr id="3" name="Text 1"/>
-          <p:cNvSpPr/>
-          <p:nvPr/>
-        </p:nvSpPr>
-        <p:spPr>
-          <a:xfrm>
-            <a:off x="566928" y="658368"/>
-            <a:ext cx="11055096" cy="868680"/>
-          </a:xfrm>
-          <a:prstGeom prst="rect">
-            <a:avLst/>
-          </a:prstGeom>
-          <a:noFill/>
-          <a:ln/>
-        </p:spPr>
-        <p:txBody>
-          <a:bodyPr wrap="square" lIns="0" tIns="0" rIns="0" bIns="0" rtlCol="0" anchor="t"/>
-          <a:lstStyle/>
-          <a:p>
-            <a:pPr algn="l" indent="0" marL="0">
-              <a:buNone/>
-            </a:pPr>
-            <a:r>
-              <a:rPr lang="en-US" sz="3200" b="1" dirty="0">
-                <a:solidFill>
-                  <a:srgbClr val="0E1B3D"/>
+            <a:pPr algn="ctr" indent="0" marL="0">
+              <a:buNone/>
+            </a:pPr>
+            <a:r>
+              <a:rPr lang="en-US" sz="5200" b="1" dirty="0">
+                <a:solidFill>
+                  <a:srgbClr val="D3D9E3"/>
                 </a:solidFill>
                 <a:latin typeface="Cambria" pitchFamily="34" charset="0"/>
                 <a:ea typeface="Cambria" pitchFamily="34" charset="-122"/>
                 <a:cs typeface="Cambria" pitchFamily="34" charset="-120"/>
               </a:rPr>
+              <a:t>CONFIDENTIAL ｜ 社外秘</a:t>
+            </a:r>
+            <a:endParaRPr lang="en-US" sz="5200" dirty="0"/>
+          </a:p>
+        </p:txBody>
+      </p:sp>
+      <p:sp>
+        <p:nvSpPr>
+          <p:cNvPr id="3" name="Text 1"/>
+          <p:cNvSpPr/>
+          <p:nvPr/>
+        </p:nvSpPr>
+        <p:spPr>
+          <a:xfrm>
+            <a:off x="566928" y="384048"/>
+            <a:ext cx="8229600" cy="274320"/>
+          </a:xfrm>
+          <a:prstGeom prst="rect">
+            <a:avLst/>
+          </a:prstGeom>
+          <a:noFill/>
+          <a:ln/>
+        </p:spPr>
+        <p:txBody>
+          <a:bodyPr wrap="square" lIns="0" tIns="0" rIns="0" bIns="0" rtlCol="0" anchor="ctr"/>
+          <a:lstStyle/>
+          <a:p>
+            <a:pPr algn="l" indent="0" marL="0">
+              <a:buNone/>
+            </a:pPr>
+            <a:r>
+              <a:rPr lang="en-US" sz="1200" b="1" spc="300" kern="0" dirty="0">
+                <a:solidFill>
+                  <a:srgbClr val="C8102E"/>
+                </a:solidFill>
+                <a:latin typeface="Calibri" pitchFamily="34" charset="0"/>
+                <a:ea typeface="Calibri" pitchFamily="34" charset="-122"/>
+                <a:cs typeface="Calibri" pitchFamily="34" charset="-120"/>
+              </a:rPr>
+              <a:t>SQL認証環境の追加リスク（ADが無くても）</a:t>
+            </a:r>
+            <a:endParaRPr lang="en-US" sz="1200" dirty="0"/>
+          </a:p>
+        </p:txBody>
+      </p:sp>
+      <p:sp>
+        <p:nvSpPr>
+          <p:cNvPr id="4" name="Text 2"/>
+          <p:cNvSpPr/>
+          <p:nvPr/>
+        </p:nvSpPr>
+        <p:spPr>
+          <a:xfrm>
+            <a:off x="566928" y="658368"/>
+            <a:ext cx="11055096" cy="868680"/>
+          </a:xfrm>
+          <a:prstGeom prst="rect">
+            <a:avLst/>
+          </a:prstGeom>
+          <a:noFill/>
+          <a:ln/>
+        </p:spPr>
+        <p:txBody>
+          <a:bodyPr wrap="square" lIns="0" tIns="0" rIns="0" bIns="0" rtlCol="0" anchor="t"/>
+          <a:lstStyle/>
+          <a:p>
+            <a:pPr algn="l" indent="0" marL="0">
+              <a:buNone/>
+            </a:pPr>
+            <a:r>
+              <a:rPr lang="en-US" sz="3200" b="1" dirty="0">
+                <a:solidFill>
+                  <a:srgbClr val="0E1B3D"/>
+                </a:solidFill>
+                <a:latin typeface="Cambria" pitchFamily="34" charset="0"/>
+                <a:ea typeface="Cambria" pitchFamily="34" charset="-122"/>
+                <a:cs typeface="Cambria" pitchFamily="34" charset="-120"/>
+              </a:rPr>
               <a:t>SQL認証でも認証情報は盗まれる ― 5つの経路</a:t>
             </a:r>
             <a:endParaRPr lang="en-US" sz="3200" dirty="0"/>
@@ -4608,7 +4803,7 @@
       </p:sp>
       <p:sp>
         <p:nvSpPr>
-          <p:cNvPr id="4" name="Shape 2"/>
+          <p:cNvPr id="5" name="Shape 3"/>
           <p:cNvSpPr/>
           <p:nvPr/>
         </p:nvSpPr>
@@ -4642,7 +4837,7 @@
       </p:sp>
       <p:sp>
         <p:nvSpPr>
-          <p:cNvPr id="5" name="Shape 3"/>
+          <p:cNvPr id="6" name="Shape 4"/>
           <p:cNvSpPr/>
           <p:nvPr/>
         </p:nvSpPr>
@@ -4662,7 +4857,7 @@
       </p:sp>
       <p:sp>
         <p:nvSpPr>
-          <p:cNvPr id="6" name="Text 4"/>
+          <p:cNvPr id="7" name="Text 5"/>
           <p:cNvSpPr/>
           <p:nvPr/>
         </p:nvSpPr>
@@ -4701,7 +4896,7 @@
       </p:sp>
       <p:sp>
         <p:nvSpPr>
-          <p:cNvPr id="7" name="Text 5"/>
+          <p:cNvPr id="8" name="Text 6"/>
           <p:cNvSpPr/>
           <p:nvPr/>
         </p:nvSpPr>
@@ -4743,7 +4938,7 @@
       </p:sp>
       <p:sp>
         <p:nvSpPr>
-          <p:cNvPr id="8" name="Text 6"/>
+          <p:cNvPr id="9" name="Text 7"/>
           <p:cNvSpPr/>
           <p:nvPr/>
         </p:nvSpPr>
@@ -4785,7 +4980,7 @@
       </p:sp>
       <p:sp>
         <p:nvSpPr>
-          <p:cNvPr id="9" name="Shape 7"/>
+          <p:cNvPr id="10" name="Shape 8"/>
           <p:cNvSpPr/>
           <p:nvPr/>
         </p:nvSpPr>
@@ -4819,7 +5014,7 @@
       </p:sp>
       <p:sp>
         <p:nvSpPr>
-          <p:cNvPr id="10" name="Shape 8"/>
+          <p:cNvPr id="11" name="Shape 9"/>
           <p:cNvSpPr/>
           <p:nvPr/>
         </p:nvSpPr>
@@ -4839,7 +5034,7 @@
       </p:sp>
       <p:sp>
         <p:nvSpPr>
-          <p:cNvPr id="11" name="Text 9"/>
+          <p:cNvPr id="12" name="Text 10"/>
           <p:cNvSpPr/>
           <p:nvPr/>
         </p:nvSpPr>
@@ -4878,7 +5073,7 @@
       </p:sp>
       <p:sp>
         <p:nvSpPr>
-          <p:cNvPr id="12" name="Text 10"/>
+          <p:cNvPr id="13" name="Text 11"/>
           <p:cNvSpPr/>
           <p:nvPr/>
         </p:nvSpPr>
@@ -4920,7 +5115,7 @@
       </p:sp>
       <p:sp>
         <p:nvSpPr>
-          <p:cNvPr id="13" name="Text 11"/>
+          <p:cNvPr id="14" name="Text 12"/>
           <p:cNvSpPr/>
           <p:nvPr/>
         </p:nvSpPr>
@@ -4962,7 +5157,7 @@
       </p:sp>
       <p:sp>
         <p:nvSpPr>
-          <p:cNvPr id="14" name="Shape 12"/>
+          <p:cNvPr id="15" name="Shape 13"/>
           <p:cNvSpPr/>
           <p:nvPr/>
         </p:nvSpPr>
@@ -4996,7 +5191,7 @@
       </p:sp>
       <p:sp>
         <p:nvSpPr>
-          <p:cNvPr id="15" name="Shape 13"/>
+          <p:cNvPr id="16" name="Shape 14"/>
           <p:cNvSpPr/>
           <p:nvPr/>
         </p:nvSpPr>
@@ -5016,7 +5211,7 @@
       </p:sp>
       <p:sp>
         <p:nvSpPr>
-          <p:cNvPr id="16" name="Text 14"/>
+          <p:cNvPr id="17" name="Text 15"/>
           <p:cNvSpPr/>
           <p:nvPr/>
         </p:nvSpPr>
@@ -5055,7 +5250,7 @@
       </p:sp>
       <p:sp>
         <p:nvSpPr>
-          <p:cNvPr id="17" name="Text 15"/>
+          <p:cNvPr id="18" name="Text 16"/>
           <p:cNvSpPr/>
           <p:nvPr/>
         </p:nvSpPr>
@@ -5097,7 +5292,7 @@
       </p:sp>
       <p:sp>
         <p:nvSpPr>
-          <p:cNvPr id="18" name="Text 16"/>
+          <p:cNvPr id="19" name="Text 17"/>
           <p:cNvSpPr/>
           <p:nvPr/>
         </p:nvSpPr>
@@ -5139,7 +5334,7 @@
       </p:sp>
       <p:sp>
         <p:nvSpPr>
-          <p:cNvPr id="19" name="Shape 17"/>
+          <p:cNvPr id="20" name="Shape 18"/>
           <p:cNvSpPr/>
           <p:nvPr/>
         </p:nvSpPr>
@@ -5173,7 +5368,7 @@
       </p:sp>
       <p:sp>
         <p:nvSpPr>
-          <p:cNvPr id="20" name="Shape 18"/>
+          <p:cNvPr id="21" name="Shape 19"/>
           <p:cNvSpPr/>
           <p:nvPr/>
         </p:nvSpPr>
@@ -5193,7 +5388,7 @@
       </p:sp>
       <p:sp>
         <p:nvSpPr>
-          <p:cNvPr id="21" name="Text 19"/>
+          <p:cNvPr id="22" name="Text 20"/>
           <p:cNvSpPr/>
           <p:nvPr/>
         </p:nvSpPr>
@@ -5232,7 +5427,7 @@
       </p:sp>
       <p:sp>
         <p:nvSpPr>
-          <p:cNvPr id="22" name="Text 20"/>
+          <p:cNvPr id="23" name="Text 21"/>
           <p:cNvSpPr/>
           <p:nvPr/>
         </p:nvSpPr>
@@ -5274,7 +5469,7 @@
       </p:sp>
       <p:sp>
         <p:nvSpPr>
-          <p:cNvPr id="23" name="Text 21"/>
+          <p:cNvPr id="24" name="Text 22"/>
           <p:cNvSpPr/>
           <p:nvPr/>
         </p:nvSpPr>
@@ -5316,7 +5511,7 @@
       </p:sp>
       <p:sp>
         <p:nvSpPr>
-          <p:cNvPr id="24" name="Shape 22"/>
+          <p:cNvPr id="25" name="Shape 23"/>
           <p:cNvSpPr/>
           <p:nvPr/>
         </p:nvSpPr>
@@ -5350,7 +5545,7 @@
       </p:sp>
       <p:sp>
         <p:nvSpPr>
-          <p:cNvPr id="25" name="Shape 23"/>
+          <p:cNvPr id="26" name="Shape 24"/>
           <p:cNvSpPr/>
           <p:nvPr/>
         </p:nvSpPr>
@@ -5370,7 +5565,7 @@
       </p:sp>
       <p:sp>
         <p:nvSpPr>
-          <p:cNvPr id="26" name="Text 24"/>
+          <p:cNvPr id="27" name="Text 25"/>
           <p:cNvSpPr/>
           <p:nvPr/>
         </p:nvSpPr>
@@ -5409,7 +5604,7 @@
       </p:sp>
       <p:sp>
         <p:nvSpPr>
-          <p:cNvPr id="27" name="Text 25"/>
+          <p:cNvPr id="28" name="Text 26"/>
           <p:cNvSpPr/>
           <p:nvPr/>
         </p:nvSpPr>
@@ -5451,7 +5646,7 @@
       </p:sp>
       <p:sp>
         <p:nvSpPr>
-          <p:cNvPr id="28" name="Text 26"/>
+          <p:cNvPr id="29" name="Text 27"/>
           <p:cNvSpPr/>
           <p:nvPr/>
         </p:nvSpPr>
@@ -5493,7 +5688,7 @@
       </p:sp>
       <p:sp>
         <p:nvSpPr>
-          <p:cNvPr id="29" name="Shape 27"/>
+          <p:cNvPr id="30" name="Shape 28"/>
           <p:cNvSpPr/>
           <p:nvPr/>
         </p:nvSpPr>
@@ -5515,7 +5710,7 @@
       </p:sp>
       <p:sp>
         <p:nvSpPr>
-          <p:cNvPr id="30" name="Text 28"/>
+          <p:cNvPr id="31" name="Text 29"/>
           <p:cNvSpPr/>
           <p:nvPr/>
         </p:nvSpPr>
@@ -5568,7 +5763,7 @@
       </p:sp>
       <p:sp>
         <p:nvSpPr>
-          <p:cNvPr id="31" name="Text 29"/>
+          <p:cNvPr id="32" name="Text 30"/>
           <p:cNvSpPr/>
           <p:nvPr/>
         </p:nvSpPr>
@@ -5600,6 +5795,45 @@
                 <a:cs typeface="Calibri" pitchFamily="34" charset="-120"/>
               </a:rPr>
               <a:t>11</a:t>
+            </a:r>
+            <a:endParaRPr lang="en-US" sz="1000" dirty="0"/>
+          </a:p>
+        </p:txBody>
+      </p:sp>
+      <p:sp>
+        <p:nvSpPr>
+          <p:cNvPr id="33" name="Text 31"/>
+          <p:cNvSpPr/>
+          <p:nvPr/>
+        </p:nvSpPr>
+        <p:spPr>
+          <a:xfrm>
+            <a:off x="9052560" y="237744"/>
+            <a:ext cx="2697480" cy="292608"/>
+          </a:xfrm>
+          <a:prstGeom prst="rect">
+            <a:avLst/>
+          </a:prstGeom>
+          <a:noFill/>
+          <a:ln/>
+        </p:spPr>
+        <p:txBody>
+          <a:bodyPr wrap="square" lIns="0" tIns="0" rIns="0" bIns="0" rtlCol="0" anchor="ctr"/>
+          <a:lstStyle/>
+          <a:p>
+            <a:pPr algn="r" indent="0" marL="0">
+              <a:buNone/>
+            </a:pPr>
+            <a:r>
+              <a:rPr lang="en-US" sz="1000" b="1" spc="100" kern="0" dirty="0">
+                <a:solidFill>
+                  <a:srgbClr val="C8102E"/>
+                </a:solidFill>
+                <a:latin typeface="Calibri" pitchFamily="34" charset="0"/>
+                <a:ea typeface="Calibri" pitchFamily="34" charset="-122"/>
+                <a:cs typeface="Calibri" pitchFamily="34" charset="-120"/>
+              </a:rPr>
+              <a:t>社外秘・取扱注意</a:t>
             </a:r>
             <a:endParaRPr lang="en-US" sz="1000" dirty="0"/>
           </a:p>
@@ -5644,9 +5878,9 @@
           <p:nvPr/>
         </p:nvSpPr>
         <p:spPr>
-          <a:xfrm>
-            <a:off x="566928" y="384048"/>
-            <a:ext cx="8229600" cy="274320"/>
+          <a:xfrm rot="19800000">
+            <a:off x="822960" y="2331720"/>
+            <a:ext cx="10515600" cy="1920240"/>
           </a:xfrm>
           <a:prstGeom prst="rect">
             <a:avLst/>
@@ -5658,57 +5892,96 @@
           <a:bodyPr wrap="square" lIns="0" tIns="0" rIns="0" bIns="0" rtlCol="0" anchor="ctr"/>
           <a:lstStyle/>
           <a:p>
-            <a:pPr algn="l" indent="0" marL="0">
-              <a:buNone/>
-            </a:pPr>
-            <a:r>
-              <a:rPr lang="en-US" sz="1200" b="1" spc="300" kern="0" dirty="0">
-                <a:solidFill>
-                  <a:srgbClr val="C8102E"/>
-                </a:solidFill>
-                <a:latin typeface="Calibri" pitchFamily="34" charset="0"/>
-                <a:ea typeface="Calibri" pitchFamily="34" charset="-122"/>
-                <a:cs typeface="Calibri" pitchFamily="34" charset="-120"/>
-              </a:rPr>
-              <a:t>あるべき考え方</a:t>
-            </a:r>
-            <a:endParaRPr lang="en-US" sz="1200" dirty="0"/>
-          </a:p>
-        </p:txBody>
-      </p:sp>
-      <p:sp>
-        <p:nvSpPr>
-          <p:cNvPr id="3" name="Text 1"/>
-          <p:cNvSpPr/>
-          <p:nvPr/>
-        </p:nvSpPr>
-        <p:spPr>
-          <a:xfrm>
-            <a:off x="566928" y="658368"/>
-            <a:ext cx="11055096" cy="868680"/>
-          </a:xfrm>
-          <a:prstGeom prst="rect">
-            <a:avLst/>
-          </a:prstGeom>
-          <a:noFill/>
-          <a:ln/>
-        </p:spPr>
-        <p:txBody>
-          <a:bodyPr wrap="square" lIns="0" tIns="0" rIns="0" bIns="0" rtlCol="0" anchor="t"/>
-          <a:lstStyle/>
-          <a:p>
-            <a:pPr algn="l" indent="0" marL="0">
-              <a:buNone/>
-            </a:pPr>
-            <a:r>
-              <a:rPr lang="en-US" sz="3200" b="1" dirty="0">
-                <a:solidFill>
-                  <a:srgbClr val="0E1B3D"/>
+            <a:pPr algn="ctr" indent="0" marL="0">
+              <a:buNone/>
+            </a:pPr>
+            <a:r>
+              <a:rPr lang="en-US" sz="5200" b="1" dirty="0">
+                <a:solidFill>
+                  <a:srgbClr val="D3D9E3"/>
                 </a:solidFill>
                 <a:latin typeface="Cambria" pitchFamily="34" charset="0"/>
                 <a:ea typeface="Cambria" pitchFamily="34" charset="-122"/>
                 <a:cs typeface="Cambria" pitchFamily="34" charset="-120"/>
               </a:rPr>
+              <a:t>CONFIDENTIAL ｜ 社外秘</a:t>
+            </a:r>
+            <a:endParaRPr lang="en-US" sz="5200" dirty="0"/>
+          </a:p>
+        </p:txBody>
+      </p:sp>
+      <p:sp>
+        <p:nvSpPr>
+          <p:cNvPr id="3" name="Text 1"/>
+          <p:cNvSpPr/>
+          <p:nvPr/>
+        </p:nvSpPr>
+        <p:spPr>
+          <a:xfrm>
+            <a:off x="566928" y="384048"/>
+            <a:ext cx="8229600" cy="274320"/>
+          </a:xfrm>
+          <a:prstGeom prst="rect">
+            <a:avLst/>
+          </a:prstGeom>
+          <a:noFill/>
+          <a:ln/>
+        </p:spPr>
+        <p:txBody>
+          <a:bodyPr wrap="square" lIns="0" tIns="0" rIns="0" bIns="0" rtlCol="0" anchor="ctr"/>
+          <a:lstStyle/>
+          <a:p>
+            <a:pPr algn="l" indent="0" marL="0">
+              <a:buNone/>
+            </a:pPr>
+            <a:r>
+              <a:rPr lang="en-US" sz="1200" b="1" spc="300" kern="0" dirty="0">
+                <a:solidFill>
+                  <a:srgbClr val="C8102E"/>
+                </a:solidFill>
+                <a:latin typeface="Calibri" pitchFamily="34" charset="0"/>
+                <a:ea typeface="Calibri" pitchFamily="34" charset="-122"/>
+                <a:cs typeface="Calibri" pitchFamily="34" charset="-120"/>
+              </a:rPr>
+              <a:t>あるべき考え方</a:t>
+            </a:r>
+            <a:endParaRPr lang="en-US" sz="1200" dirty="0"/>
+          </a:p>
+        </p:txBody>
+      </p:sp>
+      <p:sp>
+        <p:nvSpPr>
+          <p:cNvPr id="4" name="Text 2"/>
+          <p:cNvSpPr/>
+          <p:nvPr/>
+        </p:nvSpPr>
+        <p:spPr>
+          <a:xfrm>
+            <a:off x="566928" y="658368"/>
+            <a:ext cx="11055096" cy="868680"/>
+          </a:xfrm>
+          <a:prstGeom prst="rect">
+            <a:avLst/>
+          </a:prstGeom>
+          <a:noFill/>
+          <a:ln/>
+        </p:spPr>
+        <p:txBody>
+          <a:bodyPr wrap="square" lIns="0" tIns="0" rIns="0" bIns="0" rtlCol="0" anchor="t"/>
+          <a:lstStyle/>
+          <a:p>
+            <a:pPr algn="l" indent="0" marL="0">
+              <a:buNone/>
+            </a:pPr>
+            <a:r>
+              <a:rPr lang="en-US" sz="3200" b="1" dirty="0">
+                <a:solidFill>
+                  <a:srgbClr val="0E1B3D"/>
+                </a:solidFill>
+                <a:latin typeface="Cambria" pitchFamily="34" charset="0"/>
+                <a:ea typeface="Cambria" pitchFamily="34" charset="-122"/>
+                <a:cs typeface="Cambria" pitchFamily="34" charset="-120"/>
+              </a:rPr>
               <a:t>脆弱性検査とEDRは「補完関係」― 多層で守る</a:t>
             </a:r>
             <a:endParaRPr lang="en-US" sz="3200" dirty="0"/>
@@ -5717,7 +5990,7 @@
       </p:sp>
       <p:sp>
         <p:nvSpPr>
-          <p:cNvPr id="4" name="Shape 2"/>
+          <p:cNvPr id="5" name="Shape 3"/>
           <p:cNvSpPr/>
           <p:nvPr/>
         </p:nvSpPr>
@@ -5751,7 +6024,7 @@
       </p:sp>
       <p:sp>
         <p:nvSpPr>
-          <p:cNvPr id="5" name="Shape 3"/>
+          <p:cNvPr id="6" name="Shape 4"/>
           <p:cNvSpPr/>
           <p:nvPr/>
         </p:nvSpPr>
@@ -5771,7 +6044,7 @@
       </p:sp>
       <p:sp>
         <p:nvSpPr>
-          <p:cNvPr id="6" name="Text 4"/>
+          <p:cNvPr id="7" name="Text 5"/>
           <p:cNvSpPr/>
           <p:nvPr/>
         </p:nvSpPr>
@@ -5810,7 +6083,7 @@
       </p:sp>
       <p:sp>
         <p:nvSpPr>
-          <p:cNvPr id="7" name="Text 5"/>
+          <p:cNvPr id="8" name="Text 6"/>
           <p:cNvSpPr/>
           <p:nvPr/>
         </p:nvSpPr>
@@ -5863,7 +6136,7 @@
       </p:sp>
       <p:sp>
         <p:nvSpPr>
-          <p:cNvPr id="8" name="Text 6"/>
+          <p:cNvPr id="9" name="Text 7"/>
           <p:cNvSpPr/>
           <p:nvPr/>
         </p:nvSpPr>
@@ -5902,7 +6175,7 @@
       </p:sp>
       <p:sp>
         <p:nvSpPr>
-          <p:cNvPr id="9" name="Shape 7"/>
+          <p:cNvPr id="10" name="Shape 8"/>
           <p:cNvSpPr/>
           <p:nvPr/>
         </p:nvSpPr>
@@ -5936,7 +6209,7 @@
       </p:sp>
       <p:sp>
         <p:nvSpPr>
-          <p:cNvPr id="10" name="Shape 8"/>
+          <p:cNvPr id="11" name="Shape 9"/>
           <p:cNvSpPr/>
           <p:nvPr/>
         </p:nvSpPr>
@@ -5956,7 +6229,7 @@
       </p:sp>
       <p:sp>
         <p:nvSpPr>
-          <p:cNvPr id="11" name="Text 9"/>
+          <p:cNvPr id="12" name="Text 10"/>
           <p:cNvSpPr/>
           <p:nvPr/>
         </p:nvSpPr>
@@ -5995,7 +6268,7 @@
       </p:sp>
       <p:sp>
         <p:nvSpPr>
-          <p:cNvPr id="12" name="Text 10"/>
+          <p:cNvPr id="13" name="Text 11"/>
           <p:cNvSpPr/>
           <p:nvPr/>
         </p:nvSpPr>
@@ -6048,7 +6321,7 @@
       </p:sp>
       <p:sp>
         <p:nvSpPr>
-          <p:cNvPr id="13" name="Text 11"/>
+          <p:cNvPr id="14" name="Text 12"/>
           <p:cNvSpPr/>
           <p:nvPr/>
         </p:nvSpPr>
@@ -6087,7 +6360,7 @@
       </p:sp>
       <p:sp>
         <p:nvSpPr>
-          <p:cNvPr id="14" name="Shape 12"/>
+          <p:cNvPr id="15" name="Shape 13"/>
           <p:cNvSpPr/>
           <p:nvPr/>
         </p:nvSpPr>
@@ -6121,7 +6394,7 @@
       </p:sp>
       <p:sp>
         <p:nvSpPr>
-          <p:cNvPr id="15" name="Shape 13"/>
+          <p:cNvPr id="16" name="Shape 14"/>
           <p:cNvSpPr/>
           <p:nvPr/>
         </p:nvSpPr>
@@ -6141,7 +6414,7 @@
       </p:sp>
       <p:sp>
         <p:nvSpPr>
-          <p:cNvPr id="16" name="Text 14"/>
+          <p:cNvPr id="17" name="Text 15"/>
           <p:cNvSpPr/>
           <p:nvPr/>
         </p:nvSpPr>
@@ -6180,7 +6453,7 @@
       </p:sp>
       <p:sp>
         <p:nvSpPr>
-          <p:cNvPr id="17" name="Text 15"/>
+          <p:cNvPr id="18" name="Text 16"/>
           <p:cNvSpPr/>
           <p:nvPr/>
         </p:nvSpPr>
@@ -6233,7 +6506,7 @@
       </p:sp>
       <p:sp>
         <p:nvSpPr>
-          <p:cNvPr id="18" name="Text 16"/>
+          <p:cNvPr id="19" name="Text 17"/>
           <p:cNvSpPr/>
           <p:nvPr/>
         </p:nvSpPr>
@@ -6272,7 +6545,7 @@
       </p:sp>
       <p:sp>
         <p:nvSpPr>
-          <p:cNvPr id="19" name="Shape 17"/>
+          <p:cNvPr id="20" name="Shape 18"/>
           <p:cNvSpPr/>
           <p:nvPr/>
         </p:nvSpPr>
@@ -6301,7 +6574,7 @@
       </p:sp>
       <p:sp>
         <p:nvSpPr>
-          <p:cNvPr id="20" name="Text 18"/>
+          <p:cNvPr id="21" name="Text 19"/>
           <p:cNvSpPr/>
           <p:nvPr/>
         </p:nvSpPr>
@@ -6389,7 +6662,7 @@
       </p:sp>
       <p:sp>
         <p:nvSpPr>
-          <p:cNvPr id="21" name="Text 19"/>
+          <p:cNvPr id="22" name="Text 20"/>
           <p:cNvSpPr/>
           <p:nvPr/>
         </p:nvSpPr>
@@ -6421,6 +6694,45 @@
                 <a:cs typeface="Calibri" pitchFamily="34" charset="-120"/>
               </a:rPr>
               <a:t>12</a:t>
+            </a:r>
+            <a:endParaRPr lang="en-US" sz="1000" dirty="0"/>
+          </a:p>
+        </p:txBody>
+      </p:sp>
+      <p:sp>
+        <p:nvSpPr>
+          <p:cNvPr id="23" name="Text 21"/>
+          <p:cNvSpPr/>
+          <p:nvPr/>
+        </p:nvSpPr>
+        <p:spPr>
+          <a:xfrm>
+            <a:off x="9052560" y="237744"/>
+            <a:ext cx="2697480" cy="292608"/>
+          </a:xfrm>
+          <a:prstGeom prst="rect">
+            <a:avLst/>
+          </a:prstGeom>
+          <a:noFill/>
+          <a:ln/>
+        </p:spPr>
+        <p:txBody>
+          <a:bodyPr wrap="square" lIns="0" tIns="0" rIns="0" bIns="0" rtlCol="0" anchor="ctr"/>
+          <a:lstStyle/>
+          <a:p>
+            <a:pPr algn="r" indent="0" marL="0">
+              <a:buNone/>
+            </a:pPr>
+            <a:r>
+              <a:rPr lang="en-US" sz="1000" b="1" spc="100" kern="0" dirty="0">
+                <a:solidFill>
+                  <a:srgbClr val="C8102E"/>
+                </a:solidFill>
+                <a:latin typeface="Calibri" pitchFamily="34" charset="0"/>
+                <a:ea typeface="Calibri" pitchFamily="34" charset="-122"/>
+                <a:cs typeface="Calibri" pitchFamily="34" charset="-120"/>
+              </a:rPr>
+              <a:t>社外秘・取扱注意</a:t>
             </a:r>
             <a:endParaRPr lang="en-US" sz="1000" dirty="0"/>
           </a:p>
@@ -6465,9 +6777,9 @@
           <p:nvPr/>
         </p:nvSpPr>
         <p:spPr>
-          <a:xfrm>
-            <a:off x="566928" y="384048"/>
-            <a:ext cx="8229600" cy="274320"/>
+          <a:xfrm rot="19800000">
+            <a:off x="822960" y="2331720"/>
+            <a:ext cx="10515600" cy="1920240"/>
           </a:xfrm>
           <a:prstGeom prst="rect">
             <a:avLst/>
@@ -6479,57 +6791,96 @@
           <a:bodyPr wrap="square" lIns="0" tIns="0" rIns="0" bIns="0" rtlCol="0" anchor="ctr"/>
           <a:lstStyle/>
           <a:p>
-            <a:pPr algn="l" indent="0" marL="0">
-              <a:buNone/>
-            </a:pPr>
-            <a:r>
-              <a:rPr lang="en-US" sz="1200" b="1" spc="300" kern="0" dirty="0">
-                <a:solidFill>
-                  <a:srgbClr val="C8102E"/>
-                </a:solidFill>
-                <a:latin typeface="Calibri" pitchFamily="34" charset="0"/>
-                <a:ea typeface="Calibri" pitchFamily="34" charset="-122"/>
-                <a:cs typeface="Calibri" pitchFamily="34" charset="-120"/>
-              </a:rPr>
-              <a:t>Aenaへの提言</a:t>
-            </a:r>
-            <a:endParaRPr lang="en-US" sz="1200" dirty="0"/>
-          </a:p>
-        </p:txBody>
-      </p:sp>
-      <p:sp>
-        <p:nvSpPr>
-          <p:cNvPr id="3" name="Text 1"/>
-          <p:cNvSpPr/>
-          <p:nvPr/>
-        </p:nvSpPr>
-        <p:spPr>
-          <a:xfrm>
-            <a:off x="566928" y="658368"/>
-            <a:ext cx="11055096" cy="868680"/>
-          </a:xfrm>
-          <a:prstGeom prst="rect">
-            <a:avLst/>
-          </a:prstGeom>
-          <a:noFill/>
-          <a:ln/>
-        </p:spPr>
-        <p:txBody>
-          <a:bodyPr wrap="square" lIns="0" tIns="0" rIns="0" bIns="0" rtlCol="0" anchor="t"/>
-          <a:lstStyle/>
-          <a:p>
-            <a:pPr algn="l" indent="0" marL="0">
-              <a:buNone/>
-            </a:pPr>
-            <a:r>
-              <a:rPr lang="en-US" sz="3200" b="1" dirty="0">
-                <a:solidFill>
-                  <a:srgbClr val="0E1B3D"/>
+            <a:pPr algn="ctr" indent="0" marL="0">
+              <a:buNone/>
+            </a:pPr>
+            <a:r>
+              <a:rPr lang="en-US" sz="5200" b="1" dirty="0">
+                <a:solidFill>
+                  <a:srgbClr val="D3D9E3"/>
                 </a:solidFill>
                 <a:latin typeface="Cambria" pitchFamily="34" charset="0"/>
                 <a:ea typeface="Cambria" pitchFamily="34" charset="-122"/>
                 <a:cs typeface="Cambria" pitchFamily="34" charset="-120"/>
               </a:rPr>
+              <a:t>CONFIDENTIAL ｜ 社外秘</a:t>
+            </a:r>
+            <a:endParaRPr lang="en-US" sz="5200" dirty="0"/>
+          </a:p>
+        </p:txBody>
+      </p:sp>
+      <p:sp>
+        <p:nvSpPr>
+          <p:cNvPr id="3" name="Text 1"/>
+          <p:cNvSpPr/>
+          <p:nvPr/>
+        </p:nvSpPr>
+        <p:spPr>
+          <a:xfrm>
+            <a:off x="566928" y="384048"/>
+            <a:ext cx="8229600" cy="274320"/>
+          </a:xfrm>
+          <a:prstGeom prst="rect">
+            <a:avLst/>
+          </a:prstGeom>
+          <a:noFill/>
+          <a:ln/>
+        </p:spPr>
+        <p:txBody>
+          <a:bodyPr wrap="square" lIns="0" tIns="0" rIns="0" bIns="0" rtlCol="0" anchor="ctr"/>
+          <a:lstStyle/>
+          <a:p>
+            <a:pPr algn="l" indent="0" marL="0">
+              <a:buNone/>
+            </a:pPr>
+            <a:r>
+              <a:rPr lang="en-US" sz="1200" b="1" spc="300" kern="0" dirty="0">
+                <a:solidFill>
+                  <a:srgbClr val="C8102E"/>
+                </a:solidFill>
+                <a:latin typeface="Calibri" pitchFamily="34" charset="0"/>
+                <a:ea typeface="Calibri" pitchFamily="34" charset="-122"/>
+                <a:cs typeface="Calibri" pitchFamily="34" charset="-120"/>
+              </a:rPr>
+              <a:t>Aenaへの提言</a:t>
+            </a:r>
+            <a:endParaRPr lang="en-US" sz="1200" dirty="0"/>
+          </a:p>
+        </p:txBody>
+      </p:sp>
+      <p:sp>
+        <p:nvSpPr>
+          <p:cNvPr id="4" name="Text 2"/>
+          <p:cNvSpPr/>
+          <p:nvPr/>
+        </p:nvSpPr>
+        <p:spPr>
+          <a:xfrm>
+            <a:off x="566928" y="658368"/>
+            <a:ext cx="11055096" cy="868680"/>
+          </a:xfrm>
+          <a:prstGeom prst="rect">
+            <a:avLst/>
+          </a:prstGeom>
+          <a:noFill/>
+          <a:ln/>
+        </p:spPr>
+        <p:txBody>
+          <a:bodyPr wrap="square" lIns="0" tIns="0" rIns="0" bIns="0" rtlCol="0" anchor="t"/>
+          <a:lstStyle/>
+          <a:p>
+            <a:pPr algn="l" indent="0" marL="0">
+              <a:buNone/>
+            </a:pPr>
+            <a:r>
+              <a:rPr lang="en-US" sz="3200" b="1" dirty="0">
+                <a:solidFill>
+                  <a:srgbClr val="0E1B3D"/>
+                </a:solidFill>
+                <a:latin typeface="Cambria" pitchFamily="34" charset="0"/>
+                <a:ea typeface="Cambria" pitchFamily="34" charset="-122"/>
+                <a:cs typeface="Cambria" pitchFamily="34" charset="-120"/>
+              </a:rPr>
               <a:t>S-1に加えて今すぐ着手したい6項目</a:t>
             </a:r>
             <a:endParaRPr lang="en-US" sz="3200" dirty="0"/>
@@ -6538,7 +6889,7 @@
       </p:sp>
       <p:sp>
         <p:nvSpPr>
-          <p:cNvPr id="4" name="Shape 2"/>
+          <p:cNvPr id="5" name="Shape 3"/>
           <p:cNvSpPr/>
           <p:nvPr/>
         </p:nvSpPr>
@@ -6572,7 +6923,7 @@
       </p:sp>
       <p:sp>
         <p:nvSpPr>
-          <p:cNvPr id="5" name="Shape 3"/>
+          <p:cNvPr id="6" name="Shape 4"/>
           <p:cNvSpPr/>
           <p:nvPr/>
         </p:nvSpPr>
@@ -6592,7 +6943,7 @@
       </p:sp>
       <p:sp>
         <p:nvSpPr>
-          <p:cNvPr id="6" name="Text 4"/>
+          <p:cNvPr id="7" name="Text 5"/>
           <p:cNvSpPr/>
           <p:nvPr/>
         </p:nvSpPr>
@@ -6631,7 +6982,7 @@
       </p:sp>
       <p:sp>
         <p:nvSpPr>
-          <p:cNvPr id="7" name="Text 5"/>
+          <p:cNvPr id="8" name="Text 6"/>
           <p:cNvSpPr/>
           <p:nvPr/>
         </p:nvSpPr>
@@ -6673,7 +7024,7 @@
       </p:sp>
       <p:sp>
         <p:nvSpPr>
-          <p:cNvPr id="8" name="Text 6"/>
+          <p:cNvPr id="9" name="Text 7"/>
           <p:cNvSpPr/>
           <p:nvPr/>
         </p:nvSpPr>
@@ -6715,7 +7066,7 @@
       </p:sp>
       <p:sp>
         <p:nvSpPr>
-          <p:cNvPr id="9" name="Shape 7"/>
+          <p:cNvPr id="10" name="Shape 8"/>
           <p:cNvSpPr/>
           <p:nvPr/>
         </p:nvSpPr>
@@ -6749,7 +7100,7 @@
       </p:sp>
       <p:sp>
         <p:nvSpPr>
-          <p:cNvPr id="10" name="Shape 8"/>
+          <p:cNvPr id="11" name="Shape 9"/>
           <p:cNvSpPr/>
           <p:nvPr/>
         </p:nvSpPr>
@@ -6769,7 +7120,7 @@
       </p:sp>
       <p:sp>
         <p:nvSpPr>
-          <p:cNvPr id="11" name="Text 9"/>
+          <p:cNvPr id="12" name="Text 10"/>
           <p:cNvSpPr/>
           <p:nvPr/>
         </p:nvSpPr>
@@ -6808,7 +7159,7 @@
       </p:sp>
       <p:sp>
         <p:nvSpPr>
-          <p:cNvPr id="12" name="Text 10"/>
+          <p:cNvPr id="13" name="Text 11"/>
           <p:cNvSpPr/>
           <p:nvPr/>
         </p:nvSpPr>
@@ -6850,7 +7201,7 @@
       </p:sp>
       <p:sp>
         <p:nvSpPr>
-          <p:cNvPr id="13" name="Text 11"/>
+          <p:cNvPr id="14" name="Text 12"/>
           <p:cNvSpPr/>
           <p:nvPr/>
         </p:nvSpPr>
@@ -6892,7 +7243,7 @@
       </p:sp>
       <p:sp>
         <p:nvSpPr>
-          <p:cNvPr id="14" name="Shape 12"/>
+          <p:cNvPr id="15" name="Shape 13"/>
           <p:cNvSpPr/>
           <p:nvPr/>
         </p:nvSpPr>
@@ -6926,7 +7277,7 @@
       </p:sp>
       <p:sp>
         <p:nvSpPr>
-          <p:cNvPr id="15" name="Shape 13"/>
+          <p:cNvPr id="16" name="Shape 14"/>
           <p:cNvSpPr/>
           <p:nvPr/>
         </p:nvSpPr>
@@ -6946,7 +7297,7 @@
       </p:sp>
       <p:sp>
         <p:nvSpPr>
-          <p:cNvPr id="16" name="Text 14"/>
+          <p:cNvPr id="17" name="Text 15"/>
           <p:cNvSpPr/>
           <p:nvPr/>
         </p:nvSpPr>
@@ -6985,7 +7336,7 @@
       </p:sp>
       <p:sp>
         <p:nvSpPr>
-          <p:cNvPr id="17" name="Text 15"/>
+          <p:cNvPr id="18" name="Text 16"/>
           <p:cNvSpPr/>
           <p:nvPr/>
         </p:nvSpPr>
@@ -7027,7 +7378,7 @@
       </p:sp>
       <p:sp>
         <p:nvSpPr>
-          <p:cNvPr id="18" name="Text 16"/>
+          <p:cNvPr id="19" name="Text 17"/>
           <p:cNvSpPr/>
           <p:nvPr/>
         </p:nvSpPr>
@@ -7069,7 +7420,7 @@
       </p:sp>
       <p:sp>
         <p:nvSpPr>
-          <p:cNvPr id="19" name="Shape 17"/>
+          <p:cNvPr id="20" name="Shape 18"/>
           <p:cNvSpPr/>
           <p:nvPr/>
         </p:nvSpPr>
@@ -7103,7 +7454,7 @@
       </p:sp>
       <p:sp>
         <p:nvSpPr>
-          <p:cNvPr id="20" name="Shape 18"/>
+          <p:cNvPr id="21" name="Shape 19"/>
           <p:cNvSpPr/>
           <p:nvPr/>
         </p:nvSpPr>
@@ -7123,7 +7474,7 @@
       </p:sp>
       <p:sp>
         <p:nvSpPr>
-          <p:cNvPr id="21" name="Text 19"/>
+          <p:cNvPr id="22" name="Text 20"/>
           <p:cNvSpPr/>
           <p:nvPr/>
         </p:nvSpPr>
@@ -7162,7 +7513,7 @@
       </p:sp>
       <p:sp>
         <p:nvSpPr>
-          <p:cNvPr id="22" name="Text 20"/>
+          <p:cNvPr id="23" name="Text 21"/>
           <p:cNvSpPr/>
           <p:nvPr/>
         </p:nvSpPr>
@@ -7204,7 +7555,7 @@
       </p:sp>
       <p:sp>
         <p:nvSpPr>
-          <p:cNvPr id="23" name="Text 21"/>
+          <p:cNvPr id="24" name="Text 22"/>
           <p:cNvSpPr/>
           <p:nvPr/>
         </p:nvSpPr>
@@ -7246,7 +7597,7 @@
       </p:sp>
       <p:sp>
         <p:nvSpPr>
-          <p:cNvPr id="24" name="Shape 22"/>
+          <p:cNvPr id="25" name="Shape 23"/>
           <p:cNvSpPr/>
           <p:nvPr/>
         </p:nvSpPr>
@@ -7280,7 +7631,7 @@
       </p:sp>
       <p:sp>
         <p:nvSpPr>
-          <p:cNvPr id="25" name="Shape 23"/>
+          <p:cNvPr id="26" name="Shape 24"/>
           <p:cNvSpPr/>
           <p:nvPr/>
         </p:nvSpPr>
@@ -7300,7 +7651,7 @@
       </p:sp>
       <p:sp>
         <p:nvSpPr>
-          <p:cNvPr id="26" name="Text 24"/>
+          <p:cNvPr id="27" name="Text 25"/>
           <p:cNvSpPr/>
           <p:nvPr/>
         </p:nvSpPr>
@@ -7339,7 +7690,7 @@
       </p:sp>
       <p:sp>
         <p:nvSpPr>
-          <p:cNvPr id="27" name="Text 25"/>
+          <p:cNvPr id="28" name="Text 26"/>
           <p:cNvSpPr/>
           <p:nvPr/>
         </p:nvSpPr>
@@ -7381,7 +7732,7 @@
       </p:sp>
       <p:sp>
         <p:nvSpPr>
-          <p:cNvPr id="28" name="Text 26"/>
+          <p:cNvPr id="29" name="Text 27"/>
           <p:cNvSpPr/>
           <p:nvPr/>
         </p:nvSpPr>
@@ -7423,7 +7774,7 @@
       </p:sp>
       <p:sp>
         <p:nvSpPr>
-          <p:cNvPr id="29" name="Shape 27"/>
+          <p:cNvPr id="30" name="Shape 28"/>
           <p:cNvSpPr/>
           <p:nvPr/>
         </p:nvSpPr>
@@ -7457,7 +7808,7 @@
       </p:sp>
       <p:sp>
         <p:nvSpPr>
-          <p:cNvPr id="30" name="Shape 28"/>
+          <p:cNvPr id="31" name="Shape 29"/>
           <p:cNvSpPr/>
           <p:nvPr/>
         </p:nvSpPr>
@@ -7477,7 +7828,7 @@
       </p:sp>
       <p:sp>
         <p:nvSpPr>
-          <p:cNvPr id="31" name="Text 29"/>
+          <p:cNvPr id="32" name="Text 30"/>
           <p:cNvSpPr/>
           <p:nvPr/>
         </p:nvSpPr>
@@ -7516,7 +7867,7 @@
       </p:sp>
       <p:sp>
         <p:nvSpPr>
-          <p:cNvPr id="32" name="Text 30"/>
+          <p:cNvPr id="33" name="Text 31"/>
           <p:cNvSpPr/>
           <p:nvPr/>
         </p:nvSpPr>
@@ -7558,7 +7909,7 @@
       </p:sp>
       <p:sp>
         <p:nvSpPr>
-          <p:cNvPr id="33" name="Text 31"/>
+          <p:cNvPr id="34" name="Text 32"/>
           <p:cNvSpPr/>
           <p:nvPr/>
         </p:nvSpPr>
@@ -7600,7 +7951,7 @@
       </p:sp>
       <p:sp>
         <p:nvSpPr>
-          <p:cNvPr id="34" name="Text 32"/>
+          <p:cNvPr id="35" name="Text 33"/>
           <p:cNvSpPr/>
           <p:nvPr/>
         </p:nvSpPr>
@@ -7632,6 +7983,45 @@
                 <a:cs typeface="Calibri" pitchFamily="34" charset="-120"/>
               </a:rPr>
               <a:t>13</a:t>
+            </a:r>
+            <a:endParaRPr lang="en-US" sz="1000" dirty="0"/>
+          </a:p>
+        </p:txBody>
+      </p:sp>
+      <p:sp>
+        <p:nvSpPr>
+          <p:cNvPr id="36" name="Text 34"/>
+          <p:cNvSpPr/>
+          <p:nvPr/>
+        </p:nvSpPr>
+        <p:spPr>
+          <a:xfrm>
+            <a:off x="9052560" y="237744"/>
+            <a:ext cx="2697480" cy="292608"/>
+          </a:xfrm>
+          <a:prstGeom prst="rect">
+            <a:avLst/>
+          </a:prstGeom>
+          <a:noFill/>
+          <a:ln/>
+        </p:spPr>
+        <p:txBody>
+          <a:bodyPr wrap="square" lIns="0" tIns="0" rIns="0" bIns="0" rtlCol="0" anchor="ctr"/>
+          <a:lstStyle/>
+          <a:p>
+            <a:pPr algn="r" indent="0" marL="0">
+              <a:buNone/>
+            </a:pPr>
+            <a:r>
+              <a:rPr lang="en-US" sz="1000" b="1" spc="100" kern="0" dirty="0">
+                <a:solidFill>
+                  <a:srgbClr val="C8102E"/>
+                </a:solidFill>
+                <a:latin typeface="Calibri" pitchFamily="34" charset="0"/>
+                <a:ea typeface="Calibri" pitchFamily="34" charset="-122"/>
+                <a:cs typeface="Calibri" pitchFamily="34" charset="-120"/>
+              </a:rPr>
+              <a:t>社外秘・取扱注意</a:t>
             </a:r>
             <a:endParaRPr lang="en-US" sz="1000" dirty="0"/>
           </a:p>
@@ -7671,7 +8061,46 @@
       </p:grpSpPr>
       <p:sp>
         <p:nvSpPr>
-          <p:cNvPr id="2" name="Shape 0"/>
+          <p:cNvPr id="2" name="Text 0"/>
+          <p:cNvSpPr/>
+          <p:nvPr/>
+        </p:nvSpPr>
+        <p:spPr>
+          <a:xfrm rot="19800000">
+            <a:off x="822960" y="2331720"/>
+            <a:ext cx="10515600" cy="1920240"/>
+          </a:xfrm>
+          <a:prstGeom prst="rect">
+            <a:avLst/>
+          </a:prstGeom>
+          <a:noFill/>
+          <a:ln/>
+        </p:spPr>
+        <p:txBody>
+          <a:bodyPr wrap="square" lIns="0" tIns="0" rIns="0" bIns="0" rtlCol="0" anchor="ctr"/>
+          <a:lstStyle/>
+          <a:p>
+            <a:pPr algn="ctr" indent="0" marL="0">
+              <a:buNone/>
+            </a:pPr>
+            <a:r>
+              <a:rPr lang="en-US" sz="5200" b="1" dirty="0">
+                <a:solidFill>
+                  <a:srgbClr val="D3D9E3"/>
+                </a:solidFill>
+                <a:latin typeface="Cambria" pitchFamily="34" charset="0"/>
+                <a:ea typeface="Cambria" pitchFamily="34" charset="-122"/>
+                <a:cs typeface="Cambria" pitchFamily="34" charset="-120"/>
+              </a:rPr>
+              <a:t>CONFIDENTIAL ｜ 社外秘</a:t>
+            </a:r>
+            <a:endParaRPr lang="en-US" sz="5200" dirty="0"/>
+          </a:p>
+        </p:txBody>
+      </p:sp>
+      <p:sp>
+        <p:nvSpPr>
+          <p:cNvPr id="3" name="Shape 1"/>
           <p:cNvSpPr/>
           <p:nvPr/>
         </p:nvSpPr>
@@ -7693,7 +8122,7 @@
       </p:sp>
       <p:sp>
         <p:nvSpPr>
-          <p:cNvPr id="3" name="Text 1"/>
+          <p:cNvPr id="4" name="Text 2"/>
           <p:cNvSpPr/>
           <p:nvPr/>
         </p:nvSpPr>
@@ -7732,7 +8161,7 @@
       </p:sp>
       <p:sp>
         <p:nvSpPr>
-          <p:cNvPr id="4" name="Text 2"/>
+          <p:cNvPr id="5" name="Text 3"/>
           <p:cNvSpPr/>
           <p:nvPr/>
         </p:nvSpPr>
@@ -7774,7 +8203,7 @@
       </p:sp>
       <p:sp>
         <p:nvSpPr>
-          <p:cNvPr id="5" name="Text 3"/>
+          <p:cNvPr id="6" name="Text 4"/>
           <p:cNvSpPr/>
           <p:nvPr/>
         </p:nvSpPr>
@@ -7892,7 +8321,7 @@
       </p:sp>
       <p:sp>
         <p:nvSpPr>
-          <p:cNvPr id="6" name="Shape 4"/>
+          <p:cNvPr id="7" name="Shape 5"/>
           <p:cNvSpPr/>
           <p:nvPr/>
         </p:nvSpPr>
@@ -7914,7 +8343,7 @@
       </p:sp>
       <p:sp>
         <p:nvSpPr>
-          <p:cNvPr id="7" name="Text 5"/>
+          <p:cNvPr id="8" name="Text 6"/>
           <p:cNvSpPr/>
           <p:nvPr/>
         </p:nvSpPr>
@@ -7953,7 +8382,7 @@
       </p:sp>
       <p:sp>
         <p:nvSpPr>
-          <p:cNvPr id="8" name="Text 6"/>
+          <p:cNvPr id="9" name="Text 7"/>
           <p:cNvSpPr/>
           <p:nvPr/>
         </p:nvSpPr>
@@ -7985,6 +8414,45 @@
                 <a:cs typeface="Calibri" pitchFamily="34" charset="-120"/>
               </a:rPr>
               <a:t>14</a:t>
+            </a:r>
+            <a:endParaRPr lang="en-US" sz="1000" dirty="0"/>
+          </a:p>
+        </p:txBody>
+      </p:sp>
+      <p:sp>
+        <p:nvSpPr>
+          <p:cNvPr id="10" name="Text 8"/>
+          <p:cNvSpPr/>
+          <p:nvPr/>
+        </p:nvSpPr>
+        <p:spPr>
+          <a:xfrm>
+            <a:off x="9052560" y="237744"/>
+            <a:ext cx="2697480" cy="292608"/>
+          </a:xfrm>
+          <a:prstGeom prst="rect">
+            <a:avLst/>
+          </a:prstGeom>
+          <a:noFill/>
+          <a:ln/>
+        </p:spPr>
+        <p:txBody>
+          <a:bodyPr wrap="square" lIns="0" tIns="0" rIns="0" bIns="0" rtlCol="0" anchor="ctr"/>
+          <a:lstStyle/>
+          <a:p>
+            <a:pPr algn="r" indent="0" marL="0">
+              <a:buNone/>
+            </a:pPr>
+            <a:r>
+              <a:rPr lang="en-US" sz="1000" b="1" spc="100" kern="0" dirty="0">
+                <a:solidFill>
+                  <a:srgbClr val="C8102E"/>
+                </a:solidFill>
+                <a:latin typeface="Calibri" pitchFamily="34" charset="0"/>
+                <a:ea typeface="Calibri" pitchFamily="34" charset="-122"/>
+                <a:cs typeface="Calibri" pitchFamily="34" charset="-120"/>
+              </a:rPr>
+              <a:t>社外秘・取扱注意</a:t>
             </a:r>
             <a:endParaRPr lang="en-US" sz="1000" dirty="0"/>
           </a:p>
@@ -8029,9 +8497,9 @@
           <p:nvPr/>
         </p:nvSpPr>
         <p:spPr>
-          <a:xfrm>
-            <a:off x="566928" y="384048"/>
-            <a:ext cx="8229600" cy="274320"/>
+          <a:xfrm rot="19800000">
+            <a:off x="822960" y="2331720"/>
+            <a:ext cx="10515600" cy="1920240"/>
           </a:xfrm>
           <a:prstGeom prst="rect">
             <a:avLst/>
@@ -8043,57 +8511,96 @@
           <a:bodyPr wrap="square" lIns="0" tIns="0" rIns="0" bIns="0" rtlCol="0" anchor="ctr"/>
           <a:lstStyle/>
           <a:p>
-            <a:pPr algn="l" indent="0" marL="0">
-              <a:buNone/>
-            </a:pPr>
-            <a:r>
-              <a:rPr lang="en-US" sz="1200" b="1" spc="300" kern="0" dirty="0">
-                <a:solidFill>
-                  <a:srgbClr val="68738A"/>
-                </a:solidFill>
-                <a:latin typeface="Calibri" pitchFamily="34" charset="0"/>
-                <a:ea typeface="Calibri" pitchFamily="34" charset="-122"/>
-                <a:cs typeface="Calibri" pitchFamily="34" charset="-120"/>
-              </a:rPr>
-              <a:t>REFERENCES</a:t>
-            </a:r>
-            <a:endParaRPr lang="en-US" sz="1200" dirty="0"/>
-          </a:p>
-        </p:txBody>
-      </p:sp>
-      <p:sp>
-        <p:nvSpPr>
-          <p:cNvPr id="3" name="Text 1"/>
-          <p:cNvSpPr/>
-          <p:nvPr/>
-        </p:nvSpPr>
-        <p:spPr>
-          <a:xfrm>
-            <a:off x="566928" y="658368"/>
-            <a:ext cx="11055096" cy="868680"/>
-          </a:xfrm>
-          <a:prstGeom prst="rect">
-            <a:avLst/>
-          </a:prstGeom>
-          <a:noFill/>
-          <a:ln/>
-        </p:spPr>
-        <p:txBody>
-          <a:bodyPr wrap="square" lIns="0" tIns="0" rIns="0" bIns="0" rtlCol="0" anchor="t"/>
-          <a:lstStyle/>
-          <a:p>
-            <a:pPr algn="l" indent="0" marL="0">
-              <a:buNone/>
-            </a:pPr>
-            <a:r>
-              <a:rPr lang="en-US" sz="3200" b="1" dirty="0">
-                <a:solidFill>
-                  <a:srgbClr val="0E1B3D"/>
+            <a:pPr algn="ctr" indent="0" marL="0">
+              <a:buNone/>
+            </a:pPr>
+            <a:r>
+              <a:rPr lang="en-US" sz="5200" b="1" dirty="0">
+                <a:solidFill>
+                  <a:srgbClr val="D3D9E3"/>
                 </a:solidFill>
                 <a:latin typeface="Cambria" pitchFamily="34" charset="0"/>
                 <a:ea typeface="Cambria" pitchFamily="34" charset="-122"/>
                 <a:cs typeface="Cambria" pitchFamily="34" charset="-120"/>
               </a:rPr>
+              <a:t>CONFIDENTIAL ｜ 社外秘</a:t>
+            </a:r>
+            <a:endParaRPr lang="en-US" sz="5200" dirty="0"/>
+          </a:p>
+        </p:txBody>
+      </p:sp>
+      <p:sp>
+        <p:nvSpPr>
+          <p:cNvPr id="3" name="Text 1"/>
+          <p:cNvSpPr/>
+          <p:nvPr/>
+        </p:nvSpPr>
+        <p:spPr>
+          <a:xfrm>
+            <a:off x="566928" y="384048"/>
+            <a:ext cx="8229600" cy="274320"/>
+          </a:xfrm>
+          <a:prstGeom prst="rect">
+            <a:avLst/>
+          </a:prstGeom>
+          <a:noFill/>
+          <a:ln/>
+        </p:spPr>
+        <p:txBody>
+          <a:bodyPr wrap="square" lIns="0" tIns="0" rIns="0" bIns="0" rtlCol="0" anchor="ctr"/>
+          <a:lstStyle/>
+          <a:p>
+            <a:pPr algn="l" indent="0" marL="0">
+              <a:buNone/>
+            </a:pPr>
+            <a:r>
+              <a:rPr lang="en-US" sz="1200" b="1" spc="300" kern="0" dirty="0">
+                <a:solidFill>
+                  <a:srgbClr val="68738A"/>
+                </a:solidFill>
+                <a:latin typeface="Calibri" pitchFamily="34" charset="0"/>
+                <a:ea typeface="Calibri" pitchFamily="34" charset="-122"/>
+                <a:cs typeface="Calibri" pitchFamily="34" charset="-120"/>
+              </a:rPr>
+              <a:t>REFERENCES</a:t>
+            </a:r>
+            <a:endParaRPr lang="en-US" sz="1200" dirty="0"/>
+          </a:p>
+        </p:txBody>
+      </p:sp>
+      <p:sp>
+        <p:nvSpPr>
+          <p:cNvPr id="4" name="Text 2"/>
+          <p:cNvSpPr/>
+          <p:nvPr/>
+        </p:nvSpPr>
+        <p:spPr>
+          <a:xfrm>
+            <a:off x="566928" y="658368"/>
+            <a:ext cx="11055096" cy="868680"/>
+          </a:xfrm>
+          <a:prstGeom prst="rect">
+            <a:avLst/>
+          </a:prstGeom>
+          <a:noFill/>
+          <a:ln/>
+        </p:spPr>
+        <p:txBody>
+          <a:bodyPr wrap="square" lIns="0" tIns="0" rIns="0" bIns="0" rtlCol="0" anchor="t"/>
+          <a:lstStyle/>
+          <a:p>
+            <a:pPr algn="l" indent="0" marL="0">
+              <a:buNone/>
+            </a:pPr>
+            <a:r>
+              <a:rPr lang="en-US" sz="3200" b="1" dirty="0">
+                <a:solidFill>
+                  <a:srgbClr val="0E1B3D"/>
+                </a:solidFill>
+                <a:latin typeface="Cambria" pitchFamily="34" charset="0"/>
+                <a:ea typeface="Cambria" pitchFamily="34" charset="-122"/>
+                <a:cs typeface="Cambria" pitchFamily="34" charset="-120"/>
+              </a:rPr>
               <a:t>出典</a:t>
             </a:r>
             <a:endParaRPr lang="en-US" sz="3200" dirty="0"/>
@@ -8102,7 +8609,7 @@
       </p:sp>
       <p:sp>
         <p:nvSpPr>
-          <p:cNvPr id="4" name="Text 2"/>
+          <p:cNvPr id="5" name="Text 3"/>
           <p:cNvSpPr/>
           <p:nvPr/>
         </p:nvSpPr>
@@ -8292,7 +8799,7 @@
       </p:sp>
       <p:sp>
         <p:nvSpPr>
-          <p:cNvPr id="5" name="Text 3"/>
+          <p:cNvPr id="6" name="Text 4"/>
           <p:cNvSpPr/>
           <p:nvPr/>
         </p:nvSpPr>
@@ -8331,7 +8838,7 @@
       </p:sp>
       <p:sp>
         <p:nvSpPr>
-          <p:cNvPr id="6" name="Text 4"/>
+          <p:cNvPr id="7" name="Text 5"/>
           <p:cNvSpPr/>
           <p:nvPr/>
         </p:nvSpPr>
@@ -8363,6 +8870,45 @@
                 <a:cs typeface="Calibri" pitchFamily="34" charset="-120"/>
               </a:rPr>
               <a:t>15</a:t>
+            </a:r>
+            <a:endParaRPr lang="en-US" sz="1000" dirty="0"/>
+          </a:p>
+        </p:txBody>
+      </p:sp>
+      <p:sp>
+        <p:nvSpPr>
+          <p:cNvPr id="8" name="Text 6"/>
+          <p:cNvSpPr/>
+          <p:nvPr/>
+        </p:nvSpPr>
+        <p:spPr>
+          <a:xfrm>
+            <a:off x="9052560" y="237744"/>
+            <a:ext cx="2697480" cy="292608"/>
+          </a:xfrm>
+          <a:prstGeom prst="rect">
+            <a:avLst/>
+          </a:prstGeom>
+          <a:noFill/>
+          <a:ln/>
+        </p:spPr>
+        <p:txBody>
+          <a:bodyPr wrap="square" lIns="0" tIns="0" rIns="0" bIns="0" rtlCol="0" anchor="ctr"/>
+          <a:lstStyle/>
+          <a:p>
+            <a:pPr algn="r" indent="0" marL="0">
+              <a:buNone/>
+            </a:pPr>
+            <a:r>
+              <a:rPr lang="en-US" sz="1000" b="1" spc="100" kern="0" dirty="0">
+                <a:solidFill>
+                  <a:srgbClr val="C8102E"/>
+                </a:solidFill>
+                <a:latin typeface="Calibri" pitchFamily="34" charset="0"/>
+                <a:ea typeface="Calibri" pitchFamily="34" charset="-122"/>
+                <a:cs typeface="Calibri" pitchFamily="34" charset="-120"/>
+              </a:rPr>
+              <a:t>社外秘・取扱注意</a:t>
             </a:r>
             <a:endParaRPr lang="en-US" sz="1000" dirty="0"/>
           </a:p>
@@ -8407,9 +8953,9 @@
           <p:nvPr/>
         </p:nvSpPr>
         <p:spPr>
-          <a:xfrm>
-            <a:off x="566928" y="384048"/>
-            <a:ext cx="8229600" cy="274320"/>
+          <a:xfrm rot="19800000">
+            <a:off x="822960" y="2331720"/>
+            <a:ext cx="10515600" cy="1920240"/>
           </a:xfrm>
           <a:prstGeom prst="rect">
             <a:avLst/>
@@ -8421,57 +8967,96 @@
           <a:bodyPr wrap="square" lIns="0" tIns="0" rIns="0" bIns="0" rtlCol="0" anchor="ctr"/>
           <a:lstStyle/>
           <a:p>
-            <a:pPr algn="l" indent="0" marL="0">
-              <a:buNone/>
-            </a:pPr>
-            <a:r>
-              <a:rPr lang="en-US" sz="1200" b="1" spc="300" kern="0" dirty="0">
-                <a:solidFill>
-                  <a:srgbClr val="C8102E"/>
-                </a:solidFill>
-                <a:latin typeface="Calibri" pitchFamily="34" charset="0"/>
-                <a:ea typeface="Calibri" pitchFamily="34" charset="-122"/>
-                <a:cs typeface="Calibri" pitchFamily="34" charset="-120"/>
-              </a:rPr>
-              <a:t>結論（先に要点）</a:t>
-            </a:r>
-            <a:endParaRPr lang="en-US" sz="1200" dirty="0"/>
-          </a:p>
-        </p:txBody>
-      </p:sp>
-      <p:sp>
-        <p:nvSpPr>
-          <p:cNvPr id="3" name="Text 1"/>
-          <p:cNvSpPr/>
-          <p:nvPr/>
-        </p:nvSpPr>
-        <p:spPr>
-          <a:xfrm>
-            <a:off x="566928" y="658368"/>
-            <a:ext cx="11055096" cy="868680"/>
-          </a:xfrm>
-          <a:prstGeom prst="rect">
-            <a:avLst/>
-          </a:prstGeom>
-          <a:noFill/>
-          <a:ln/>
-        </p:spPr>
-        <p:txBody>
-          <a:bodyPr wrap="square" lIns="0" tIns="0" rIns="0" bIns="0" rtlCol="0" anchor="t"/>
-          <a:lstStyle/>
-          <a:p>
-            <a:pPr algn="l" indent="0" marL="0">
-              <a:buNone/>
-            </a:pPr>
-            <a:r>
-              <a:rPr lang="en-US" sz="3200" b="1" dirty="0">
-                <a:solidFill>
-                  <a:srgbClr val="0E1B3D"/>
+            <a:pPr algn="ctr" indent="0" marL="0">
+              <a:buNone/>
+            </a:pPr>
+            <a:r>
+              <a:rPr lang="en-US" sz="5200" b="1" dirty="0">
+                <a:solidFill>
+                  <a:srgbClr val="D3D9E3"/>
                 </a:solidFill>
                 <a:latin typeface="Cambria" pitchFamily="34" charset="0"/>
                 <a:ea typeface="Cambria" pitchFamily="34" charset="-122"/>
                 <a:cs typeface="Cambria" pitchFamily="34" charset="-120"/>
               </a:rPr>
+              <a:t>CONFIDENTIAL ｜ 社外秘</a:t>
+            </a:r>
+            <a:endParaRPr lang="en-US" sz="5200" dirty="0"/>
+          </a:p>
+        </p:txBody>
+      </p:sp>
+      <p:sp>
+        <p:nvSpPr>
+          <p:cNvPr id="3" name="Text 1"/>
+          <p:cNvSpPr/>
+          <p:nvPr/>
+        </p:nvSpPr>
+        <p:spPr>
+          <a:xfrm>
+            <a:off x="566928" y="384048"/>
+            <a:ext cx="8229600" cy="274320"/>
+          </a:xfrm>
+          <a:prstGeom prst="rect">
+            <a:avLst/>
+          </a:prstGeom>
+          <a:noFill/>
+          <a:ln/>
+        </p:spPr>
+        <p:txBody>
+          <a:bodyPr wrap="square" lIns="0" tIns="0" rIns="0" bIns="0" rtlCol="0" anchor="ctr"/>
+          <a:lstStyle/>
+          <a:p>
+            <a:pPr algn="l" indent="0" marL="0">
+              <a:buNone/>
+            </a:pPr>
+            <a:r>
+              <a:rPr lang="en-US" sz="1200" b="1" spc="300" kern="0" dirty="0">
+                <a:solidFill>
+                  <a:srgbClr val="C8102E"/>
+                </a:solidFill>
+                <a:latin typeface="Calibri" pitchFamily="34" charset="0"/>
+                <a:ea typeface="Calibri" pitchFamily="34" charset="-122"/>
+                <a:cs typeface="Calibri" pitchFamily="34" charset="-120"/>
+              </a:rPr>
+              <a:t>結論（先に要点）</a:t>
+            </a:r>
+            <a:endParaRPr lang="en-US" sz="1200" dirty="0"/>
+          </a:p>
+        </p:txBody>
+      </p:sp>
+      <p:sp>
+        <p:nvSpPr>
+          <p:cNvPr id="4" name="Text 2"/>
+          <p:cNvSpPr/>
+          <p:nvPr/>
+        </p:nvSpPr>
+        <p:spPr>
+          <a:xfrm>
+            <a:off x="566928" y="658368"/>
+            <a:ext cx="11055096" cy="868680"/>
+          </a:xfrm>
+          <a:prstGeom prst="rect">
+            <a:avLst/>
+          </a:prstGeom>
+          <a:noFill/>
+          <a:ln/>
+        </p:spPr>
+        <p:txBody>
+          <a:bodyPr wrap="square" lIns="0" tIns="0" rIns="0" bIns="0" rtlCol="0" anchor="t"/>
+          <a:lstStyle/>
+          <a:p>
+            <a:pPr algn="l" indent="0" marL="0">
+              <a:buNone/>
+            </a:pPr>
+            <a:r>
+              <a:rPr lang="en-US" sz="3200" b="1" dirty="0">
+                <a:solidFill>
+                  <a:srgbClr val="0E1B3D"/>
+                </a:solidFill>
+                <a:latin typeface="Cambria" pitchFamily="34" charset="0"/>
+                <a:ea typeface="Cambria" pitchFamily="34" charset="-122"/>
+                <a:cs typeface="Cambria" pitchFamily="34" charset="-120"/>
+              </a:rPr>
               <a:t>S-1 と脆弱性検査は「守る層」が違う。代替ではなく補完。</a:t>
             </a:r>
             <a:endParaRPr lang="en-US" sz="3200" dirty="0"/>
@@ -8480,7 +9065,7 @@
       </p:sp>
       <p:sp>
         <p:nvSpPr>
-          <p:cNvPr id="4" name="Shape 2"/>
+          <p:cNvPr id="5" name="Shape 3"/>
           <p:cNvSpPr/>
           <p:nvPr/>
         </p:nvSpPr>
@@ -8514,7 +9099,7 @@
       </p:sp>
       <p:sp>
         <p:nvSpPr>
-          <p:cNvPr id="5" name="Text 3"/>
+          <p:cNvPr id="6" name="Text 4"/>
           <p:cNvSpPr/>
           <p:nvPr/>
         </p:nvSpPr>
@@ -8553,7 +9138,7 @@
       </p:sp>
       <p:sp>
         <p:nvSpPr>
-          <p:cNvPr id="6" name="Text 4"/>
+          <p:cNvPr id="7" name="Text 5"/>
           <p:cNvSpPr/>
           <p:nvPr/>
         </p:nvSpPr>
@@ -8592,7 +9177,7 @@
       </p:sp>
       <p:sp>
         <p:nvSpPr>
-          <p:cNvPr id="7" name="Text 5"/>
+          <p:cNvPr id="8" name="Text 6"/>
           <p:cNvSpPr/>
           <p:nvPr/>
         </p:nvSpPr>
@@ -8634,7 +9219,7 @@
       </p:sp>
       <p:sp>
         <p:nvSpPr>
-          <p:cNvPr id="8" name="Shape 6"/>
+          <p:cNvPr id="9" name="Shape 7"/>
           <p:cNvSpPr/>
           <p:nvPr/>
         </p:nvSpPr>
@@ -8668,7 +9253,7 @@
       </p:sp>
       <p:sp>
         <p:nvSpPr>
-          <p:cNvPr id="9" name="Text 7"/>
+          <p:cNvPr id="10" name="Text 8"/>
           <p:cNvSpPr/>
           <p:nvPr/>
         </p:nvSpPr>
@@ -8707,7 +9292,7 @@
       </p:sp>
       <p:sp>
         <p:nvSpPr>
-          <p:cNvPr id="10" name="Text 8"/>
+          <p:cNvPr id="11" name="Text 9"/>
           <p:cNvSpPr/>
           <p:nvPr/>
         </p:nvSpPr>
@@ -8746,7 +9331,7 @@
       </p:sp>
       <p:sp>
         <p:nvSpPr>
-          <p:cNvPr id="11" name="Text 9"/>
+          <p:cNvPr id="12" name="Text 10"/>
           <p:cNvSpPr/>
           <p:nvPr/>
         </p:nvSpPr>
@@ -8788,7 +9373,7 @@
       </p:sp>
       <p:sp>
         <p:nvSpPr>
-          <p:cNvPr id="12" name="Shape 10"/>
+          <p:cNvPr id="13" name="Shape 11"/>
           <p:cNvSpPr/>
           <p:nvPr/>
         </p:nvSpPr>
@@ -8822,7 +9407,7 @@
       </p:sp>
       <p:sp>
         <p:nvSpPr>
-          <p:cNvPr id="13" name="Text 11"/>
+          <p:cNvPr id="14" name="Text 12"/>
           <p:cNvSpPr/>
           <p:nvPr/>
         </p:nvSpPr>
@@ -8861,7 +9446,7 @@
       </p:sp>
       <p:sp>
         <p:nvSpPr>
-          <p:cNvPr id="14" name="Text 12"/>
+          <p:cNvPr id="15" name="Text 13"/>
           <p:cNvSpPr/>
           <p:nvPr/>
         </p:nvSpPr>
@@ -8900,7 +9485,7 @@
       </p:sp>
       <p:sp>
         <p:nvSpPr>
-          <p:cNvPr id="15" name="Text 13"/>
+          <p:cNvPr id="16" name="Text 14"/>
           <p:cNvSpPr/>
           <p:nvPr/>
         </p:nvSpPr>
@@ -8942,7 +9527,7 @@
       </p:sp>
       <p:sp>
         <p:nvSpPr>
-          <p:cNvPr id="16" name="Text 14"/>
+          <p:cNvPr id="17" name="Text 15"/>
           <p:cNvSpPr/>
           <p:nvPr/>
         </p:nvSpPr>
@@ -8974,6 +9559,45 @@
                 <a:cs typeface="Calibri" pitchFamily="34" charset="-120"/>
               </a:rPr>
               <a:t>2</a:t>
+            </a:r>
+            <a:endParaRPr lang="en-US" sz="1000" dirty="0"/>
+          </a:p>
+        </p:txBody>
+      </p:sp>
+      <p:sp>
+        <p:nvSpPr>
+          <p:cNvPr id="18" name="Text 16"/>
+          <p:cNvSpPr/>
+          <p:nvPr/>
+        </p:nvSpPr>
+        <p:spPr>
+          <a:xfrm>
+            <a:off x="9052560" y="237744"/>
+            <a:ext cx="2697480" cy="292608"/>
+          </a:xfrm>
+          <a:prstGeom prst="rect">
+            <a:avLst/>
+          </a:prstGeom>
+          <a:noFill/>
+          <a:ln/>
+        </p:spPr>
+        <p:txBody>
+          <a:bodyPr wrap="square" lIns="0" tIns="0" rIns="0" bIns="0" rtlCol="0" anchor="ctr"/>
+          <a:lstStyle/>
+          <a:p>
+            <a:pPr algn="r" indent="0" marL="0">
+              <a:buNone/>
+            </a:pPr>
+            <a:r>
+              <a:rPr lang="en-US" sz="1000" b="1" spc="100" kern="0" dirty="0">
+                <a:solidFill>
+                  <a:srgbClr val="C8102E"/>
+                </a:solidFill>
+                <a:latin typeface="Calibri" pitchFamily="34" charset="0"/>
+                <a:ea typeface="Calibri" pitchFamily="34" charset="-122"/>
+                <a:cs typeface="Calibri" pitchFamily="34" charset="-120"/>
+              </a:rPr>
+              <a:t>社外秘・取扱注意</a:t>
             </a:r>
             <a:endParaRPr lang="en-US" sz="1000" dirty="0"/>
           </a:p>
@@ -9018,9 +9642,9 @@
           <p:nvPr/>
         </p:nvSpPr>
         <p:spPr>
-          <a:xfrm>
-            <a:off x="566928" y="384048"/>
-            <a:ext cx="8229600" cy="274320"/>
+          <a:xfrm rot="19800000">
+            <a:off x="822960" y="2331720"/>
+            <a:ext cx="10515600" cy="1920240"/>
           </a:xfrm>
           <a:prstGeom prst="rect">
             <a:avLst/>
@@ -9032,57 +9656,96 @@
           <a:bodyPr wrap="square" lIns="0" tIns="0" rIns="0" bIns="0" rtlCol="0" anchor="ctr"/>
           <a:lstStyle/>
           <a:p>
-            <a:pPr algn="l" indent="0" marL="0">
-              <a:buNone/>
-            </a:pPr>
-            <a:r>
-              <a:rPr lang="en-US" sz="1200" b="1" spc="300" kern="0" dirty="0">
-                <a:solidFill>
-                  <a:srgbClr val="C8102E"/>
-                </a:solidFill>
-                <a:latin typeface="Calibri" pitchFamily="34" charset="0"/>
-                <a:ea typeface="Calibri" pitchFamily="34" charset="-122"/>
-                <a:cs typeface="Calibri" pitchFamily="34" charset="-120"/>
-              </a:rPr>
-              <a:t>認識のギャップ</a:t>
-            </a:r>
-            <a:endParaRPr lang="en-US" sz="1200" dirty="0"/>
-          </a:p>
-        </p:txBody>
-      </p:sp>
-      <p:sp>
-        <p:nvSpPr>
-          <p:cNvPr id="3" name="Text 1"/>
-          <p:cNvSpPr/>
-          <p:nvPr/>
-        </p:nvSpPr>
-        <p:spPr>
-          <a:xfrm>
-            <a:off x="566928" y="658368"/>
-            <a:ext cx="11055096" cy="868680"/>
-          </a:xfrm>
-          <a:prstGeom prst="rect">
-            <a:avLst/>
-          </a:prstGeom>
-          <a:noFill/>
-          <a:ln/>
-        </p:spPr>
-        <p:txBody>
-          <a:bodyPr wrap="square" lIns="0" tIns="0" rIns="0" bIns="0" rtlCol="0" anchor="t"/>
-          <a:lstStyle/>
-          <a:p>
-            <a:pPr algn="l" indent="0" marL="0">
-              <a:buNone/>
-            </a:pPr>
-            <a:r>
-              <a:rPr lang="en-US" sz="3200" b="1" dirty="0">
-                <a:solidFill>
-                  <a:srgbClr val="0E1B3D"/>
+            <a:pPr algn="ctr" indent="0" marL="0">
+              <a:buNone/>
+            </a:pPr>
+            <a:r>
+              <a:rPr lang="en-US" sz="5200" b="1" dirty="0">
+                <a:solidFill>
+                  <a:srgbClr val="D3D9E3"/>
                 </a:solidFill>
                 <a:latin typeface="Cambria" pitchFamily="34" charset="0"/>
                 <a:ea typeface="Cambria" pitchFamily="34" charset="-122"/>
                 <a:cs typeface="Cambria" pitchFamily="34" charset="-120"/>
               </a:rPr>
+              <a:t>CONFIDENTIAL ｜ 社外秘</a:t>
+            </a:r>
+            <a:endParaRPr lang="en-US" sz="5200" dirty="0"/>
+          </a:p>
+        </p:txBody>
+      </p:sp>
+      <p:sp>
+        <p:nvSpPr>
+          <p:cNvPr id="3" name="Text 1"/>
+          <p:cNvSpPr/>
+          <p:nvPr/>
+        </p:nvSpPr>
+        <p:spPr>
+          <a:xfrm>
+            <a:off x="566928" y="384048"/>
+            <a:ext cx="8229600" cy="274320"/>
+          </a:xfrm>
+          <a:prstGeom prst="rect">
+            <a:avLst/>
+          </a:prstGeom>
+          <a:noFill/>
+          <a:ln/>
+        </p:spPr>
+        <p:txBody>
+          <a:bodyPr wrap="square" lIns="0" tIns="0" rIns="0" bIns="0" rtlCol="0" anchor="ctr"/>
+          <a:lstStyle/>
+          <a:p>
+            <a:pPr algn="l" indent="0" marL="0">
+              <a:buNone/>
+            </a:pPr>
+            <a:r>
+              <a:rPr lang="en-US" sz="1200" b="1" spc="300" kern="0" dirty="0">
+                <a:solidFill>
+                  <a:srgbClr val="C8102E"/>
+                </a:solidFill>
+                <a:latin typeface="Calibri" pitchFamily="34" charset="0"/>
+                <a:ea typeface="Calibri" pitchFamily="34" charset="-122"/>
+                <a:cs typeface="Calibri" pitchFamily="34" charset="-120"/>
+              </a:rPr>
+              <a:t>認識のギャップ</a:t>
+            </a:r>
+            <a:endParaRPr lang="en-US" sz="1200" dirty="0"/>
+          </a:p>
+        </p:txBody>
+      </p:sp>
+      <p:sp>
+        <p:nvSpPr>
+          <p:cNvPr id="4" name="Text 2"/>
+          <p:cNvSpPr/>
+          <p:nvPr/>
+        </p:nvSpPr>
+        <p:spPr>
+          <a:xfrm>
+            <a:off x="566928" y="658368"/>
+            <a:ext cx="11055096" cy="868680"/>
+          </a:xfrm>
+          <a:prstGeom prst="rect">
+            <a:avLst/>
+          </a:prstGeom>
+          <a:noFill/>
+          <a:ln/>
+        </p:spPr>
+        <p:txBody>
+          <a:bodyPr wrap="square" lIns="0" tIns="0" rIns="0" bIns="0" rtlCol="0" anchor="t"/>
+          <a:lstStyle/>
+          <a:p>
+            <a:pPr algn="l" indent="0" marL="0">
+              <a:buNone/>
+            </a:pPr>
+            <a:r>
+              <a:rPr lang="en-US" sz="3200" b="1" dirty="0">
+                <a:solidFill>
+                  <a:srgbClr val="0E1B3D"/>
+                </a:solidFill>
+                <a:latin typeface="Cambria" pitchFamily="34" charset="0"/>
+                <a:ea typeface="Cambria" pitchFamily="34" charset="-122"/>
+                <a:cs typeface="Cambria" pitchFamily="34" charset="-120"/>
+              </a:rPr>
               <a:t>「S-1を入れたから安心」— どこがズレているか</a:t>
             </a:r>
             <a:endParaRPr lang="en-US" sz="3200" dirty="0"/>
@@ -9091,7 +9754,7 @@
       </p:sp>
       <p:sp>
         <p:nvSpPr>
-          <p:cNvPr id="4" name="Shape 2"/>
+          <p:cNvPr id="5" name="Shape 3"/>
           <p:cNvSpPr/>
           <p:nvPr/>
         </p:nvSpPr>
@@ -9118,7 +9781,7 @@
       </p:sp>
       <p:sp>
         <p:nvSpPr>
-          <p:cNvPr id="5" name="Text 3"/>
+          <p:cNvPr id="6" name="Text 4"/>
           <p:cNvSpPr/>
           <p:nvPr/>
         </p:nvSpPr>
@@ -9157,7 +9820,7 @@
       </p:sp>
       <p:sp>
         <p:nvSpPr>
-          <p:cNvPr id="6" name="Text 4"/>
+          <p:cNvPr id="7" name="Text 5"/>
           <p:cNvSpPr/>
           <p:nvPr/>
         </p:nvSpPr>
@@ -9275,7 +9938,7 @@
       </p:sp>
       <p:sp>
         <p:nvSpPr>
-          <p:cNvPr id="7" name="Shape 5"/>
+          <p:cNvPr id="8" name="Shape 6"/>
           <p:cNvSpPr/>
           <p:nvPr/>
         </p:nvSpPr>
@@ -9302,7 +9965,7 @@
       </p:sp>
       <p:sp>
         <p:nvSpPr>
-          <p:cNvPr id="8" name="Text 6"/>
+          <p:cNvPr id="9" name="Text 7"/>
           <p:cNvSpPr/>
           <p:nvPr/>
         </p:nvSpPr>
@@ -9341,7 +10004,7 @@
       </p:sp>
       <p:sp>
         <p:nvSpPr>
-          <p:cNvPr id="9" name="Text 7"/>
+          <p:cNvPr id="10" name="Text 8"/>
           <p:cNvSpPr/>
           <p:nvPr/>
         </p:nvSpPr>
@@ -9459,7 +10122,7 @@
       </p:sp>
       <p:sp>
         <p:nvSpPr>
-          <p:cNvPr id="10" name="Text 8"/>
+          <p:cNvPr id="11" name="Text 9"/>
           <p:cNvSpPr/>
           <p:nvPr/>
         </p:nvSpPr>
@@ -9491,6 +10154,45 @@
                 <a:cs typeface="Calibri" pitchFamily="34" charset="-120"/>
               </a:rPr>
               <a:t>3</a:t>
+            </a:r>
+            <a:endParaRPr lang="en-US" sz="1000" dirty="0"/>
+          </a:p>
+        </p:txBody>
+      </p:sp>
+      <p:sp>
+        <p:nvSpPr>
+          <p:cNvPr id="12" name="Text 10"/>
+          <p:cNvSpPr/>
+          <p:nvPr/>
+        </p:nvSpPr>
+        <p:spPr>
+          <a:xfrm>
+            <a:off x="9052560" y="237744"/>
+            <a:ext cx="2697480" cy="292608"/>
+          </a:xfrm>
+          <a:prstGeom prst="rect">
+            <a:avLst/>
+          </a:prstGeom>
+          <a:noFill/>
+          <a:ln/>
+        </p:spPr>
+        <p:txBody>
+          <a:bodyPr wrap="square" lIns="0" tIns="0" rIns="0" bIns="0" rtlCol="0" anchor="ctr"/>
+          <a:lstStyle/>
+          <a:p>
+            <a:pPr algn="r" indent="0" marL="0">
+              <a:buNone/>
+            </a:pPr>
+            <a:r>
+              <a:rPr lang="en-US" sz="1000" b="1" spc="100" kern="0" dirty="0">
+                <a:solidFill>
+                  <a:srgbClr val="C8102E"/>
+                </a:solidFill>
+                <a:latin typeface="Calibri" pitchFamily="34" charset="0"/>
+                <a:ea typeface="Calibri" pitchFamily="34" charset="-122"/>
+                <a:cs typeface="Calibri" pitchFamily="34" charset="-120"/>
+              </a:rPr>
+              <a:t>社外秘・取扱注意</a:t>
             </a:r>
             <a:endParaRPr lang="en-US" sz="1000" dirty="0"/>
           </a:p>
@@ -9535,9 +10237,9 @@
           <p:nvPr/>
         </p:nvSpPr>
         <p:spPr>
-          <a:xfrm>
-            <a:off x="566928" y="384048"/>
-            <a:ext cx="8229600" cy="274320"/>
+          <a:xfrm rot="19800000">
+            <a:off x="822960" y="2331720"/>
+            <a:ext cx="10515600" cy="1920240"/>
           </a:xfrm>
           <a:prstGeom prst="rect">
             <a:avLst/>
@@ -9549,57 +10251,96 @@
           <a:bodyPr wrap="square" lIns="0" tIns="0" rIns="0" bIns="0" rtlCol="0" anchor="ctr"/>
           <a:lstStyle/>
           <a:p>
-            <a:pPr algn="l" indent="0" marL="0">
-              <a:buNone/>
-            </a:pPr>
-            <a:r>
-              <a:rPr lang="en-US" sz="1200" b="1" spc="300" kern="0" dirty="0">
-                <a:solidFill>
-                  <a:srgbClr val="C8102E"/>
-                </a:solidFill>
-                <a:latin typeface="Calibri" pitchFamily="34" charset="0"/>
-                <a:ea typeface="Calibri" pitchFamily="34" charset="-122"/>
-                <a:cs typeface="Calibri" pitchFamily="34" charset="-120"/>
-              </a:rPr>
-              <a:t>攻撃の実態</a:t>
-            </a:r>
-            <a:endParaRPr lang="en-US" sz="1200" dirty="0"/>
-          </a:p>
-        </p:txBody>
-      </p:sp>
-      <p:sp>
-        <p:nvSpPr>
-          <p:cNvPr id="3" name="Text 1"/>
-          <p:cNvSpPr/>
-          <p:nvPr/>
-        </p:nvSpPr>
-        <p:spPr>
-          <a:xfrm>
-            <a:off x="566928" y="658368"/>
-            <a:ext cx="11055096" cy="868680"/>
-          </a:xfrm>
-          <a:prstGeom prst="rect">
-            <a:avLst/>
-          </a:prstGeom>
-          <a:noFill/>
-          <a:ln/>
-        </p:spPr>
-        <p:txBody>
-          <a:bodyPr wrap="square" lIns="0" tIns="0" rIns="0" bIns="0" rtlCol="0" anchor="t"/>
-          <a:lstStyle/>
-          <a:p>
-            <a:pPr algn="l" indent="0" marL="0">
-              <a:buNone/>
-            </a:pPr>
-            <a:r>
-              <a:rPr lang="en-US" sz="3200" b="1" dirty="0">
-                <a:solidFill>
-                  <a:srgbClr val="0E1B3D"/>
+            <a:pPr algn="ctr" indent="0" marL="0">
+              <a:buNone/>
+            </a:pPr>
+            <a:r>
+              <a:rPr lang="en-US" sz="5200" b="1" dirty="0">
+                <a:solidFill>
+                  <a:srgbClr val="D3D9E3"/>
                 </a:solidFill>
                 <a:latin typeface="Cambria" pitchFamily="34" charset="0"/>
                 <a:ea typeface="Cambria" pitchFamily="34" charset="-122"/>
                 <a:cs typeface="Cambria" pitchFamily="34" charset="-120"/>
               </a:rPr>
+              <a:t>CONFIDENTIAL ｜ 社外秘</a:t>
+            </a:r>
+            <a:endParaRPr lang="en-US" sz="5200" dirty="0"/>
+          </a:p>
+        </p:txBody>
+      </p:sp>
+      <p:sp>
+        <p:nvSpPr>
+          <p:cNvPr id="3" name="Text 1"/>
+          <p:cNvSpPr/>
+          <p:nvPr/>
+        </p:nvSpPr>
+        <p:spPr>
+          <a:xfrm>
+            <a:off x="566928" y="384048"/>
+            <a:ext cx="8229600" cy="274320"/>
+          </a:xfrm>
+          <a:prstGeom prst="rect">
+            <a:avLst/>
+          </a:prstGeom>
+          <a:noFill/>
+          <a:ln/>
+        </p:spPr>
+        <p:txBody>
+          <a:bodyPr wrap="square" lIns="0" tIns="0" rIns="0" bIns="0" rtlCol="0" anchor="ctr"/>
+          <a:lstStyle/>
+          <a:p>
+            <a:pPr algn="l" indent="0" marL="0">
+              <a:buNone/>
+            </a:pPr>
+            <a:r>
+              <a:rPr lang="en-US" sz="1200" b="1" spc="300" kern="0" dirty="0">
+                <a:solidFill>
+                  <a:srgbClr val="C8102E"/>
+                </a:solidFill>
+                <a:latin typeface="Calibri" pitchFamily="34" charset="0"/>
+                <a:ea typeface="Calibri" pitchFamily="34" charset="-122"/>
+                <a:cs typeface="Calibri" pitchFamily="34" charset="-120"/>
+              </a:rPr>
+              <a:t>攻撃の実態</a:t>
+            </a:r>
+            <a:endParaRPr lang="en-US" sz="1200" dirty="0"/>
+          </a:p>
+        </p:txBody>
+      </p:sp>
+      <p:sp>
+        <p:nvSpPr>
+          <p:cNvPr id="4" name="Text 2"/>
+          <p:cNvSpPr/>
+          <p:nvPr/>
+        </p:nvSpPr>
+        <p:spPr>
+          <a:xfrm>
+            <a:off x="566928" y="658368"/>
+            <a:ext cx="11055096" cy="868680"/>
+          </a:xfrm>
+          <a:prstGeom prst="rect">
+            <a:avLst/>
+          </a:prstGeom>
+          <a:noFill/>
+          <a:ln/>
+        </p:spPr>
+        <p:txBody>
+          <a:bodyPr wrap="square" lIns="0" tIns="0" rIns="0" bIns="0" rtlCol="0" anchor="t"/>
+          <a:lstStyle/>
+          <a:p>
+            <a:pPr algn="l" indent="0" marL="0">
+              <a:buNone/>
+            </a:pPr>
+            <a:r>
+              <a:rPr lang="en-US" sz="3200" b="1" dirty="0">
+                <a:solidFill>
+                  <a:srgbClr val="0E1B3D"/>
+                </a:solidFill>
+                <a:latin typeface="Cambria" pitchFamily="34" charset="0"/>
+                <a:ea typeface="Cambria" pitchFamily="34" charset="-122"/>
+                <a:cs typeface="Cambria" pitchFamily="34" charset="-120"/>
+              </a:rPr>
               <a:t>ランサムは「侵入の後」に動く ― 侵入型攻撃の4段階</a:t>
             </a:r>
             <a:endParaRPr lang="en-US" sz="3200" dirty="0"/>
@@ -9608,7 +10349,7 @@
       </p:sp>
       <p:sp>
         <p:nvSpPr>
-          <p:cNvPr id="4" name="Shape 2"/>
+          <p:cNvPr id="5" name="Shape 3"/>
           <p:cNvSpPr/>
           <p:nvPr/>
         </p:nvSpPr>
@@ -9642,7 +10383,7 @@
       </p:sp>
       <p:sp>
         <p:nvSpPr>
-          <p:cNvPr id="5" name="Shape 3"/>
+          <p:cNvPr id="6" name="Shape 4"/>
           <p:cNvSpPr/>
           <p:nvPr/>
         </p:nvSpPr>
@@ -9662,7 +10403,7 @@
       </p:sp>
       <p:sp>
         <p:nvSpPr>
-          <p:cNvPr id="6" name="Text 4"/>
+          <p:cNvPr id="7" name="Text 5"/>
           <p:cNvSpPr/>
           <p:nvPr/>
         </p:nvSpPr>
@@ -9701,7 +10442,7 @@
       </p:sp>
       <p:sp>
         <p:nvSpPr>
-          <p:cNvPr id="7" name="Text 5"/>
+          <p:cNvPr id="8" name="Text 6"/>
           <p:cNvSpPr/>
           <p:nvPr/>
         </p:nvSpPr>
@@ -9743,7 +10484,7 @@
       </p:sp>
       <p:sp>
         <p:nvSpPr>
-          <p:cNvPr id="8" name="Text 6"/>
+          <p:cNvPr id="9" name="Text 7"/>
           <p:cNvSpPr/>
           <p:nvPr/>
         </p:nvSpPr>
@@ -9785,7 +10526,7 @@
       </p:sp>
       <p:sp>
         <p:nvSpPr>
-          <p:cNvPr id="9" name="Shape 7"/>
+          <p:cNvPr id="10" name="Shape 8"/>
           <p:cNvSpPr/>
           <p:nvPr/>
         </p:nvSpPr>
@@ -9819,7 +10560,7 @@
       </p:sp>
       <p:sp>
         <p:nvSpPr>
-          <p:cNvPr id="10" name="Shape 8"/>
+          <p:cNvPr id="11" name="Shape 9"/>
           <p:cNvSpPr/>
           <p:nvPr/>
         </p:nvSpPr>
@@ -9839,7 +10580,7 @@
       </p:sp>
       <p:sp>
         <p:nvSpPr>
-          <p:cNvPr id="11" name="Text 9"/>
+          <p:cNvPr id="12" name="Text 10"/>
           <p:cNvSpPr/>
           <p:nvPr/>
         </p:nvSpPr>
@@ -9878,7 +10619,7 @@
       </p:sp>
       <p:sp>
         <p:nvSpPr>
-          <p:cNvPr id="12" name="Text 10"/>
+          <p:cNvPr id="13" name="Text 11"/>
           <p:cNvSpPr/>
           <p:nvPr/>
         </p:nvSpPr>
@@ -9920,7 +10661,7 @@
       </p:sp>
       <p:sp>
         <p:nvSpPr>
-          <p:cNvPr id="13" name="Text 11"/>
+          <p:cNvPr id="14" name="Text 12"/>
           <p:cNvSpPr/>
           <p:nvPr/>
         </p:nvSpPr>
@@ -9962,7 +10703,7 @@
       </p:sp>
       <p:sp>
         <p:nvSpPr>
-          <p:cNvPr id="14" name="Shape 12"/>
+          <p:cNvPr id="15" name="Shape 13"/>
           <p:cNvSpPr/>
           <p:nvPr/>
         </p:nvSpPr>
@@ -9996,7 +10737,7 @@
       </p:sp>
       <p:sp>
         <p:nvSpPr>
-          <p:cNvPr id="15" name="Shape 13"/>
+          <p:cNvPr id="16" name="Shape 14"/>
           <p:cNvSpPr/>
           <p:nvPr/>
         </p:nvSpPr>
@@ -10016,7 +10757,7 @@
       </p:sp>
       <p:sp>
         <p:nvSpPr>
-          <p:cNvPr id="16" name="Text 14"/>
+          <p:cNvPr id="17" name="Text 15"/>
           <p:cNvSpPr/>
           <p:nvPr/>
         </p:nvSpPr>
@@ -10055,7 +10796,7 @@
       </p:sp>
       <p:sp>
         <p:nvSpPr>
-          <p:cNvPr id="17" name="Text 15"/>
+          <p:cNvPr id="18" name="Text 16"/>
           <p:cNvSpPr/>
           <p:nvPr/>
         </p:nvSpPr>
@@ -10097,7 +10838,7 @@
       </p:sp>
       <p:sp>
         <p:nvSpPr>
-          <p:cNvPr id="18" name="Text 16"/>
+          <p:cNvPr id="19" name="Text 17"/>
           <p:cNvSpPr/>
           <p:nvPr/>
         </p:nvSpPr>
@@ -10139,7 +10880,7 @@
       </p:sp>
       <p:sp>
         <p:nvSpPr>
-          <p:cNvPr id="19" name="Shape 17"/>
+          <p:cNvPr id="20" name="Shape 18"/>
           <p:cNvSpPr/>
           <p:nvPr/>
         </p:nvSpPr>
@@ -10173,7 +10914,7 @@
       </p:sp>
       <p:sp>
         <p:nvSpPr>
-          <p:cNvPr id="20" name="Shape 18"/>
+          <p:cNvPr id="21" name="Shape 19"/>
           <p:cNvSpPr/>
           <p:nvPr/>
         </p:nvSpPr>
@@ -10193,7 +10934,7 @@
       </p:sp>
       <p:sp>
         <p:nvSpPr>
-          <p:cNvPr id="21" name="Text 19"/>
+          <p:cNvPr id="22" name="Text 20"/>
           <p:cNvSpPr/>
           <p:nvPr/>
         </p:nvSpPr>
@@ -10232,7 +10973,7 @@
       </p:sp>
       <p:sp>
         <p:nvSpPr>
-          <p:cNvPr id="22" name="Text 20"/>
+          <p:cNvPr id="23" name="Text 21"/>
           <p:cNvSpPr/>
           <p:nvPr/>
         </p:nvSpPr>
@@ -10274,7 +11015,7 @@
       </p:sp>
       <p:sp>
         <p:nvSpPr>
-          <p:cNvPr id="23" name="Text 21"/>
+          <p:cNvPr id="24" name="Text 22"/>
           <p:cNvSpPr/>
           <p:nvPr/>
         </p:nvSpPr>
@@ -10316,7 +11057,7 @@
       </p:sp>
       <p:sp>
         <p:nvSpPr>
-          <p:cNvPr id="24" name="Shape 22"/>
+          <p:cNvPr id="25" name="Shape 23"/>
           <p:cNvSpPr/>
           <p:nvPr/>
         </p:nvSpPr>
@@ -10336,7 +11077,7 @@
       </p:sp>
       <p:sp>
         <p:nvSpPr>
-          <p:cNvPr id="25" name="Shape 23"/>
+          <p:cNvPr id="26" name="Shape 24"/>
           <p:cNvSpPr/>
           <p:nvPr/>
         </p:nvSpPr>
@@ -10356,7 +11097,7 @@
       </p:sp>
       <p:sp>
         <p:nvSpPr>
-          <p:cNvPr id="26" name="Shape 24"/>
+          <p:cNvPr id="27" name="Shape 25"/>
           <p:cNvSpPr/>
           <p:nvPr/>
         </p:nvSpPr>
@@ -10376,7 +11117,7 @@
       </p:sp>
       <p:sp>
         <p:nvSpPr>
-          <p:cNvPr id="27" name="Shape 25"/>
+          <p:cNvPr id="28" name="Shape 26"/>
           <p:cNvSpPr/>
           <p:nvPr/>
         </p:nvSpPr>
@@ -10399,7 +11140,7 @@
       </p:sp>
       <p:sp>
         <p:nvSpPr>
-          <p:cNvPr id="28" name="Text 26"/>
+          <p:cNvPr id="29" name="Text 27"/>
           <p:cNvSpPr/>
           <p:nvPr/>
         </p:nvSpPr>
@@ -10438,7 +11179,7 @@
       </p:sp>
       <p:sp>
         <p:nvSpPr>
-          <p:cNvPr id="29" name="Shape 27"/>
+          <p:cNvPr id="30" name="Shape 28"/>
           <p:cNvSpPr/>
           <p:nvPr/>
         </p:nvSpPr>
@@ -10461,7 +11202,7 @@
       </p:sp>
       <p:sp>
         <p:nvSpPr>
-          <p:cNvPr id="30" name="Text 28"/>
+          <p:cNvPr id="31" name="Text 29"/>
           <p:cNvSpPr/>
           <p:nvPr/>
         </p:nvSpPr>
@@ -10500,7 +11241,7 @@
       </p:sp>
       <p:sp>
         <p:nvSpPr>
-          <p:cNvPr id="31" name="Shape 29"/>
+          <p:cNvPr id="32" name="Shape 30"/>
           <p:cNvSpPr/>
           <p:nvPr/>
         </p:nvSpPr>
@@ -10522,7 +11263,7 @@
       </p:sp>
       <p:sp>
         <p:nvSpPr>
-          <p:cNvPr id="32" name="Text 30"/>
+          <p:cNvPr id="33" name="Text 31"/>
           <p:cNvSpPr/>
           <p:nvPr/>
         </p:nvSpPr>
@@ -10581,7 +11322,7 @@
       </p:sp>
       <p:sp>
         <p:nvSpPr>
-          <p:cNvPr id="33" name="Text 31"/>
+          <p:cNvPr id="34" name="Text 32"/>
           <p:cNvSpPr/>
           <p:nvPr/>
         </p:nvSpPr>
@@ -10613,6 +11354,45 @@
                 <a:cs typeface="Calibri" pitchFamily="34" charset="-120"/>
               </a:rPr>
               <a:t>4</a:t>
+            </a:r>
+            <a:endParaRPr lang="en-US" sz="1000" dirty="0"/>
+          </a:p>
+        </p:txBody>
+      </p:sp>
+      <p:sp>
+        <p:nvSpPr>
+          <p:cNvPr id="35" name="Text 33"/>
+          <p:cNvSpPr/>
+          <p:nvPr/>
+        </p:nvSpPr>
+        <p:spPr>
+          <a:xfrm>
+            <a:off x="9052560" y="237744"/>
+            <a:ext cx="2697480" cy="292608"/>
+          </a:xfrm>
+          <a:prstGeom prst="rect">
+            <a:avLst/>
+          </a:prstGeom>
+          <a:noFill/>
+          <a:ln/>
+        </p:spPr>
+        <p:txBody>
+          <a:bodyPr wrap="square" lIns="0" tIns="0" rIns="0" bIns="0" rtlCol="0" anchor="ctr"/>
+          <a:lstStyle/>
+          <a:p>
+            <a:pPr algn="r" indent="0" marL="0">
+              <a:buNone/>
+            </a:pPr>
+            <a:r>
+              <a:rPr lang="en-US" sz="1000" b="1" spc="100" kern="0" dirty="0">
+                <a:solidFill>
+                  <a:srgbClr val="C8102E"/>
+                </a:solidFill>
+                <a:latin typeface="Calibri" pitchFamily="34" charset="0"/>
+                <a:ea typeface="Calibri" pitchFamily="34" charset="-122"/>
+                <a:cs typeface="Calibri" pitchFamily="34" charset="-120"/>
+              </a:rPr>
+              <a:t>社外秘・取扱注意</a:t>
             </a:r>
             <a:endParaRPr lang="en-US" sz="1000" dirty="0"/>
           </a:p>
@@ -10657,9 +11437,9 @@
           <p:nvPr/>
         </p:nvSpPr>
         <p:spPr>
-          <a:xfrm>
-            <a:off x="566928" y="384048"/>
-            <a:ext cx="8229600" cy="274320"/>
+          <a:xfrm rot="19800000">
+            <a:off x="822960" y="2331720"/>
+            <a:ext cx="10515600" cy="1920240"/>
           </a:xfrm>
           <a:prstGeom prst="rect">
             <a:avLst/>
@@ -10671,57 +11451,96 @@
           <a:bodyPr wrap="square" lIns="0" tIns="0" rIns="0" bIns="0" rtlCol="0" anchor="ctr"/>
           <a:lstStyle/>
           <a:p>
-            <a:pPr algn="l" indent="0" marL="0">
-              <a:buNone/>
-            </a:pPr>
-            <a:r>
-              <a:rPr lang="en-US" sz="1200" b="1" spc="300" kern="0" dirty="0">
-                <a:solidFill>
-                  <a:srgbClr val="C8102E"/>
-                </a:solidFill>
-                <a:latin typeface="Calibri" pitchFamily="34" charset="0"/>
-                <a:ea typeface="Calibri" pitchFamily="34" charset="-122"/>
-                <a:cs typeface="Calibri" pitchFamily="34" charset="-120"/>
-              </a:rPr>
-              <a:t>データで見る「入口」</a:t>
-            </a:r>
-            <a:endParaRPr lang="en-US" sz="1200" dirty="0"/>
-          </a:p>
-        </p:txBody>
-      </p:sp>
-      <p:sp>
-        <p:nvSpPr>
-          <p:cNvPr id="3" name="Text 1"/>
-          <p:cNvSpPr/>
-          <p:nvPr/>
-        </p:nvSpPr>
-        <p:spPr>
-          <a:xfrm>
-            <a:off x="566928" y="658368"/>
-            <a:ext cx="11055096" cy="868680"/>
-          </a:xfrm>
-          <a:prstGeom prst="rect">
-            <a:avLst/>
-          </a:prstGeom>
-          <a:noFill/>
-          <a:ln/>
-        </p:spPr>
-        <p:txBody>
-          <a:bodyPr wrap="square" lIns="0" tIns="0" rIns="0" bIns="0" rtlCol="0" anchor="t"/>
-          <a:lstStyle/>
-          <a:p>
-            <a:pPr algn="l" indent="0" marL="0">
-              <a:buNone/>
-            </a:pPr>
-            <a:r>
-              <a:rPr lang="en-US" sz="3200" b="1" dirty="0">
-                <a:solidFill>
-                  <a:srgbClr val="0E1B3D"/>
+            <a:pPr algn="ctr" indent="0" marL="0">
+              <a:buNone/>
+            </a:pPr>
+            <a:r>
+              <a:rPr lang="en-US" sz="5200" b="1" dirty="0">
+                <a:solidFill>
+                  <a:srgbClr val="D3D9E3"/>
                 </a:solidFill>
                 <a:latin typeface="Cambria" pitchFamily="34" charset="0"/>
                 <a:ea typeface="Cambria" pitchFamily="34" charset="-122"/>
                 <a:cs typeface="Cambria" pitchFamily="34" charset="-120"/>
               </a:rPr>
+              <a:t>CONFIDENTIAL ｜ 社外秘</a:t>
+            </a:r>
+            <a:endParaRPr lang="en-US" sz="5200" dirty="0"/>
+          </a:p>
+        </p:txBody>
+      </p:sp>
+      <p:sp>
+        <p:nvSpPr>
+          <p:cNvPr id="3" name="Text 1"/>
+          <p:cNvSpPr/>
+          <p:nvPr/>
+        </p:nvSpPr>
+        <p:spPr>
+          <a:xfrm>
+            <a:off x="566928" y="384048"/>
+            <a:ext cx="8229600" cy="274320"/>
+          </a:xfrm>
+          <a:prstGeom prst="rect">
+            <a:avLst/>
+          </a:prstGeom>
+          <a:noFill/>
+          <a:ln/>
+        </p:spPr>
+        <p:txBody>
+          <a:bodyPr wrap="square" lIns="0" tIns="0" rIns="0" bIns="0" rtlCol="0" anchor="ctr"/>
+          <a:lstStyle/>
+          <a:p>
+            <a:pPr algn="l" indent="0" marL="0">
+              <a:buNone/>
+            </a:pPr>
+            <a:r>
+              <a:rPr lang="en-US" sz="1200" b="1" spc="300" kern="0" dirty="0">
+                <a:solidFill>
+                  <a:srgbClr val="C8102E"/>
+                </a:solidFill>
+                <a:latin typeface="Calibri" pitchFamily="34" charset="0"/>
+                <a:ea typeface="Calibri" pitchFamily="34" charset="-122"/>
+                <a:cs typeface="Calibri" pitchFamily="34" charset="-120"/>
+              </a:rPr>
+              <a:t>データで見る「入口」</a:t>
+            </a:r>
+            <a:endParaRPr lang="en-US" sz="1200" dirty="0"/>
+          </a:p>
+        </p:txBody>
+      </p:sp>
+      <p:sp>
+        <p:nvSpPr>
+          <p:cNvPr id="4" name="Text 2"/>
+          <p:cNvSpPr/>
+          <p:nvPr/>
+        </p:nvSpPr>
+        <p:spPr>
+          <a:xfrm>
+            <a:off x="566928" y="658368"/>
+            <a:ext cx="11055096" cy="868680"/>
+          </a:xfrm>
+          <a:prstGeom prst="rect">
+            <a:avLst/>
+          </a:prstGeom>
+          <a:noFill/>
+          <a:ln/>
+        </p:spPr>
+        <p:txBody>
+          <a:bodyPr wrap="square" lIns="0" tIns="0" rIns="0" bIns="0" rtlCol="0" anchor="t"/>
+          <a:lstStyle/>
+          <a:p>
+            <a:pPr algn="l" indent="0" marL="0">
+              <a:buNone/>
+            </a:pPr>
+            <a:r>
+              <a:rPr lang="en-US" sz="3200" b="1" dirty="0">
+                <a:solidFill>
+                  <a:srgbClr val="0E1B3D"/>
+                </a:solidFill>
+                <a:latin typeface="Cambria" pitchFamily="34" charset="0"/>
+                <a:ea typeface="Cambria" pitchFamily="34" charset="-122"/>
+                <a:cs typeface="Cambria" pitchFamily="34" charset="-120"/>
+              </a:rPr>
               <a:t>攻撃者はどこから入るか ― EDRでは塞げない領域</a:t>
             </a:r>
             <a:endParaRPr lang="en-US" sz="3200" dirty="0"/>
@@ -10730,7 +11549,7 @@
       </p:sp>
       <p:sp>
         <p:nvSpPr>
-          <p:cNvPr id="4" name="Shape 2"/>
+          <p:cNvPr id="5" name="Shape 3"/>
           <p:cNvSpPr/>
           <p:nvPr/>
         </p:nvSpPr>
@@ -10764,7 +11583,7 @@
       </p:sp>
       <p:sp>
         <p:nvSpPr>
-          <p:cNvPr id="5" name="Text 3"/>
+          <p:cNvPr id="6" name="Text 4"/>
           <p:cNvSpPr/>
           <p:nvPr/>
         </p:nvSpPr>
@@ -10803,7 +11622,7 @@
       </p:sp>
       <p:sp>
         <p:nvSpPr>
-          <p:cNvPr id="6" name="Text 4"/>
+          <p:cNvPr id="7" name="Text 5"/>
           <p:cNvSpPr/>
           <p:nvPr/>
         </p:nvSpPr>
@@ -10845,7 +11664,7 @@
       </p:sp>
       <p:sp>
         <p:nvSpPr>
-          <p:cNvPr id="7" name="Text 5"/>
+          <p:cNvPr id="8" name="Text 6"/>
           <p:cNvSpPr/>
           <p:nvPr/>
         </p:nvSpPr>
@@ -10884,7 +11703,7 @@
       </p:sp>
       <p:sp>
         <p:nvSpPr>
-          <p:cNvPr id="8" name="Shape 6"/>
+          <p:cNvPr id="9" name="Shape 7"/>
           <p:cNvSpPr/>
           <p:nvPr/>
         </p:nvSpPr>
@@ -10918,7 +11737,7 @@
       </p:sp>
       <p:sp>
         <p:nvSpPr>
-          <p:cNvPr id="9" name="Text 7"/>
+          <p:cNvPr id="10" name="Text 8"/>
           <p:cNvSpPr/>
           <p:nvPr/>
         </p:nvSpPr>
@@ -10957,7 +11776,7 @@
       </p:sp>
       <p:sp>
         <p:nvSpPr>
-          <p:cNvPr id="10" name="Text 8"/>
+          <p:cNvPr id="11" name="Text 9"/>
           <p:cNvSpPr/>
           <p:nvPr/>
         </p:nvSpPr>
@@ -10999,7 +11818,7 @@
       </p:sp>
       <p:sp>
         <p:nvSpPr>
-          <p:cNvPr id="11" name="Text 9"/>
+          <p:cNvPr id="12" name="Text 10"/>
           <p:cNvSpPr/>
           <p:nvPr/>
         </p:nvSpPr>
@@ -11038,7 +11857,7 @@
       </p:sp>
       <p:sp>
         <p:nvSpPr>
-          <p:cNvPr id="12" name="Text 10"/>
+          <p:cNvPr id="13" name="Text 11"/>
           <p:cNvSpPr/>
           <p:nvPr/>
         </p:nvSpPr>
@@ -11077,7 +11896,7 @@
       </p:sp>
       <p:graphicFrame>
         <p:nvGraphicFramePr>
-          <p:cNvPr id="13" name="Chart 0" descr=""/>
+          <p:cNvPr id="14" name="Chart 0" descr=""/>
           <p:cNvGraphicFramePr/>
           <p:nvPr/>
         </p:nvGraphicFramePr>
@@ -11093,7 +11912,7 @@
       </p:graphicFrame>
       <p:sp>
         <p:nvSpPr>
-          <p:cNvPr id="14" name="Text 11"/>
+          <p:cNvPr id="15" name="Text 12"/>
           <p:cNvSpPr/>
           <p:nvPr/>
         </p:nvSpPr>
@@ -11135,7 +11954,7 @@
       </p:sp>
       <p:sp>
         <p:nvSpPr>
-          <p:cNvPr id="15" name="Text 12"/>
+          <p:cNvPr id="16" name="Text 13"/>
           <p:cNvSpPr/>
           <p:nvPr/>
         </p:nvSpPr>
@@ -11174,7 +11993,7 @@
       </p:sp>
       <p:sp>
         <p:nvSpPr>
-          <p:cNvPr id="16" name="Text 13"/>
+          <p:cNvPr id="17" name="Text 14"/>
           <p:cNvSpPr/>
           <p:nvPr/>
         </p:nvSpPr>
@@ -11206,6 +12025,45 @@
                 <a:cs typeface="Calibri" pitchFamily="34" charset="-120"/>
               </a:rPr>
               <a:t>5</a:t>
+            </a:r>
+            <a:endParaRPr lang="en-US" sz="1000" dirty="0"/>
+          </a:p>
+        </p:txBody>
+      </p:sp>
+      <p:sp>
+        <p:nvSpPr>
+          <p:cNvPr id="18" name="Text 15"/>
+          <p:cNvSpPr/>
+          <p:nvPr/>
+        </p:nvSpPr>
+        <p:spPr>
+          <a:xfrm>
+            <a:off x="9052560" y="237744"/>
+            <a:ext cx="2697480" cy="292608"/>
+          </a:xfrm>
+          <a:prstGeom prst="rect">
+            <a:avLst/>
+          </a:prstGeom>
+          <a:noFill/>
+          <a:ln/>
+        </p:spPr>
+        <p:txBody>
+          <a:bodyPr wrap="square" lIns="0" tIns="0" rIns="0" bIns="0" rtlCol="0" anchor="ctr"/>
+          <a:lstStyle/>
+          <a:p>
+            <a:pPr algn="r" indent="0" marL="0">
+              <a:buNone/>
+            </a:pPr>
+            <a:r>
+              <a:rPr lang="en-US" sz="1000" b="1" spc="100" kern="0" dirty="0">
+                <a:solidFill>
+                  <a:srgbClr val="C8102E"/>
+                </a:solidFill>
+                <a:latin typeface="Calibri" pitchFamily="34" charset="0"/>
+                <a:ea typeface="Calibri" pitchFamily="34" charset="-122"/>
+                <a:cs typeface="Calibri" pitchFamily="34" charset="-120"/>
+              </a:rPr>
+              <a:t>社外秘・取扱注意</a:t>
             </a:r>
             <a:endParaRPr lang="en-US" sz="1000" dirty="0"/>
           </a:p>
@@ -11250,9 +12108,9 @@
           <p:nvPr/>
         </p:nvSpPr>
         <p:spPr>
-          <a:xfrm>
-            <a:off x="566928" y="384048"/>
-            <a:ext cx="8229600" cy="274320"/>
+          <a:xfrm rot="19800000">
+            <a:off x="822960" y="2331720"/>
+            <a:ext cx="10515600" cy="1920240"/>
           </a:xfrm>
           <a:prstGeom prst="rect">
             <a:avLst/>
@@ -11264,57 +12122,96 @@
           <a:bodyPr wrap="square" lIns="0" tIns="0" rIns="0" bIns="0" rtlCol="0" anchor="ctr"/>
           <a:lstStyle/>
           <a:p>
-            <a:pPr algn="l" indent="0" marL="0">
-              <a:buNone/>
-            </a:pPr>
-            <a:r>
-              <a:rPr lang="en-US" sz="1200" b="1" spc="300" kern="0" dirty="0">
-                <a:solidFill>
-                  <a:srgbClr val="C8102E"/>
-                </a:solidFill>
-                <a:latin typeface="Calibri" pitchFamily="34" charset="0"/>
-                <a:ea typeface="Calibri" pitchFamily="34" charset="-122"/>
-                <a:cs typeface="Calibri" pitchFamily="34" charset="-120"/>
-              </a:rPr>
-              <a:t>S-1の役割を正しく理解する</a:t>
-            </a:r>
-            <a:endParaRPr lang="en-US" sz="1200" dirty="0"/>
-          </a:p>
-        </p:txBody>
-      </p:sp>
-      <p:sp>
-        <p:nvSpPr>
-          <p:cNvPr id="3" name="Text 1"/>
-          <p:cNvSpPr/>
-          <p:nvPr/>
-        </p:nvSpPr>
-        <p:spPr>
-          <a:xfrm>
-            <a:off x="566928" y="658368"/>
-            <a:ext cx="11055096" cy="868680"/>
-          </a:xfrm>
-          <a:prstGeom prst="rect">
-            <a:avLst/>
-          </a:prstGeom>
-          <a:noFill/>
-          <a:ln/>
-        </p:spPr>
-        <p:txBody>
-          <a:bodyPr wrap="square" lIns="0" tIns="0" rIns="0" bIns="0" rtlCol="0" anchor="t"/>
-          <a:lstStyle/>
-          <a:p>
-            <a:pPr algn="l" indent="0" marL="0">
-              <a:buNone/>
-            </a:pPr>
-            <a:r>
-              <a:rPr lang="en-US" sz="3200" b="1" dirty="0">
-                <a:solidFill>
-                  <a:srgbClr val="0E1B3D"/>
+            <a:pPr algn="ctr" indent="0" marL="0">
+              <a:buNone/>
+            </a:pPr>
+            <a:r>
+              <a:rPr lang="en-US" sz="5200" b="1" dirty="0">
+                <a:solidFill>
+                  <a:srgbClr val="D3D9E3"/>
                 </a:solidFill>
                 <a:latin typeface="Cambria" pitchFamily="34" charset="0"/>
                 <a:ea typeface="Cambria" pitchFamily="34" charset="-122"/>
                 <a:cs typeface="Cambria" pitchFamily="34" charset="-120"/>
               </a:rPr>
+              <a:t>CONFIDENTIAL ｜ 社外秘</a:t>
+            </a:r>
+            <a:endParaRPr lang="en-US" sz="5200" dirty="0"/>
+          </a:p>
+        </p:txBody>
+      </p:sp>
+      <p:sp>
+        <p:nvSpPr>
+          <p:cNvPr id="3" name="Text 1"/>
+          <p:cNvSpPr/>
+          <p:nvPr/>
+        </p:nvSpPr>
+        <p:spPr>
+          <a:xfrm>
+            <a:off x="566928" y="384048"/>
+            <a:ext cx="8229600" cy="274320"/>
+          </a:xfrm>
+          <a:prstGeom prst="rect">
+            <a:avLst/>
+          </a:prstGeom>
+          <a:noFill/>
+          <a:ln/>
+        </p:spPr>
+        <p:txBody>
+          <a:bodyPr wrap="square" lIns="0" tIns="0" rIns="0" bIns="0" rtlCol="0" anchor="ctr"/>
+          <a:lstStyle/>
+          <a:p>
+            <a:pPr algn="l" indent="0" marL="0">
+              <a:buNone/>
+            </a:pPr>
+            <a:r>
+              <a:rPr lang="en-US" sz="1200" b="1" spc="300" kern="0" dirty="0">
+                <a:solidFill>
+                  <a:srgbClr val="C8102E"/>
+                </a:solidFill>
+                <a:latin typeface="Calibri" pitchFamily="34" charset="0"/>
+                <a:ea typeface="Calibri" pitchFamily="34" charset="-122"/>
+                <a:cs typeface="Calibri" pitchFamily="34" charset="-120"/>
+              </a:rPr>
+              <a:t>S-1の役割を正しく理解する</a:t>
+            </a:r>
+            <a:endParaRPr lang="en-US" sz="1200" dirty="0"/>
+          </a:p>
+        </p:txBody>
+      </p:sp>
+      <p:sp>
+        <p:nvSpPr>
+          <p:cNvPr id="4" name="Text 2"/>
+          <p:cNvSpPr/>
+          <p:nvPr/>
+        </p:nvSpPr>
+        <p:spPr>
+          <a:xfrm>
+            <a:off x="566928" y="658368"/>
+            <a:ext cx="11055096" cy="868680"/>
+          </a:xfrm>
+          <a:prstGeom prst="rect">
+            <a:avLst/>
+          </a:prstGeom>
+          <a:noFill/>
+          <a:ln/>
+        </p:spPr>
+        <p:txBody>
+          <a:bodyPr wrap="square" lIns="0" tIns="0" rIns="0" bIns="0" rtlCol="0" anchor="t"/>
+          <a:lstStyle/>
+          <a:p>
+            <a:pPr algn="l" indent="0" marL="0">
+              <a:buNone/>
+            </a:pPr>
+            <a:r>
+              <a:rPr lang="en-US" sz="3200" b="1" dirty="0">
+                <a:solidFill>
+                  <a:srgbClr val="0E1B3D"/>
+                </a:solidFill>
+                <a:latin typeface="Cambria" pitchFamily="34" charset="0"/>
+                <a:ea typeface="Cambria" pitchFamily="34" charset="-122"/>
+                <a:cs typeface="Cambria" pitchFamily="34" charset="-120"/>
+              </a:rPr>
               <a:t>EDR(SentinelOne)ができること・できないこと</a:t>
             </a:r>
             <a:endParaRPr lang="en-US" sz="3200" dirty="0"/>
@@ -11323,7 +12220,7 @@
       </p:sp>
       <p:sp>
         <p:nvSpPr>
-          <p:cNvPr id="4" name="Shape 2"/>
+          <p:cNvPr id="5" name="Shape 3"/>
           <p:cNvSpPr/>
           <p:nvPr/>
         </p:nvSpPr>
@@ -11350,7 +12247,7 @@
       </p:sp>
       <p:sp>
         <p:nvSpPr>
-          <p:cNvPr id="5" name="Text 3"/>
+          <p:cNvPr id="6" name="Text 4"/>
           <p:cNvSpPr/>
           <p:nvPr/>
         </p:nvSpPr>
@@ -11389,7 +12286,7 @@
       </p:sp>
       <p:sp>
         <p:nvSpPr>
-          <p:cNvPr id="6" name="Text 4"/>
+          <p:cNvPr id="7" name="Text 5"/>
           <p:cNvSpPr/>
           <p:nvPr/>
         </p:nvSpPr>
@@ -11507,7 +12404,7 @@
       </p:sp>
       <p:sp>
         <p:nvSpPr>
-          <p:cNvPr id="7" name="Shape 5"/>
+          <p:cNvPr id="8" name="Shape 6"/>
           <p:cNvSpPr/>
           <p:nvPr/>
         </p:nvSpPr>
@@ -11534,7 +12431,7 @@
       </p:sp>
       <p:sp>
         <p:nvSpPr>
-          <p:cNvPr id="8" name="Text 6"/>
+          <p:cNvPr id="9" name="Text 7"/>
           <p:cNvSpPr/>
           <p:nvPr/>
         </p:nvSpPr>
@@ -11573,7 +12470,7 @@
       </p:sp>
       <p:sp>
         <p:nvSpPr>
-          <p:cNvPr id="9" name="Text 7"/>
+          <p:cNvPr id="10" name="Text 8"/>
           <p:cNvSpPr/>
           <p:nvPr/>
         </p:nvSpPr>
@@ -11691,7 +12588,7 @@
       </p:sp>
       <p:sp>
         <p:nvSpPr>
-          <p:cNvPr id="10" name="Text 8"/>
+          <p:cNvPr id="11" name="Text 9"/>
           <p:cNvSpPr/>
           <p:nvPr/>
         </p:nvSpPr>
@@ -11723,6 +12620,45 @@
                 <a:cs typeface="Calibri" pitchFamily="34" charset="-120"/>
               </a:rPr>
               <a:t>6</a:t>
+            </a:r>
+            <a:endParaRPr lang="en-US" sz="1000" dirty="0"/>
+          </a:p>
+        </p:txBody>
+      </p:sp>
+      <p:sp>
+        <p:nvSpPr>
+          <p:cNvPr id="12" name="Text 10"/>
+          <p:cNvSpPr/>
+          <p:nvPr/>
+        </p:nvSpPr>
+        <p:spPr>
+          <a:xfrm>
+            <a:off x="9052560" y="237744"/>
+            <a:ext cx="2697480" cy="292608"/>
+          </a:xfrm>
+          <a:prstGeom prst="rect">
+            <a:avLst/>
+          </a:prstGeom>
+          <a:noFill/>
+          <a:ln/>
+        </p:spPr>
+        <p:txBody>
+          <a:bodyPr wrap="square" lIns="0" tIns="0" rIns="0" bIns="0" rtlCol="0" anchor="ctr"/>
+          <a:lstStyle/>
+          <a:p>
+            <a:pPr algn="r" indent="0" marL="0">
+              <a:buNone/>
+            </a:pPr>
+            <a:r>
+              <a:rPr lang="en-US" sz="1000" b="1" spc="100" kern="0" dirty="0">
+                <a:solidFill>
+                  <a:srgbClr val="C8102E"/>
+                </a:solidFill>
+                <a:latin typeface="Calibri" pitchFamily="34" charset="0"/>
+                <a:ea typeface="Calibri" pitchFamily="34" charset="-122"/>
+                <a:cs typeface="Calibri" pitchFamily="34" charset="-120"/>
+              </a:rPr>
+              <a:t>社外秘・取扱注意</a:t>
             </a:r>
             <a:endParaRPr lang="en-US" sz="1000" dirty="0"/>
           </a:p>
@@ -11762,7 +12698,46 @@
       </p:grpSpPr>
       <p:sp>
         <p:nvSpPr>
-          <p:cNvPr id="2" name="Shape 0"/>
+          <p:cNvPr id="2" name="Text 0"/>
+          <p:cNvSpPr/>
+          <p:nvPr/>
+        </p:nvSpPr>
+        <p:spPr>
+          <a:xfrm rot="19800000">
+            <a:off x="822960" y="2331720"/>
+            <a:ext cx="10515600" cy="1920240"/>
+          </a:xfrm>
+          <a:prstGeom prst="rect">
+            <a:avLst/>
+          </a:prstGeom>
+          <a:noFill/>
+          <a:ln/>
+        </p:spPr>
+        <p:txBody>
+          <a:bodyPr wrap="square" lIns="0" tIns="0" rIns="0" bIns="0" rtlCol="0" anchor="ctr"/>
+          <a:lstStyle/>
+          <a:p>
+            <a:pPr algn="ctr" indent="0" marL="0">
+              <a:buNone/>
+            </a:pPr>
+            <a:r>
+              <a:rPr lang="en-US" sz="5200" b="1" dirty="0">
+                <a:solidFill>
+                  <a:srgbClr val="D3D9E3"/>
+                </a:solidFill>
+                <a:latin typeface="Cambria" pitchFamily="34" charset="0"/>
+                <a:ea typeface="Cambria" pitchFamily="34" charset="-122"/>
+                <a:cs typeface="Cambria" pitchFamily="34" charset="-120"/>
+              </a:rPr>
+              <a:t>CONFIDENTIAL ｜ 社外秘</a:t>
+            </a:r>
+            <a:endParaRPr lang="en-US" sz="5200" dirty="0"/>
+          </a:p>
+        </p:txBody>
+      </p:sp>
+      <p:sp>
+        <p:nvSpPr>
+          <p:cNvPr id="3" name="Shape 1"/>
           <p:cNvSpPr/>
           <p:nvPr/>
         </p:nvSpPr>
@@ -11784,7 +12759,7 @@
       </p:sp>
       <p:sp>
         <p:nvSpPr>
-          <p:cNvPr id="3" name="Text 1"/>
+          <p:cNvPr id="4" name="Text 2"/>
           <p:cNvSpPr/>
           <p:nvPr/>
         </p:nvSpPr>
@@ -11823,7 +12798,7 @@
       </p:sp>
       <p:sp>
         <p:nvSpPr>
-          <p:cNvPr id="4" name="Text 2"/>
+          <p:cNvPr id="5" name="Text 3"/>
           <p:cNvSpPr/>
           <p:nvPr/>
         </p:nvSpPr>
@@ -11862,7 +12837,7 @@
       </p:sp>
       <p:sp>
         <p:nvSpPr>
-          <p:cNvPr id="5" name="Text 3"/>
+          <p:cNvPr id="6" name="Text 4"/>
           <p:cNvSpPr/>
           <p:nvPr/>
         </p:nvSpPr>
@@ -11901,7 +12876,7 @@
       </p:sp>
       <p:sp>
         <p:nvSpPr>
-          <p:cNvPr id="6" name="Text 4"/>
+          <p:cNvPr id="7" name="Text 5"/>
           <p:cNvSpPr/>
           <p:nvPr/>
         </p:nvSpPr>
@@ -12035,7 +13010,7 @@
       </p:sp>
       <p:sp>
         <p:nvSpPr>
-          <p:cNvPr id="7" name="Shape 5"/>
+          <p:cNvPr id="8" name="Shape 6"/>
           <p:cNvSpPr/>
           <p:nvPr/>
         </p:nvSpPr>
@@ -12064,7 +13039,7 @@
       </p:sp>
       <p:sp>
         <p:nvSpPr>
-          <p:cNvPr id="8" name="Text 6"/>
+          <p:cNvPr id="9" name="Text 7"/>
           <p:cNvSpPr/>
           <p:nvPr/>
         </p:nvSpPr>
@@ -12103,7 +13078,7 @@
       </p:sp>
       <p:sp>
         <p:nvSpPr>
-          <p:cNvPr id="9" name="Text 7"/>
+          <p:cNvPr id="10" name="Text 8"/>
           <p:cNvSpPr/>
           <p:nvPr/>
         </p:nvSpPr>
@@ -12145,7 +13120,7 @@
       </p:sp>
       <p:sp>
         <p:nvSpPr>
-          <p:cNvPr id="10" name="Shape 8"/>
+          <p:cNvPr id="11" name="Shape 9"/>
           <p:cNvSpPr/>
           <p:nvPr/>
         </p:nvSpPr>
@@ -12172,7 +13147,7 @@
       </p:sp>
       <p:sp>
         <p:nvSpPr>
-          <p:cNvPr id="11" name="Text 9"/>
+          <p:cNvPr id="12" name="Text 10"/>
           <p:cNvSpPr/>
           <p:nvPr/>
         </p:nvSpPr>
@@ -12260,7 +13235,7 @@
       </p:sp>
       <p:sp>
         <p:nvSpPr>
-          <p:cNvPr id="12" name="Text 10"/>
+          <p:cNvPr id="13" name="Text 11"/>
           <p:cNvSpPr/>
           <p:nvPr/>
         </p:nvSpPr>
@@ -12299,7 +13274,7 @@
       </p:sp>
       <p:sp>
         <p:nvSpPr>
-          <p:cNvPr id="13" name="Text 11"/>
+          <p:cNvPr id="14" name="Text 12"/>
           <p:cNvSpPr/>
           <p:nvPr/>
         </p:nvSpPr>
@@ -12331,6 +13306,45 @@
                 <a:cs typeface="Calibri" pitchFamily="34" charset="-120"/>
               </a:rPr>
               <a:t>7</a:t>
+            </a:r>
+            <a:endParaRPr lang="en-US" sz="1000" dirty="0"/>
+          </a:p>
+        </p:txBody>
+      </p:sp>
+      <p:sp>
+        <p:nvSpPr>
+          <p:cNvPr id="15" name="Text 13"/>
+          <p:cNvSpPr/>
+          <p:nvPr/>
+        </p:nvSpPr>
+        <p:spPr>
+          <a:xfrm>
+            <a:off x="9052560" y="237744"/>
+            <a:ext cx="2697480" cy="292608"/>
+          </a:xfrm>
+          <a:prstGeom prst="rect">
+            <a:avLst/>
+          </a:prstGeom>
+          <a:noFill/>
+          <a:ln/>
+        </p:spPr>
+        <p:txBody>
+          <a:bodyPr wrap="square" lIns="0" tIns="0" rIns="0" bIns="0" rtlCol="0" anchor="ctr"/>
+          <a:lstStyle/>
+          <a:p>
+            <a:pPr algn="r" indent="0" marL="0">
+              <a:buNone/>
+            </a:pPr>
+            <a:r>
+              <a:rPr lang="en-US" sz="1000" b="1" spc="100" kern="0" dirty="0">
+                <a:solidFill>
+                  <a:srgbClr val="C8102E"/>
+                </a:solidFill>
+                <a:latin typeface="Calibri" pitchFamily="34" charset="0"/>
+                <a:ea typeface="Calibri" pitchFamily="34" charset="-122"/>
+                <a:cs typeface="Calibri" pitchFamily="34" charset="-120"/>
+              </a:rPr>
+              <a:t>社外秘・取扱注意</a:t>
             </a:r>
             <a:endParaRPr lang="en-US" sz="1000" dirty="0"/>
           </a:p>
@@ -12375,9 +13389,9 @@
           <p:nvPr/>
         </p:nvSpPr>
         <p:spPr>
-          <a:xfrm>
-            <a:off x="566928" y="384048"/>
-            <a:ext cx="8229600" cy="274320"/>
+          <a:xfrm rot="19800000">
+            <a:off x="822960" y="2331720"/>
+            <a:ext cx="10515600" cy="1920240"/>
           </a:xfrm>
           <a:prstGeom prst="rect">
             <a:avLst/>
@@ -12389,57 +13403,96 @@
           <a:bodyPr wrap="square" lIns="0" tIns="0" rIns="0" bIns="0" rtlCol="0" anchor="ctr"/>
           <a:lstStyle/>
           <a:p>
-            <a:pPr algn="l" indent="0" marL="0">
-              <a:buNone/>
-            </a:pPr>
-            <a:r>
-              <a:rPr lang="en-US" sz="1200" b="1" spc="300" kern="0" dirty="0">
-                <a:solidFill>
-                  <a:srgbClr val="C8102E"/>
-                </a:solidFill>
-                <a:latin typeface="Calibri" pitchFamily="34" charset="0"/>
-                <a:ea typeface="Calibri" pitchFamily="34" charset="-122"/>
-                <a:cs typeface="Calibri" pitchFamily="34" charset="-120"/>
-              </a:rPr>
-              <a:t>事例②  ― EDR導入済みの大手でも</a:t>
-            </a:r>
-            <a:endParaRPr lang="en-US" sz="1200" dirty="0"/>
-          </a:p>
-        </p:txBody>
-      </p:sp>
-      <p:sp>
-        <p:nvSpPr>
-          <p:cNvPr id="3" name="Text 1"/>
-          <p:cNvSpPr/>
-          <p:nvPr/>
-        </p:nvSpPr>
-        <p:spPr>
-          <a:xfrm>
-            <a:off x="566928" y="658368"/>
-            <a:ext cx="11055096" cy="868680"/>
-          </a:xfrm>
-          <a:prstGeom prst="rect">
-            <a:avLst/>
-          </a:prstGeom>
-          <a:noFill/>
-          <a:ln/>
-        </p:spPr>
-        <p:txBody>
-          <a:bodyPr wrap="square" lIns="0" tIns="0" rIns="0" bIns="0" rtlCol="0" anchor="t"/>
-          <a:lstStyle/>
-          <a:p>
-            <a:pPr algn="l" indent="0" marL="0">
-              <a:buNone/>
-            </a:pPr>
-            <a:r>
-              <a:rPr lang="en-US" sz="3200" b="1" dirty="0">
-                <a:solidFill>
-                  <a:srgbClr val="0E1B3D"/>
+            <a:pPr algn="ctr" indent="0" marL="0">
+              <a:buNone/>
+            </a:pPr>
+            <a:r>
+              <a:rPr lang="en-US" sz="5200" b="1" dirty="0">
+                <a:solidFill>
+                  <a:srgbClr val="D3D9E3"/>
                 </a:solidFill>
                 <a:latin typeface="Cambria" pitchFamily="34" charset="0"/>
                 <a:ea typeface="Cambria" pitchFamily="34" charset="-122"/>
                 <a:cs typeface="Cambria" pitchFamily="34" charset="-120"/>
               </a:rPr>
+              <a:t>CONFIDENTIAL ｜ 社外秘</a:t>
+            </a:r>
+            <a:endParaRPr lang="en-US" sz="5200" dirty="0"/>
+          </a:p>
+        </p:txBody>
+      </p:sp>
+      <p:sp>
+        <p:nvSpPr>
+          <p:cNvPr id="3" name="Text 1"/>
+          <p:cNvSpPr/>
+          <p:nvPr/>
+        </p:nvSpPr>
+        <p:spPr>
+          <a:xfrm>
+            <a:off x="566928" y="384048"/>
+            <a:ext cx="8229600" cy="274320"/>
+          </a:xfrm>
+          <a:prstGeom prst="rect">
+            <a:avLst/>
+          </a:prstGeom>
+          <a:noFill/>
+          <a:ln/>
+        </p:spPr>
+        <p:txBody>
+          <a:bodyPr wrap="square" lIns="0" tIns="0" rIns="0" bIns="0" rtlCol="0" anchor="ctr"/>
+          <a:lstStyle/>
+          <a:p>
+            <a:pPr algn="l" indent="0" marL="0">
+              <a:buNone/>
+            </a:pPr>
+            <a:r>
+              <a:rPr lang="en-US" sz="1200" b="1" spc="300" kern="0" dirty="0">
+                <a:solidFill>
+                  <a:srgbClr val="C8102E"/>
+                </a:solidFill>
+                <a:latin typeface="Calibri" pitchFamily="34" charset="0"/>
+                <a:ea typeface="Calibri" pitchFamily="34" charset="-122"/>
+                <a:cs typeface="Calibri" pitchFamily="34" charset="-120"/>
+              </a:rPr>
+              <a:t>事例②  ― EDR導入済みの大手でも</a:t>
+            </a:r>
+            <a:endParaRPr lang="en-US" sz="1200" dirty="0"/>
+          </a:p>
+        </p:txBody>
+      </p:sp>
+      <p:sp>
+        <p:nvSpPr>
+          <p:cNvPr id="4" name="Text 2"/>
+          <p:cNvSpPr/>
+          <p:nvPr/>
+        </p:nvSpPr>
+        <p:spPr>
+          <a:xfrm>
+            <a:off x="566928" y="658368"/>
+            <a:ext cx="11055096" cy="868680"/>
+          </a:xfrm>
+          <a:prstGeom prst="rect">
+            <a:avLst/>
+          </a:prstGeom>
+          <a:noFill/>
+          <a:ln/>
+        </p:spPr>
+        <p:txBody>
+          <a:bodyPr wrap="square" lIns="0" tIns="0" rIns="0" bIns="0" rtlCol="0" anchor="t"/>
+          <a:lstStyle/>
+          <a:p>
+            <a:pPr algn="l" indent="0" marL="0">
+              <a:buNone/>
+            </a:pPr>
+            <a:r>
+              <a:rPr lang="en-US" sz="3200" b="1" dirty="0">
+                <a:solidFill>
+                  <a:srgbClr val="0E1B3D"/>
+                </a:solidFill>
+                <a:latin typeface="Cambria" pitchFamily="34" charset="0"/>
+                <a:ea typeface="Cambria" pitchFamily="34" charset="-122"/>
+                <a:cs typeface="Cambria" pitchFamily="34" charset="-120"/>
+              </a:rPr>
               <a:t>アスクル（2025年）― EDRを無効化し4か月潜伏</a:t>
             </a:r>
             <a:endParaRPr lang="en-US" sz="3200" dirty="0"/>
@@ -12448,7 +13501,7 @@
       </p:sp>
       <p:sp>
         <p:nvSpPr>
-          <p:cNvPr id="4" name="Shape 2"/>
+          <p:cNvPr id="5" name="Shape 3"/>
           <p:cNvSpPr/>
           <p:nvPr/>
         </p:nvSpPr>
@@ -12482,7 +13535,7 @@
       </p:sp>
       <p:sp>
         <p:nvSpPr>
-          <p:cNvPr id="5" name="Text 3"/>
+          <p:cNvPr id="6" name="Text 4"/>
           <p:cNvSpPr/>
           <p:nvPr/>
         </p:nvSpPr>
@@ -12521,7 +13574,7 @@
       </p:sp>
       <p:sp>
         <p:nvSpPr>
-          <p:cNvPr id="6" name="Text 4"/>
+          <p:cNvPr id="7" name="Text 5"/>
           <p:cNvSpPr/>
           <p:nvPr/>
         </p:nvSpPr>
@@ -12563,7 +13616,7 @@
       </p:sp>
       <p:sp>
         <p:nvSpPr>
-          <p:cNvPr id="7" name="Shape 5"/>
+          <p:cNvPr id="8" name="Shape 6"/>
           <p:cNvSpPr/>
           <p:nvPr/>
         </p:nvSpPr>
@@ -12597,7 +13650,7 @@
       </p:sp>
       <p:sp>
         <p:nvSpPr>
-          <p:cNvPr id="8" name="Text 6"/>
+          <p:cNvPr id="9" name="Text 7"/>
           <p:cNvSpPr/>
           <p:nvPr/>
         </p:nvSpPr>
@@ -12636,7 +13689,7 @@
       </p:sp>
       <p:sp>
         <p:nvSpPr>
-          <p:cNvPr id="9" name="Text 7"/>
+          <p:cNvPr id="10" name="Text 8"/>
           <p:cNvSpPr/>
           <p:nvPr/>
         </p:nvSpPr>
@@ -12678,7 +13731,7 @@
       </p:sp>
       <p:sp>
         <p:nvSpPr>
-          <p:cNvPr id="10" name="Shape 8"/>
+          <p:cNvPr id="11" name="Shape 9"/>
           <p:cNvSpPr/>
           <p:nvPr/>
         </p:nvSpPr>
@@ -12712,7 +13765,7 @@
       </p:sp>
       <p:sp>
         <p:nvSpPr>
-          <p:cNvPr id="11" name="Text 9"/>
+          <p:cNvPr id="12" name="Text 10"/>
           <p:cNvSpPr/>
           <p:nvPr/>
         </p:nvSpPr>
@@ -12751,7 +13804,7 @@
       </p:sp>
       <p:sp>
         <p:nvSpPr>
-          <p:cNvPr id="12" name="Text 10"/>
+          <p:cNvPr id="13" name="Text 11"/>
           <p:cNvSpPr/>
           <p:nvPr/>
         </p:nvSpPr>
@@ -12793,7 +13846,7 @@
       </p:sp>
       <p:sp>
         <p:nvSpPr>
-          <p:cNvPr id="13" name="Shape 11"/>
+          <p:cNvPr id="14" name="Shape 12"/>
           <p:cNvSpPr/>
           <p:nvPr/>
         </p:nvSpPr>
@@ -12827,7 +13880,7 @@
       </p:sp>
       <p:sp>
         <p:nvSpPr>
-          <p:cNvPr id="14" name="Text 12"/>
+          <p:cNvPr id="15" name="Text 13"/>
           <p:cNvSpPr/>
           <p:nvPr/>
         </p:nvSpPr>
@@ -12866,7 +13919,7 @@
       </p:sp>
       <p:sp>
         <p:nvSpPr>
-          <p:cNvPr id="15" name="Text 13"/>
+          <p:cNvPr id="16" name="Text 14"/>
           <p:cNvSpPr/>
           <p:nvPr/>
         </p:nvSpPr>
@@ -12908,7 +13961,7 @@
       </p:sp>
       <p:sp>
         <p:nvSpPr>
-          <p:cNvPr id="16" name="Shape 14"/>
+          <p:cNvPr id="17" name="Shape 15"/>
           <p:cNvSpPr/>
           <p:nvPr/>
         </p:nvSpPr>
@@ -12928,7 +13981,7 @@
       </p:sp>
       <p:sp>
         <p:nvSpPr>
-          <p:cNvPr id="17" name="Shape 15"/>
+          <p:cNvPr id="18" name="Shape 16"/>
           <p:cNvSpPr/>
           <p:nvPr/>
         </p:nvSpPr>
@@ -12948,7 +14001,7 @@
       </p:sp>
       <p:sp>
         <p:nvSpPr>
-          <p:cNvPr id="18" name="Shape 16"/>
+          <p:cNvPr id="19" name="Shape 17"/>
           <p:cNvSpPr/>
           <p:nvPr/>
         </p:nvSpPr>
@@ -12968,7 +14021,7 @@
       </p:sp>
       <p:sp>
         <p:nvSpPr>
-          <p:cNvPr id="19" name="Shape 17"/>
+          <p:cNvPr id="20" name="Shape 18"/>
           <p:cNvSpPr/>
           <p:nvPr/>
         </p:nvSpPr>
@@ -12990,7 +14043,7 @@
       </p:sp>
       <p:sp>
         <p:nvSpPr>
-          <p:cNvPr id="20" name="Text 18"/>
+          <p:cNvPr id="21" name="Text 19"/>
           <p:cNvSpPr/>
           <p:nvPr/>
         </p:nvSpPr>
@@ -13029,7 +14082,7 @@
       </p:sp>
       <p:sp>
         <p:nvSpPr>
-          <p:cNvPr id="21" name="Text 19"/>
+          <p:cNvPr id="22" name="Text 20"/>
           <p:cNvSpPr/>
           <p:nvPr/>
         </p:nvSpPr>
@@ -13071,7 +14124,7 @@
       </p:sp>
       <p:sp>
         <p:nvSpPr>
-          <p:cNvPr id="22" name="Shape 20"/>
+          <p:cNvPr id="23" name="Shape 21"/>
           <p:cNvSpPr/>
           <p:nvPr/>
         </p:nvSpPr>
@@ -13098,7 +14151,7 @@
       </p:sp>
       <p:sp>
         <p:nvSpPr>
-          <p:cNvPr id="23" name="Text 21"/>
+          <p:cNvPr id="24" name="Text 22"/>
           <p:cNvSpPr/>
           <p:nvPr/>
         </p:nvSpPr>
@@ -13137,7 +14190,7 @@
       </p:sp>
       <p:sp>
         <p:nvSpPr>
-          <p:cNvPr id="24" name="Text 22"/>
+          <p:cNvPr id="25" name="Text 23"/>
           <p:cNvSpPr/>
           <p:nvPr/>
         </p:nvSpPr>
@@ -13179,7 +14232,7 @@
       </p:sp>
       <p:sp>
         <p:nvSpPr>
-          <p:cNvPr id="25" name="Shape 23"/>
+          <p:cNvPr id="26" name="Shape 24"/>
           <p:cNvSpPr/>
           <p:nvPr/>
         </p:nvSpPr>
@@ -13206,7 +14259,7 @@
       </p:sp>
       <p:sp>
         <p:nvSpPr>
-          <p:cNvPr id="26" name="Text 24"/>
+          <p:cNvPr id="27" name="Text 25"/>
           <p:cNvSpPr/>
           <p:nvPr/>
         </p:nvSpPr>
@@ -13245,7 +14298,7 @@
       </p:sp>
       <p:sp>
         <p:nvSpPr>
-          <p:cNvPr id="27" name="Text 25"/>
+          <p:cNvPr id="28" name="Text 26"/>
           <p:cNvSpPr/>
           <p:nvPr/>
         </p:nvSpPr>
@@ -13287,7 +14340,7 @@
       </p:sp>
       <p:sp>
         <p:nvSpPr>
-          <p:cNvPr id="28" name="Text 26"/>
+          <p:cNvPr id="29" name="Text 27"/>
           <p:cNvSpPr/>
           <p:nvPr/>
         </p:nvSpPr>
@@ -13326,7 +14379,7 @@
       </p:sp>
       <p:sp>
         <p:nvSpPr>
-          <p:cNvPr id="29" name="Text 27"/>
+          <p:cNvPr id="30" name="Text 28"/>
           <p:cNvSpPr/>
           <p:nvPr/>
         </p:nvSpPr>
@@ -13358,6 +14411,45 @@
                 <a:cs typeface="Calibri" pitchFamily="34" charset="-120"/>
               </a:rPr>
               <a:t>8</a:t>
+            </a:r>
+            <a:endParaRPr lang="en-US" sz="1000" dirty="0"/>
+          </a:p>
+        </p:txBody>
+      </p:sp>
+      <p:sp>
+        <p:nvSpPr>
+          <p:cNvPr id="31" name="Text 29"/>
+          <p:cNvSpPr/>
+          <p:nvPr/>
+        </p:nvSpPr>
+        <p:spPr>
+          <a:xfrm>
+            <a:off x="9052560" y="237744"/>
+            <a:ext cx="2697480" cy="292608"/>
+          </a:xfrm>
+          <a:prstGeom prst="rect">
+            <a:avLst/>
+          </a:prstGeom>
+          <a:noFill/>
+          <a:ln/>
+        </p:spPr>
+        <p:txBody>
+          <a:bodyPr wrap="square" lIns="0" tIns="0" rIns="0" bIns="0" rtlCol="0" anchor="ctr"/>
+          <a:lstStyle/>
+          <a:p>
+            <a:pPr algn="r" indent="0" marL="0">
+              <a:buNone/>
+            </a:pPr>
+            <a:r>
+              <a:rPr lang="en-US" sz="1000" b="1" spc="100" kern="0" dirty="0">
+                <a:solidFill>
+                  <a:srgbClr val="C8102E"/>
+                </a:solidFill>
+                <a:latin typeface="Calibri" pitchFamily="34" charset="0"/>
+                <a:ea typeface="Calibri" pitchFamily="34" charset="-122"/>
+                <a:cs typeface="Calibri" pitchFamily="34" charset="-120"/>
+              </a:rPr>
+              <a:t>社外秘・取扱注意</a:t>
             </a:r>
             <a:endParaRPr lang="en-US" sz="1000" dirty="0"/>
           </a:p>
@@ -13402,9 +14494,9 @@
           <p:nvPr/>
         </p:nvSpPr>
         <p:spPr>
-          <a:xfrm>
-            <a:off x="566928" y="384048"/>
-            <a:ext cx="8229600" cy="274320"/>
+          <a:xfrm rot="19800000">
+            <a:off x="822960" y="2331720"/>
+            <a:ext cx="10515600" cy="1920240"/>
           </a:xfrm>
           <a:prstGeom prst="rect">
             <a:avLst/>
@@ -13416,57 +14508,96 @@
           <a:bodyPr wrap="square" lIns="0" tIns="0" rIns="0" bIns="0" rtlCol="0" anchor="ctr"/>
           <a:lstStyle/>
           <a:p>
-            <a:pPr algn="l" indent="0" marL="0">
-              <a:buNone/>
-            </a:pPr>
-            <a:r>
-              <a:rPr lang="en-US" sz="1200" b="1" spc="300" kern="0" dirty="0">
-                <a:solidFill>
-                  <a:srgbClr val="C8102E"/>
-                </a:solidFill>
-                <a:latin typeface="Calibri" pitchFamily="34" charset="0"/>
-                <a:ea typeface="Calibri" pitchFamily="34" charset="-122"/>
-                <a:cs typeface="Calibri" pitchFamily="34" charset="-120"/>
-              </a:rPr>
-              <a:t>事例③  ＋ 業界統計</a:t>
-            </a:r>
-            <a:endParaRPr lang="en-US" sz="1200" dirty="0"/>
-          </a:p>
-        </p:txBody>
-      </p:sp>
-      <p:sp>
-        <p:nvSpPr>
-          <p:cNvPr id="3" name="Text 1"/>
-          <p:cNvSpPr/>
-          <p:nvPr/>
-        </p:nvSpPr>
-        <p:spPr>
-          <a:xfrm>
-            <a:off x="566928" y="658368"/>
-            <a:ext cx="11055096" cy="868680"/>
-          </a:xfrm>
-          <a:prstGeom prst="rect">
-            <a:avLst/>
-          </a:prstGeom>
-          <a:noFill/>
-          <a:ln/>
-        </p:spPr>
-        <p:txBody>
-          <a:bodyPr wrap="square" lIns="0" tIns="0" rIns="0" bIns="0" rtlCol="0" anchor="t"/>
-          <a:lstStyle/>
-          <a:p>
-            <a:pPr algn="l" indent="0" marL="0">
-              <a:buNone/>
-            </a:pPr>
-            <a:r>
-              <a:rPr lang="en-US" sz="3200" b="1" dirty="0">
-                <a:solidFill>
-                  <a:srgbClr val="0E1B3D"/>
+            <a:pPr algn="ctr" indent="0" marL="0">
+              <a:buNone/>
+            </a:pPr>
+            <a:r>
+              <a:rPr lang="en-US" sz="5200" b="1" dirty="0">
+                <a:solidFill>
+                  <a:srgbClr val="D3D9E3"/>
                 </a:solidFill>
                 <a:latin typeface="Cambria" pitchFamily="34" charset="0"/>
                 <a:ea typeface="Cambria" pitchFamily="34" charset="-122"/>
                 <a:cs typeface="Cambria" pitchFamily="34" charset="-120"/>
               </a:rPr>
+              <a:t>CONFIDENTIAL ｜ 社外秘</a:t>
+            </a:r>
+            <a:endParaRPr lang="en-US" sz="5200" dirty="0"/>
+          </a:p>
+        </p:txBody>
+      </p:sp>
+      <p:sp>
+        <p:nvSpPr>
+          <p:cNvPr id="3" name="Text 1"/>
+          <p:cNvSpPr/>
+          <p:nvPr/>
+        </p:nvSpPr>
+        <p:spPr>
+          <a:xfrm>
+            <a:off x="566928" y="384048"/>
+            <a:ext cx="8229600" cy="274320"/>
+          </a:xfrm>
+          <a:prstGeom prst="rect">
+            <a:avLst/>
+          </a:prstGeom>
+          <a:noFill/>
+          <a:ln/>
+        </p:spPr>
+        <p:txBody>
+          <a:bodyPr wrap="square" lIns="0" tIns="0" rIns="0" bIns="0" rtlCol="0" anchor="ctr"/>
+          <a:lstStyle/>
+          <a:p>
+            <a:pPr algn="l" indent="0" marL="0">
+              <a:buNone/>
+            </a:pPr>
+            <a:r>
+              <a:rPr lang="en-US" sz="1200" b="1" spc="300" kern="0" dirty="0">
+                <a:solidFill>
+                  <a:srgbClr val="C8102E"/>
+                </a:solidFill>
+                <a:latin typeface="Calibri" pitchFamily="34" charset="0"/>
+                <a:ea typeface="Calibri" pitchFamily="34" charset="-122"/>
+                <a:cs typeface="Calibri" pitchFamily="34" charset="-120"/>
+              </a:rPr>
+              <a:t>事例③  ＋ 業界統計</a:t>
+            </a:r>
+            <a:endParaRPr lang="en-US" sz="1200" dirty="0"/>
+          </a:p>
+        </p:txBody>
+      </p:sp>
+      <p:sp>
+        <p:nvSpPr>
+          <p:cNvPr id="4" name="Text 2"/>
+          <p:cNvSpPr/>
+          <p:nvPr/>
+        </p:nvSpPr>
+        <p:spPr>
+          <a:xfrm>
+            <a:off x="566928" y="658368"/>
+            <a:ext cx="11055096" cy="868680"/>
+          </a:xfrm>
+          <a:prstGeom prst="rect">
+            <a:avLst/>
+          </a:prstGeom>
+          <a:noFill/>
+          <a:ln/>
+        </p:spPr>
+        <p:txBody>
+          <a:bodyPr wrap="square" lIns="0" tIns="0" rIns="0" bIns="0" rtlCol="0" anchor="t"/>
+          <a:lstStyle/>
+          <a:p>
+            <a:pPr algn="l" indent="0" marL="0">
+              <a:buNone/>
+            </a:pPr>
+            <a:r>
+              <a:rPr lang="en-US" sz="3200" b="1" dirty="0">
+                <a:solidFill>
+                  <a:srgbClr val="0E1B3D"/>
+                </a:solidFill>
+                <a:latin typeface="Cambria" pitchFamily="34" charset="0"/>
+                <a:ea typeface="Cambria" pitchFamily="34" charset="-122"/>
+                <a:cs typeface="Cambria" pitchFamily="34" charset="-120"/>
+              </a:rPr>
               <a:t>「導入していたのに検知できなかった」は珍しくない</a:t>
             </a:r>
             <a:endParaRPr lang="en-US" sz="3200" dirty="0"/>
@@ -13475,7 +14606,7 @@
       </p:sp>
       <p:sp>
         <p:nvSpPr>
-          <p:cNvPr id="4" name="Shape 2"/>
+          <p:cNvPr id="5" name="Shape 3"/>
           <p:cNvSpPr/>
           <p:nvPr/>
         </p:nvSpPr>
@@ -13509,7 +14640,7 @@
       </p:sp>
       <p:sp>
         <p:nvSpPr>
-          <p:cNvPr id="5" name="Shape 3"/>
+          <p:cNvPr id="6" name="Shape 4"/>
           <p:cNvSpPr/>
           <p:nvPr/>
         </p:nvSpPr>
@@ -13529,7 +14660,7 @@
       </p:sp>
       <p:sp>
         <p:nvSpPr>
-          <p:cNvPr id="6" name="Text 4"/>
+          <p:cNvPr id="7" name="Text 5"/>
           <p:cNvSpPr/>
           <p:nvPr/>
         </p:nvSpPr>
@@ -13568,7 +14699,7 @@
       </p:sp>
       <p:sp>
         <p:nvSpPr>
-          <p:cNvPr id="7" name="Text 5"/>
+          <p:cNvPr id="8" name="Text 6"/>
           <p:cNvSpPr/>
           <p:nvPr/>
         </p:nvSpPr>
@@ -13610,7 +14741,7 @@
       </p:sp>
       <p:sp>
         <p:nvSpPr>
-          <p:cNvPr id="8" name="Shape 6"/>
+          <p:cNvPr id="9" name="Shape 7"/>
           <p:cNvSpPr/>
           <p:nvPr/>
         </p:nvSpPr>
@@ -13644,7 +14775,7 @@
       </p:sp>
       <p:sp>
         <p:nvSpPr>
-          <p:cNvPr id="9" name="Shape 7"/>
+          <p:cNvPr id="10" name="Shape 8"/>
           <p:cNvSpPr/>
           <p:nvPr/>
         </p:nvSpPr>
@@ -13664,7 +14795,7 @@
       </p:sp>
       <p:sp>
         <p:nvSpPr>
-          <p:cNvPr id="10" name="Text 8"/>
+          <p:cNvPr id="11" name="Text 9"/>
           <p:cNvSpPr/>
           <p:nvPr/>
         </p:nvSpPr>
@@ -13703,7 +14834,7 @@
       </p:sp>
       <p:sp>
         <p:nvSpPr>
-          <p:cNvPr id="11" name="Text 9"/>
+          <p:cNvPr id="12" name="Text 10"/>
           <p:cNvSpPr/>
           <p:nvPr/>
         </p:nvSpPr>
@@ -13745,7 +14876,7 @@
       </p:sp>
       <p:sp>
         <p:nvSpPr>
-          <p:cNvPr id="12" name="Shape 10"/>
+          <p:cNvPr id="13" name="Shape 11"/>
           <p:cNvSpPr/>
           <p:nvPr/>
         </p:nvSpPr>
@@ -13774,7 +14905,7 @@
       </p:sp>
       <p:sp>
         <p:nvSpPr>
-          <p:cNvPr id="13" name="Text 11"/>
+          <p:cNvPr id="14" name="Text 12"/>
           <p:cNvSpPr/>
           <p:nvPr/>
         </p:nvSpPr>
@@ -13813,7 +14944,7 @@
       </p:sp>
       <p:sp>
         <p:nvSpPr>
-          <p:cNvPr id="14" name="Text 12"/>
+          <p:cNvPr id="15" name="Text 13"/>
           <p:cNvSpPr/>
           <p:nvPr/>
         </p:nvSpPr>
@@ -13855,7 +14986,7 @@
       </p:sp>
       <p:sp>
         <p:nvSpPr>
-          <p:cNvPr id="15" name="Text 13"/>
+          <p:cNvPr id="16" name="Text 14"/>
           <p:cNvSpPr/>
           <p:nvPr/>
         </p:nvSpPr>
@@ -13894,7 +15025,7 @@
       </p:sp>
       <p:sp>
         <p:nvSpPr>
-          <p:cNvPr id="16" name="Shape 14"/>
+          <p:cNvPr id="17" name="Shape 15"/>
           <p:cNvSpPr/>
           <p:nvPr/>
         </p:nvSpPr>
@@ -13921,7 +15052,7 @@
       </p:sp>
       <p:sp>
         <p:nvSpPr>
-          <p:cNvPr id="17" name="Text 15"/>
+          <p:cNvPr id="18" name="Text 16"/>
           <p:cNvSpPr/>
           <p:nvPr/>
         </p:nvSpPr>
@@ -13980,7 +15111,7 @@
       </p:sp>
       <p:sp>
         <p:nvSpPr>
-          <p:cNvPr id="18" name="Text 16"/>
+          <p:cNvPr id="19" name="Text 17"/>
           <p:cNvSpPr/>
           <p:nvPr/>
         </p:nvSpPr>
@@ -14012,6 +15143,45 @@
                 <a:cs typeface="Calibri" pitchFamily="34" charset="-120"/>
               </a:rPr>
               <a:t>9</a:t>
+            </a:r>
+            <a:endParaRPr lang="en-US" sz="1000" dirty="0"/>
+          </a:p>
+        </p:txBody>
+      </p:sp>
+      <p:sp>
+        <p:nvSpPr>
+          <p:cNvPr id="20" name="Text 18"/>
+          <p:cNvSpPr/>
+          <p:nvPr/>
+        </p:nvSpPr>
+        <p:spPr>
+          <a:xfrm>
+            <a:off x="9052560" y="237744"/>
+            <a:ext cx="2697480" cy="292608"/>
+          </a:xfrm>
+          <a:prstGeom prst="rect">
+            <a:avLst/>
+          </a:prstGeom>
+          <a:noFill/>
+          <a:ln/>
+        </p:spPr>
+        <p:txBody>
+          <a:bodyPr wrap="square" lIns="0" tIns="0" rIns="0" bIns="0" rtlCol="0" anchor="ctr"/>
+          <a:lstStyle/>
+          <a:p>
+            <a:pPr algn="r" indent="0" marL="0">
+              <a:buNone/>
+            </a:pPr>
+            <a:r>
+              <a:rPr lang="en-US" sz="1000" b="1" spc="100" kern="0" dirty="0">
+                <a:solidFill>
+                  <a:srgbClr val="C8102E"/>
+                </a:solidFill>
+                <a:latin typeface="Calibri" pitchFamily="34" charset="0"/>
+                <a:ea typeface="Calibri" pitchFamily="34" charset="-122"/>
+                <a:cs typeface="Calibri" pitchFamily="34" charset="-120"/>
+              </a:rPr>
+              <a:t>社外秘・取扱注意</a:t>
             </a:r>
             <a:endParaRPr lang="en-US" sz="1000" dirty="0"/>
           </a:p>

--- a/成果物/SentinelOne導入後も脆弱性検査が必要な理由.pptx
+++ b/成果物/SentinelOne導入後も脆弱性検査が必要な理由.pptx
@@ -2393,8 +2393,8 @@
         </p:nvSpPr>
         <p:spPr>
           <a:xfrm rot="19800000">
-            <a:off x="822960" y="2331720"/>
-            <a:ext cx="10515600" cy="1920240"/>
+            <a:off x="822960" y="2377440"/>
+            <a:ext cx="10515600" cy="1828800"/>
           </a:xfrm>
           <a:prstGeom prst="rect">
             <a:avLst/>
@@ -2410,9 +2410,9 @@
               <a:buNone/>
             </a:pPr>
             <a:r>
-              <a:rPr lang="en-US" sz="5200" b="1" dirty="0">
-                <a:solidFill>
-                  <a:srgbClr val="D3D9E3"/>
+              <a:rPr lang="en-US" sz="5000" b="1" dirty="0">
+                <a:solidFill>
+                  <a:srgbClr val="223257"/>
                 </a:solidFill>
                 <a:latin typeface="Cambria" pitchFamily="34" charset="0"/>
                 <a:ea typeface="Cambria" pitchFamily="34" charset="-122"/>
@@ -2420,7 +2420,7 @@
               </a:rPr>
               <a:t>CONFIDENTIAL ｜ 社外秘</a:t>
             </a:r>
-            <a:endParaRPr lang="en-US" sz="5200" dirty="0"/>
+            <a:endParaRPr lang="en-US" sz="5000" dirty="0"/>
           </a:p>
         </p:txBody>
       </p:sp>
@@ -2749,8 +2749,8 @@
         </p:nvSpPr>
         <p:spPr>
           <a:xfrm rot="19800000">
-            <a:off x="822960" y="2331720"/>
-            <a:ext cx="10515600" cy="1920240"/>
+            <a:off x="822960" y="2377440"/>
+            <a:ext cx="10515600" cy="1828800"/>
           </a:xfrm>
           <a:prstGeom prst="rect">
             <a:avLst/>
@@ -2766,9 +2766,9 @@
               <a:buNone/>
             </a:pPr>
             <a:r>
-              <a:rPr lang="en-US" sz="5200" b="1" dirty="0">
-                <a:solidFill>
-                  <a:srgbClr val="D3D9E3"/>
+              <a:rPr lang="en-US" sz="5000" b="1" dirty="0">
+                <a:solidFill>
+                  <a:srgbClr val="EBEEF3"/>
                 </a:solidFill>
                 <a:latin typeface="Cambria" pitchFamily="34" charset="0"/>
                 <a:ea typeface="Cambria" pitchFamily="34" charset="-122"/>
@@ -2776,7 +2776,7 @@
               </a:rPr>
               <a:t>CONFIDENTIAL ｜ 社外秘</a:t>
             </a:r>
-            <a:endParaRPr lang="en-US" sz="5200" dirty="0"/>
+            <a:endParaRPr lang="en-US" sz="5000" dirty="0"/>
           </a:p>
         </p:txBody>
       </p:sp>
@@ -4692,8 +4692,8 @@
         </p:nvSpPr>
         <p:spPr>
           <a:xfrm rot="19800000">
-            <a:off x="822960" y="2331720"/>
-            <a:ext cx="10515600" cy="1920240"/>
+            <a:off x="822960" y="2377440"/>
+            <a:ext cx="10515600" cy="1828800"/>
           </a:xfrm>
           <a:prstGeom prst="rect">
             <a:avLst/>
@@ -4709,9 +4709,9 @@
               <a:buNone/>
             </a:pPr>
             <a:r>
-              <a:rPr lang="en-US" sz="5200" b="1" dirty="0">
-                <a:solidFill>
-                  <a:srgbClr val="D3D9E3"/>
+              <a:rPr lang="en-US" sz="5000" b="1" dirty="0">
+                <a:solidFill>
+                  <a:srgbClr val="EBEEF3"/>
                 </a:solidFill>
                 <a:latin typeface="Cambria" pitchFamily="34" charset="0"/>
                 <a:ea typeface="Cambria" pitchFamily="34" charset="-122"/>
@@ -4719,7 +4719,7 @@
               </a:rPr>
               <a:t>CONFIDENTIAL ｜ 社外秘</a:t>
             </a:r>
-            <a:endParaRPr lang="en-US" sz="5200" dirty="0"/>
+            <a:endParaRPr lang="en-US" sz="5000" dirty="0"/>
           </a:p>
         </p:txBody>
       </p:sp>
@@ -5879,8 +5879,8 @@
         </p:nvSpPr>
         <p:spPr>
           <a:xfrm rot="19800000">
-            <a:off x="822960" y="2331720"/>
-            <a:ext cx="10515600" cy="1920240"/>
+            <a:off x="822960" y="2377440"/>
+            <a:ext cx="10515600" cy="1828800"/>
           </a:xfrm>
           <a:prstGeom prst="rect">
             <a:avLst/>
@@ -5896,9 +5896,9 @@
               <a:buNone/>
             </a:pPr>
             <a:r>
-              <a:rPr lang="en-US" sz="5200" b="1" dirty="0">
-                <a:solidFill>
-                  <a:srgbClr val="D3D9E3"/>
+              <a:rPr lang="en-US" sz="5000" b="1" dirty="0">
+                <a:solidFill>
+                  <a:srgbClr val="EBEEF3"/>
                 </a:solidFill>
                 <a:latin typeface="Cambria" pitchFamily="34" charset="0"/>
                 <a:ea typeface="Cambria" pitchFamily="34" charset="-122"/>
@@ -5906,7 +5906,7 @@
               </a:rPr>
               <a:t>CONFIDENTIAL ｜ 社外秘</a:t>
             </a:r>
-            <a:endParaRPr lang="en-US" sz="5200" dirty="0"/>
+            <a:endParaRPr lang="en-US" sz="5000" dirty="0"/>
           </a:p>
         </p:txBody>
       </p:sp>
@@ -6778,8 +6778,8 @@
         </p:nvSpPr>
         <p:spPr>
           <a:xfrm rot="19800000">
-            <a:off x="822960" y="2331720"/>
-            <a:ext cx="10515600" cy="1920240"/>
+            <a:off x="822960" y="2377440"/>
+            <a:ext cx="10515600" cy="1828800"/>
           </a:xfrm>
           <a:prstGeom prst="rect">
             <a:avLst/>
@@ -6795,9 +6795,9 @@
               <a:buNone/>
             </a:pPr>
             <a:r>
-              <a:rPr lang="en-US" sz="5200" b="1" dirty="0">
-                <a:solidFill>
-                  <a:srgbClr val="D3D9E3"/>
+              <a:rPr lang="en-US" sz="5000" b="1" dirty="0">
+                <a:solidFill>
+                  <a:srgbClr val="EBEEF3"/>
                 </a:solidFill>
                 <a:latin typeface="Cambria" pitchFamily="34" charset="0"/>
                 <a:ea typeface="Cambria" pitchFamily="34" charset="-122"/>
@@ -6805,7 +6805,7 @@
               </a:rPr>
               <a:t>CONFIDENTIAL ｜ 社外秘</a:t>
             </a:r>
-            <a:endParaRPr lang="en-US" sz="5200" dirty="0"/>
+            <a:endParaRPr lang="en-US" sz="5000" dirty="0"/>
           </a:p>
         </p:txBody>
       </p:sp>
@@ -8067,8 +8067,8 @@
         </p:nvSpPr>
         <p:spPr>
           <a:xfrm rot="19800000">
-            <a:off x="822960" y="2331720"/>
-            <a:ext cx="10515600" cy="1920240"/>
+            <a:off x="822960" y="2377440"/>
+            <a:ext cx="10515600" cy="1828800"/>
           </a:xfrm>
           <a:prstGeom prst="rect">
             <a:avLst/>
@@ -8084,9 +8084,9 @@
               <a:buNone/>
             </a:pPr>
             <a:r>
-              <a:rPr lang="en-US" sz="5200" b="1" dirty="0">
-                <a:solidFill>
-                  <a:srgbClr val="D3D9E3"/>
+              <a:rPr lang="en-US" sz="5000" b="1" dirty="0">
+                <a:solidFill>
+                  <a:srgbClr val="223257"/>
                 </a:solidFill>
                 <a:latin typeface="Cambria" pitchFamily="34" charset="0"/>
                 <a:ea typeface="Cambria" pitchFamily="34" charset="-122"/>
@@ -8094,7 +8094,7 @@
               </a:rPr>
               <a:t>CONFIDENTIAL ｜ 社外秘</a:t>
             </a:r>
-            <a:endParaRPr lang="en-US" sz="5200" dirty="0"/>
+            <a:endParaRPr lang="en-US" sz="5000" dirty="0"/>
           </a:p>
         </p:txBody>
       </p:sp>
@@ -8498,8 +8498,8 @@
         </p:nvSpPr>
         <p:spPr>
           <a:xfrm rot="19800000">
-            <a:off x="822960" y="2331720"/>
-            <a:ext cx="10515600" cy="1920240"/>
+            <a:off x="822960" y="2377440"/>
+            <a:ext cx="10515600" cy="1828800"/>
           </a:xfrm>
           <a:prstGeom prst="rect">
             <a:avLst/>
@@ -8515,9 +8515,9 @@
               <a:buNone/>
             </a:pPr>
             <a:r>
-              <a:rPr lang="en-US" sz="5200" b="1" dirty="0">
-                <a:solidFill>
-                  <a:srgbClr val="D3D9E3"/>
+              <a:rPr lang="en-US" sz="5000" b="1" dirty="0">
+                <a:solidFill>
+                  <a:srgbClr val="EBEEF3"/>
                 </a:solidFill>
                 <a:latin typeface="Cambria" pitchFamily="34" charset="0"/>
                 <a:ea typeface="Cambria" pitchFamily="34" charset="-122"/>
@@ -8525,7 +8525,7 @@
               </a:rPr>
               <a:t>CONFIDENTIAL ｜ 社外秘</a:t>
             </a:r>
-            <a:endParaRPr lang="en-US" sz="5200" dirty="0"/>
+            <a:endParaRPr lang="en-US" sz="5000" dirty="0"/>
           </a:p>
         </p:txBody>
       </p:sp>
@@ -8954,8 +8954,8 @@
         </p:nvSpPr>
         <p:spPr>
           <a:xfrm rot="19800000">
-            <a:off x="822960" y="2331720"/>
-            <a:ext cx="10515600" cy="1920240"/>
+            <a:off x="822960" y="2377440"/>
+            <a:ext cx="10515600" cy="1828800"/>
           </a:xfrm>
           <a:prstGeom prst="rect">
             <a:avLst/>
@@ -8971,9 +8971,9 @@
               <a:buNone/>
             </a:pPr>
             <a:r>
-              <a:rPr lang="en-US" sz="5200" b="1" dirty="0">
-                <a:solidFill>
-                  <a:srgbClr val="D3D9E3"/>
+              <a:rPr lang="en-US" sz="5000" b="1" dirty="0">
+                <a:solidFill>
+                  <a:srgbClr val="EBEEF3"/>
                 </a:solidFill>
                 <a:latin typeface="Cambria" pitchFamily="34" charset="0"/>
                 <a:ea typeface="Cambria" pitchFamily="34" charset="-122"/>
@@ -8981,7 +8981,7 @@
               </a:rPr>
               <a:t>CONFIDENTIAL ｜ 社外秘</a:t>
             </a:r>
-            <a:endParaRPr lang="en-US" sz="5200" dirty="0"/>
+            <a:endParaRPr lang="en-US" sz="5000" dirty="0"/>
           </a:p>
         </p:txBody>
       </p:sp>
@@ -9643,8 +9643,8 @@
         </p:nvSpPr>
         <p:spPr>
           <a:xfrm rot="19800000">
-            <a:off x="822960" y="2331720"/>
-            <a:ext cx="10515600" cy="1920240"/>
+            <a:off x="822960" y="2377440"/>
+            <a:ext cx="10515600" cy="1828800"/>
           </a:xfrm>
           <a:prstGeom prst="rect">
             <a:avLst/>
@@ -9660,9 +9660,9 @@
               <a:buNone/>
             </a:pPr>
             <a:r>
-              <a:rPr lang="en-US" sz="5200" b="1" dirty="0">
-                <a:solidFill>
-                  <a:srgbClr val="D3D9E3"/>
+              <a:rPr lang="en-US" sz="5000" b="1" dirty="0">
+                <a:solidFill>
+                  <a:srgbClr val="EBEEF3"/>
                 </a:solidFill>
                 <a:latin typeface="Cambria" pitchFamily="34" charset="0"/>
                 <a:ea typeface="Cambria" pitchFamily="34" charset="-122"/>
@@ -9670,7 +9670,7 @@
               </a:rPr>
               <a:t>CONFIDENTIAL ｜ 社外秘</a:t>
             </a:r>
-            <a:endParaRPr lang="en-US" sz="5200" dirty="0"/>
+            <a:endParaRPr lang="en-US" sz="5000" dirty="0"/>
           </a:p>
         </p:txBody>
       </p:sp>
@@ -10238,8 +10238,8 @@
         </p:nvSpPr>
         <p:spPr>
           <a:xfrm rot="19800000">
-            <a:off x="822960" y="2331720"/>
-            <a:ext cx="10515600" cy="1920240"/>
+            <a:off x="822960" y="2377440"/>
+            <a:ext cx="10515600" cy="1828800"/>
           </a:xfrm>
           <a:prstGeom prst="rect">
             <a:avLst/>
@@ -10255,9 +10255,9 @@
               <a:buNone/>
             </a:pPr>
             <a:r>
-              <a:rPr lang="en-US" sz="5200" b="1" dirty="0">
-                <a:solidFill>
-                  <a:srgbClr val="D3D9E3"/>
+              <a:rPr lang="en-US" sz="5000" b="1" dirty="0">
+                <a:solidFill>
+                  <a:srgbClr val="EBEEF3"/>
                 </a:solidFill>
                 <a:latin typeface="Cambria" pitchFamily="34" charset="0"/>
                 <a:ea typeface="Cambria" pitchFamily="34" charset="-122"/>
@@ -10265,7 +10265,7 @@
               </a:rPr>
               <a:t>CONFIDENTIAL ｜ 社外秘</a:t>
             </a:r>
-            <a:endParaRPr lang="en-US" sz="5200" dirty="0"/>
+            <a:endParaRPr lang="en-US" sz="5000" dirty="0"/>
           </a:p>
         </p:txBody>
       </p:sp>
@@ -11438,8 +11438,8 @@
         </p:nvSpPr>
         <p:spPr>
           <a:xfrm rot="19800000">
-            <a:off x="822960" y="2331720"/>
-            <a:ext cx="10515600" cy="1920240"/>
+            <a:off x="822960" y="2377440"/>
+            <a:ext cx="10515600" cy="1828800"/>
           </a:xfrm>
           <a:prstGeom prst="rect">
             <a:avLst/>
@@ -11455,9 +11455,9 @@
               <a:buNone/>
             </a:pPr>
             <a:r>
-              <a:rPr lang="en-US" sz="5200" b="1" dirty="0">
-                <a:solidFill>
-                  <a:srgbClr val="D3D9E3"/>
+              <a:rPr lang="en-US" sz="5000" b="1" dirty="0">
+                <a:solidFill>
+                  <a:srgbClr val="EBEEF3"/>
                 </a:solidFill>
                 <a:latin typeface="Cambria" pitchFamily="34" charset="0"/>
                 <a:ea typeface="Cambria" pitchFamily="34" charset="-122"/>
@@ -11465,7 +11465,7 @@
               </a:rPr>
               <a:t>CONFIDENTIAL ｜ 社外秘</a:t>
             </a:r>
-            <a:endParaRPr lang="en-US" sz="5200" dirty="0"/>
+            <a:endParaRPr lang="en-US" sz="5000" dirty="0"/>
           </a:p>
         </p:txBody>
       </p:sp>
@@ -12109,8 +12109,8 @@
         </p:nvSpPr>
         <p:spPr>
           <a:xfrm rot="19800000">
-            <a:off x="822960" y="2331720"/>
-            <a:ext cx="10515600" cy="1920240"/>
+            <a:off x="822960" y="2377440"/>
+            <a:ext cx="10515600" cy="1828800"/>
           </a:xfrm>
           <a:prstGeom prst="rect">
             <a:avLst/>
@@ -12126,9 +12126,9 @@
               <a:buNone/>
             </a:pPr>
             <a:r>
-              <a:rPr lang="en-US" sz="5200" b="1" dirty="0">
-                <a:solidFill>
-                  <a:srgbClr val="D3D9E3"/>
+              <a:rPr lang="en-US" sz="5000" b="1" dirty="0">
+                <a:solidFill>
+                  <a:srgbClr val="EBEEF3"/>
                 </a:solidFill>
                 <a:latin typeface="Cambria" pitchFamily="34" charset="0"/>
                 <a:ea typeface="Cambria" pitchFamily="34" charset="-122"/>
@@ -12136,7 +12136,7 @@
               </a:rPr>
               <a:t>CONFIDENTIAL ｜ 社外秘</a:t>
             </a:r>
-            <a:endParaRPr lang="en-US" sz="5200" dirty="0"/>
+            <a:endParaRPr lang="en-US" sz="5000" dirty="0"/>
           </a:p>
         </p:txBody>
       </p:sp>
@@ -12704,8 +12704,8 @@
         </p:nvSpPr>
         <p:spPr>
           <a:xfrm rot="19800000">
-            <a:off x="822960" y="2331720"/>
-            <a:ext cx="10515600" cy="1920240"/>
+            <a:off x="822960" y="2377440"/>
+            <a:ext cx="10515600" cy="1828800"/>
           </a:xfrm>
           <a:prstGeom prst="rect">
             <a:avLst/>
@@ -12721,9 +12721,9 @@
               <a:buNone/>
             </a:pPr>
             <a:r>
-              <a:rPr lang="en-US" sz="5200" b="1" dirty="0">
-                <a:solidFill>
-                  <a:srgbClr val="D3D9E3"/>
+              <a:rPr lang="en-US" sz="5000" b="1" dirty="0">
+                <a:solidFill>
+                  <a:srgbClr val="223257"/>
                 </a:solidFill>
                 <a:latin typeface="Cambria" pitchFamily="34" charset="0"/>
                 <a:ea typeface="Cambria" pitchFamily="34" charset="-122"/>
@@ -12731,7 +12731,7 @@
               </a:rPr>
               <a:t>CONFIDENTIAL ｜ 社外秘</a:t>
             </a:r>
-            <a:endParaRPr lang="en-US" sz="5200" dirty="0"/>
+            <a:endParaRPr lang="en-US" sz="5000" dirty="0"/>
           </a:p>
         </p:txBody>
       </p:sp>
@@ -13390,8 +13390,8 @@
         </p:nvSpPr>
         <p:spPr>
           <a:xfrm rot="19800000">
-            <a:off x="822960" y="2331720"/>
-            <a:ext cx="10515600" cy="1920240"/>
+            <a:off x="822960" y="2377440"/>
+            <a:ext cx="10515600" cy="1828800"/>
           </a:xfrm>
           <a:prstGeom prst="rect">
             <a:avLst/>
@@ -13407,9 +13407,9 @@
               <a:buNone/>
             </a:pPr>
             <a:r>
-              <a:rPr lang="en-US" sz="5200" b="1" dirty="0">
-                <a:solidFill>
-                  <a:srgbClr val="D3D9E3"/>
+              <a:rPr lang="en-US" sz="5000" b="1" dirty="0">
+                <a:solidFill>
+                  <a:srgbClr val="EBEEF3"/>
                 </a:solidFill>
                 <a:latin typeface="Cambria" pitchFamily="34" charset="0"/>
                 <a:ea typeface="Cambria" pitchFamily="34" charset="-122"/>
@@ -13417,7 +13417,7 @@
               </a:rPr>
               <a:t>CONFIDENTIAL ｜ 社外秘</a:t>
             </a:r>
-            <a:endParaRPr lang="en-US" sz="5200" dirty="0"/>
+            <a:endParaRPr lang="en-US" sz="5000" dirty="0"/>
           </a:p>
         </p:txBody>
       </p:sp>
@@ -14495,8 +14495,8 @@
         </p:nvSpPr>
         <p:spPr>
           <a:xfrm rot="19800000">
-            <a:off x="822960" y="2331720"/>
-            <a:ext cx="10515600" cy="1920240"/>
+            <a:off x="822960" y="2377440"/>
+            <a:ext cx="10515600" cy="1828800"/>
           </a:xfrm>
           <a:prstGeom prst="rect">
             <a:avLst/>
@@ -14512,9 +14512,9 @@
               <a:buNone/>
             </a:pPr>
             <a:r>
-              <a:rPr lang="en-US" sz="5200" b="1" dirty="0">
-                <a:solidFill>
-                  <a:srgbClr val="D3D9E3"/>
+              <a:rPr lang="en-US" sz="5000" b="1" dirty="0">
+                <a:solidFill>
+                  <a:srgbClr val="EBEEF3"/>
                 </a:solidFill>
                 <a:latin typeface="Cambria" pitchFamily="34" charset="0"/>
                 <a:ea typeface="Cambria" pitchFamily="34" charset="-122"/>
@@ -14522,7 +14522,7 @@
               </a:rPr>
               <a:t>CONFIDENTIAL ｜ 社外秘</a:t>
             </a:r>
-            <a:endParaRPr lang="en-US" sz="5200" dirty="0"/>
+            <a:endParaRPr lang="en-US" sz="5000" dirty="0"/>
           </a:p>
         </p:txBody>
       </p:sp>
